--- a/public/documents/countries/jordanie.pptx
+++ b/public/documents/countries/jordanie.pptx
@@ -117,7 +117,7 @@
 </p:presentation>
 </file>
 
-<file path=ppt/charts/chart22.xml><?xml version="1.0" encoding="utf-8"?>
+<file path=ppt/charts/chart16.xml><?xml version="1.0" encoding="utf-8"?>
 <c:chartSpace xmlns:c="http://schemas.openxmlformats.org/drawingml/2006/chart" xmlns:a="http://schemas.openxmlformats.org/drawingml/2006/main" xmlns:r="http://schemas.openxmlformats.org/officeDocument/2006/relationships">
   <c:date1904 val="0"/>
   <c:roundedCorners val="1"/>
@@ -362,7 +362,7 @@
 </c:chartSpace>
 </file>
 
-<file path=ppt/charts/chart23.xml><?xml version="1.0" encoding="utf-8"?>
+<file path=ppt/charts/chart17.xml><?xml version="1.0" encoding="utf-8"?>
 <c:chartSpace xmlns:c="http://schemas.openxmlformats.org/drawingml/2006/chart" xmlns:a="http://schemas.openxmlformats.org/drawingml/2006/main" xmlns:r="http://schemas.openxmlformats.org/officeDocument/2006/relationships">
   <c:date1904 val="0"/>
   <c:roundedCorners val="1"/>
@@ -670,7 +670,7 @@
 </c:chartSpace>
 </file>
 
-<file path=ppt/charts/chart24.xml><?xml version="1.0" encoding="utf-8"?>
+<file path=ppt/charts/chart18.xml><?xml version="1.0" encoding="utf-8"?>
 <c:chartSpace xmlns:c="http://schemas.openxmlformats.org/drawingml/2006/chart" xmlns:a="http://schemas.openxmlformats.org/drawingml/2006/main" xmlns:r="http://schemas.openxmlformats.org/officeDocument/2006/relationships">
   <c:date1904 val="0"/>
   <c:roundedCorners val="1"/>
@@ -3360,7 +3360,7 @@
                 <a:ea typeface="Arial" pitchFamily="34" charset="-122"/>
                 <a:cs typeface="Arial" pitchFamily="34" charset="-120"/>
               </a:rPr>
-              <a:t>تحليل الأكريلاميد (مختبر Polymex، ISO 9001) وفحص REACH / SVHC (SGS) متاحان عند الطلب، إضافة إلى شهادة SOHISCERT السارية المفعول.</a:t>
+              <a:t>تحليل الأكريلاميد (مختبر Polymex، ISO 9001، بتركيز أقل من 3,0 ميكروغرام/غرام) وفحص REACH / SVHC (SGS) وشهادة SOHISCERT السارية حتى 4 سبتمبر 2027: متاحة جميعها عند الطلب.</a:t>
             </a:r>
             <a:endParaRPr lang="en-US" sz="1100" dirty="0"/>
           </a:p>

--- a/public/documents/countries/jordanie.pptx
+++ b/public/documents/countries/jordanie.pptx
@@ -117,7 +117,7 @@
 </p:presentation>
 </file>
 
-<file path=ppt/charts/chart16.xml><?xml version="1.0" encoding="utf-8"?>
+<file path=ppt/charts/chart25.xml><?xml version="1.0" encoding="utf-8"?>
 <c:chartSpace xmlns:c="http://schemas.openxmlformats.org/drawingml/2006/chart" xmlns:a="http://schemas.openxmlformats.org/drawingml/2006/main" xmlns:r="http://schemas.openxmlformats.org/officeDocument/2006/relationships">
   <c:date1904 val="0"/>
   <c:roundedCorners val="1"/>
@@ -362,7 +362,7 @@
 </c:chartSpace>
 </file>
 
-<file path=ppt/charts/chart17.xml><?xml version="1.0" encoding="utf-8"?>
+<file path=ppt/charts/chart26.xml><?xml version="1.0" encoding="utf-8"?>
 <c:chartSpace xmlns:c="http://schemas.openxmlformats.org/drawingml/2006/chart" xmlns:a="http://schemas.openxmlformats.org/drawingml/2006/main" xmlns:r="http://schemas.openxmlformats.org/officeDocument/2006/relationships">
   <c:date1904 val="0"/>
   <c:roundedCorners val="1"/>
@@ -670,7 +670,7 @@
 </c:chartSpace>
 </file>
 
-<file path=ppt/charts/chart18.xml><?xml version="1.0" encoding="utf-8"?>
+<file path=ppt/charts/chart27.xml><?xml version="1.0" encoding="utf-8"?>
 <c:chartSpace xmlns:c="http://schemas.openxmlformats.org/drawingml/2006/chart" xmlns:a="http://schemas.openxmlformats.org/drawingml/2006/main" xmlns:r="http://schemas.openxmlformats.org/officeDocument/2006/relationships">
   <c:date1904 val="0"/>
   <c:roundedCorners val="1"/>
@@ -2650,6 +2650,13 @@
 <file path=ppt/slides/slide1.xml><?xml version="1.0" encoding="utf-8"?>
 <p:sld xmlns:a="http://schemas.openxmlformats.org/drawingml/2006/main" xmlns:r="http://schemas.openxmlformats.org/officeDocument/2006/relationships" xmlns:p="http://schemas.openxmlformats.org/presentationml/2006/main">
   <p:cSld name="Slide 1">
+    <p:bg>
+      <p:bgPr>
+        <a:solidFill>
+          <a:srgbClr val="0D0D0D"/>
+        </a:solidFill>
+      </p:bgPr>
+    </p:bg>
     <p:spTree>
       <p:nvGrpSpPr>
         <p:cNvPr id="1" name=""/>
@@ -2681,7 +2688,7 @@
         <p:spPr>
           <a:xfrm>
             <a:off x="0" y="0"/>
-            <a:ext cx="12191695" cy="6858000"/>
+            <a:ext cx="5918911" cy="6858000"/>
           </a:xfrm>
           <a:prstGeom prst="rect">
             <a:avLst/>
@@ -2690,14 +2697,34 @@
       </p:pic>
       <p:sp>
         <p:nvSpPr>
-          <p:cNvPr id="3" name="Text 0"/>
-          <p:cNvSpPr txBox="1"/>
-          <p:nvPr/>
-        </p:nvSpPr>
-        <p:spPr>
-          <a:xfrm>
-            <a:off x="777240" y="1965960"/>
-            <a:ext cx="10058400" cy="320040"/>
+          <p:cNvPr id="3" name="Shape 0"/>
+          <p:cNvSpPr/>
+          <p:nvPr/>
+        </p:nvSpPr>
+        <p:spPr>
+          <a:xfrm>
+            <a:off x="5918911" y="0"/>
+            <a:ext cx="6272784" cy="6858000"/>
+          </a:xfrm>
+          <a:prstGeom prst="rect">
+            <a:avLst/>
+          </a:prstGeom>
+          <a:solidFill>
+            <a:srgbClr val="0D0D0D"/>
+          </a:solidFill>
+          <a:ln/>
+        </p:spPr>
+      </p:sp>
+      <p:sp>
+        <p:nvSpPr>
+          <p:cNvPr id="4" name="Text 1"/>
+          <p:cNvSpPr txBox="1"/>
+          <p:nvPr/>
+        </p:nvSpPr>
+        <p:spPr>
+          <a:xfrm>
+            <a:off x="6577279" y="566928"/>
+            <a:ext cx="4041648" cy="292608"/>
           </a:xfrm>
           <a:prstGeom prst="rect">
             <a:avLst/>
@@ -2713,114 +2740,242 @@
               <a:buNone/>
             </a:pPr>
             <a:r>
-              <a:rPr lang="en-US" sz="1300" b="1" spc="250" kern="0" dirty="0">
-                <a:solidFill>
-                  <a:srgbClr val="D9A441"/>
-                </a:solidFill>
-                <a:latin typeface="Arial" pitchFamily="34" charset="0"/>
-                <a:ea typeface="Arial" pitchFamily="34" charset="-122"/>
-                <a:cs typeface="Arial" pitchFamily="34" charset="-120"/>
-              </a:rPr>
-              <a:t>ملف سوق</a:t>
-            </a:r>
-            <a:endParaRPr lang="en-US" sz="1300" dirty="0"/>
-          </a:p>
-        </p:txBody>
-      </p:sp>
-      <p:sp>
-        <p:nvSpPr>
-          <p:cNvPr id="4" name="Text 1"/>
-          <p:cNvSpPr txBox="1"/>
-          <p:nvPr/>
-        </p:nvSpPr>
-        <p:spPr>
-          <a:xfrm>
-            <a:off x="777240" y="2377440"/>
-            <a:ext cx="10241280" cy="1371600"/>
-          </a:xfrm>
-          <a:prstGeom prst="rect">
-            <a:avLst/>
-          </a:prstGeom>
-          <a:noFill/>
-          <a:ln/>
-        </p:spPr>
-        <p:txBody>
-          <a:bodyPr wrap="square" lIns="0" tIns="0" rIns="0" bIns="0" rtlCol="0" anchor="ctr"/>
-          <a:lstStyle/>
-          <a:p>
-            <a:pPr rtl="1" algn="r" indent="0" marL="0">
-              <a:buNone/>
-            </a:pPr>
-            <a:r>
-              <a:rPr lang="en-US" sz="4200" b="1" dirty="0">
-                <a:solidFill>
-                  <a:srgbClr val="FFFFFF"/>
-                </a:solidFill>
-                <a:latin typeface="Arial" pitchFamily="34" charset="0"/>
-                <a:ea typeface="Arial" pitchFamily="34" charset="-122"/>
-                <a:cs typeface="Arial" pitchFamily="34" charset="-120"/>
-              </a:rPr>
-              <a:t>المملكة الأردنية الهاشمية</a:t>
-            </a:r>
-            <a:endParaRPr lang="en-US" sz="4200" dirty="0"/>
-          </a:p>
-        </p:txBody>
-      </p:sp>
-      <p:sp>
-        <p:nvSpPr>
-          <p:cNvPr id="5" name="Text 2"/>
-          <p:cNvSpPr txBox="1"/>
-          <p:nvPr/>
-        </p:nvSpPr>
-        <p:spPr>
-          <a:xfrm>
-            <a:off x="777240" y="3840480"/>
-            <a:ext cx="8686800" cy="822960"/>
-          </a:xfrm>
-          <a:prstGeom prst="rect">
-            <a:avLst/>
-          </a:prstGeom>
-          <a:noFill/>
-          <a:ln/>
-        </p:spPr>
-        <p:txBody>
-          <a:bodyPr wrap="square" lIns="0" tIns="0" rIns="0" bIns="0" rtlCol="0" anchor="ctr"/>
+              <a:rPr lang="en-US" sz="1100" b="1" spc="80" kern="0" dirty="0">
+                <a:solidFill>
+                  <a:srgbClr val="8BC34A"/>
+                </a:solidFill>
+                <a:latin typeface="Arial" pitchFamily="34" charset="0"/>
+                <a:ea typeface="Arial" pitchFamily="34" charset="-122"/>
+                <a:cs typeface="Arial" pitchFamily="34" charset="-120"/>
+              </a:rPr>
+              <a:t>GREEN SOLUTIONS GROUP</a:t>
+            </a:r>
+            <a:endParaRPr lang="en-US" sz="1100" dirty="0"/>
+          </a:p>
+        </p:txBody>
+      </p:sp>
+      <p:pic>
+        <p:nvPicPr>
+          <p:cNvPr id="5" name="Image 1" descr="C:\Users\Utilisateur\dev\green-solutions-web\public\images\logo-icon.png">    </p:cNvPr>
+          <p:cNvPicPr>
+            <a:picLocks noChangeAspect="1"/>
+          </p:cNvPicPr>
+          <p:nvPr/>
+        </p:nvPicPr>
+        <p:blipFill>
+          <a:blip r:embed="rId2"/>
+          <a:stretch>
+            <a:fillRect/>
+          </a:stretch>
+        </p:blipFill>
+        <p:spPr>
+          <a:xfrm>
+            <a:off x="6577279" y="457200"/>
+            <a:ext cx="603504" cy="603504"/>
+          </a:xfrm>
+          <a:prstGeom prst="rect">
+            <a:avLst/>
+          </a:prstGeom>
+        </p:spPr>
+      </p:pic>
+      <p:pic>
+        <p:nvPicPr>
+          <p:cNvPr id="6" name="Image 2" descr="C:\Users\Utilisateur\dev\green-solutions-web\scripts\dossiers\drapeaux\jordanie.png">    </p:cNvPr>
+          <p:cNvPicPr>
+            <a:picLocks noChangeAspect="1"/>
+          </p:cNvPicPr>
+          <p:nvPr/>
+        </p:nvPicPr>
+        <p:blipFill>
+          <a:blip r:embed="rId3"/>
+          <a:stretch>
+            <a:fillRect/>
+          </a:stretch>
+        </p:blipFill>
+        <p:spPr>
+          <a:xfrm>
+            <a:off x="6577279" y="1389888"/>
+            <a:ext cx="1965960" cy="1310640"/>
+          </a:xfrm>
+          <a:prstGeom prst="rect">
+            <a:avLst/>
+          </a:prstGeom>
+        </p:spPr>
+      </p:pic>
+      <p:sp>
+        <p:nvSpPr>
+          <p:cNvPr id="7" name="Shape 2"/>
+          <p:cNvSpPr/>
+          <p:nvPr/>
+        </p:nvSpPr>
+        <p:spPr>
+          <a:xfrm>
+            <a:off x="6577279" y="1389888"/>
+            <a:ext cx="1965960" cy="1310640"/>
+          </a:xfrm>
+          <a:prstGeom prst="rect">
+            <a:avLst/>
+          </a:prstGeom>
+          <a:ln w="9525">
+            <a:solidFill>
+              <a:srgbClr val="3A3A3A"/>
+            </a:solidFill>
+            <a:prstDash val="solid"/>
+          </a:ln>
+        </p:spPr>
+      </p:sp>
+      <p:sp>
+        <p:nvSpPr>
+          <p:cNvPr id="8" name="Text 3"/>
+          <p:cNvSpPr txBox="1"/>
+          <p:nvPr/>
+        </p:nvSpPr>
+        <p:spPr>
+          <a:xfrm>
+            <a:off x="8771839" y="1298448"/>
+            <a:ext cx="2761488" cy="1234440"/>
+          </a:xfrm>
+          <a:prstGeom prst="rect">
+            <a:avLst/>
+          </a:prstGeom>
+          <a:noFill/>
+          <a:ln/>
+        </p:spPr>
+        <p:txBody>
+          <a:bodyPr wrap="square" lIns="0" tIns="0" rIns="0" bIns="0" rtlCol="0" anchor="t"/>
           <a:lstStyle/>
           <a:p>
             <a:pPr rtl="1" algn="r" indent="0" marL="0">
               <a:lnSpc>
-                <a:spcPct val="125000"/>
+                <a:spcPct val="110000"/>
               </a:lnSpc>
               <a:buNone/>
             </a:pPr>
             <a:r>
-              <a:rPr lang="en-US" sz="1600" dirty="0">
-                <a:solidFill>
-                  <a:srgbClr val="FFFFFF">
-                    <a:alpha val="88000"/>
-                  </a:srgbClr>
-                </a:solidFill>
-                <a:latin typeface="Arial" pitchFamily="34" charset="0"/>
-                <a:ea typeface="Arial" pitchFamily="34" charset="-122"/>
-                <a:cs typeface="Arial" pitchFamily="34" charset="-120"/>
-              </a:rPr>
-              <a:t>خضار الأغوار وزيتون المرتفعات تحت ندرة مائية هيكلية.</a:t>
+              <a:rPr lang="en-US" sz="2400" b="1" dirty="0">
+                <a:solidFill>
+                  <a:srgbClr val="FFFFFF"/>
+                </a:solidFill>
+                <a:latin typeface="Arial" pitchFamily="34" charset="0"/>
+                <a:ea typeface="Arial" pitchFamily="34" charset="-122"/>
+                <a:cs typeface="Arial" pitchFamily="34" charset="-120"/>
+              </a:rPr>
+              <a:t>المملكة الأردنية الهاشمية</a:t>
+            </a:r>
+            <a:endParaRPr lang="en-US" sz="2400" dirty="0"/>
+          </a:p>
+        </p:txBody>
+      </p:sp>
+      <p:sp>
+        <p:nvSpPr>
+          <p:cNvPr id="9" name="Shape 4"/>
+          <p:cNvSpPr/>
+          <p:nvPr/>
+        </p:nvSpPr>
+        <p:spPr>
+          <a:xfrm>
+            <a:off x="8744407" y="2889504"/>
+            <a:ext cx="2788920" cy="45720"/>
+          </a:xfrm>
+          <a:prstGeom prst="rect">
+            <a:avLst/>
+          </a:prstGeom>
+          <a:solidFill>
+            <a:srgbClr val="D9A441"/>
+          </a:solidFill>
+          <a:ln/>
+        </p:spPr>
+      </p:sp>
+      <p:sp>
+        <p:nvSpPr>
+          <p:cNvPr id="10" name="Text 5"/>
+          <p:cNvSpPr txBox="1"/>
+          <p:nvPr/>
+        </p:nvSpPr>
+        <p:spPr>
+          <a:xfrm>
+            <a:off x="6577279" y="3163824"/>
+            <a:ext cx="4956048" cy="384048"/>
+          </a:xfrm>
+          <a:prstGeom prst="rect">
+            <a:avLst/>
+          </a:prstGeom>
+          <a:noFill/>
+          <a:ln/>
+        </p:spPr>
+        <p:txBody>
+          <a:bodyPr wrap="square" lIns="0" tIns="0" rIns="0" bIns="0" rtlCol="0" anchor="ctr"/>
+          <a:lstStyle/>
+          <a:p>
+            <a:pPr rtl="1" algn="r" indent="0" marL="0">
+              <a:buNone/>
+            </a:pPr>
+            <a:r>
+              <a:rPr lang="en-US" sz="1600" b="1" dirty="0">
+                <a:solidFill>
+                  <a:srgbClr val="D9A441"/>
+                </a:solidFill>
+                <a:latin typeface="Arial" pitchFamily="34" charset="0"/>
+                <a:ea typeface="Arial" pitchFamily="34" charset="-122"/>
+                <a:cs typeface="Arial" pitchFamily="34" charset="-120"/>
+              </a:rPr>
+              <a:t>عمّان · 2026</a:t>
             </a:r>
             <a:endParaRPr lang="en-US" sz="1600" dirty="0"/>
           </a:p>
+        </p:txBody>
+      </p:sp>
+      <p:sp>
+        <p:nvSpPr>
+          <p:cNvPr id="11" name="Text 6"/>
+          <p:cNvSpPr txBox="1"/>
+          <p:nvPr/>
+        </p:nvSpPr>
+        <p:spPr>
+          <a:xfrm>
+            <a:off x="6577279" y="3767328"/>
+            <a:ext cx="4956048" cy="914400"/>
+          </a:xfrm>
+          <a:prstGeom prst="rect">
+            <a:avLst/>
+          </a:prstGeom>
+          <a:noFill/>
+          <a:ln/>
+        </p:spPr>
+        <p:txBody>
+          <a:bodyPr wrap="square" lIns="0" tIns="0" rIns="0" bIns="0" rtlCol="0" anchor="t"/>
+          <a:lstStyle/>
           <a:p>
             <a:pPr rtl="1" algn="r" indent="0" marL="0">
               <a:lnSpc>
-                <a:spcPct val="125000"/>
+                <a:spcPct val="128000"/>
               </a:lnSpc>
               <a:buNone/>
             </a:pPr>
             <a:r>
-              <a:rPr lang="en-US" sz="1600" dirty="0">
-                <a:solidFill>
-                  <a:srgbClr val="FFFFFF">
-                    <a:alpha val="88000"/>
-                  </a:srgbClr>
+              <a:rPr lang="en-US" sz="1450" dirty="0">
+                <a:solidFill>
+                  <a:srgbClr val="FFFFFF"/>
+                </a:solidFill>
+                <a:latin typeface="Arial" pitchFamily="34" charset="0"/>
+                <a:ea typeface="Arial" pitchFamily="34" charset="-122"/>
+                <a:cs typeface="Arial" pitchFamily="34" charset="-120"/>
+              </a:rPr>
+              <a:t>خضار الأغوار وزيتون المرتفعات تحت ندرة مائية هيكلية.</a:t>
+            </a:r>
+            <a:endParaRPr lang="en-US" sz="1450" dirty="0"/>
+          </a:p>
+          <a:p>
+            <a:pPr rtl="1" algn="r" indent="0" marL="0">
+              <a:lnSpc>
+                <a:spcPct val="128000"/>
+              </a:lnSpc>
+              <a:buNone/>
+            </a:pPr>
+            <a:r>
+              <a:rPr lang="en-US" sz="1450" dirty="0">
+                <a:solidFill>
+                  <a:srgbClr val="FFFFFF"/>
                 </a:solidFill>
                 <a:latin typeface="Arial" pitchFamily="34" charset="0"/>
                 <a:ea typeface="Arial" pitchFamily="34" charset="-122"/>
@@ -2828,20 +2983,20 @@
               </a:rPr>
               <a:t>ما الذي يغيّره الاحتفاظ بالماء في التربة على مستوى الحقل.</a:t>
             </a:r>
-            <a:endParaRPr lang="en-US" sz="1600" dirty="0"/>
-          </a:p>
-        </p:txBody>
-      </p:sp>
-      <p:sp>
-        <p:nvSpPr>
-          <p:cNvPr id="6" name="Text 3"/>
-          <p:cNvSpPr txBox="1"/>
-          <p:nvPr/>
-        </p:nvSpPr>
-        <p:spPr>
-          <a:xfrm>
-            <a:off x="777240" y="5989320"/>
-            <a:ext cx="10058400" cy="320040"/>
+            <a:endParaRPr lang="en-US" sz="1450" dirty="0"/>
+          </a:p>
+        </p:txBody>
+      </p:sp>
+      <p:sp>
+        <p:nvSpPr>
+          <p:cNvPr id="12" name="Text 7"/>
+          <p:cNvSpPr txBox="1"/>
+          <p:nvPr/>
+        </p:nvSpPr>
+        <p:spPr>
+          <a:xfrm>
+            <a:off x="6577279" y="4892040"/>
+            <a:ext cx="4956048" cy="347472"/>
           </a:xfrm>
           <a:prstGeom prst="rect">
             <a:avLst/>
@@ -2857,19 +3012,56 @@
               <a:buNone/>
             </a:pPr>
             <a:r>
-              <a:rPr lang="en-US" sz="1100" dirty="0">
-                <a:solidFill>
-                  <a:srgbClr val="FFFFFF">
-                    <a:alpha val="65000"/>
-                  </a:srgbClr>
-                </a:solidFill>
-                <a:latin typeface="Arial" pitchFamily="34" charset="0"/>
-                <a:ea typeface="Arial" pitchFamily="34" charset="-122"/>
-                <a:cs typeface="Arial" pitchFamily="34" charset="-120"/>
-              </a:rPr>
-              <a:t>Green Solutions · contact@evergreen-ecosorb.com</a:t>
+              <a:rPr lang="en-US" sz="1100" b="1" dirty="0">
+                <a:solidFill>
+                  <a:srgbClr val="8BC34A"/>
+                </a:solidFill>
+                <a:latin typeface="Arial" pitchFamily="34" charset="0"/>
+                <a:ea typeface="Arial" pitchFamily="34" charset="-122"/>
+                <a:cs typeface="Arial" pitchFamily="34" charset="-120"/>
+              </a:rPr>
+              <a:t>ECOSORB® · ECOFERT® · NAPEMA® · PAULOWNIA</a:t>
             </a:r>
             <a:endParaRPr lang="en-US" sz="1100" dirty="0"/>
+          </a:p>
+        </p:txBody>
+      </p:sp>
+      <p:sp>
+        <p:nvSpPr>
+          <p:cNvPr id="13" name="Text 8"/>
+          <p:cNvSpPr txBox="1"/>
+          <p:nvPr/>
+        </p:nvSpPr>
+        <p:spPr>
+          <a:xfrm>
+            <a:off x="6577279" y="6053328"/>
+            <a:ext cx="4956048" cy="310896"/>
+          </a:xfrm>
+          <a:prstGeom prst="rect">
+            <a:avLst/>
+          </a:prstGeom>
+          <a:noFill/>
+          <a:ln/>
+        </p:spPr>
+        <p:txBody>
+          <a:bodyPr wrap="square" lIns="0" tIns="0" rIns="0" bIns="0" rtlCol="0" anchor="ctr"/>
+          <a:lstStyle/>
+          <a:p>
+            <a:pPr rtl="1" algn="r" indent="0" marL="0">
+              <a:buNone/>
+            </a:pPr>
+            <a:r>
+              <a:rPr lang="en-US" sz="850" dirty="0">
+                <a:solidFill>
+                  <a:srgbClr val="9A9A9A"/>
+                </a:solidFill>
+                <a:latin typeface="Arial" pitchFamily="34" charset="0"/>
+                <a:ea typeface="Arial" pitchFamily="34" charset="-122"/>
+                <a:cs typeface="Arial" pitchFamily="34" charset="-120"/>
+              </a:rPr>
+              <a:t>سبتمبر 2026 · وثيقة سرية · للاستخدام الحصري للمرسل إليه</a:t>
+            </a:r>
+            <a:endParaRPr lang="en-US" sz="850" dirty="0"/>
           </a:p>
         </p:txBody>
       </p:sp>

--- a/public/documents/countries/jordanie.pptx
+++ b/public/documents/countries/jordanie.pptx
@@ -117,7 +117,7 @@
 </p:presentation>
 </file>
 
-<file path=ppt/charts/chart25.xml><?xml version="1.0" encoding="utf-8"?>
+<file path=ppt/charts/chart31.xml><?xml version="1.0" encoding="utf-8"?>
 <c:chartSpace xmlns:c="http://schemas.openxmlformats.org/drawingml/2006/chart" xmlns:a="http://schemas.openxmlformats.org/drawingml/2006/main" xmlns:r="http://schemas.openxmlformats.org/officeDocument/2006/relationships">
   <c:date1904 val="0"/>
   <c:roundedCorners val="1"/>
@@ -362,7 +362,7 @@
 </c:chartSpace>
 </file>
 
-<file path=ppt/charts/chart26.xml><?xml version="1.0" encoding="utf-8"?>
+<file path=ppt/charts/chart32.xml><?xml version="1.0" encoding="utf-8"?>
 <c:chartSpace xmlns:c="http://schemas.openxmlformats.org/drawingml/2006/chart" xmlns:a="http://schemas.openxmlformats.org/drawingml/2006/main" xmlns:r="http://schemas.openxmlformats.org/officeDocument/2006/relationships">
   <c:date1904 val="0"/>
   <c:roundedCorners val="1"/>
@@ -670,7 +670,7 @@
 </c:chartSpace>
 </file>
 
-<file path=ppt/charts/chart27.xml><?xml version="1.0" encoding="utf-8"?>
+<file path=ppt/charts/chart33.xml><?xml version="1.0" encoding="utf-8"?>
 <c:chartSpace xmlns:c="http://schemas.openxmlformats.org/drawingml/2006/chart" xmlns:a="http://schemas.openxmlformats.org/drawingml/2006/main" xmlns:r="http://schemas.openxmlformats.org/officeDocument/2006/relationships">
   <c:date1904 val="0"/>
   <c:roundedCorners val="1"/>
@@ -3842,9 +3842,35 @@
           </a:p>
         </p:txBody>
       </p:sp>
-      <p:sp>
-        <p:nvSpPr>
-          <p:cNvPr id="6" name="Text 3"/>
+      <p:pic>
+        <p:nvPicPr>
+          <p:cNvPr id="6" name="Image 1" descr="C:\Users\Utilisateur\dev\green-solutions-web\scripts\dossiers\sceau-aim-clair.png">    </p:cNvPr>
+          <p:cNvPicPr>
+            <a:picLocks noChangeAspect="1"/>
+          </p:cNvPicPr>
+          <p:nvPr/>
+        </p:nvPicPr>
+        <p:blipFill>
+          <a:blip r:embed="rId2">
+            <a:alphaModFix amt="85000"/>
+          </a:blip>
+          <a:stretch>
+            <a:fillRect/>
+          </a:stretch>
+        </p:blipFill>
+        <p:spPr>
+          <a:xfrm>
+            <a:off x="502920" y="5193792"/>
+            <a:ext cx="1051560" cy="1051560"/>
+          </a:xfrm>
+          <a:prstGeom prst="rect">
+            <a:avLst/>
+          </a:prstGeom>
+        </p:spPr>
+      </p:pic>
+      <p:sp>
+        <p:nvSpPr>
+          <p:cNvPr id="7" name="Text 3"/>
           <p:cNvSpPr txBox="1"/>
           <p:nvPr/>
         </p:nvSpPr>
@@ -3885,7 +3911,7 @@
       </p:sp>
       <p:sp>
         <p:nvSpPr>
-          <p:cNvPr id="7" name="Text 4"/>
+          <p:cNvPr id="8" name="Text 4"/>
           <p:cNvSpPr txBox="1"/>
           <p:nvPr/>
         </p:nvSpPr>

--- a/public/documents/countries/jordanie.pptx
+++ b/public/documents/countries/jordanie.pptx
@@ -16,9 +16,16 @@
     <p:sldId id="264" r:id="rId10"/>
     <p:sldId id="265" r:id="rId11"/>
     <p:sldId id="266" r:id="rId12"/>
+    <p:sldId id="267" r:id="rId13"/>
+    <p:sldId id="268" r:id="rId14"/>
+    <p:sldId id="269" r:id="rId15"/>
+    <p:sldId id="270" r:id="rId16"/>
+    <p:sldId id="271" r:id="rId17"/>
+    <p:sldId id="272" r:id="rId18"/>
+    <p:sldId id="273" r:id="rId19"/>
   </p:sldIdLst>
   <p:notesMasterIdLst>
-    <p:notesMasterId r:id="rId13"/>
+    <p:notesMasterId r:id="rId20"/>
   </p:notesMasterIdLst>
   <p:sldSz cx="12192000" cy="6858000"/>
   <p:notesSz cx="6858000" cy="12192000"/>
@@ -117,7 +124,7 @@
 </p:presentation>
 </file>
 
-<file path=ppt/charts/chart31.xml><?xml version="1.0" encoding="utf-8"?>
+<file path=ppt/charts/chart41.xml><?xml version="1.0" encoding="utf-8"?>
 <c:chartSpace xmlns:c="http://schemas.openxmlformats.org/drawingml/2006/chart" xmlns:a="http://schemas.openxmlformats.org/drawingml/2006/main" xmlns:r="http://schemas.openxmlformats.org/officeDocument/2006/relationships">
   <c:date1904 val="0"/>
   <c:roundedCorners val="1"/>
@@ -362,7 +369,7 @@
 </c:chartSpace>
 </file>
 
-<file path=ppt/charts/chart32.xml><?xml version="1.0" encoding="utf-8"?>
+<file path=ppt/charts/chart42.xml><?xml version="1.0" encoding="utf-8"?>
 <c:chartSpace xmlns:c="http://schemas.openxmlformats.org/drawingml/2006/chart" xmlns:a="http://schemas.openxmlformats.org/drawingml/2006/main" xmlns:r="http://schemas.openxmlformats.org/officeDocument/2006/relationships">
   <c:date1904 val="0"/>
   <c:roundedCorners val="1"/>
@@ -670,7 +677,372 @@
 </c:chartSpace>
 </file>
 
-<file path=ppt/charts/chart33.xml><?xml version="1.0" encoding="utf-8"?>
+<file path=ppt/charts/chart43.xml><?xml version="1.0" encoding="utf-8"?>
+<c:chartSpace xmlns:c="http://schemas.openxmlformats.org/drawingml/2006/chart" xmlns:a="http://schemas.openxmlformats.org/drawingml/2006/main" xmlns:r="http://schemas.openxmlformats.org/officeDocument/2006/relationships">
+  <c:date1904 val="0"/>
+  <c:roundedCorners val="1"/>
+  <c:chart>
+    <c:autoTitleDeleted val="1"/>
+    <c:plotArea>
+      <c:layout/>
+      <c:barChart>
+        <c:barDir val="col"/>
+        <c:grouping val="clustered"/>
+        <c:varyColors val="0"/>
+        <c:ser>
+          <c:idx val="0"/>
+          <c:order val="0"/>
+          <c:tx>
+            <c:strRef>
+              <c:f>Sheet1!$B$1</c:f>
+              <c:strCache>
+                <c:ptCount val="1"/>
+                <c:pt idx="0">
+                  <c:v>الحد الأدنى (%)</c:v>
+                </c:pt>
+              </c:strCache>
+            </c:strRef>
+          </c:tx>
+          <c:spPr>
+            <a:solidFill>
+              <a:srgbClr val="2C6E49"/>
+            </a:solidFill>
+            <a:effectLst/>
+          </c:spPr>
+          <c:invertIfNegative val="0"/>
+          <c:dLbls>
+            <c:numFmt formatCode="[$-401]0&quot;%&quot;" sourceLinked="0"/>
+            <c:txPr>
+              <a:bodyPr/>
+              <a:lstStyle/>
+              <a:p>
+                <a:pPr>
+                  <a:defRPr b="0" i="0" strike="noStrike" sz="1100" u="none">
+                    <a:solidFill>
+                      <a:srgbClr val="16412B"/>
+                    </a:solidFill>
+                    <a:latin typeface="Arial"/>
+                  </a:defRPr>
+                </a:pPr>
+              </a:p>
+            </c:txPr>
+            <c:showLegendKey val="0"/>
+            <c:showVal val="1"/>
+            <c:showCatName val="0"/>
+            <c:showSerName val="0"/>
+            <c:showPercent val="0"/>
+            <c:showBubbleSize val="0"/>
+            <c:showLeaderLines val="0"/>
+          </c:dLbls>
+          <c:cat>
+            <c:multiLvlStrRef>
+              <c:f>Sheet1!$A$2:$A$6</c:f>
+              <c:multiLvlStrCache>
+                <c:ptCount val="5"/>
+                <c:lvl>
+                  <c:pt idx="0">
+                    <c:v>الطماطم</c:v>
+                  </c:pt>
+                  <c:pt idx="1">
+                    <c:v>الخيار</c:v>
+                  </c:pt>
+                  <c:pt idx="2">
+                    <c:v>الزيتون</c:v>
+                  </c:pt>
+                  <c:pt idx="3">
+                    <c:v>البطاطس</c:v>
+                  </c:pt>
+                  <c:pt idx="4">
+                    <c:v>الحمضيات</c:v>
+                  </c:pt>
+                </c:lvl>
+              </c:multiLvlStrCache>
+            </c:multiLvlStrRef>
+          </c:cat>
+          <c:val>
+            <c:numRef>
+              <c:f>Sheet1!$B$2:$B$6</c:f>
+              <c:numCache>
+                <c:formatCode>General</c:formatCode>
+                <c:ptCount val="5"/>
+                <c:pt idx="0">
+                  <c:v>30</c:v>
+                </c:pt>
+                <c:pt idx="1">
+                  <c:v>20</c:v>
+                </c:pt>
+                <c:pt idx="2">
+                  <c:v>20</c:v>
+                </c:pt>
+                <c:pt idx="3">
+                  <c:v>20</c:v>
+                </c:pt>
+                <c:pt idx="4">
+                  <c:v>20</c:v>
+                </c:pt>
+              </c:numCache>
+            </c:numRef>
+          </c:val>
+        </c:ser>
+        <c:ser>
+          <c:idx val="1"/>
+          <c:order val="1"/>
+          <c:tx>
+            <c:strRef>
+              <c:f>Sheet1!$C$1</c:f>
+              <c:strCache>
+                <c:ptCount val="1"/>
+                <c:pt idx="0">
+                  <c:v>الحد الأعلى (%)</c:v>
+                </c:pt>
+              </c:strCache>
+            </c:strRef>
+          </c:tx>
+          <c:spPr>
+            <a:solidFill>
+              <a:srgbClr val="D9A441"/>
+            </a:solidFill>
+            <a:effectLst/>
+          </c:spPr>
+          <c:invertIfNegative val="0"/>
+          <c:dLbls>
+            <c:numFmt formatCode="[$-401]0&quot;%&quot;" sourceLinked="0"/>
+            <c:txPr>
+              <a:bodyPr/>
+              <a:lstStyle/>
+              <a:p>
+                <a:pPr>
+                  <a:defRPr b="0" i="0" strike="noStrike" sz="1100" u="none">
+                    <a:solidFill>
+                      <a:srgbClr val="16412B"/>
+                    </a:solidFill>
+                    <a:latin typeface="Arial"/>
+                  </a:defRPr>
+                </a:pPr>
+              </a:p>
+            </c:txPr>
+            <c:showLegendKey val="0"/>
+            <c:showVal val="1"/>
+            <c:showCatName val="0"/>
+            <c:showSerName val="0"/>
+            <c:showPercent val="0"/>
+            <c:showBubbleSize val="0"/>
+            <c:showLeaderLines val="0"/>
+          </c:dLbls>
+          <c:cat>
+            <c:multiLvlStrRef>
+              <c:f>Sheet1!$A$2:$A$6</c:f>
+              <c:multiLvlStrCache>
+                <c:ptCount val="5"/>
+                <c:lvl>
+                  <c:pt idx="0">
+                    <c:v>الطماطم</c:v>
+                  </c:pt>
+                  <c:pt idx="1">
+                    <c:v>الخيار</c:v>
+                  </c:pt>
+                  <c:pt idx="2">
+                    <c:v>الزيتون</c:v>
+                  </c:pt>
+                  <c:pt idx="3">
+                    <c:v>البطاطس</c:v>
+                  </c:pt>
+                  <c:pt idx="4">
+                    <c:v>الحمضيات</c:v>
+                  </c:pt>
+                </c:lvl>
+              </c:multiLvlStrCache>
+            </c:multiLvlStrRef>
+          </c:cat>
+          <c:val>
+            <c:numRef>
+              <c:f>Sheet1!$C$2:$C$6</c:f>
+              <c:numCache>
+                <c:formatCode>General</c:formatCode>
+                <c:ptCount val="5"/>
+                <c:pt idx="0">
+                  <c:v>50</c:v>
+                </c:pt>
+                <c:pt idx="1">
+                  <c:v>40</c:v>
+                </c:pt>
+                <c:pt idx="2">
+                  <c:v>40</c:v>
+                </c:pt>
+                <c:pt idx="3">
+                  <c:v>40</c:v>
+                </c:pt>
+                <c:pt idx="4">
+                  <c:v>40</c:v>
+                </c:pt>
+              </c:numCache>
+            </c:numRef>
+          </c:val>
+        </c:ser>
+        <c:dLbls>
+          <c:numFmt formatCode="[$-401]0&quot;%&quot;" sourceLinked="0"/>
+          <c:txPr>
+            <a:bodyPr/>
+            <a:lstStyle/>
+            <a:p>
+              <a:pPr>
+                <a:defRPr b="0" i="0" strike="noStrike" sz="1100" u="none">
+                  <a:solidFill>
+                    <a:srgbClr val="16412B"/>
+                  </a:solidFill>
+                  <a:latin typeface="Arial"/>
+                </a:defRPr>
+              </a:pPr>
+            </a:p>
+          </c:txPr>
+          <c:showLegendKey val="0"/>
+          <c:showVal val="1"/>
+          <c:showCatName val="0"/>
+          <c:showSerName val="0"/>
+          <c:showPercent val="0"/>
+          <c:showBubbleSize val="0"/>
+          <c:showLeaderLines val="0"/>
+        </c:dLbls>
+        <c:gapWidth val="150"/>
+        <c:overlap val="0"/>
+        <c:axId val="2094734554"/>
+        <c:axId val="2094734552"/>
+        <c:axId val="2094734556"/>
+      </c:barChart>
+      <c:catAx>
+        <c:axId val="2094734554"/>
+        <c:scaling>
+          <c:orientation val="minMax"/>
+        </c:scaling>
+        <c:delete val="0"/>
+        <c:axPos val="b"/>
+        <c:numFmt formatCode="General" sourceLinked="1"/>
+        <c:majorTickMark val="out"/>
+        <c:minorTickMark val="none"/>
+        <c:tickLblPos val="low"/>
+        <c:spPr>
+          <a:ln w="12700" cap="flat">
+            <a:solidFill>
+              <a:srgbClr val="888888"/>
+            </a:solidFill>
+            <a:prstDash val="solid"/>
+            <a:round/>
+          </a:ln>
+        </c:spPr>
+        <c:txPr>
+          <a:bodyPr/>
+          <a:lstStyle/>
+          <a:p>
+            <a:pPr>
+              <a:defRPr sz="1100" b="0" i="0" u="none" strike="noStrike">
+                <a:solidFill>
+                  <a:srgbClr val="6F7D71"/>
+                </a:solidFill>
+                <a:latin typeface="Arial"/>
+              </a:defRPr>
+            </a:pPr>
+            <a:endParaRPr lang="en-US"/>
+          </a:p>
+        </c:txPr>
+        <c:crossAx val="2094734552"/>
+        <c:crosses val="autoZero"/>
+        <c:auto val="1"/>
+        <c:lblAlgn val="ctr"/>
+        <c:noMultiLvlLbl val="1"/>
+      </c:catAx>
+      <c:valAx>
+        <c:axId val="2094734552"/>
+        <c:scaling>
+          <c:orientation val="minMax"/>
+          <c:min val="0"/>
+        </c:scaling>
+        <c:delete val="0"/>
+        <c:axPos val="l"/>
+        <c:majorGridlines>
+          <c:spPr>
+            <a:ln w="9525" cap="flat">
+              <a:solidFill>
+                <a:srgbClr val="E0DFD0"/>
+              </a:solidFill>
+              <a:prstDash val="solid"/>
+              <a:round/>
+            </a:ln>
+          </c:spPr>
+        </c:majorGridlines>
+        <c:numFmt formatCode="General" sourceLinked="0"/>
+        <c:majorTickMark val="out"/>
+        <c:minorTickMark val="none"/>
+        <c:tickLblPos val="nextTo"/>
+        <c:spPr>
+          <a:ln w="12700" cap="flat">
+            <a:solidFill>
+              <a:srgbClr val="888888"/>
+            </a:solidFill>
+            <a:prstDash val="solid"/>
+            <a:round/>
+          </a:ln>
+        </c:spPr>
+        <c:txPr>
+          <a:bodyPr/>
+          <a:lstStyle/>
+          <a:p>
+            <a:pPr>
+              <a:defRPr sz="1100" b="0" i="0" u="none" strike="noStrike">
+                <a:solidFill>
+                  <a:srgbClr val="6F7D71"/>
+                </a:solidFill>
+                <a:latin typeface="Arial"/>
+              </a:defRPr>
+            </a:pPr>
+            <a:endParaRPr lang="en-US"/>
+          </a:p>
+        </c:txPr>
+        <c:crossAx val="2094734554"/>
+        <c:crosses val="autoZero"/>
+        <c:crossBetween val="between"/>
+      </c:valAx>
+      <c:spPr>
+        <a:noFill/>
+        <a:ln>
+          <a:noFill/>
+        </a:ln>
+        <a:effectLst/>
+      </c:spPr>
+    </c:plotArea>
+    <c:legend>
+      <c:legendPos val="b"/>
+      <c:overlay val="0"/>
+      <c:txPr>
+        <a:bodyPr/>
+        <a:lstStyle/>
+        <a:p>
+          <a:pPr>
+            <a:defRPr sz="1100">
+              <a:latin typeface="Arial"/>
+              <a:cs typeface="Arial"/>
+            </a:defRPr>
+          </a:pPr>
+          <a:endParaRPr lang="en-US"/>
+        </a:p>
+      </c:txPr>
+    </c:legend>
+    <c:plotVisOnly val="1"/>
+    <c:dispBlanksAs val="span"/>
+  </c:chart>
+  <c:spPr>
+    <a:noFill/>
+    <a:ln>
+      <a:noFill/>
+    </a:ln>
+    <a:effectLst/>
+  </c:spPr>
+  <c:externalData r:id="rId1">
+    <c:autoUpdate val="0"/>
+  </c:externalData>
+</c:chartSpace>
+</file>
+
+<file path=ppt/charts/chart44.xml><?xml version="1.0" encoding="utf-8"?>
 <c:chartSpace xmlns:c="http://schemas.openxmlformats.org/drawingml/2006/chart" xmlns:a="http://schemas.openxmlformats.org/drawingml/2006/main" xmlns:r="http://schemas.openxmlformats.org/officeDocument/2006/relationships">
   <c:date1904 val="0"/>
   <c:roundedCorners val="1"/>
@@ -1618,6 +1990,622 @@
             <a:fld id="{F7021451-1387-4CA6-816F-3879F97B5CBC}" type="slidenum">
               <a:rPr lang="en-US"/>
               <a:t>11</a:t>
+            </a:fld>
+            <a:endParaRPr lang="en-US"/>
+          </a:p>
+        </p:txBody>
+      </p:sp>
+    </p:spTree>
+    <p:extLst>
+      <p:ext uri="{BB962C8B-B14F-4D97-AF65-F5344CB8AC3E}">
+        <p14:creationId xmlns:p14="http://schemas.microsoft.com/office/powerpoint/2010/main" val="1024086991"/>
+      </p:ext>
+    </p:extLst>
+  </p:cSld>
+  <p:clrMapOvr>
+    <a:masterClrMapping/>
+  </p:clrMapOvr>
+</p:notes>
+</file>
+
+<file path=ppt/notesSlides/notesSlide12.xml><?xml version="1.0" encoding="utf-8"?>
+<p:notes xmlns:a="http://schemas.openxmlformats.org/drawingml/2006/main" xmlns:r="http://schemas.openxmlformats.org/officeDocument/2006/relationships" xmlns:p="http://schemas.openxmlformats.org/presentationml/2006/main">
+  <p:cSld>
+    <p:spTree>
+      <p:nvGrpSpPr>
+        <p:cNvPr id="1" name=""/>
+        <p:cNvGrpSpPr/>
+        <p:nvPr/>
+      </p:nvGrpSpPr>
+      <p:grpSpPr>
+        <a:xfrm>
+          <a:off x="0" y="0"/>
+          <a:ext cx="0" cy="0"/>
+          <a:chOff x="0" y="0"/>
+          <a:chExt cx="0" cy="0"/>
+        </a:xfrm>
+      </p:grpSpPr>
+      <p:sp>
+        <p:nvSpPr>
+          <p:cNvPr id="2" name="Slide Image Placeholder 1"/>
+          <p:cNvSpPr>
+            <a:spLocks noGrp="1" noRot="1" noChangeAspect="1"/>
+          </p:cNvSpPr>
+          <p:nvPr>
+            <p:ph type="sldImg"/>
+          </p:nvPr>
+        </p:nvSpPr>
+        <p:spPr/>
+      </p:sp>
+      <p:sp>
+        <p:nvSpPr>
+          <p:cNvPr id="3" name="Notes Placeholder 2"/>
+          <p:cNvSpPr>
+            <a:spLocks noGrp="1"/>
+          </p:cNvSpPr>
+          <p:nvPr>
+            <p:ph type="body" idx="1"/>
+          </p:nvPr>
+        </p:nvSpPr>
+        <p:spPr/>
+        <p:txBody>
+          <a:bodyPr/>
+          <a:lstStyle/>
+          <a:p>
+            <a:r>
+              <a:rPr lang="en-US" dirty="0"/>
+              <a:t/>
+            </a:r>
+            <a:endParaRPr lang="en-US" dirty="0"/>
+          </a:p>
+        </p:txBody>
+      </p:sp>
+      <p:sp>
+        <p:nvSpPr>
+          <p:cNvPr id="4" name="Slide Number Placeholder 3"/>
+          <p:cNvSpPr>
+            <a:spLocks noGrp="1"/>
+          </p:cNvSpPr>
+          <p:nvPr>
+            <p:ph type="sldNum" sz="quarter" idx="10"/>
+          </p:nvPr>
+        </p:nvSpPr>
+        <p:spPr/>
+        <p:txBody>
+          <a:bodyPr/>
+          <a:lstStyle/>
+          <a:p>
+            <a:fld id="{F7021451-1387-4CA6-816F-3879F97B5CBC}" type="slidenum">
+              <a:rPr lang="en-US"/>
+              <a:t>12</a:t>
+            </a:fld>
+            <a:endParaRPr lang="en-US"/>
+          </a:p>
+        </p:txBody>
+      </p:sp>
+    </p:spTree>
+    <p:extLst>
+      <p:ext uri="{BB962C8B-B14F-4D97-AF65-F5344CB8AC3E}">
+        <p14:creationId xmlns:p14="http://schemas.microsoft.com/office/powerpoint/2010/main" val="1024086991"/>
+      </p:ext>
+    </p:extLst>
+  </p:cSld>
+  <p:clrMapOvr>
+    <a:masterClrMapping/>
+  </p:clrMapOvr>
+</p:notes>
+</file>
+
+<file path=ppt/notesSlides/notesSlide13.xml><?xml version="1.0" encoding="utf-8"?>
+<p:notes xmlns:a="http://schemas.openxmlformats.org/drawingml/2006/main" xmlns:r="http://schemas.openxmlformats.org/officeDocument/2006/relationships" xmlns:p="http://schemas.openxmlformats.org/presentationml/2006/main">
+  <p:cSld>
+    <p:spTree>
+      <p:nvGrpSpPr>
+        <p:cNvPr id="1" name=""/>
+        <p:cNvGrpSpPr/>
+        <p:nvPr/>
+      </p:nvGrpSpPr>
+      <p:grpSpPr>
+        <a:xfrm>
+          <a:off x="0" y="0"/>
+          <a:ext cx="0" cy="0"/>
+          <a:chOff x="0" y="0"/>
+          <a:chExt cx="0" cy="0"/>
+        </a:xfrm>
+      </p:grpSpPr>
+      <p:sp>
+        <p:nvSpPr>
+          <p:cNvPr id="2" name="Slide Image Placeholder 1"/>
+          <p:cNvSpPr>
+            <a:spLocks noGrp="1" noRot="1" noChangeAspect="1"/>
+          </p:cNvSpPr>
+          <p:nvPr>
+            <p:ph type="sldImg"/>
+          </p:nvPr>
+        </p:nvSpPr>
+        <p:spPr/>
+      </p:sp>
+      <p:sp>
+        <p:nvSpPr>
+          <p:cNvPr id="3" name="Notes Placeholder 2"/>
+          <p:cNvSpPr>
+            <a:spLocks noGrp="1"/>
+          </p:cNvSpPr>
+          <p:nvPr>
+            <p:ph type="body" idx="1"/>
+          </p:nvPr>
+        </p:nvSpPr>
+        <p:spPr/>
+        <p:txBody>
+          <a:bodyPr/>
+          <a:lstStyle/>
+          <a:p>
+            <a:r>
+              <a:rPr lang="en-US" dirty="0"/>
+              <a:t/>
+            </a:r>
+            <a:endParaRPr lang="en-US" dirty="0"/>
+          </a:p>
+        </p:txBody>
+      </p:sp>
+      <p:sp>
+        <p:nvSpPr>
+          <p:cNvPr id="4" name="Slide Number Placeholder 3"/>
+          <p:cNvSpPr>
+            <a:spLocks noGrp="1"/>
+          </p:cNvSpPr>
+          <p:nvPr>
+            <p:ph type="sldNum" sz="quarter" idx="10"/>
+          </p:nvPr>
+        </p:nvSpPr>
+        <p:spPr/>
+        <p:txBody>
+          <a:bodyPr/>
+          <a:lstStyle/>
+          <a:p>
+            <a:fld id="{F7021451-1387-4CA6-816F-3879F97B5CBC}" type="slidenum">
+              <a:rPr lang="en-US"/>
+              <a:t>13</a:t>
+            </a:fld>
+            <a:endParaRPr lang="en-US"/>
+          </a:p>
+        </p:txBody>
+      </p:sp>
+    </p:spTree>
+    <p:extLst>
+      <p:ext uri="{BB962C8B-B14F-4D97-AF65-F5344CB8AC3E}">
+        <p14:creationId xmlns:p14="http://schemas.microsoft.com/office/powerpoint/2010/main" val="1024086991"/>
+      </p:ext>
+    </p:extLst>
+  </p:cSld>
+  <p:clrMapOvr>
+    <a:masterClrMapping/>
+  </p:clrMapOvr>
+</p:notes>
+</file>
+
+<file path=ppt/notesSlides/notesSlide14.xml><?xml version="1.0" encoding="utf-8"?>
+<p:notes xmlns:a="http://schemas.openxmlformats.org/drawingml/2006/main" xmlns:r="http://schemas.openxmlformats.org/officeDocument/2006/relationships" xmlns:p="http://schemas.openxmlformats.org/presentationml/2006/main">
+  <p:cSld>
+    <p:spTree>
+      <p:nvGrpSpPr>
+        <p:cNvPr id="1" name=""/>
+        <p:cNvGrpSpPr/>
+        <p:nvPr/>
+      </p:nvGrpSpPr>
+      <p:grpSpPr>
+        <a:xfrm>
+          <a:off x="0" y="0"/>
+          <a:ext cx="0" cy="0"/>
+          <a:chOff x="0" y="0"/>
+          <a:chExt cx="0" cy="0"/>
+        </a:xfrm>
+      </p:grpSpPr>
+      <p:sp>
+        <p:nvSpPr>
+          <p:cNvPr id="2" name="Slide Image Placeholder 1"/>
+          <p:cNvSpPr>
+            <a:spLocks noGrp="1" noRot="1" noChangeAspect="1"/>
+          </p:cNvSpPr>
+          <p:nvPr>
+            <p:ph type="sldImg"/>
+          </p:nvPr>
+        </p:nvSpPr>
+        <p:spPr/>
+      </p:sp>
+      <p:sp>
+        <p:nvSpPr>
+          <p:cNvPr id="3" name="Notes Placeholder 2"/>
+          <p:cNvSpPr>
+            <a:spLocks noGrp="1"/>
+          </p:cNvSpPr>
+          <p:nvPr>
+            <p:ph type="body" idx="1"/>
+          </p:nvPr>
+        </p:nvSpPr>
+        <p:spPr/>
+        <p:txBody>
+          <a:bodyPr/>
+          <a:lstStyle/>
+          <a:p>
+            <a:r>
+              <a:rPr lang="en-US" dirty="0"/>
+              <a:t/>
+            </a:r>
+            <a:endParaRPr lang="en-US" dirty="0"/>
+          </a:p>
+        </p:txBody>
+      </p:sp>
+      <p:sp>
+        <p:nvSpPr>
+          <p:cNvPr id="4" name="Slide Number Placeholder 3"/>
+          <p:cNvSpPr>
+            <a:spLocks noGrp="1"/>
+          </p:cNvSpPr>
+          <p:nvPr>
+            <p:ph type="sldNum" sz="quarter" idx="10"/>
+          </p:nvPr>
+        </p:nvSpPr>
+        <p:spPr/>
+        <p:txBody>
+          <a:bodyPr/>
+          <a:lstStyle/>
+          <a:p>
+            <a:fld id="{F7021451-1387-4CA6-816F-3879F97B5CBC}" type="slidenum">
+              <a:rPr lang="en-US"/>
+              <a:t>14</a:t>
+            </a:fld>
+            <a:endParaRPr lang="en-US"/>
+          </a:p>
+        </p:txBody>
+      </p:sp>
+    </p:spTree>
+    <p:extLst>
+      <p:ext uri="{BB962C8B-B14F-4D97-AF65-F5344CB8AC3E}">
+        <p14:creationId xmlns:p14="http://schemas.microsoft.com/office/powerpoint/2010/main" val="1024086991"/>
+      </p:ext>
+    </p:extLst>
+  </p:cSld>
+  <p:clrMapOvr>
+    <a:masterClrMapping/>
+  </p:clrMapOvr>
+</p:notes>
+</file>
+
+<file path=ppt/notesSlides/notesSlide15.xml><?xml version="1.0" encoding="utf-8"?>
+<p:notes xmlns:a="http://schemas.openxmlformats.org/drawingml/2006/main" xmlns:r="http://schemas.openxmlformats.org/officeDocument/2006/relationships" xmlns:p="http://schemas.openxmlformats.org/presentationml/2006/main">
+  <p:cSld>
+    <p:spTree>
+      <p:nvGrpSpPr>
+        <p:cNvPr id="1" name=""/>
+        <p:cNvGrpSpPr/>
+        <p:nvPr/>
+      </p:nvGrpSpPr>
+      <p:grpSpPr>
+        <a:xfrm>
+          <a:off x="0" y="0"/>
+          <a:ext cx="0" cy="0"/>
+          <a:chOff x="0" y="0"/>
+          <a:chExt cx="0" cy="0"/>
+        </a:xfrm>
+      </p:grpSpPr>
+      <p:sp>
+        <p:nvSpPr>
+          <p:cNvPr id="2" name="Slide Image Placeholder 1"/>
+          <p:cNvSpPr>
+            <a:spLocks noGrp="1" noRot="1" noChangeAspect="1"/>
+          </p:cNvSpPr>
+          <p:nvPr>
+            <p:ph type="sldImg"/>
+          </p:nvPr>
+        </p:nvSpPr>
+        <p:spPr/>
+      </p:sp>
+      <p:sp>
+        <p:nvSpPr>
+          <p:cNvPr id="3" name="Notes Placeholder 2"/>
+          <p:cNvSpPr>
+            <a:spLocks noGrp="1"/>
+          </p:cNvSpPr>
+          <p:nvPr>
+            <p:ph type="body" idx="1"/>
+          </p:nvPr>
+        </p:nvSpPr>
+        <p:spPr/>
+        <p:txBody>
+          <a:bodyPr/>
+          <a:lstStyle/>
+          <a:p>
+            <a:r>
+              <a:rPr lang="en-US" dirty="0"/>
+              <a:t/>
+            </a:r>
+            <a:endParaRPr lang="en-US" dirty="0"/>
+          </a:p>
+        </p:txBody>
+      </p:sp>
+      <p:sp>
+        <p:nvSpPr>
+          <p:cNvPr id="4" name="Slide Number Placeholder 3"/>
+          <p:cNvSpPr>
+            <a:spLocks noGrp="1"/>
+          </p:cNvSpPr>
+          <p:nvPr>
+            <p:ph type="sldNum" sz="quarter" idx="10"/>
+          </p:nvPr>
+        </p:nvSpPr>
+        <p:spPr/>
+        <p:txBody>
+          <a:bodyPr/>
+          <a:lstStyle/>
+          <a:p>
+            <a:fld id="{F7021451-1387-4CA6-816F-3879F97B5CBC}" type="slidenum">
+              <a:rPr lang="en-US"/>
+              <a:t>15</a:t>
+            </a:fld>
+            <a:endParaRPr lang="en-US"/>
+          </a:p>
+        </p:txBody>
+      </p:sp>
+    </p:spTree>
+    <p:extLst>
+      <p:ext uri="{BB962C8B-B14F-4D97-AF65-F5344CB8AC3E}">
+        <p14:creationId xmlns:p14="http://schemas.microsoft.com/office/powerpoint/2010/main" val="1024086991"/>
+      </p:ext>
+    </p:extLst>
+  </p:cSld>
+  <p:clrMapOvr>
+    <a:masterClrMapping/>
+  </p:clrMapOvr>
+</p:notes>
+</file>
+
+<file path=ppt/notesSlides/notesSlide16.xml><?xml version="1.0" encoding="utf-8"?>
+<p:notes xmlns:a="http://schemas.openxmlformats.org/drawingml/2006/main" xmlns:r="http://schemas.openxmlformats.org/officeDocument/2006/relationships" xmlns:p="http://schemas.openxmlformats.org/presentationml/2006/main">
+  <p:cSld>
+    <p:spTree>
+      <p:nvGrpSpPr>
+        <p:cNvPr id="1" name=""/>
+        <p:cNvGrpSpPr/>
+        <p:nvPr/>
+      </p:nvGrpSpPr>
+      <p:grpSpPr>
+        <a:xfrm>
+          <a:off x="0" y="0"/>
+          <a:ext cx="0" cy="0"/>
+          <a:chOff x="0" y="0"/>
+          <a:chExt cx="0" cy="0"/>
+        </a:xfrm>
+      </p:grpSpPr>
+      <p:sp>
+        <p:nvSpPr>
+          <p:cNvPr id="2" name="Slide Image Placeholder 1"/>
+          <p:cNvSpPr>
+            <a:spLocks noGrp="1" noRot="1" noChangeAspect="1"/>
+          </p:cNvSpPr>
+          <p:nvPr>
+            <p:ph type="sldImg"/>
+          </p:nvPr>
+        </p:nvSpPr>
+        <p:spPr/>
+      </p:sp>
+      <p:sp>
+        <p:nvSpPr>
+          <p:cNvPr id="3" name="Notes Placeholder 2"/>
+          <p:cNvSpPr>
+            <a:spLocks noGrp="1"/>
+          </p:cNvSpPr>
+          <p:nvPr>
+            <p:ph type="body" idx="1"/>
+          </p:nvPr>
+        </p:nvSpPr>
+        <p:spPr/>
+        <p:txBody>
+          <a:bodyPr/>
+          <a:lstStyle/>
+          <a:p>
+            <a:r>
+              <a:rPr lang="en-US" dirty="0"/>
+              <a:t/>
+            </a:r>
+            <a:endParaRPr lang="en-US" dirty="0"/>
+          </a:p>
+        </p:txBody>
+      </p:sp>
+      <p:sp>
+        <p:nvSpPr>
+          <p:cNvPr id="4" name="Slide Number Placeholder 3"/>
+          <p:cNvSpPr>
+            <a:spLocks noGrp="1"/>
+          </p:cNvSpPr>
+          <p:nvPr>
+            <p:ph type="sldNum" sz="quarter" idx="10"/>
+          </p:nvPr>
+        </p:nvSpPr>
+        <p:spPr/>
+        <p:txBody>
+          <a:bodyPr/>
+          <a:lstStyle/>
+          <a:p>
+            <a:fld id="{F7021451-1387-4CA6-816F-3879F97B5CBC}" type="slidenum">
+              <a:rPr lang="en-US"/>
+              <a:t>16</a:t>
+            </a:fld>
+            <a:endParaRPr lang="en-US"/>
+          </a:p>
+        </p:txBody>
+      </p:sp>
+    </p:spTree>
+    <p:extLst>
+      <p:ext uri="{BB962C8B-B14F-4D97-AF65-F5344CB8AC3E}">
+        <p14:creationId xmlns:p14="http://schemas.microsoft.com/office/powerpoint/2010/main" val="1024086991"/>
+      </p:ext>
+    </p:extLst>
+  </p:cSld>
+  <p:clrMapOvr>
+    <a:masterClrMapping/>
+  </p:clrMapOvr>
+</p:notes>
+</file>
+
+<file path=ppt/notesSlides/notesSlide17.xml><?xml version="1.0" encoding="utf-8"?>
+<p:notes xmlns:a="http://schemas.openxmlformats.org/drawingml/2006/main" xmlns:r="http://schemas.openxmlformats.org/officeDocument/2006/relationships" xmlns:p="http://schemas.openxmlformats.org/presentationml/2006/main">
+  <p:cSld>
+    <p:spTree>
+      <p:nvGrpSpPr>
+        <p:cNvPr id="1" name=""/>
+        <p:cNvGrpSpPr/>
+        <p:nvPr/>
+      </p:nvGrpSpPr>
+      <p:grpSpPr>
+        <a:xfrm>
+          <a:off x="0" y="0"/>
+          <a:ext cx="0" cy="0"/>
+          <a:chOff x="0" y="0"/>
+          <a:chExt cx="0" cy="0"/>
+        </a:xfrm>
+      </p:grpSpPr>
+      <p:sp>
+        <p:nvSpPr>
+          <p:cNvPr id="2" name="Slide Image Placeholder 1"/>
+          <p:cNvSpPr>
+            <a:spLocks noGrp="1" noRot="1" noChangeAspect="1"/>
+          </p:cNvSpPr>
+          <p:nvPr>
+            <p:ph type="sldImg"/>
+          </p:nvPr>
+        </p:nvSpPr>
+        <p:spPr/>
+      </p:sp>
+      <p:sp>
+        <p:nvSpPr>
+          <p:cNvPr id="3" name="Notes Placeholder 2"/>
+          <p:cNvSpPr>
+            <a:spLocks noGrp="1"/>
+          </p:cNvSpPr>
+          <p:nvPr>
+            <p:ph type="body" idx="1"/>
+          </p:nvPr>
+        </p:nvSpPr>
+        <p:spPr/>
+        <p:txBody>
+          <a:bodyPr/>
+          <a:lstStyle/>
+          <a:p>
+            <a:r>
+              <a:rPr lang="en-US" dirty="0"/>
+              <a:t/>
+            </a:r>
+            <a:endParaRPr lang="en-US" dirty="0"/>
+          </a:p>
+        </p:txBody>
+      </p:sp>
+      <p:sp>
+        <p:nvSpPr>
+          <p:cNvPr id="4" name="Slide Number Placeholder 3"/>
+          <p:cNvSpPr>
+            <a:spLocks noGrp="1"/>
+          </p:cNvSpPr>
+          <p:nvPr>
+            <p:ph type="sldNum" sz="quarter" idx="10"/>
+          </p:nvPr>
+        </p:nvSpPr>
+        <p:spPr/>
+        <p:txBody>
+          <a:bodyPr/>
+          <a:lstStyle/>
+          <a:p>
+            <a:fld id="{F7021451-1387-4CA6-816F-3879F97B5CBC}" type="slidenum">
+              <a:rPr lang="en-US"/>
+              <a:t>17</a:t>
+            </a:fld>
+            <a:endParaRPr lang="en-US"/>
+          </a:p>
+        </p:txBody>
+      </p:sp>
+    </p:spTree>
+    <p:extLst>
+      <p:ext uri="{BB962C8B-B14F-4D97-AF65-F5344CB8AC3E}">
+        <p14:creationId xmlns:p14="http://schemas.microsoft.com/office/powerpoint/2010/main" val="1024086991"/>
+      </p:ext>
+    </p:extLst>
+  </p:cSld>
+  <p:clrMapOvr>
+    <a:masterClrMapping/>
+  </p:clrMapOvr>
+</p:notes>
+</file>
+
+<file path=ppt/notesSlides/notesSlide18.xml><?xml version="1.0" encoding="utf-8"?>
+<p:notes xmlns:a="http://schemas.openxmlformats.org/drawingml/2006/main" xmlns:r="http://schemas.openxmlformats.org/officeDocument/2006/relationships" xmlns:p="http://schemas.openxmlformats.org/presentationml/2006/main">
+  <p:cSld>
+    <p:spTree>
+      <p:nvGrpSpPr>
+        <p:cNvPr id="1" name=""/>
+        <p:cNvGrpSpPr/>
+        <p:nvPr/>
+      </p:nvGrpSpPr>
+      <p:grpSpPr>
+        <a:xfrm>
+          <a:off x="0" y="0"/>
+          <a:ext cx="0" cy="0"/>
+          <a:chOff x="0" y="0"/>
+          <a:chExt cx="0" cy="0"/>
+        </a:xfrm>
+      </p:grpSpPr>
+      <p:sp>
+        <p:nvSpPr>
+          <p:cNvPr id="2" name="Slide Image Placeholder 1"/>
+          <p:cNvSpPr>
+            <a:spLocks noGrp="1" noRot="1" noChangeAspect="1"/>
+          </p:cNvSpPr>
+          <p:nvPr>
+            <p:ph type="sldImg"/>
+          </p:nvPr>
+        </p:nvSpPr>
+        <p:spPr/>
+      </p:sp>
+      <p:sp>
+        <p:nvSpPr>
+          <p:cNvPr id="3" name="Notes Placeholder 2"/>
+          <p:cNvSpPr>
+            <a:spLocks noGrp="1"/>
+          </p:cNvSpPr>
+          <p:nvPr>
+            <p:ph type="body" idx="1"/>
+          </p:nvPr>
+        </p:nvSpPr>
+        <p:spPr/>
+        <p:txBody>
+          <a:bodyPr/>
+          <a:lstStyle/>
+          <a:p>
+            <a:r>
+              <a:rPr lang="en-US" dirty="0"/>
+              <a:t/>
+            </a:r>
+            <a:endParaRPr lang="en-US" dirty="0"/>
+          </a:p>
+        </p:txBody>
+      </p:sp>
+      <p:sp>
+        <p:nvSpPr>
+          <p:cNvPr id="4" name="Slide Number Placeholder 3"/>
+          <p:cNvSpPr>
+            <a:spLocks noGrp="1"/>
+          </p:cNvSpPr>
+          <p:nvPr>
+            <p:ph type="sldNum" sz="quarter" idx="10"/>
+          </p:nvPr>
+        </p:nvSpPr>
+        <p:spPr/>
+        <p:txBody>
+          <a:bodyPr/>
+          <a:lstStyle/>
+          <a:p>
+            <a:fld id="{F7021451-1387-4CA6-816F-3879F97B5CBC}" type="slidenum">
+              <a:rPr lang="en-US"/>
+              <a:t>18</a:t>
             </a:fld>
             <a:endParaRPr lang="en-US"/>
           </a:p>
@@ -3130,7 +4118,7 @@
                 <a:ea typeface="Arial" pitchFamily="34" charset="-122"/>
                 <a:cs typeface="Arial" pitchFamily="34" charset="-120"/>
               </a:rPr>
-              <a:t>ما ينبغي توقّعه</a:t>
+              <a:t>استجابتنا</a:t>
             </a:r>
             <a:endParaRPr lang="en-US" sz="1150" dirty="0"/>
           </a:p>
@@ -3169,7 +4157,7 @@
                 <a:ea typeface="Arial" pitchFamily="34" charset="-122"/>
                 <a:cs typeface="Arial" pitchFamily="34" charset="-120"/>
               </a:rPr>
-              <a:t>مخاطر محددة وردود عليها</a:t>
+              <a:t>تقنيتان لقيدين مختلفين</a:t>
             </a:r>
             <a:endParaRPr lang="en-US" sz="3000" dirty="0"/>
           </a:p>
@@ -3208,7 +4196,7 @@
                 <a:ea typeface="Arial" pitchFamily="34" charset="-122"/>
                 <a:cs typeface="Arial" pitchFamily="34" charset="-120"/>
               </a:rPr>
-              <a:t>المخاطر</a:t>
+              <a:t>EVERGREEN® — الاحتفاظ بالماء</a:t>
             </a:r>
             <a:endParaRPr lang="en-US" sz="1600" dirty="0"/>
           </a:p>
@@ -3254,7 +4242,7 @@
                 <a:ea typeface="Arial" pitchFamily="34" charset="-122"/>
                 <a:cs typeface="Arial" pitchFamily="34" charset="-120"/>
               </a:rPr>
-              <a:t>تفاوت الأمطار بين سنة وأخرى: موسم رطب قد يحجب فائدة المنتج في المرتفعات البعلية.</a:t>
+              <a:t>مادة محتفظة بالماء أساسها البوتاسيوم، توضع في منطقة الجذور عند الزراعة أو عند التجديد.</a:t>
             </a:r>
             <a:endParaRPr lang="en-US" sz="1350" dirty="0"/>
           </a:p>
@@ -3278,7 +4266,7 @@
                 <a:ea typeface="Arial" pitchFamily="34" charset="-122"/>
                 <a:cs typeface="Arial" pitchFamily="34" charset="-120"/>
               </a:rPr>
-              <a:t>تجزّؤ الحيازات وصغر مساحاتها، ما يشتّت قرار الشراء على عدد كبير من المزارعين.</a:t>
+              <a:t>تلتقط ماء المطر أو الري وتعيده إلى النبات تدريجياً، فتزيل الإجهاد المائي في المراحل الحرجة.</a:t>
             </a:r>
             <a:endParaRPr lang="en-US" sz="1350" dirty="0"/>
           </a:p>
@@ -3302,7 +4290,7 @@
                 <a:ea typeface="Arial" pitchFamily="34" charset="-122"/>
                 <a:cs typeface="Arial" pitchFamily="34" charset="-120"/>
               </a:rPr>
-              <a:t>منافسة مواد رخيصة أساسها الصوديوم تركت انطباعاً سيئاً لدى المزارعين.</a:t>
+              <a:t>قدرة امتصاص تبلغ نحو 300 ضعف وزنها، ومدة أثر مفيد من 3 إلى 4 سنوات في التربة.</a:t>
             </a:r>
             <a:endParaRPr lang="en-US" sz="1350" dirty="0"/>
           </a:p>
@@ -3326,7 +4314,7 @@
                 <a:ea typeface="Arial" pitchFamily="34" charset="-122"/>
                 <a:cs typeface="Arial" pitchFamily="34" charset="-120"/>
               </a:rPr>
-              <a:t>ضغط على السيولة لدى الحيازات بعد مواسم متتالية من ارتفاع كلفة المياه والمدخلات.</a:t>
+              <a:t>تتحلل بنسبة 20 إلى 25 % سنوياً، دون تراكم ودون خطر جرعة زائدة.</a:t>
             </a:r>
             <a:endParaRPr lang="en-US" sz="1350" dirty="0"/>
           </a:p>
@@ -3365,7 +4353,7 @@
                 <a:ea typeface="Arial" pitchFamily="34" charset="-122"/>
                 <a:cs typeface="Arial" pitchFamily="34" charset="-120"/>
               </a:rPr>
-              <a:t>الردود</a:t>
+              <a:t>ECOFERT® — تغذية دون استنزاف</a:t>
             </a:r>
             <a:endParaRPr lang="en-US" sz="1600" dirty="0"/>
           </a:p>
@@ -3411,7 +4399,7 @@
                 <a:ea typeface="Arial" pitchFamily="34" charset="-122"/>
                 <a:cs typeface="Arial" pitchFamily="34" charset="-120"/>
               </a:rPr>
-              <a:t>إجراء التجربة على دورة كاملة مع قطعة شاهدة، لتوثيق المكسب حتى في سنة مواتية.</a:t>
+              <a:t>مخصّب بجرعات دقيقة من الأحماض الأمينية والنيتروجين والفوسفور والبوتاسيوم، من موارد متجددة.</a:t>
             </a:r>
             <a:endParaRPr lang="en-US" sz="1350" dirty="0"/>
           </a:p>
@@ -3435,7 +4423,7 @@
                 <a:ea typeface="Arial" pitchFamily="34" charset="-122"/>
                 <a:cs typeface="Arial" pitchFamily="34" charset="-120"/>
               </a:rPr>
-              <a:t>المرور عبر الجمعيات التعاونية واتحادات المزارعين بدل التعامل الفردي.</a:t>
+              <a:t>غير مخلبي: لا يفقر مركّب الطين والدبال، ولا يرفع ملوحة التربة ولا محتواها من النترات.</a:t>
             </a:r>
             <a:endParaRPr lang="en-US" sz="1350" dirty="0"/>
           </a:p>
@@ -3459,7 +4447,7 @@
                 <a:ea typeface="Arial" pitchFamily="34" charset="-122"/>
                 <a:cs typeface="Arial" pitchFamily="34" charset="-120"/>
               </a:rPr>
-              <a:t>توثيق فارق التركيبة: بوتاسيوم لا صوديوم، وملاءمة للمحاصيل الغذائية وللتربة المالحة.</a:t>
+              <a:t>حائز شهادتي SOHISCERT والعضوية الأوروبية — شرط للدخول إلى دفاتر شروط المشترين الأوروبيين.</a:t>
             </a:r>
             <a:endParaRPr lang="en-US" sz="1350" dirty="0"/>
           </a:p>
@@ -3483,7 +4471,7 @@
                 <a:ea typeface="Arial" pitchFamily="34" charset="-122"/>
                 <a:cs typeface="Arial" pitchFamily="34" charset="-120"/>
               </a:rPr>
-              <a:t>توزيع الالتزام على الزمن: أثر يدوم 3 إلى 4 سنوات يوزّع الكلفة على عدة مواسم.</a:t>
+              <a:t>من 1 إلى 4 عبوات سعة 140 مل للهكتار، متوافق مع تجهيزات الري بالتسميد القائمة.</a:t>
             </a:r>
             <a:endParaRPr lang="en-US" sz="1350" dirty="0"/>
           </a:p>
@@ -3552,7 +4540,7 @@
                 <a:ea typeface="Arial" pitchFamily="34" charset="-122"/>
                 <a:cs typeface="Arial" pitchFamily="34" charset="-120"/>
               </a:rPr>
-              <a:t>تحليل الأكريلاميد (مختبر Polymex، ISO 9001، بتركيز أقل من 3,0 ميكروغرام/غرام) وفحص REACH / SVHC (SGS) وشهادة SOHISCERT السارية حتى 4 سبتمبر 2027: متاحة جميعها عند الطلب.</a:t>
+              <a:t>المنتجان يُباعان منفصلين لكنهما صُمّما ليعزز أحدهما الآخر: المادة المحتفظة بالماء تطيل توفّره في منطقة الجذور، والمخصّب يثمّن هذا الماء المتاح دون إرهاق التربة.</a:t>
             </a:r>
             <a:endParaRPr lang="en-US" sz="1100" dirty="0"/>
           </a:p>
@@ -3651,6 +4639,4717 @@
 <file path=ppt/slides/slide11.xml><?xml version="1.0" encoding="utf-8"?>
 <p:sld xmlns:a="http://schemas.openxmlformats.org/drawingml/2006/main" xmlns:r="http://schemas.openxmlformats.org/officeDocument/2006/relationships" xmlns:p="http://schemas.openxmlformats.org/presentationml/2006/main">
   <p:cSld name="Slide 11">
+    <p:bg>
+      <p:bgPr>
+        <a:solidFill>
+          <a:srgbClr val="FCFAF5"/>
+        </a:solidFill>
+      </p:bgPr>
+    </p:bg>
+    <p:spTree>
+      <p:nvGrpSpPr>
+        <p:cNvPr id="1" name=""/>
+        <p:cNvGrpSpPr/>
+        <p:nvPr/>
+      </p:nvGrpSpPr>
+      <p:grpSpPr>
+        <a:xfrm>
+          <a:off x="0" y="0"/>
+          <a:ext cx="0" cy="0"/>
+          <a:chOff x="0" y="0"/>
+          <a:chExt cx="0" cy="0"/>
+        </a:xfrm>
+      </p:grpSpPr>
+      <p:sp>
+        <p:nvSpPr>
+          <p:cNvPr id="2" name="Text 0"/>
+          <p:cNvSpPr txBox="1"/>
+          <p:nvPr/>
+        </p:nvSpPr>
+        <p:spPr>
+          <a:xfrm>
+            <a:off x="594360" y="411480"/>
+            <a:ext cx="10515600" cy="274320"/>
+          </a:xfrm>
+          <a:prstGeom prst="rect">
+            <a:avLst/>
+          </a:prstGeom>
+          <a:noFill/>
+          <a:ln/>
+        </p:spPr>
+        <p:txBody>
+          <a:bodyPr wrap="square" lIns="0" tIns="0" rIns="0" bIns="0" rtlCol="0" anchor="ctr"/>
+          <a:lstStyle/>
+          <a:p>
+            <a:pPr rtl="1" algn="r" indent="0" marL="0">
+              <a:buNone/>
+            </a:pPr>
+            <a:r>
+              <a:rPr lang="en-US" sz="1150" b="1" spc="200" kern="0" dirty="0">
+                <a:solidFill>
+                  <a:srgbClr val="D9A441"/>
+                </a:solidFill>
+                <a:latin typeface="Arial" pitchFamily="34" charset="0"/>
+                <a:ea typeface="Arial" pitchFamily="34" charset="-122"/>
+                <a:cs typeface="Arial" pitchFamily="34" charset="-120"/>
+              </a:rPr>
+              <a:t>بقية المنتجات</a:t>
+            </a:r>
+            <a:endParaRPr lang="en-US" sz="1150" dirty="0"/>
+          </a:p>
+        </p:txBody>
+      </p:sp>
+      <p:sp>
+        <p:nvSpPr>
+          <p:cNvPr id="3" name="Text 1"/>
+          <p:cNvSpPr txBox="1"/>
+          <p:nvPr/>
+        </p:nvSpPr>
+        <p:spPr>
+          <a:xfrm>
+            <a:off x="594360" y="731520"/>
+            <a:ext cx="10881360" cy="731520"/>
+          </a:xfrm>
+          <a:prstGeom prst="rect">
+            <a:avLst/>
+          </a:prstGeom>
+          <a:noFill/>
+          <a:ln/>
+        </p:spPr>
+        <p:txBody>
+          <a:bodyPr wrap="square" lIns="0" tIns="0" rIns="0" bIns="0" rtlCol="0" anchor="ctr"/>
+          <a:lstStyle/>
+          <a:p>
+            <a:pPr rtl="1" algn="r" indent="0" marL="0">
+              <a:buNone/>
+            </a:pPr>
+            <a:r>
+              <a:rPr lang="en-US" sz="3000" b="1" dirty="0">
+                <a:solidFill>
+                  <a:srgbClr val="16412B"/>
+                </a:solidFill>
+                <a:latin typeface="Arial" pitchFamily="34" charset="0"/>
+                <a:ea typeface="Arial" pitchFamily="34" charset="-122"/>
+                <a:cs typeface="Arial" pitchFamily="34" charset="-120"/>
+              </a:rPr>
+              <a:t>حماية المحاصيل وتثبيت التربة</a:t>
+            </a:r>
+            <a:endParaRPr lang="en-US" sz="3000" dirty="0"/>
+          </a:p>
+        </p:txBody>
+      </p:sp>
+      <p:sp>
+        <p:nvSpPr>
+          <p:cNvPr id="4" name="Text 2"/>
+          <p:cNvSpPr txBox="1"/>
+          <p:nvPr/>
+        </p:nvSpPr>
+        <p:spPr>
+          <a:xfrm>
+            <a:off x="594360" y="1783080"/>
+            <a:ext cx="5227168" cy="411480"/>
+          </a:xfrm>
+          <a:prstGeom prst="rect">
+            <a:avLst/>
+          </a:prstGeom>
+          <a:noFill/>
+          <a:ln/>
+        </p:spPr>
+        <p:txBody>
+          <a:bodyPr wrap="square" lIns="0" tIns="0" rIns="0" bIns="0" rtlCol="0" anchor="ctr"/>
+          <a:lstStyle/>
+          <a:p>
+            <a:pPr rtl="1" algn="r" indent="0" marL="0">
+              <a:buNone/>
+            </a:pPr>
+            <a:r>
+              <a:rPr lang="en-US" sz="1600" b="1" dirty="0">
+                <a:solidFill>
+                  <a:srgbClr val="2C6E49"/>
+                </a:solidFill>
+                <a:latin typeface="Arial" pitchFamily="34" charset="0"/>
+                <a:ea typeface="Arial" pitchFamily="34" charset="-122"/>
+                <a:cs typeface="Arial" pitchFamily="34" charset="-120"/>
+              </a:rPr>
+              <a:t>NAPEMA® — حماية دون متبقيات</a:t>
+            </a:r>
+            <a:endParaRPr lang="en-US" sz="1600" dirty="0"/>
+          </a:p>
+        </p:txBody>
+      </p:sp>
+      <p:sp>
+        <p:nvSpPr>
+          <p:cNvPr id="5" name="Text 3"/>
+          <p:cNvSpPr txBox="1"/>
+          <p:nvPr/>
+        </p:nvSpPr>
+        <p:spPr>
+          <a:xfrm>
+            <a:off x="594360" y="2286000"/>
+            <a:ext cx="5227168" cy="2468880"/>
+          </a:xfrm>
+          <a:prstGeom prst="rect">
+            <a:avLst/>
+          </a:prstGeom>
+          <a:noFill/>
+          <a:ln/>
+        </p:spPr>
+        <p:txBody>
+          <a:bodyPr wrap="square" lIns="0" tIns="0" rIns="0" bIns="0" rtlCol="0" anchor="t"/>
+          <a:lstStyle/>
+          <a:p>
+            <a:pPr algn="r" marL="342900" indent="-342900">
+              <a:lnSpc>
+                <a:spcPct val="122000"/>
+              </a:lnSpc>
+              <a:spcAft>
+                <a:spcPts val="1000"/>
+              </a:spcAft>
+              <a:buSzPct val="100000"/>
+              <a:buChar char="•"/>
+            </a:pPr>
+            <a:r>
+              <a:rPr lang="en-US" sz="1350" dirty="0">
+                <a:solidFill>
+                  <a:srgbClr val="364239"/>
+                </a:solidFill>
+                <a:latin typeface="Arial" pitchFamily="34" charset="0"/>
+                <a:ea typeface="Arial" pitchFamily="34" charset="-122"/>
+                <a:cs typeface="Arial" pitchFamily="34" charset="-120"/>
+              </a:rPr>
+              <a:t>مكافحة الأمراض والطفيليات والفطريات والآفات، دون أي جزيء كيميائي مُصنَّع.</a:t>
+            </a:r>
+            <a:endParaRPr lang="en-US" sz="1350" dirty="0"/>
+          </a:p>
+          <a:p>
+            <a:pPr algn="r" marL="342900" indent="-342900">
+              <a:lnSpc>
+                <a:spcPct val="122000"/>
+              </a:lnSpc>
+              <a:spcAft>
+                <a:spcPts val="1000"/>
+              </a:spcAft>
+              <a:buSzPct val="100000"/>
+              <a:buChar char="•"/>
+            </a:pPr>
+            <a:r>
+              <a:rPr lang="en-US" sz="1350" dirty="0">
+                <a:solidFill>
+                  <a:srgbClr val="364239"/>
+                </a:solidFill>
+                <a:latin typeface="Arial" pitchFamily="34" charset="0"/>
+                <a:ea typeface="Arial" pitchFamily="34" charset="-122"/>
+                <a:cs typeface="Arial" pitchFamily="34" charset="-120"/>
+              </a:rPr>
+              <a:t>رشّ على الأوراق والجذور، بمفعول وقائي وعلاجي في آن واحد.</a:t>
+            </a:r>
+            <a:endParaRPr lang="en-US" sz="1350" dirty="0"/>
+          </a:p>
+          <a:p>
+            <a:pPr algn="r" marL="342900" indent="-342900">
+              <a:lnSpc>
+                <a:spcPct val="122000"/>
+              </a:lnSpc>
+              <a:spcAft>
+                <a:spcPts val="1000"/>
+              </a:spcAft>
+              <a:buSzPct val="100000"/>
+              <a:buChar char="•"/>
+            </a:pPr>
+            <a:r>
+              <a:rPr lang="en-US" sz="1350" dirty="0">
+                <a:solidFill>
+                  <a:srgbClr val="364239"/>
+                </a:solidFill>
+                <a:latin typeface="Arial" pitchFamily="34" charset="0"/>
+                <a:ea typeface="Arial" pitchFamily="34" charset="-122"/>
+                <a:cs typeface="Arial" pitchFamily="34" charset="-120"/>
+              </a:rPr>
+              <a:t>لا متبقيات في التربة ولا في النبات ولا في الهواء، مع الحفاظ على الملقِّحات والحشرات النافعة.</a:t>
+            </a:r>
+            <a:endParaRPr lang="en-US" sz="1350" dirty="0"/>
+          </a:p>
+          <a:p>
+            <a:pPr algn="r" marL="342900" indent="-342900">
+              <a:lnSpc>
+                <a:spcPct val="122000"/>
+              </a:lnSpc>
+              <a:spcAft>
+                <a:spcPts val="1000"/>
+              </a:spcAft>
+              <a:buSzPct val="100000"/>
+              <a:buChar char="•"/>
+            </a:pPr>
+            <a:r>
+              <a:rPr lang="en-US" sz="1350" dirty="0">
+                <a:solidFill>
+                  <a:srgbClr val="364239"/>
+                </a:solidFill>
+                <a:latin typeface="Arial" pitchFamily="34" charset="0"/>
+                <a:ea typeface="Arial" pitchFamily="34" charset="-122"/>
+                <a:cs typeface="Arial" pitchFamily="34" charset="-120"/>
+              </a:rPr>
+              <a:t>تركيبة مصمَّمة لمشكلة محددة: البق الدقيقي، واخضرار الحمضيات (HLB)، والنيماتودا.</a:t>
+            </a:r>
+            <a:endParaRPr lang="en-US" sz="1350" dirty="0"/>
+          </a:p>
+        </p:txBody>
+      </p:sp>
+      <p:sp>
+        <p:nvSpPr>
+          <p:cNvPr id="6" name="Text 4"/>
+          <p:cNvSpPr txBox="1"/>
+          <p:nvPr/>
+        </p:nvSpPr>
+        <p:spPr>
+          <a:xfrm>
+            <a:off x="6370168" y="1783080"/>
+            <a:ext cx="5227168" cy="411480"/>
+          </a:xfrm>
+          <a:prstGeom prst="rect">
+            <a:avLst/>
+          </a:prstGeom>
+          <a:noFill/>
+          <a:ln/>
+        </p:spPr>
+        <p:txBody>
+          <a:bodyPr wrap="square" lIns="0" tIns="0" rIns="0" bIns="0" rtlCol="0" anchor="ctr"/>
+          <a:lstStyle/>
+          <a:p>
+            <a:pPr rtl="1" algn="r" indent="0" marL="0">
+              <a:buNone/>
+            </a:pPr>
+            <a:r>
+              <a:rPr lang="en-US" sz="1600" b="1" dirty="0">
+                <a:solidFill>
+                  <a:srgbClr val="2C6E49"/>
+                </a:solidFill>
+                <a:latin typeface="Arial" pitchFamily="34" charset="0"/>
+                <a:ea typeface="Arial" pitchFamily="34" charset="-122"/>
+                <a:cs typeface="Arial" pitchFamily="34" charset="-120"/>
+              </a:rPr>
+              <a:t>Paulownia ALTIFOLIA® — شجرة المناطق الحارة</a:t>
+            </a:r>
+            <a:endParaRPr lang="en-US" sz="1600" dirty="0"/>
+          </a:p>
+        </p:txBody>
+      </p:sp>
+      <p:sp>
+        <p:nvSpPr>
+          <p:cNvPr id="7" name="Text 5"/>
+          <p:cNvSpPr txBox="1"/>
+          <p:nvPr/>
+        </p:nvSpPr>
+        <p:spPr>
+          <a:xfrm>
+            <a:off x="6370168" y="2286000"/>
+            <a:ext cx="5227168" cy="2468880"/>
+          </a:xfrm>
+          <a:prstGeom prst="rect">
+            <a:avLst/>
+          </a:prstGeom>
+          <a:noFill/>
+          <a:ln/>
+        </p:spPr>
+        <p:txBody>
+          <a:bodyPr wrap="square" lIns="0" tIns="0" rIns="0" bIns="0" rtlCol="0" anchor="t"/>
+          <a:lstStyle/>
+          <a:p>
+            <a:pPr algn="r" marL="342900" indent="-342900">
+              <a:lnSpc>
+                <a:spcPct val="122000"/>
+              </a:lnSpc>
+              <a:spcAft>
+                <a:spcPts val="1000"/>
+              </a:spcAft>
+              <a:buSzPct val="100000"/>
+              <a:buChar char="•"/>
+            </a:pPr>
+            <a:r>
+              <a:rPr lang="en-US" sz="1350" dirty="0">
+                <a:solidFill>
+                  <a:srgbClr val="364239"/>
+                </a:solidFill>
+                <a:latin typeface="Arial" pitchFamily="34" charset="0"/>
+                <a:ea typeface="Arial" pitchFamily="34" charset="-122"/>
+                <a:cs typeface="Arial" pitchFamily="34" charset="-120"/>
+              </a:rPr>
+              <a:t>من 13 إلى 15 متراً خلال ست إلى ثماني سنوات، بجذع كبير القطر.</a:t>
+            </a:r>
+            <a:endParaRPr lang="en-US" sz="1350" dirty="0"/>
+          </a:p>
+          <a:p>
+            <a:pPr algn="r" marL="342900" indent="-342900">
+              <a:lnSpc>
+                <a:spcPct val="122000"/>
+              </a:lnSpc>
+              <a:spcAft>
+                <a:spcPts val="1000"/>
+              </a:spcAft>
+              <a:buSzPct val="100000"/>
+              <a:buChar char="•"/>
+            </a:pPr>
+            <a:r>
+              <a:rPr lang="en-US" sz="1350" dirty="0">
+                <a:solidFill>
+                  <a:srgbClr val="364239"/>
+                </a:solidFill>
+                <a:latin typeface="Arial" pitchFamily="34" charset="0"/>
+                <a:ea typeface="Arial" pitchFamily="34" charset="-122"/>
+                <a:cs typeface="Arial" pitchFamily="34" charset="-120"/>
+              </a:rPr>
+              <a:t>مع 100 غرام من EVERGREEN® لكل شتلة، تنخفض حاجة الري بنسبة 50 %.</a:t>
+            </a:r>
+            <a:endParaRPr lang="en-US" sz="1350" dirty="0"/>
+          </a:p>
+          <a:p>
+            <a:pPr algn="r" marL="342900" indent="-342900">
+              <a:lnSpc>
+                <a:spcPct val="122000"/>
+              </a:lnSpc>
+              <a:spcAft>
+                <a:spcPts val="1000"/>
+              </a:spcAft>
+              <a:buSzPct val="100000"/>
+              <a:buChar char="•"/>
+            </a:pPr>
+            <a:r>
+              <a:rPr lang="en-US" sz="1350" dirty="0">
+                <a:solidFill>
+                  <a:srgbClr val="364239"/>
+                </a:solidFill>
+                <a:latin typeface="Arial" pitchFamily="34" charset="0"/>
+                <a:ea typeface="Arial" pitchFamily="34" charset="-122"/>
+                <a:cs typeface="Arial" pitchFamily="34" charset="-120"/>
+              </a:rPr>
+              <a:t>تتحمّل من −25 إلى +45 درجة مئوية، ولا يشتعل خشبها قبل 426 درجة.</a:t>
+            </a:r>
+            <a:endParaRPr lang="en-US" sz="1350" dirty="0"/>
+          </a:p>
+          <a:p>
+            <a:pPr algn="r" marL="342900" indent="-342900">
+              <a:lnSpc>
+                <a:spcPct val="122000"/>
+              </a:lnSpc>
+              <a:spcAft>
+                <a:spcPts val="1000"/>
+              </a:spcAft>
+              <a:buSzPct val="100000"/>
+              <a:buChar char="•"/>
+            </a:pPr>
+            <a:r>
+              <a:rPr lang="en-US" sz="1350" dirty="0">
+                <a:solidFill>
+                  <a:srgbClr val="364239"/>
+                </a:solidFill>
+                <a:latin typeface="Arial" pitchFamily="34" charset="0"/>
+                <a:ea typeface="Arial" pitchFamily="34" charset="-122"/>
+                <a:cs typeface="Arial" pitchFamily="34" charset="-120"/>
+              </a:rPr>
+              <a:t>مصدّ للرياح، وحماية للتربة من التعرية، و400 إلى 700 كغ من العسل للهكتار.</a:t>
+            </a:r>
+            <a:endParaRPr lang="en-US" sz="1350" dirty="0"/>
+          </a:p>
+        </p:txBody>
+      </p:sp>
+      <p:sp>
+        <p:nvSpPr>
+          <p:cNvPr id="8" name="Shape 6"/>
+          <p:cNvSpPr/>
+          <p:nvPr/>
+        </p:nvSpPr>
+        <p:spPr>
+          <a:xfrm>
+            <a:off x="594360" y="4846320"/>
+            <a:ext cx="11002975" cy="960120"/>
+          </a:xfrm>
+          <a:prstGeom prst="roundRect">
+            <a:avLst>
+              <a:gd name="adj" fmla="val 7619"/>
+            </a:avLst>
+          </a:prstGeom>
+          <a:solidFill>
+            <a:srgbClr val="F2F1E8"/>
+          </a:solidFill>
+          <a:ln w="9525">
+            <a:solidFill>
+              <a:srgbClr val="E0DFD0"/>
+            </a:solidFill>
+            <a:prstDash val="solid"/>
+          </a:ln>
+        </p:spPr>
+      </p:sp>
+      <p:sp>
+        <p:nvSpPr>
+          <p:cNvPr id="9" name="Text 7"/>
+          <p:cNvSpPr txBox="1"/>
+          <p:nvPr/>
+        </p:nvSpPr>
+        <p:spPr>
+          <a:xfrm>
+            <a:off x="822960" y="4983480"/>
+            <a:ext cx="10545775" cy="713232"/>
+          </a:xfrm>
+          <a:prstGeom prst="rect">
+            <a:avLst/>
+          </a:prstGeom>
+          <a:noFill/>
+          <a:ln/>
+        </p:spPr>
+        <p:txBody>
+          <a:bodyPr wrap="square" lIns="0" tIns="0" rIns="0" bIns="0" rtlCol="0" anchor="t"/>
+          <a:lstStyle/>
+          <a:p>
+            <a:pPr rtl="1" algn="r" indent="0" marL="0">
+              <a:lnSpc>
+                <a:spcPct val="118000"/>
+              </a:lnSpc>
+              <a:buNone/>
+            </a:pPr>
+            <a:r>
+              <a:rPr lang="en-US" sz="1100" dirty="0">
+                <a:solidFill>
+                  <a:srgbClr val="6F7D71"/>
+                </a:solidFill>
+                <a:latin typeface="Arial" pitchFamily="34" charset="0"/>
+                <a:ea typeface="Arial" pitchFamily="34" charset="-122"/>
+                <a:cs typeface="Arial" pitchFamily="34" charset="-120"/>
+              </a:rPr>
+              <a:t>تُسلَّم الشتلات في أصص (25 إلى 30 سم)، معتمدة خالية من الأمراض، وتُستبدل بالضمان عند تلفها. أول قطع في نهاية السنة السادسة، ويُقدَّر الخشب بنحو 400 إلى 450 يورو للمتر المكعب.</a:t>
+            </a:r>
+            <a:endParaRPr lang="en-US" sz="1100" dirty="0"/>
+          </a:p>
+        </p:txBody>
+      </p:sp>
+      <p:sp>
+        <p:nvSpPr>
+          <p:cNvPr id="10" name="Text 8"/>
+          <p:cNvSpPr txBox="1"/>
+          <p:nvPr/>
+        </p:nvSpPr>
+        <p:spPr>
+          <a:xfrm>
+            <a:off x="502920" y="6382512"/>
+            <a:ext cx="8229600" cy="274320"/>
+          </a:xfrm>
+          <a:prstGeom prst="rect">
+            <a:avLst/>
+          </a:prstGeom>
+          <a:noFill/>
+          <a:ln/>
+        </p:spPr>
+        <p:txBody>
+          <a:bodyPr wrap="square" lIns="0" tIns="0" rIns="0" bIns="0" rtlCol="0" anchor="ctr"/>
+          <a:lstStyle/>
+          <a:p>
+            <a:pPr rtl="1" algn="r" indent="0" marL="0">
+              <a:buNone/>
+            </a:pPr>
+            <a:r>
+              <a:rPr lang="en-US" sz="950" dirty="0">
+                <a:solidFill>
+                  <a:srgbClr val="6F7D71">
+                    <a:alpha val="80000"/>
+                  </a:srgbClr>
+                </a:solidFill>
+                <a:latin typeface="Arial" pitchFamily="34" charset="0"/>
+                <a:ea typeface="Arial" pitchFamily="34" charset="-122"/>
+                <a:cs typeface="Arial" pitchFamily="34" charset="-120"/>
+              </a:rPr>
+              <a:t>Green Solutions · ملف السوق الزراعية الأردنية</a:t>
+            </a:r>
+            <a:endParaRPr lang="en-US" sz="950" dirty="0"/>
+          </a:p>
+        </p:txBody>
+      </p:sp>
+      <p:sp>
+        <p:nvSpPr>
+          <p:cNvPr id="11" name="Text 9"/>
+          <p:cNvSpPr txBox="1"/>
+          <p:nvPr/>
+        </p:nvSpPr>
+        <p:spPr>
+          <a:xfrm>
+            <a:off x="11140135" y="6382512"/>
+            <a:ext cx="548640" cy="274320"/>
+          </a:xfrm>
+          <a:prstGeom prst="rect">
+            <a:avLst/>
+          </a:prstGeom>
+          <a:noFill/>
+          <a:ln/>
+        </p:spPr>
+        <p:txBody>
+          <a:bodyPr wrap="square" lIns="0" tIns="0" rIns="0" bIns="0" rtlCol="0" anchor="ctr"/>
+          <a:lstStyle/>
+          <a:p>
+            <a:pPr rtl="1" algn="r" indent="0" marL="0">
+              <a:buNone/>
+            </a:pPr>
+            <a:r>
+              <a:rPr lang="en-US" sz="950" dirty="0">
+                <a:solidFill>
+                  <a:srgbClr val="6F7D71">
+                    <a:alpha val="80000"/>
+                  </a:srgbClr>
+                </a:solidFill>
+                <a:latin typeface="Arial" pitchFamily="34" charset="0"/>
+                <a:ea typeface="Arial" pitchFamily="34" charset="-122"/>
+                <a:cs typeface="Arial" pitchFamily="34" charset="-120"/>
+              </a:rPr>
+              <a:t>10</a:t>
+            </a:r>
+            <a:endParaRPr lang="en-US" sz="950" dirty="0"/>
+          </a:p>
+        </p:txBody>
+      </p:sp>
+    </p:spTree>
+  </p:cSld>
+  <p:clrMapOvr>
+    <a:masterClrMapping/>
+  </p:clrMapOvr>
+</p:sld>
+</file>
+
+<file path=ppt/slides/slide12.xml><?xml version="1.0" encoding="utf-8"?>
+<p:sld xmlns:a="http://schemas.openxmlformats.org/drawingml/2006/main" xmlns:r="http://schemas.openxmlformats.org/officeDocument/2006/relationships" xmlns:p="http://schemas.openxmlformats.org/presentationml/2006/main">
+  <p:cSld name="Slide 12">
+    <p:bg>
+      <p:bgPr>
+        <a:solidFill>
+          <a:srgbClr val="FCFAF5"/>
+        </a:solidFill>
+      </p:bgPr>
+    </p:bg>
+    <p:spTree>
+      <p:nvGrpSpPr>
+        <p:cNvPr id="1" name=""/>
+        <p:cNvGrpSpPr/>
+        <p:nvPr/>
+      </p:nvGrpSpPr>
+      <p:grpSpPr>
+        <a:xfrm>
+          <a:off x="0" y="0"/>
+          <a:ext cx="0" cy="0"/>
+          <a:chOff x="0" y="0"/>
+          <a:chExt cx="0" cy="0"/>
+        </a:xfrm>
+      </p:grpSpPr>
+      <p:sp>
+        <p:nvSpPr>
+          <p:cNvPr id="2" name="Text 0"/>
+          <p:cNvSpPr txBox="1"/>
+          <p:nvPr/>
+        </p:nvSpPr>
+        <p:spPr>
+          <a:xfrm>
+            <a:off x="594360" y="411480"/>
+            <a:ext cx="10515600" cy="274320"/>
+          </a:xfrm>
+          <a:prstGeom prst="rect">
+            <a:avLst/>
+          </a:prstGeom>
+          <a:noFill/>
+          <a:ln/>
+        </p:spPr>
+        <p:txBody>
+          <a:bodyPr wrap="square" lIns="0" tIns="0" rIns="0" bIns="0" rtlCol="0" anchor="ctr"/>
+          <a:lstStyle/>
+          <a:p>
+            <a:pPr rtl="1" algn="r" indent="0" marL="0">
+              <a:buNone/>
+            </a:pPr>
+            <a:r>
+              <a:rPr lang="en-US" sz="1150" b="1" spc="200" kern="0" dirty="0">
+                <a:solidFill>
+                  <a:srgbClr val="D9A441"/>
+                </a:solidFill>
+                <a:latin typeface="Arial" pitchFamily="34" charset="0"/>
+                <a:ea typeface="Arial" pitchFamily="34" charset="-122"/>
+                <a:cs typeface="Arial" pitchFamily="34" charset="-120"/>
+              </a:rPr>
+              <a:t>أحجام تقديرية</a:t>
+            </a:r>
+            <a:endParaRPr lang="en-US" sz="1150" dirty="0"/>
+          </a:p>
+        </p:txBody>
+      </p:sp>
+      <p:sp>
+        <p:nvSpPr>
+          <p:cNvPr id="3" name="Text 1"/>
+          <p:cNvSpPr txBox="1"/>
+          <p:nvPr/>
+        </p:nvSpPr>
+        <p:spPr>
+          <a:xfrm>
+            <a:off x="594360" y="731520"/>
+            <a:ext cx="10881360" cy="731520"/>
+          </a:xfrm>
+          <a:prstGeom prst="rect">
+            <a:avLst/>
+          </a:prstGeom>
+          <a:noFill/>
+          <a:ln/>
+        </p:spPr>
+        <p:txBody>
+          <a:bodyPr wrap="square" lIns="0" tIns="0" rIns="0" bIns="0" rtlCol="0" anchor="ctr"/>
+          <a:lstStyle/>
+          <a:p>
+            <a:pPr rtl="1" algn="r" indent="0" marL="0">
+              <a:buNone/>
+            </a:pPr>
+            <a:r>
+              <a:rPr lang="en-US" sz="3000" b="1" dirty="0">
+                <a:solidFill>
+                  <a:srgbClr val="16412B"/>
+                </a:solidFill>
+                <a:latin typeface="Arial" pitchFamily="34" charset="0"/>
+                <a:ea typeface="Arial" pitchFamily="34" charset="-122"/>
+                <a:cs typeface="Arial" pitchFamily="34" charset="-120"/>
+              </a:rPr>
+              <a:t>توفير المياه المتوقع حسب أسلوب الري</a:t>
+            </a:r>
+            <a:endParaRPr lang="en-US" sz="3000" dirty="0"/>
+          </a:p>
+        </p:txBody>
+      </p:sp>
+      <p:graphicFrame>
+        <p:nvGraphicFramePr>
+          <p:cNvPr id="4" name="Chart 0" descr=""/>
+          <p:cNvGraphicFramePr/>
+          <p:nvPr/>
+        </p:nvGraphicFramePr>
+        <p:xfrm>
+          <a:off x="594360" y="1783080"/>
+          <a:ext cx="7360920" cy="3977640"/>
+        </p:xfrm>
+        <a:graphic xmlns:a="http://schemas.openxmlformats.org/drawingml/2006/main">
+          <a:graphicData uri="http://schemas.openxmlformats.org/drawingml/2006/chart">
+            <c:chart xmlns:c="http://schemas.openxmlformats.org/drawingml/2006/chart" r:id="rId1"/>
+          </a:graphicData>
+        </a:graphic>
+      </p:graphicFrame>
+      <p:sp>
+        <p:nvSpPr>
+          <p:cNvPr id="5" name="Shape 2"/>
+          <p:cNvSpPr/>
+          <p:nvPr/>
+        </p:nvSpPr>
+        <p:spPr>
+          <a:xfrm>
+            <a:off x="8275320" y="1783080"/>
+            <a:ext cx="3291840" cy="3977640"/>
+          </a:xfrm>
+          <a:prstGeom prst="roundRect">
+            <a:avLst>
+              <a:gd name="adj" fmla="val 2778"/>
+            </a:avLst>
+          </a:prstGeom>
+          <a:solidFill>
+            <a:srgbClr val="F2F1E8"/>
+          </a:solidFill>
+          <a:ln w="9525">
+            <a:solidFill>
+              <a:srgbClr val="E0DFD0"/>
+            </a:solidFill>
+            <a:prstDash val="solid"/>
+          </a:ln>
+        </p:spPr>
+      </p:sp>
+      <p:sp>
+        <p:nvSpPr>
+          <p:cNvPr id="6" name="Text 3"/>
+          <p:cNvSpPr txBox="1"/>
+          <p:nvPr/>
+        </p:nvSpPr>
+        <p:spPr>
+          <a:xfrm>
+            <a:off x="8503920" y="2011680"/>
+            <a:ext cx="2834640" cy="457200"/>
+          </a:xfrm>
+          <a:prstGeom prst="rect">
+            <a:avLst/>
+          </a:prstGeom>
+          <a:noFill/>
+          <a:ln/>
+        </p:spPr>
+        <p:txBody>
+          <a:bodyPr wrap="square" lIns="0" tIns="0" rIns="0" bIns="0" rtlCol="0" anchor="ctr"/>
+          <a:lstStyle/>
+          <a:p>
+            <a:pPr rtl="1" algn="r" indent="0" marL="0">
+              <a:buNone/>
+            </a:pPr>
+            <a:r>
+              <a:rPr lang="en-US" sz="1300" b="1" dirty="0">
+                <a:solidFill>
+                  <a:srgbClr val="2C6E49"/>
+                </a:solidFill>
+                <a:latin typeface="Arial" pitchFamily="34" charset="0"/>
+                <a:ea typeface="Arial" pitchFamily="34" charset="-122"/>
+                <a:cs typeface="Arial" pitchFamily="34" charset="-120"/>
+              </a:rPr>
+              <a:t>تُقرأ بحذر</a:t>
+            </a:r>
+            <a:endParaRPr lang="en-US" sz="1300" dirty="0"/>
+          </a:p>
+        </p:txBody>
+      </p:sp>
+      <p:sp>
+        <p:nvSpPr>
+          <p:cNvPr id="7" name="Text 4"/>
+          <p:cNvSpPr txBox="1"/>
+          <p:nvPr/>
+        </p:nvSpPr>
+        <p:spPr>
+          <a:xfrm>
+            <a:off x="8503920" y="2560320"/>
+            <a:ext cx="2834640" cy="3017520"/>
+          </a:xfrm>
+          <a:prstGeom prst="rect">
+            <a:avLst/>
+          </a:prstGeom>
+          <a:noFill/>
+          <a:ln/>
+        </p:spPr>
+        <p:txBody>
+          <a:bodyPr wrap="square" lIns="0" tIns="0" rIns="0" bIns="0" rtlCol="0" anchor="t"/>
+          <a:lstStyle/>
+          <a:p>
+            <a:pPr rtl="1" algn="r" indent="0" marL="0">
+              <a:lnSpc>
+                <a:spcPct val="125000"/>
+              </a:lnSpc>
+              <a:buNone/>
+            </a:pPr>
+            <a:r>
+              <a:rPr lang="en-US" sz="1200" dirty="0">
+                <a:solidFill>
+                  <a:srgbClr val="364239"/>
+                </a:solidFill>
+                <a:latin typeface="Arial" pitchFamily="34" charset="0"/>
+                <a:ea typeface="Arial" pitchFamily="34" charset="-122"/>
+                <a:cs typeface="Arial" pitchFamily="34" charset="-120"/>
+              </a:rPr>
+              <a:t>هذه النطاقات تقديرية استرشادية، مبنية على المكاسب الموثقة لموادنا المحتفظة بالماء.</a:t>
+            </a:r>
+            <a:endParaRPr lang="en-US" sz="1200" dirty="0"/>
+          </a:p>
+          <a:p>
+            <a:pPr rtl="1" algn="r" indent="0" marL="0">
+              <a:lnSpc>
+                <a:spcPct val="125000"/>
+              </a:lnSpc>
+              <a:buNone/>
+            </a:pPr>
+            <a:endParaRPr lang="en-US" sz="1200" dirty="0"/>
+          </a:p>
+          <a:p>
+            <a:pPr rtl="1" algn="r" indent="0" marL="0">
+              <a:lnSpc>
+                <a:spcPct val="125000"/>
+              </a:lnSpc>
+              <a:buNone/>
+            </a:pPr>
+            <a:r>
+              <a:rPr lang="en-US" sz="1200" dirty="0">
+                <a:solidFill>
+                  <a:srgbClr val="364239"/>
+                </a:solidFill>
+                <a:latin typeface="Arial" pitchFamily="34" charset="0"/>
+                <a:ea typeface="Arial" pitchFamily="34" charset="-122"/>
+                <a:cs typeface="Arial" pitchFamily="34" charset="-120"/>
+              </a:rPr>
+              <a:t>النتيجة الفعلية تتوقف على التربة والمناخ والمحصول. الأرقام تعطي حجماً تقريبياً لا أكثر، وهي لا تشكّل بأي حال قيمة مضمونة أو تعاقدية أو مطلقة.</a:t>
+            </a:r>
+            <a:endParaRPr lang="en-US" sz="1200" dirty="0"/>
+          </a:p>
+        </p:txBody>
+      </p:sp>
+      <p:sp>
+        <p:nvSpPr>
+          <p:cNvPr id="8" name="Text 5"/>
+          <p:cNvSpPr txBox="1"/>
+          <p:nvPr/>
+        </p:nvSpPr>
+        <p:spPr>
+          <a:xfrm>
+            <a:off x="502920" y="6382512"/>
+            <a:ext cx="8229600" cy="274320"/>
+          </a:xfrm>
+          <a:prstGeom prst="rect">
+            <a:avLst/>
+          </a:prstGeom>
+          <a:noFill/>
+          <a:ln/>
+        </p:spPr>
+        <p:txBody>
+          <a:bodyPr wrap="square" lIns="0" tIns="0" rIns="0" bIns="0" rtlCol="0" anchor="ctr"/>
+          <a:lstStyle/>
+          <a:p>
+            <a:pPr rtl="1" algn="r" indent="0" marL="0">
+              <a:buNone/>
+            </a:pPr>
+            <a:r>
+              <a:rPr lang="en-US" sz="950" dirty="0">
+                <a:solidFill>
+                  <a:srgbClr val="6F7D71">
+                    <a:alpha val="80000"/>
+                  </a:srgbClr>
+                </a:solidFill>
+                <a:latin typeface="Arial" pitchFamily="34" charset="0"/>
+                <a:ea typeface="Arial" pitchFamily="34" charset="-122"/>
+                <a:cs typeface="Arial" pitchFamily="34" charset="-120"/>
+              </a:rPr>
+              <a:t>Green Solutions · ملف السوق الزراعية الأردنية</a:t>
+            </a:r>
+            <a:endParaRPr lang="en-US" sz="950" dirty="0"/>
+          </a:p>
+        </p:txBody>
+      </p:sp>
+      <p:sp>
+        <p:nvSpPr>
+          <p:cNvPr id="9" name="Text 6"/>
+          <p:cNvSpPr txBox="1"/>
+          <p:nvPr/>
+        </p:nvSpPr>
+        <p:spPr>
+          <a:xfrm>
+            <a:off x="11140135" y="6382512"/>
+            <a:ext cx="548640" cy="274320"/>
+          </a:xfrm>
+          <a:prstGeom prst="rect">
+            <a:avLst/>
+          </a:prstGeom>
+          <a:noFill/>
+          <a:ln/>
+        </p:spPr>
+        <p:txBody>
+          <a:bodyPr wrap="square" lIns="0" tIns="0" rIns="0" bIns="0" rtlCol="0" anchor="ctr"/>
+          <a:lstStyle/>
+          <a:p>
+            <a:pPr rtl="1" algn="r" indent="0" marL="0">
+              <a:buNone/>
+            </a:pPr>
+            <a:r>
+              <a:rPr lang="en-US" sz="950" dirty="0">
+                <a:solidFill>
+                  <a:srgbClr val="6F7D71">
+                    <a:alpha val="80000"/>
+                  </a:srgbClr>
+                </a:solidFill>
+                <a:latin typeface="Arial" pitchFamily="34" charset="0"/>
+                <a:ea typeface="Arial" pitchFamily="34" charset="-122"/>
+                <a:cs typeface="Arial" pitchFamily="34" charset="-120"/>
+              </a:rPr>
+              <a:t>11</a:t>
+            </a:r>
+            <a:endParaRPr lang="en-US" sz="950" dirty="0"/>
+          </a:p>
+        </p:txBody>
+      </p:sp>
+    </p:spTree>
+  </p:cSld>
+  <p:clrMapOvr>
+    <a:masterClrMapping/>
+  </p:clrMapOvr>
+</p:sld>
+</file>
+
+<file path=ppt/slides/slide13.xml><?xml version="1.0" encoding="utf-8"?>
+<p:sld xmlns:a="http://schemas.openxmlformats.org/drawingml/2006/main" xmlns:r="http://schemas.openxmlformats.org/officeDocument/2006/relationships" xmlns:p="http://schemas.openxmlformats.org/presentationml/2006/main">
+  <p:cSld name="Slide 13">
+    <p:bg>
+      <p:bgPr>
+        <a:solidFill>
+          <a:srgbClr val="FCFAF5"/>
+        </a:solidFill>
+      </p:bgPr>
+    </p:bg>
+    <p:spTree>
+      <p:nvGrpSpPr>
+        <p:cNvPr id="1" name=""/>
+        <p:cNvGrpSpPr/>
+        <p:nvPr/>
+      </p:nvGrpSpPr>
+      <p:grpSpPr>
+        <a:xfrm>
+          <a:off x="0" y="0"/>
+          <a:ext cx="0" cy="0"/>
+          <a:chOff x="0" y="0"/>
+          <a:chExt cx="0" cy="0"/>
+        </a:xfrm>
+      </p:grpSpPr>
+      <p:sp>
+        <p:nvSpPr>
+          <p:cNvPr id="2" name="Text 0"/>
+          <p:cNvSpPr txBox="1"/>
+          <p:nvPr/>
+        </p:nvSpPr>
+        <p:spPr>
+          <a:xfrm>
+            <a:off x="594360" y="411480"/>
+            <a:ext cx="10515600" cy="274320"/>
+          </a:xfrm>
+          <a:prstGeom prst="rect">
+            <a:avLst/>
+          </a:prstGeom>
+          <a:noFill/>
+          <a:ln/>
+        </p:spPr>
+        <p:txBody>
+          <a:bodyPr wrap="square" lIns="0" tIns="0" rIns="0" bIns="0" rtlCol="0" anchor="ctr"/>
+          <a:lstStyle/>
+          <a:p>
+            <a:pPr rtl="1" algn="r" indent="0" marL="0">
+              <a:buNone/>
+            </a:pPr>
+            <a:r>
+              <a:rPr lang="en-US" sz="1150" b="1" spc="200" kern="0" dirty="0">
+                <a:solidFill>
+                  <a:srgbClr val="D9A441"/>
+                </a:solidFill>
+                <a:latin typeface="Arial" pitchFamily="34" charset="0"/>
+                <a:ea typeface="Arial" pitchFamily="34" charset="-122"/>
+                <a:cs typeface="Arial" pitchFamily="34" charset="-120"/>
+              </a:rPr>
+              <a:t>ثلاثة ميادين أولوية</a:t>
+            </a:r>
+            <a:endParaRPr lang="en-US" sz="1150" dirty="0"/>
+          </a:p>
+        </p:txBody>
+      </p:sp>
+      <p:sp>
+        <p:nvSpPr>
+          <p:cNvPr id="3" name="Text 1"/>
+          <p:cNvSpPr txBox="1"/>
+          <p:nvPr/>
+        </p:nvSpPr>
+        <p:spPr>
+          <a:xfrm>
+            <a:off x="594360" y="731520"/>
+            <a:ext cx="10881360" cy="731520"/>
+          </a:xfrm>
+          <a:prstGeom prst="rect">
+            <a:avLst/>
+          </a:prstGeom>
+          <a:noFill/>
+          <a:ln/>
+        </p:spPr>
+        <p:txBody>
+          <a:bodyPr wrap="square" lIns="0" tIns="0" rIns="0" bIns="0" rtlCol="0" anchor="ctr"/>
+          <a:lstStyle/>
+          <a:p>
+            <a:pPr rtl="1" algn="r" indent="0" marL="0">
+              <a:buNone/>
+            </a:pPr>
+            <a:r>
+              <a:rPr lang="en-US" sz="3000" b="1" dirty="0">
+                <a:solidFill>
+                  <a:srgbClr val="16412B"/>
+                </a:solidFill>
+                <a:latin typeface="Arial" pitchFamily="34" charset="0"/>
+                <a:ea typeface="Arial" pitchFamily="34" charset="-122"/>
+                <a:cs typeface="Arial" pitchFamily="34" charset="-120"/>
+              </a:rPr>
+              <a:t>أين تُجرى التجارب الأولى</a:t>
+            </a:r>
+            <a:endParaRPr lang="en-US" sz="3000" dirty="0"/>
+          </a:p>
+        </p:txBody>
+      </p:sp>
+      <p:sp>
+        <p:nvSpPr>
+          <p:cNvPr id="4" name="Shape 2"/>
+          <p:cNvSpPr/>
+          <p:nvPr/>
+        </p:nvSpPr>
+        <p:spPr>
+          <a:xfrm>
+            <a:off x="594360" y="1783080"/>
+            <a:ext cx="3472586" cy="4069080"/>
+          </a:xfrm>
+          <a:prstGeom prst="roundRect">
+            <a:avLst>
+              <a:gd name="adj" fmla="val 2633"/>
+            </a:avLst>
+          </a:prstGeom>
+          <a:solidFill>
+            <a:srgbClr val="F2F1E8"/>
+          </a:solidFill>
+          <a:ln w="9525">
+            <a:solidFill>
+              <a:srgbClr val="E0DFD0"/>
+            </a:solidFill>
+            <a:prstDash val="solid"/>
+          </a:ln>
+        </p:spPr>
+      </p:sp>
+      <p:pic>
+        <p:nvPicPr>
+          <p:cNvPr id="5" name="Image 0" descr="preencoded.png">    </p:cNvPr>
+          <p:cNvPicPr>
+            <a:picLocks noChangeAspect="1"/>
+          </p:cNvPicPr>
+          <p:nvPr/>
+        </p:nvPicPr>
+        <p:blipFill>
+          <a:blip r:embed="rId1"/>
+          <a:stretch>
+            <a:fillRect/>
+          </a:stretch>
+        </p:blipFill>
+        <p:spPr>
+          <a:xfrm>
+            <a:off x="594360" y="1783080"/>
+            <a:ext cx="3472586" cy="1691640"/>
+          </a:xfrm>
+          <a:prstGeom prst="rect">
+            <a:avLst/>
+          </a:prstGeom>
+        </p:spPr>
+      </p:pic>
+      <p:sp>
+        <p:nvSpPr>
+          <p:cNvPr id="6" name="Text 3"/>
+          <p:cNvSpPr txBox="1"/>
+          <p:nvPr/>
+        </p:nvSpPr>
+        <p:spPr>
+          <a:xfrm>
+            <a:off x="795528" y="3639312"/>
+            <a:ext cx="3070250" cy="384048"/>
+          </a:xfrm>
+          <a:prstGeom prst="rect">
+            <a:avLst/>
+          </a:prstGeom>
+          <a:noFill/>
+          <a:ln/>
+        </p:spPr>
+        <p:txBody>
+          <a:bodyPr wrap="square" lIns="0" tIns="0" rIns="0" bIns="0" rtlCol="0" anchor="ctr"/>
+          <a:lstStyle/>
+          <a:p>
+            <a:pPr rtl="1" algn="r" indent="0" marL="0">
+              <a:buNone/>
+            </a:pPr>
+            <a:r>
+              <a:rPr lang="en-US" sz="1500" b="1" dirty="0">
+                <a:solidFill>
+                  <a:srgbClr val="2C6E49"/>
+                </a:solidFill>
+                <a:latin typeface="Arial" pitchFamily="34" charset="0"/>
+                <a:ea typeface="Arial" pitchFamily="34" charset="-122"/>
+                <a:cs typeface="Arial" pitchFamily="34" charset="-120"/>
+              </a:rPr>
+              <a:t>وادي الأردن — الأغوار</a:t>
+            </a:r>
+            <a:endParaRPr lang="en-US" sz="1500" dirty="0"/>
+          </a:p>
+        </p:txBody>
+      </p:sp>
+      <p:sp>
+        <p:nvSpPr>
+          <p:cNvPr id="7" name="Text 4"/>
+          <p:cNvSpPr txBox="1"/>
+          <p:nvPr/>
+        </p:nvSpPr>
+        <p:spPr>
+          <a:xfrm>
+            <a:off x="795528" y="4041648"/>
+            <a:ext cx="3070250" cy="329184"/>
+          </a:xfrm>
+          <a:prstGeom prst="rect">
+            <a:avLst/>
+          </a:prstGeom>
+          <a:noFill/>
+          <a:ln/>
+        </p:spPr>
+        <p:txBody>
+          <a:bodyPr wrap="square" lIns="0" tIns="0" rIns="0" bIns="0" rtlCol="0" anchor="ctr"/>
+          <a:lstStyle/>
+          <a:p>
+            <a:pPr rtl="1" algn="r" indent="0" marL="0">
+              <a:buNone/>
+            </a:pPr>
+            <a:r>
+              <a:rPr lang="en-US" sz="1250" b="1" dirty="0">
+                <a:solidFill>
+                  <a:srgbClr val="9C6C12"/>
+                </a:solidFill>
+                <a:latin typeface="Arial" pitchFamily="34" charset="0"/>
+                <a:ea typeface="Arial" pitchFamily="34" charset="-122"/>
+                <a:cs typeface="Arial" pitchFamily="34" charset="-120"/>
+              </a:rPr>
+              <a:t>≈ 35 ألف هكتار مروية</a:t>
+            </a:r>
+            <a:endParaRPr lang="en-US" sz="1250" dirty="0"/>
+          </a:p>
+        </p:txBody>
+      </p:sp>
+      <p:sp>
+        <p:nvSpPr>
+          <p:cNvPr id="8" name="Text 5"/>
+          <p:cNvSpPr txBox="1"/>
+          <p:nvPr/>
+        </p:nvSpPr>
+        <p:spPr>
+          <a:xfrm>
+            <a:off x="795528" y="4407408"/>
+            <a:ext cx="3070250" cy="1280160"/>
+          </a:xfrm>
+          <a:prstGeom prst="rect">
+            <a:avLst/>
+          </a:prstGeom>
+          <a:noFill/>
+          <a:ln/>
+        </p:spPr>
+        <p:txBody>
+          <a:bodyPr wrap="square" lIns="0" tIns="0" rIns="0" bIns="0" rtlCol="0" anchor="t"/>
+          <a:lstStyle/>
+          <a:p>
+            <a:pPr algn="r" marL="342900" indent="-342900">
+              <a:lnSpc>
+                <a:spcPct val="116000"/>
+              </a:lnSpc>
+              <a:spcAft>
+                <a:spcPts val="700"/>
+              </a:spcAft>
+              <a:buSzPct val="100000"/>
+              <a:buChar char="•"/>
+            </a:pPr>
+            <a:r>
+              <a:rPr lang="en-US" sz="1150" dirty="0">
+                <a:solidFill>
+                  <a:srgbClr val="364239"/>
+                </a:solidFill>
+                <a:latin typeface="Arial" pitchFamily="34" charset="0"/>
+                <a:ea typeface="Arial" pitchFamily="34" charset="-122"/>
+                <a:cs typeface="Arial" pitchFamily="34" charset="-120"/>
+              </a:rPr>
+              <a:t>قلب الإنتاج التصديري الشتوي: خضار محمية ومكشوفة موجّهة إلى أسواق الخليج، معظمها مروي بالتنقيط.</a:t>
+            </a:r>
+            <a:endParaRPr lang="en-US" sz="1150" dirty="0"/>
+          </a:p>
+          <a:p>
+            <a:pPr algn="r" marL="342900" indent="-342900">
+              <a:lnSpc>
+                <a:spcPct val="116000"/>
+              </a:lnSpc>
+              <a:spcAft>
+                <a:spcPts val="700"/>
+              </a:spcAft>
+              <a:buSzPct val="100000"/>
+              <a:buChar char="•"/>
+            </a:pPr>
+            <a:r>
+              <a:rPr lang="en-US" sz="1150" dirty="0">
+                <a:solidFill>
+                  <a:srgbClr val="364239"/>
+                </a:solidFill>
+                <a:latin typeface="Arial" pitchFamily="34" charset="0"/>
+                <a:ea typeface="Arial" pitchFamily="34" charset="-122"/>
+                <a:cs typeface="Arial" pitchFamily="34" charset="-120"/>
+              </a:rPr>
+              <a:t>الزراعة دون مستوى سطح البحر بنحو 200 إلى 400 م، مع تبخّر مرتفع طوال الموسم.</a:t>
+            </a:r>
+            <a:endParaRPr lang="en-US" sz="1150" dirty="0"/>
+          </a:p>
+          <a:p>
+            <a:pPr algn="r" marL="342900" indent="-342900">
+              <a:lnSpc>
+                <a:spcPct val="116000"/>
+              </a:lnSpc>
+              <a:spcAft>
+                <a:spcPts val="700"/>
+              </a:spcAft>
+              <a:buSzPct val="100000"/>
+              <a:buChar char="•"/>
+            </a:pPr>
+            <a:r>
+              <a:rPr lang="en-US" sz="1150" dirty="0">
+                <a:solidFill>
+                  <a:srgbClr val="364239"/>
+                </a:solidFill>
+                <a:latin typeface="Arial" pitchFamily="34" charset="0"/>
+                <a:ea typeface="Arial" pitchFamily="34" charset="-122"/>
+                <a:cs typeface="Arial" pitchFamily="34" charset="-120"/>
+              </a:rPr>
+              <a:t>حصص مائية مقننة عبر قناة الملك عبدالله، وجزء متزايد منها مياه صرف معالجة.</a:t>
+            </a:r>
+            <a:endParaRPr lang="en-US" sz="1150" dirty="0"/>
+          </a:p>
+        </p:txBody>
+      </p:sp>
+      <p:sp>
+        <p:nvSpPr>
+          <p:cNvPr id="9" name="Shape 6"/>
+          <p:cNvSpPr/>
+          <p:nvPr/>
+        </p:nvSpPr>
+        <p:spPr>
+          <a:xfrm>
+            <a:off x="4359554" y="1783080"/>
+            <a:ext cx="3472586" cy="4069080"/>
+          </a:xfrm>
+          <a:prstGeom prst="roundRect">
+            <a:avLst>
+              <a:gd name="adj" fmla="val 2633"/>
+            </a:avLst>
+          </a:prstGeom>
+          <a:solidFill>
+            <a:srgbClr val="F2F1E8"/>
+          </a:solidFill>
+          <a:ln w="9525">
+            <a:solidFill>
+              <a:srgbClr val="E0DFD0"/>
+            </a:solidFill>
+            <a:prstDash val="solid"/>
+          </a:ln>
+        </p:spPr>
+      </p:sp>
+      <p:pic>
+        <p:nvPicPr>
+          <p:cNvPr id="10" name="Image 1" descr="preencoded.png">    </p:cNvPr>
+          <p:cNvPicPr>
+            <a:picLocks noChangeAspect="1"/>
+          </p:cNvPicPr>
+          <p:nvPr/>
+        </p:nvPicPr>
+        <p:blipFill>
+          <a:blip r:embed="rId2"/>
+          <a:stretch>
+            <a:fillRect/>
+          </a:stretch>
+        </p:blipFill>
+        <p:spPr>
+          <a:xfrm>
+            <a:off x="4359554" y="1783080"/>
+            <a:ext cx="3472586" cy="1691640"/>
+          </a:xfrm>
+          <a:prstGeom prst="rect">
+            <a:avLst/>
+          </a:prstGeom>
+        </p:spPr>
+      </p:pic>
+      <p:sp>
+        <p:nvSpPr>
+          <p:cNvPr id="11" name="Text 7"/>
+          <p:cNvSpPr txBox="1"/>
+          <p:nvPr/>
+        </p:nvSpPr>
+        <p:spPr>
+          <a:xfrm>
+            <a:off x="4560722" y="3639312"/>
+            <a:ext cx="3070250" cy="384048"/>
+          </a:xfrm>
+          <a:prstGeom prst="rect">
+            <a:avLst/>
+          </a:prstGeom>
+          <a:noFill/>
+          <a:ln/>
+        </p:spPr>
+        <p:txBody>
+          <a:bodyPr wrap="square" lIns="0" tIns="0" rIns="0" bIns="0" rtlCol="0" anchor="ctr"/>
+          <a:lstStyle/>
+          <a:p>
+            <a:pPr rtl="1" algn="r" indent="0" marL="0">
+              <a:buNone/>
+            </a:pPr>
+            <a:r>
+              <a:rPr lang="en-US" sz="1500" b="1" dirty="0">
+                <a:solidFill>
+                  <a:srgbClr val="2C6E49"/>
+                </a:solidFill>
+                <a:latin typeface="Arial" pitchFamily="34" charset="0"/>
+                <a:ea typeface="Arial" pitchFamily="34" charset="-122"/>
+                <a:cs typeface="Arial" pitchFamily="34" charset="-120"/>
+              </a:rPr>
+              <a:t>المرتفعات الشمالية</a:t>
+            </a:r>
+            <a:endParaRPr lang="en-US" sz="1500" dirty="0"/>
+          </a:p>
+        </p:txBody>
+      </p:sp>
+      <p:sp>
+        <p:nvSpPr>
+          <p:cNvPr id="12" name="Text 8"/>
+          <p:cNvSpPr txBox="1"/>
+          <p:nvPr/>
+        </p:nvSpPr>
+        <p:spPr>
+          <a:xfrm>
+            <a:off x="4560722" y="4041648"/>
+            <a:ext cx="3070250" cy="329184"/>
+          </a:xfrm>
+          <a:prstGeom prst="rect">
+            <a:avLst/>
+          </a:prstGeom>
+          <a:noFill/>
+          <a:ln/>
+        </p:spPr>
+        <p:txBody>
+          <a:bodyPr wrap="square" lIns="0" tIns="0" rIns="0" bIns="0" rtlCol="0" anchor="ctr"/>
+          <a:lstStyle/>
+          <a:p>
+            <a:pPr rtl="1" algn="r" indent="0" marL="0">
+              <a:buNone/>
+            </a:pPr>
+            <a:r>
+              <a:rPr lang="en-US" sz="1250" b="1" dirty="0">
+                <a:solidFill>
+                  <a:srgbClr val="9C6C12"/>
+                </a:solidFill>
+                <a:latin typeface="Arial" pitchFamily="34" charset="0"/>
+                <a:ea typeface="Arial" pitchFamily="34" charset="-122"/>
+                <a:cs typeface="Arial" pitchFamily="34" charset="-120"/>
+              </a:rPr>
+              <a:t>زيتون بعلي — إربد وعجلون وجرش</a:t>
+            </a:r>
+            <a:endParaRPr lang="en-US" sz="1250" dirty="0"/>
+          </a:p>
+        </p:txBody>
+      </p:sp>
+      <p:sp>
+        <p:nvSpPr>
+          <p:cNvPr id="13" name="Text 9"/>
+          <p:cNvSpPr txBox="1"/>
+          <p:nvPr/>
+        </p:nvSpPr>
+        <p:spPr>
+          <a:xfrm>
+            <a:off x="4560722" y="4407408"/>
+            <a:ext cx="3070250" cy="1280160"/>
+          </a:xfrm>
+          <a:prstGeom prst="rect">
+            <a:avLst/>
+          </a:prstGeom>
+          <a:noFill/>
+          <a:ln/>
+        </p:spPr>
+        <p:txBody>
+          <a:bodyPr wrap="square" lIns="0" tIns="0" rIns="0" bIns="0" rtlCol="0" anchor="t"/>
+          <a:lstStyle/>
+          <a:p>
+            <a:pPr algn="r" marL="342900" indent="-342900">
+              <a:lnSpc>
+                <a:spcPct val="116000"/>
+              </a:lnSpc>
+              <a:spcAft>
+                <a:spcPts val="700"/>
+              </a:spcAft>
+              <a:buSzPct val="100000"/>
+              <a:buChar char="•"/>
+            </a:pPr>
+            <a:r>
+              <a:rPr lang="en-US" sz="1150" dirty="0">
+                <a:solidFill>
+                  <a:srgbClr val="364239"/>
+                </a:solidFill>
+                <a:latin typeface="Arial" pitchFamily="34" charset="0"/>
+                <a:ea typeface="Arial" pitchFamily="34" charset="-122"/>
+                <a:cs typeface="Arial" pitchFamily="34" charset="-120"/>
+              </a:rPr>
+              <a:t>نحو نصف مساحة الزيتون في المملكة، وهي زراعة بعلية يتحدد إنتاجها بمطر الموسم مباشرة.</a:t>
+            </a:r>
+            <a:endParaRPr lang="en-US" sz="1150" dirty="0"/>
+          </a:p>
+          <a:p>
+            <a:pPr algn="r" marL="342900" indent="-342900">
+              <a:lnSpc>
+                <a:spcPct val="116000"/>
+              </a:lnSpc>
+              <a:spcAft>
+                <a:spcPts val="700"/>
+              </a:spcAft>
+              <a:buSzPct val="100000"/>
+              <a:buChar char="•"/>
+            </a:pPr>
+            <a:r>
+              <a:rPr lang="en-US" sz="1150" dirty="0">
+                <a:solidFill>
+                  <a:srgbClr val="364239"/>
+                </a:solidFill>
+                <a:latin typeface="Arial" pitchFamily="34" charset="0"/>
+                <a:ea typeface="Arial" pitchFamily="34" charset="-122"/>
+                <a:cs typeface="Arial" pitchFamily="34" charset="-120"/>
+              </a:rPr>
+              <a:t>أمطار بين 400 و600 مم سنوياً، لكنها متركزة في أشهر قليلة ومتفاوتة بين سنة وأخرى.</a:t>
+            </a:r>
+            <a:endParaRPr lang="en-US" sz="1150" dirty="0"/>
+          </a:p>
+          <a:p>
+            <a:pPr algn="r" marL="342900" indent="-342900">
+              <a:lnSpc>
+                <a:spcPct val="116000"/>
+              </a:lnSpc>
+              <a:spcAft>
+                <a:spcPts val="700"/>
+              </a:spcAft>
+              <a:buSzPct val="100000"/>
+              <a:buChar char="•"/>
+            </a:pPr>
+            <a:r>
+              <a:rPr lang="en-US" sz="1150" dirty="0">
+                <a:solidFill>
+                  <a:srgbClr val="364239"/>
+                </a:solidFill>
+                <a:latin typeface="Arial" pitchFamily="34" charset="0"/>
+                <a:ea typeface="Arial" pitchFamily="34" charset="-122"/>
+                <a:cs typeface="Arial" pitchFamily="34" charset="-120"/>
+              </a:rPr>
+              <a:t>الاحتفاظ بالماء في منطقة الجذور يمدّ أثر المطر إلى ما بعد توقّفه: هذا هو الرهان هنا.</a:t>
+            </a:r>
+            <a:endParaRPr lang="en-US" sz="1150" dirty="0"/>
+          </a:p>
+        </p:txBody>
+      </p:sp>
+      <p:sp>
+        <p:nvSpPr>
+          <p:cNvPr id="14" name="Shape 10"/>
+          <p:cNvSpPr/>
+          <p:nvPr/>
+        </p:nvSpPr>
+        <p:spPr>
+          <a:xfrm>
+            <a:off x="8124749" y="1783080"/>
+            <a:ext cx="3472586" cy="4069080"/>
+          </a:xfrm>
+          <a:prstGeom prst="roundRect">
+            <a:avLst>
+              <a:gd name="adj" fmla="val 2633"/>
+            </a:avLst>
+          </a:prstGeom>
+          <a:solidFill>
+            <a:srgbClr val="F2F1E8"/>
+          </a:solidFill>
+          <a:ln w="9525">
+            <a:solidFill>
+              <a:srgbClr val="E0DFD0"/>
+            </a:solidFill>
+            <a:prstDash val="solid"/>
+          </a:ln>
+        </p:spPr>
+      </p:sp>
+      <p:pic>
+        <p:nvPicPr>
+          <p:cNvPr id="15" name="Image 2" descr="preencoded.png">    </p:cNvPr>
+          <p:cNvPicPr>
+            <a:picLocks noChangeAspect="1"/>
+          </p:cNvPicPr>
+          <p:nvPr/>
+        </p:nvPicPr>
+        <p:blipFill>
+          <a:blip r:embed="rId3"/>
+          <a:stretch>
+            <a:fillRect/>
+          </a:stretch>
+        </p:blipFill>
+        <p:spPr>
+          <a:xfrm>
+            <a:off x="8124749" y="1783080"/>
+            <a:ext cx="3472586" cy="1691640"/>
+          </a:xfrm>
+          <a:prstGeom prst="rect">
+            <a:avLst/>
+          </a:prstGeom>
+        </p:spPr>
+      </p:pic>
+      <p:sp>
+        <p:nvSpPr>
+          <p:cNvPr id="16" name="Text 11"/>
+          <p:cNvSpPr txBox="1"/>
+          <p:nvPr/>
+        </p:nvSpPr>
+        <p:spPr>
+          <a:xfrm>
+            <a:off x="8325917" y="3639312"/>
+            <a:ext cx="3070250" cy="384048"/>
+          </a:xfrm>
+          <a:prstGeom prst="rect">
+            <a:avLst/>
+          </a:prstGeom>
+          <a:noFill/>
+          <a:ln/>
+        </p:spPr>
+        <p:txBody>
+          <a:bodyPr wrap="square" lIns="0" tIns="0" rIns="0" bIns="0" rtlCol="0" anchor="ctr"/>
+          <a:lstStyle/>
+          <a:p>
+            <a:pPr rtl="1" algn="r" indent="0" marL="0">
+              <a:buNone/>
+            </a:pPr>
+            <a:r>
+              <a:rPr lang="en-US" sz="1500" b="1" dirty="0">
+                <a:solidFill>
+                  <a:srgbClr val="2C6E49"/>
+                </a:solidFill>
+                <a:latin typeface="Arial" pitchFamily="34" charset="0"/>
+                <a:ea typeface="Arial" pitchFamily="34" charset="-122"/>
+                <a:cs typeface="Arial" pitchFamily="34" charset="-120"/>
+              </a:rPr>
+              <a:t>المفرق وحوض الأزرق</a:t>
+            </a:r>
+            <a:endParaRPr lang="en-US" sz="1500" dirty="0"/>
+          </a:p>
+        </p:txBody>
+      </p:sp>
+      <p:sp>
+        <p:nvSpPr>
+          <p:cNvPr id="17" name="Text 12"/>
+          <p:cNvSpPr txBox="1"/>
+          <p:nvPr/>
+        </p:nvSpPr>
+        <p:spPr>
+          <a:xfrm>
+            <a:off x="8325917" y="4041648"/>
+            <a:ext cx="3070250" cy="329184"/>
+          </a:xfrm>
+          <a:prstGeom prst="rect">
+            <a:avLst/>
+          </a:prstGeom>
+          <a:noFill/>
+          <a:ln/>
+        </p:spPr>
+        <p:txBody>
+          <a:bodyPr wrap="square" lIns="0" tIns="0" rIns="0" bIns="0" rtlCol="0" anchor="ctr"/>
+          <a:lstStyle/>
+          <a:p>
+            <a:pPr rtl="1" algn="r" indent="0" marL="0">
+              <a:buNone/>
+            </a:pPr>
+            <a:r>
+              <a:rPr lang="en-US" sz="1250" b="1" dirty="0">
+                <a:solidFill>
+                  <a:srgbClr val="9C6C12"/>
+                </a:solidFill>
+                <a:latin typeface="Arial" pitchFamily="34" charset="0"/>
+                <a:ea typeface="Arial" pitchFamily="34" charset="-122"/>
+                <a:cs typeface="Arial" pitchFamily="34" charset="-120"/>
+              </a:rPr>
+              <a:t>ضخ جوفي يقارب ضعف الحد الآمن</a:t>
+            </a:r>
+            <a:endParaRPr lang="en-US" sz="1250" dirty="0"/>
+          </a:p>
+        </p:txBody>
+      </p:sp>
+      <p:sp>
+        <p:nvSpPr>
+          <p:cNvPr id="18" name="Text 13"/>
+          <p:cNvSpPr txBox="1"/>
+          <p:nvPr/>
+        </p:nvSpPr>
+        <p:spPr>
+          <a:xfrm>
+            <a:off x="8325917" y="4407408"/>
+            <a:ext cx="3070250" cy="1280160"/>
+          </a:xfrm>
+          <a:prstGeom prst="rect">
+            <a:avLst/>
+          </a:prstGeom>
+          <a:noFill/>
+          <a:ln/>
+        </p:spPr>
+        <p:txBody>
+          <a:bodyPr wrap="square" lIns="0" tIns="0" rIns="0" bIns="0" rtlCol="0" anchor="t"/>
+          <a:lstStyle/>
+          <a:p>
+            <a:pPr algn="r" marL="342900" indent="-342900">
+              <a:lnSpc>
+                <a:spcPct val="116000"/>
+              </a:lnSpc>
+              <a:spcAft>
+                <a:spcPts val="700"/>
+              </a:spcAft>
+              <a:buSzPct val="100000"/>
+              <a:buChar char="•"/>
+            </a:pPr>
+            <a:r>
+              <a:rPr lang="en-US" sz="1150" dirty="0">
+                <a:solidFill>
+                  <a:srgbClr val="364239"/>
+                </a:solidFill>
+                <a:latin typeface="Arial" pitchFamily="34" charset="0"/>
+                <a:ea typeface="Arial" pitchFamily="34" charset="-122"/>
+                <a:cs typeface="Arial" pitchFamily="34" charset="-120"/>
+              </a:rPr>
+              <a:t>مزارع مروية بالكامل من الآبار: خضار مكشوفة وأشجار مثمرة وزيتون مروي في مناخ شبه صحراوي.</a:t>
+            </a:r>
+            <a:endParaRPr lang="en-US" sz="1150" dirty="0"/>
+          </a:p>
+          <a:p>
+            <a:pPr algn="r" marL="342900" indent="-342900">
+              <a:lnSpc>
+                <a:spcPct val="116000"/>
+              </a:lnSpc>
+              <a:spcAft>
+                <a:spcPts val="700"/>
+              </a:spcAft>
+              <a:buSzPct val="100000"/>
+              <a:buChar char="•"/>
+            </a:pPr>
+            <a:r>
+              <a:rPr lang="en-US" sz="1150" dirty="0">
+                <a:solidFill>
+                  <a:srgbClr val="364239"/>
+                </a:solidFill>
+                <a:latin typeface="Arial" pitchFamily="34" charset="0"/>
+                <a:ea typeface="Arial" pitchFamily="34" charset="-122"/>
+                <a:cs typeface="Arial" pitchFamily="34" charset="-120"/>
+              </a:rPr>
+              <a:t>قيود متزايدة على تراخيص الآبار وعلى حصص الضخ، ما يجعل كل متر مكعب موفَّر ذا قيمة مباشرة.</a:t>
+            </a:r>
+            <a:endParaRPr lang="en-US" sz="1150" dirty="0"/>
+          </a:p>
+          <a:p>
+            <a:pPr algn="r" marL="342900" indent="-342900">
+              <a:lnSpc>
+                <a:spcPct val="116000"/>
+              </a:lnSpc>
+              <a:spcAft>
+                <a:spcPts val="700"/>
+              </a:spcAft>
+              <a:buSzPct val="100000"/>
+              <a:buChar char="•"/>
+            </a:pPr>
+            <a:r>
+              <a:rPr lang="en-US" sz="1150" dirty="0">
+                <a:solidFill>
+                  <a:srgbClr val="364239"/>
+                </a:solidFill>
+                <a:latin typeface="Arial" pitchFamily="34" charset="0"/>
+                <a:ea typeface="Arial" pitchFamily="34" charset="-122"/>
+                <a:cs typeface="Arial" pitchFamily="34" charset="-120"/>
+              </a:rPr>
+              <a:t>ملوحة مياه الآبار في ارتفاع، وهو ما يستوجب مادة بوتاسية لا صوديومية في منطقة الجذور.</a:t>
+            </a:r>
+            <a:endParaRPr lang="en-US" sz="1150" dirty="0"/>
+          </a:p>
+        </p:txBody>
+      </p:sp>
+      <p:sp>
+        <p:nvSpPr>
+          <p:cNvPr id="19" name="Text 14"/>
+          <p:cNvSpPr txBox="1"/>
+          <p:nvPr/>
+        </p:nvSpPr>
+        <p:spPr>
+          <a:xfrm>
+            <a:off x="502920" y="6382512"/>
+            <a:ext cx="8229600" cy="274320"/>
+          </a:xfrm>
+          <a:prstGeom prst="rect">
+            <a:avLst/>
+          </a:prstGeom>
+          <a:noFill/>
+          <a:ln/>
+        </p:spPr>
+        <p:txBody>
+          <a:bodyPr wrap="square" lIns="0" tIns="0" rIns="0" bIns="0" rtlCol="0" anchor="ctr"/>
+          <a:lstStyle/>
+          <a:p>
+            <a:pPr rtl="1" algn="r" indent="0" marL="0">
+              <a:buNone/>
+            </a:pPr>
+            <a:r>
+              <a:rPr lang="en-US" sz="950" dirty="0">
+                <a:solidFill>
+                  <a:srgbClr val="6F7D71">
+                    <a:alpha val="80000"/>
+                  </a:srgbClr>
+                </a:solidFill>
+                <a:latin typeface="Arial" pitchFamily="34" charset="0"/>
+                <a:ea typeface="Arial" pitchFamily="34" charset="-122"/>
+                <a:cs typeface="Arial" pitchFamily="34" charset="-120"/>
+              </a:rPr>
+              <a:t>Green Solutions · ملف السوق الزراعية الأردنية</a:t>
+            </a:r>
+            <a:endParaRPr lang="en-US" sz="950" dirty="0"/>
+          </a:p>
+        </p:txBody>
+      </p:sp>
+      <p:sp>
+        <p:nvSpPr>
+          <p:cNvPr id="20" name="Text 15"/>
+          <p:cNvSpPr txBox="1"/>
+          <p:nvPr/>
+        </p:nvSpPr>
+        <p:spPr>
+          <a:xfrm>
+            <a:off x="11140135" y="6382512"/>
+            <a:ext cx="548640" cy="274320"/>
+          </a:xfrm>
+          <a:prstGeom prst="rect">
+            <a:avLst/>
+          </a:prstGeom>
+          <a:noFill/>
+          <a:ln/>
+        </p:spPr>
+        <p:txBody>
+          <a:bodyPr wrap="square" lIns="0" tIns="0" rIns="0" bIns="0" rtlCol="0" anchor="ctr"/>
+          <a:lstStyle/>
+          <a:p>
+            <a:pPr rtl="1" algn="r" indent="0" marL="0">
+              <a:buNone/>
+            </a:pPr>
+            <a:r>
+              <a:rPr lang="en-US" sz="950" dirty="0">
+                <a:solidFill>
+                  <a:srgbClr val="6F7D71">
+                    <a:alpha val="80000"/>
+                  </a:srgbClr>
+                </a:solidFill>
+                <a:latin typeface="Arial" pitchFamily="34" charset="0"/>
+                <a:ea typeface="Arial" pitchFamily="34" charset="-122"/>
+                <a:cs typeface="Arial" pitchFamily="34" charset="-120"/>
+              </a:rPr>
+              <a:t>12</a:t>
+            </a:r>
+            <a:endParaRPr lang="en-US" sz="950" dirty="0"/>
+          </a:p>
+        </p:txBody>
+      </p:sp>
+    </p:spTree>
+  </p:cSld>
+  <p:clrMapOvr>
+    <a:masterClrMapping/>
+  </p:clrMapOvr>
+</p:sld>
+</file>
+
+<file path=ppt/slides/slide14.xml><?xml version="1.0" encoding="utf-8"?>
+<p:sld xmlns:a="http://schemas.openxmlformats.org/drawingml/2006/main" xmlns:r="http://schemas.openxmlformats.org/officeDocument/2006/relationships" xmlns:p="http://schemas.openxmlformats.org/presentationml/2006/main">
+  <p:cSld name="Slide 14">
+    <p:bg>
+      <p:bgPr>
+        <a:solidFill>
+          <a:srgbClr val="FCFAF5"/>
+        </a:solidFill>
+      </p:bgPr>
+    </p:bg>
+    <p:spTree>
+      <p:nvGrpSpPr>
+        <p:cNvPr id="1" name=""/>
+        <p:cNvGrpSpPr/>
+        <p:nvPr/>
+      </p:nvGrpSpPr>
+      <p:grpSpPr>
+        <a:xfrm>
+          <a:off x="0" y="0"/>
+          <a:ext cx="0" cy="0"/>
+          <a:chOff x="0" y="0"/>
+          <a:chExt cx="0" cy="0"/>
+        </a:xfrm>
+      </p:grpSpPr>
+      <p:sp>
+        <p:nvSpPr>
+          <p:cNvPr id="2" name="Text 0"/>
+          <p:cNvSpPr txBox="1"/>
+          <p:nvPr/>
+        </p:nvSpPr>
+        <p:spPr>
+          <a:xfrm>
+            <a:off x="594360" y="411480"/>
+            <a:ext cx="10515600" cy="274320"/>
+          </a:xfrm>
+          <a:prstGeom prst="rect">
+            <a:avLst/>
+          </a:prstGeom>
+          <a:noFill/>
+          <a:ln/>
+        </p:spPr>
+        <p:txBody>
+          <a:bodyPr wrap="square" lIns="0" tIns="0" rIns="0" bIns="0" rtlCol="0" anchor="ctr"/>
+          <a:lstStyle/>
+          <a:p>
+            <a:pPr rtl="1" algn="r" indent="0" marL="0">
+              <a:buNone/>
+            </a:pPr>
+            <a:r>
+              <a:rPr lang="en-US" sz="1150" b="1" spc="200" kern="0" dirty="0">
+                <a:solidFill>
+                  <a:srgbClr val="D9A441"/>
+                </a:solidFill>
+                <a:latin typeface="Arial" pitchFamily="34" charset="0"/>
+                <a:ea typeface="Arial" pitchFamily="34" charset="-122"/>
+                <a:cs typeface="Arial" pitchFamily="34" charset="-120"/>
+              </a:rPr>
+              <a:t>كيف نعمل</a:t>
+            </a:r>
+            <a:endParaRPr lang="en-US" sz="1150" dirty="0"/>
+          </a:p>
+        </p:txBody>
+      </p:sp>
+      <p:sp>
+        <p:nvSpPr>
+          <p:cNvPr id="3" name="Text 1"/>
+          <p:cNvSpPr txBox="1"/>
+          <p:nvPr/>
+        </p:nvSpPr>
+        <p:spPr>
+          <a:xfrm>
+            <a:off x="594360" y="731520"/>
+            <a:ext cx="10881360" cy="731520"/>
+          </a:xfrm>
+          <a:prstGeom prst="rect">
+            <a:avLst/>
+          </a:prstGeom>
+          <a:noFill/>
+          <a:ln/>
+        </p:spPr>
+        <p:txBody>
+          <a:bodyPr wrap="square" lIns="0" tIns="0" rIns="0" bIns="0" rtlCol="0" anchor="ctr"/>
+          <a:lstStyle/>
+          <a:p>
+            <a:pPr rtl="1" algn="r" indent="0" marL="0">
+              <a:buNone/>
+            </a:pPr>
+            <a:r>
+              <a:rPr lang="en-US" sz="3000" b="1" dirty="0">
+                <a:solidFill>
+                  <a:srgbClr val="16412B"/>
+                </a:solidFill>
+                <a:latin typeface="Arial" pitchFamily="34" charset="0"/>
+                <a:ea typeface="Arial" pitchFamily="34" charset="-122"/>
+                <a:cs typeface="Arial" pitchFamily="34" charset="-120"/>
+              </a:rPr>
+              <a:t>انتشار على مراحل، يُقاس عند كل مرحلة</a:t>
+            </a:r>
+            <a:endParaRPr lang="en-US" sz="3000" dirty="0"/>
+          </a:p>
+        </p:txBody>
+      </p:sp>
+      <p:sp>
+        <p:nvSpPr>
+          <p:cNvPr id="4" name="Shape 2"/>
+          <p:cNvSpPr/>
+          <p:nvPr/>
+        </p:nvSpPr>
+        <p:spPr>
+          <a:xfrm>
+            <a:off x="594360" y="1874520"/>
+            <a:ext cx="2545004" cy="2834640"/>
+          </a:xfrm>
+          <a:prstGeom prst="roundRect">
+            <a:avLst>
+              <a:gd name="adj" fmla="val 3593"/>
+            </a:avLst>
+          </a:prstGeom>
+          <a:solidFill>
+            <a:srgbClr val="F2F1E8"/>
+          </a:solidFill>
+          <a:ln w="9525">
+            <a:solidFill>
+              <a:srgbClr val="E0DFD0"/>
+            </a:solidFill>
+            <a:prstDash val="solid"/>
+          </a:ln>
+        </p:spPr>
+      </p:sp>
+      <p:sp>
+        <p:nvSpPr>
+          <p:cNvPr id="5" name="Shape 3"/>
+          <p:cNvSpPr/>
+          <p:nvPr/>
+        </p:nvSpPr>
+        <p:spPr>
+          <a:xfrm>
+            <a:off x="822960" y="2103120"/>
+            <a:ext cx="566928" cy="566928"/>
+          </a:xfrm>
+          <a:prstGeom prst="ellipse">
+            <a:avLst/>
+          </a:prstGeom>
+          <a:solidFill>
+            <a:srgbClr val="2C6E49"/>
+          </a:solidFill>
+          <a:ln/>
+        </p:spPr>
+      </p:sp>
+      <p:sp>
+        <p:nvSpPr>
+          <p:cNvPr id="6" name="Text 4"/>
+          <p:cNvSpPr txBox="1"/>
+          <p:nvPr/>
+        </p:nvSpPr>
+        <p:spPr>
+          <a:xfrm>
+            <a:off x="822960" y="2103120"/>
+            <a:ext cx="566928" cy="566928"/>
+          </a:xfrm>
+          <a:prstGeom prst="rect">
+            <a:avLst/>
+          </a:prstGeom>
+          <a:noFill/>
+          <a:ln/>
+        </p:spPr>
+        <p:txBody>
+          <a:bodyPr wrap="square" lIns="0" tIns="0" rIns="0" bIns="0" rtlCol="0" anchor="ctr"/>
+          <a:lstStyle/>
+          <a:p>
+            <a:pPr rtl="1" algn="ctr" indent="0" marL="0">
+              <a:buNone/>
+            </a:pPr>
+            <a:r>
+              <a:rPr lang="en-US" sz="1600" b="1" dirty="0">
+                <a:solidFill>
+                  <a:srgbClr val="FFFFFF"/>
+                </a:solidFill>
+                <a:latin typeface="Arial" pitchFamily="34" charset="0"/>
+                <a:ea typeface="Arial" pitchFamily="34" charset="-122"/>
+                <a:cs typeface="Arial" pitchFamily="34" charset="-120"/>
+              </a:rPr>
+              <a:t>1</a:t>
+            </a:r>
+            <a:endParaRPr lang="en-US" sz="1600" dirty="0"/>
+          </a:p>
+        </p:txBody>
+      </p:sp>
+      <p:sp>
+        <p:nvSpPr>
+          <p:cNvPr id="7" name="Text 5"/>
+          <p:cNvSpPr txBox="1"/>
+          <p:nvPr/>
+        </p:nvSpPr>
+        <p:spPr>
+          <a:xfrm>
+            <a:off x="822960" y="2788920"/>
+            <a:ext cx="2087804" cy="457200"/>
+          </a:xfrm>
+          <a:prstGeom prst="rect">
+            <a:avLst/>
+          </a:prstGeom>
+          <a:noFill/>
+          <a:ln/>
+        </p:spPr>
+        <p:txBody>
+          <a:bodyPr wrap="square" lIns="0" tIns="0" rIns="0" bIns="0" rtlCol="0" anchor="ctr"/>
+          <a:lstStyle/>
+          <a:p>
+            <a:pPr rtl="1" algn="r" indent="0" marL="0">
+              <a:buNone/>
+            </a:pPr>
+            <a:r>
+              <a:rPr lang="en-US" sz="1400" b="1" dirty="0">
+                <a:solidFill>
+                  <a:srgbClr val="2C6E49"/>
+                </a:solidFill>
+                <a:latin typeface="Arial" pitchFamily="34" charset="0"/>
+                <a:ea typeface="Arial" pitchFamily="34" charset="-122"/>
+                <a:cs typeface="Arial" pitchFamily="34" charset="-120"/>
+              </a:rPr>
+              <a:t>التشخيص</a:t>
+            </a:r>
+            <a:endParaRPr lang="en-US" sz="1400" dirty="0"/>
+          </a:p>
+        </p:txBody>
+      </p:sp>
+      <p:sp>
+        <p:nvSpPr>
+          <p:cNvPr id="8" name="Text 6"/>
+          <p:cNvSpPr txBox="1"/>
+          <p:nvPr/>
+        </p:nvSpPr>
+        <p:spPr>
+          <a:xfrm>
+            <a:off x="822960" y="3291840"/>
+            <a:ext cx="2087804" cy="1234440"/>
+          </a:xfrm>
+          <a:prstGeom prst="rect">
+            <a:avLst/>
+          </a:prstGeom>
+          <a:noFill/>
+          <a:ln/>
+        </p:spPr>
+        <p:txBody>
+          <a:bodyPr wrap="square" lIns="0" tIns="0" rIns="0" bIns="0" rtlCol="0" anchor="t"/>
+          <a:lstStyle/>
+          <a:p>
+            <a:pPr rtl="1" algn="r" indent="0" marL="0">
+              <a:lnSpc>
+                <a:spcPct val="120000"/>
+              </a:lnSpc>
+              <a:buNone/>
+            </a:pPr>
+            <a:r>
+              <a:rPr lang="en-US" sz="1200" dirty="0">
+                <a:solidFill>
+                  <a:srgbClr val="364239"/>
+                </a:solidFill>
+                <a:latin typeface="Arial" pitchFamily="34" charset="0"/>
+                <a:ea typeface="Arial" pitchFamily="34" charset="-122"/>
+                <a:cs typeface="Arial" pitchFamily="34" charset="-120"/>
+              </a:rPr>
+              <a:t>تحليل التربة وأسلوب الري والمحصول. لا التزام على الإطلاق في هذه المرحلة.</a:t>
+            </a:r>
+            <a:endParaRPr lang="en-US" sz="1200" dirty="0"/>
+          </a:p>
+        </p:txBody>
+      </p:sp>
+      <p:sp>
+        <p:nvSpPr>
+          <p:cNvPr id="9" name="Shape 7"/>
+          <p:cNvSpPr/>
+          <p:nvPr/>
+        </p:nvSpPr>
+        <p:spPr>
+          <a:xfrm>
+            <a:off x="3413684" y="1874520"/>
+            <a:ext cx="2545004" cy="2834640"/>
+          </a:xfrm>
+          <a:prstGeom prst="roundRect">
+            <a:avLst>
+              <a:gd name="adj" fmla="val 3593"/>
+            </a:avLst>
+          </a:prstGeom>
+          <a:solidFill>
+            <a:srgbClr val="F2F1E8"/>
+          </a:solidFill>
+          <a:ln w="9525">
+            <a:solidFill>
+              <a:srgbClr val="E0DFD0"/>
+            </a:solidFill>
+            <a:prstDash val="solid"/>
+          </a:ln>
+        </p:spPr>
+      </p:sp>
+      <p:sp>
+        <p:nvSpPr>
+          <p:cNvPr id="10" name="Shape 8"/>
+          <p:cNvSpPr/>
+          <p:nvPr/>
+        </p:nvSpPr>
+        <p:spPr>
+          <a:xfrm>
+            <a:off x="3642284" y="2103120"/>
+            <a:ext cx="566928" cy="566928"/>
+          </a:xfrm>
+          <a:prstGeom prst="ellipse">
+            <a:avLst/>
+          </a:prstGeom>
+          <a:solidFill>
+            <a:srgbClr val="2C6E49"/>
+          </a:solidFill>
+          <a:ln/>
+        </p:spPr>
+      </p:sp>
+      <p:sp>
+        <p:nvSpPr>
+          <p:cNvPr id="11" name="Text 9"/>
+          <p:cNvSpPr txBox="1"/>
+          <p:nvPr/>
+        </p:nvSpPr>
+        <p:spPr>
+          <a:xfrm>
+            <a:off x="3642284" y="2103120"/>
+            <a:ext cx="566928" cy="566928"/>
+          </a:xfrm>
+          <a:prstGeom prst="rect">
+            <a:avLst/>
+          </a:prstGeom>
+          <a:noFill/>
+          <a:ln/>
+        </p:spPr>
+        <p:txBody>
+          <a:bodyPr wrap="square" lIns="0" tIns="0" rIns="0" bIns="0" rtlCol="0" anchor="ctr"/>
+          <a:lstStyle/>
+          <a:p>
+            <a:pPr rtl="1" algn="ctr" indent="0" marL="0">
+              <a:buNone/>
+            </a:pPr>
+            <a:r>
+              <a:rPr lang="en-US" sz="1600" b="1" dirty="0">
+                <a:solidFill>
+                  <a:srgbClr val="FFFFFF"/>
+                </a:solidFill>
+                <a:latin typeface="Arial" pitchFamily="34" charset="0"/>
+                <a:ea typeface="Arial" pitchFamily="34" charset="-122"/>
+                <a:cs typeface="Arial" pitchFamily="34" charset="-120"/>
+              </a:rPr>
+              <a:t>2</a:t>
+            </a:r>
+            <a:endParaRPr lang="en-US" sz="1600" dirty="0"/>
+          </a:p>
+        </p:txBody>
+      </p:sp>
+      <p:sp>
+        <p:nvSpPr>
+          <p:cNvPr id="12" name="Text 10"/>
+          <p:cNvSpPr txBox="1"/>
+          <p:nvPr/>
+        </p:nvSpPr>
+        <p:spPr>
+          <a:xfrm>
+            <a:off x="3642284" y="2788920"/>
+            <a:ext cx="2087804" cy="457200"/>
+          </a:xfrm>
+          <a:prstGeom prst="rect">
+            <a:avLst/>
+          </a:prstGeom>
+          <a:noFill/>
+          <a:ln/>
+        </p:spPr>
+        <p:txBody>
+          <a:bodyPr wrap="square" lIns="0" tIns="0" rIns="0" bIns="0" rtlCol="0" anchor="ctr"/>
+          <a:lstStyle/>
+          <a:p>
+            <a:pPr rtl="1" algn="r" indent="0" marL="0">
+              <a:buNone/>
+            </a:pPr>
+            <a:r>
+              <a:rPr lang="en-US" sz="1400" b="1" dirty="0">
+                <a:solidFill>
+                  <a:srgbClr val="2C6E49"/>
+                </a:solidFill>
+                <a:latin typeface="Arial" pitchFamily="34" charset="0"/>
+                <a:ea typeface="Arial" pitchFamily="34" charset="-122"/>
+                <a:cs typeface="Arial" pitchFamily="34" charset="-120"/>
+              </a:rPr>
+              <a:t>قطعة تجريبية</a:t>
+            </a:r>
+            <a:endParaRPr lang="en-US" sz="1400" dirty="0"/>
+          </a:p>
+        </p:txBody>
+      </p:sp>
+      <p:sp>
+        <p:nvSpPr>
+          <p:cNvPr id="13" name="Text 11"/>
+          <p:cNvSpPr txBox="1"/>
+          <p:nvPr/>
+        </p:nvSpPr>
+        <p:spPr>
+          <a:xfrm>
+            <a:off x="3642284" y="3291840"/>
+            <a:ext cx="2087804" cy="1234440"/>
+          </a:xfrm>
+          <a:prstGeom prst="rect">
+            <a:avLst/>
+          </a:prstGeom>
+          <a:noFill/>
+          <a:ln/>
+        </p:spPr>
+        <p:txBody>
+          <a:bodyPr wrap="square" lIns="0" tIns="0" rIns="0" bIns="0" rtlCol="0" anchor="t"/>
+          <a:lstStyle/>
+          <a:p>
+            <a:pPr rtl="1" algn="r" indent="0" marL="0">
+              <a:lnSpc>
+                <a:spcPct val="120000"/>
+              </a:lnSpc>
+              <a:buNone/>
+            </a:pPr>
+            <a:r>
+              <a:rPr lang="en-US" sz="1200" dirty="0">
+                <a:solidFill>
+                  <a:srgbClr val="364239"/>
+                </a:solidFill>
+                <a:latin typeface="Arial" pitchFamily="34" charset="0"/>
+                <a:ea typeface="Arial" pitchFamily="34" charset="-122"/>
+                <a:cs typeface="Arial" pitchFamily="34" charset="-120"/>
+              </a:rPr>
+              <a:t>تجربة مقارنة على قطعة واحدة، مع قطعة شاهدة تُدار بالطريقة نفسها.</a:t>
+            </a:r>
+            <a:endParaRPr lang="en-US" sz="1200" dirty="0"/>
+          </a:p>
+        </p:txBody>
+      </p:sp>
+      <p:sp>
+        <p:nvSpPr>
+          <p:cNvPr id="14" name="Shape 12"/>
+          <p:cNvSpPr/>
+          <p:nvPr/>
+        </p:nvSpPr>
+        <p:spPr>
+          <a:xfrm>
+            <a:off x="6233008" y="1874520"/>
+            <a:ext cx="2545004" cy="2834640"/>
+          </a:xfrm>
+          <a:prstGeom prst="roundRect">
+            <a:avLst>
+              <a:gd name="adj" fmla="val 3593"/>
+            </a:avLst>
+          </a:prstGeom>
+          <a:solidFill>
+            <a:srgbClr val="F2F1E8"/>
+          </a:solidFill>
+          <a:ln w="9525">
+            <a:solidFill>
+              <a:srgbClr val="E0DFD0"/>
+            </a:solidFill>
+            <a:prstDash val="solid"/>
+          </a:ln>
+        </p:spPr>
+      </p:sp>
+      <p:sp>
+        <p:nvSpPr>
+          <p:cNvPr id="15" name="Shape 13"/>
+          <p:cNvSpPr/>
+          <p:nvPr/>
+        </p:nvSpPr>
+        <p:spPr>
+          <a:xfrm>
+            <a:off x="6461608" y="2103120"/>
+            <a:ext cx="566928" cy="566928"/>
+          </a:xfrm>
+          <a:prstGeom prst="ellipse">
+            <a:avLst/>
+          </a:prstGeom>
+          <a:solidFill>
+            <a:srgbClr val="2C6E49"/>
+          </a:solidFill>
+          <a:ln/>
+        </p:spPr>
+      </p:sp>
+      <p:sp>
+        <p:nvSpPr>
+          <p:cNvPr id="16" name="Text 14"/>
+          <p:cNvSpPr txBox="1"/>
+          <p:nvPr/>
+        </p:nvSpPr>
+        <p:spPr>
+          <a:xfrm>
+            <a:off x="6461608" y="2103120"/>
+            <a:ext cx="566928" cy="566928"/>
+          </a:xfrm>
+          <a:prstGeom prst="rect">
+            <a:avLst/>
+          </a:prstGeom>
+          <a:noFill/>
+          <a:ln/>
+        </p:spPr>
+        <p:txBody>
+          <a:bodyPr wrap="square" lIns="0" tIns="0" rIns="0" bIns="0" rtlCol="0" anchor="ctr"/>
+          <a:lstStyle/>
+          <a:p>
+            <a:pPr rtl="1" algn="ctr" indent="0" marL="0">
+              <a:buNone/>
+            </a:pPr>
+            <a:r>
+              <a:rPr lang="en-US" sz="1600" b="1" dirty="0">
+                <a:solidFill>
+                  <a:srgbClr val="FFFFFF"/>
+                </a:solidFill>
+                <a:latin typeface="Arial" pitchFamily="34" charset="0"/>
+                <a:ea typeface="Arial" pitchFamily="34" charset="-122"/>
+                <a:cs typeface="Arial" pitchFamily="34" charset="-120"/>
+              </a:rPr>
+              <a:t>3</a:t>
+            </a:r>
+            <a:endParaRPr lang="en-US" sz="1600" dirty="0"/>
+          </a:p>
+        </p:txBody>
+      </p:sp>
+      <p:sp>
+        <p:nvSpPr>
+          <p:cNvPr id="17" name="Text 15"/>
+          <p:cNvSpPr txBox="1"/>
+          <p:nvPr/>
+        </p:nvSpPr>
+        <p:spPr>
+          <a:xfrm>
+            <a:off x="6461608" y="2788920"/>
+            <a:ext cx="2087804" cy="457200"/>
+          </a:xfrm>
+          <a:prstGeom prst="rect">
+            <a:avLst/>
+          </a:prstGeom>
+          <a:noFill/>
+          <a:ln/>
+        </p:spPr>
+        <p:txBody>
+          <a:bodyPr wrap="square" lIns="0" tIns="0" rIns="0" bIns="0" rtlCol="0" anchor="ctr"/>
+          <a:lstStyle/>
+          <a:p>
+            <a:pPr rtl="1" algn="r" indent="0" marL="0">
+              <a:buNone/>
+            </a:pPr>
+            <a:r>
+              <a:rPr lang="en-US" sz="1400" b="1" dirty="0">
+                <a:solidFill>
+                  <a:srgbClr val="2C6E49"/>
+                </a:solidFill>
+                <a:latin typeface="Arial" pitchFamily="34" charset="0"/>
+                <a:ea typeface="Arial" pitchFamily="34" charset="-122"/>
+                <a:cs typeface="Arial" pitchFamily="34" charset="-120"/>
+              </a:rPr>
+              <a:t>القياس</a:t>
+            </a:r>
+            <a:endParaRPr lang="en-US" sz="1400" dirty="0"/>
+          </a:p>
+        </p:txBody>
+      </p:sp>
+      <p:sp>
+        <p:nvSpPr>
+          <p:cNvPr id="18" name="Text 16"/>
+          <p:cNvSpPr txBox="1"/>
+          <p:nvPr/>
+        </p:nvSpPr>
+        <p:spPr>
+          <a:xfrm>
+            <a:off x="6461608" y="3291840"/>
+            <a:ext cx="2087804" cy="1234440"/>
+          </a:xfrm>
+          <a:prstGeom prst="rect">
+            <a:avLst/>
+          </a:prstGeom>
+          <a:noFill/>
+          <a:ln/>
+        </p:spPr>
+        <p:txBody>
+          <a:bodyPr wrap="square" lIns="0" tIns="0" rIns="0" bIns="0" rtlCol="0" anchor="t"/>
+          <a:lstStyle/>
+          <a:p>
+            <a:pPr rtl="1" algn="r" indent="0" marL="0">
+              <a:lnSpc>
+                <a:spcPct val="120000"/>
+              </a:lnSpc>
+              <a:buNone/>
+            </a:pPr>
+            <a:r>
+              <a:rPr lang="en-US" sz="1200" dirty="0">
+                <a:solidFill>
+                  <a:srgbClr val="364239"/>
+                </a:solidFill>
+                <a:latin typeface="Arial" pitchFamily="34" charset="0"/>
+                <a:ea typeface="Arial" pitchFamily="34" charset="-122"/>
+                <a:cs typeface="Arial" pitchFamily="34" charset="-120"/>
+              </a:rPr>
+              <a:t>رصد الاستهلاك المائي والمردود على مدى دورة زراعية كاملة.</a:t>
+            </a:r>
+            <a:endParaRPr lang="en-US" sz="1200" dirty="0"/>
+          </a:p>
+        </p:txBody>
+      </p:sp>
+      <p:sp>
+        <p:nvSpPr>
+          <p:cNvPr id="19" name="Shape 17"/>
+          <p:cNvSpPr/>
+          <p:nvPr/>
+        </p:nvSpPr>
+        <p:spPr>
+          <a:xfrm>
+            <a:off x="9052331" y="1874520"/>
+            <a:ext cx="2545004" cy="2834640"/>
+          </a:xfrm>
+          <a:prstGeom prst="roundRect">
+            <a:avLst>
+              <a:gd name="adj" fmla="val 3593"/>
+            </a:avLst>
+          </a:prstGeom>
+          <a:solidFill>
+            <a:srgbClr val="F2F1E8"/>
+          </a:solidFill>
+          <a:ln w="9525">
+            <a:solidFill>
+              <a:srgbClr val="E0DFD0"/>
+            </a:solidFill>
+            <a:prstDash val="solid"/>
+          </a:ln>
+        </p:spPr>
+      </p:sp>
+      <p:sp>
+        <p:nvSpPr>
+          <p:cNvPr id="20" name="Shape 18"/>
+          <p:cNvSpPr/>
+          <p:nvPr/>
+        </p:nvSpPr>
+        <p:spPr>
+          <a:xfrm>
+            <a:off x="9280931" y="2103120"/>
+            <a:ext cx="566928" cy="566928"/>
+          </a:xfrm>
+          <a:prstGeom prst="ellipse">
+            <a:avLst/>
+          </a:prstGeom>
+          <a:solidFill>
+            <a:srgbClr val="2C6E49"/>
+          </a:solidFill>
+          <a:ln/>
+        </p:spPr>
+      </p:sp>
+      <p:sp>
+        <p:nvSpPr>
+          <p:cNvPr id="21" name="Text 19"/>
+          <p:cNvSpPr txBox="1"/>
+          <p:nvPr/>
+        </p:nvSpPr>
+        <p:spPr>
+          <a:xfrm>
+            <a:off x="9280931" y="2103120"/>
+            <a:ext cx="566928" cy="566928"/>
+          </a:xfrm>
+          <a:prstGeom prst="rect">
+            <a:avLst/>
+          </a:prstGeom>
+          <a:noFill/>
+          <a:ln/>
+        </p:spPr>
+        <p:txBody>
+          <a:bodyPr wrap="square" lIns="0" tIns="0" rIns="0" bIns="0" rtlCol="0" anchor="ctr"/>
+          <a:lstStyle/>
+          <a:p>
+            <a:pPr rtl="1" algn="ctr" indent="0" marL="0">
+              <a:buNone/>
+            </a:pPr>
+            <a:r>
+              <a:rPr lang="en-US" sz="1600" b="1" dirty="0">
+                <a:solidFill>
+                  <a:srgbClr val="FFFFFF"/>
+                </a:solidFill>
+                <a:latin typeface="Arial" pitchFamily="34" charset="0"/>
+                <a:ea typeface="Arial" pitchFamily="34" charset="-122"/>
+                <a:cs typeface="Arial" pitchFamily="34" charset="-120"/>
+              </a:rPr>
+              <a:t>4</a:t>
+            </a:r>
+            <a:endParaRPr lang="en-US" sz="1600" dirty="0"/>
+          </a:p>
+        </p:txBody>
+      </p:sp>
+      <p:sp>
+        <p:nvSpPr>
+          <p:cNvPr id="22" name="Text 20"/>
+          <p:cNvSpPr txBox="1"/>
+          <p:nvPr/>
+        </p:nvSpPr>
+        <p:spPr>
+          <a:xfrm>
+            <a:off x="9280931" y="2788920"/>
+            <a:ext cx="2087804" cy="457200"/>
+          </a:xfrm>
+          <a:prstGeom prst="rect">
+            <a:avLst/>
+          </a:prstGeom>
+          <a:noFill/>
+          <a:ln/>
+        </p:spPr>
+        <p:txBody>
+          <a:bodyPr wrap="square" lIns="0" tIns="0" rIns="0" bIns="0" rtlCol="0" anchor="ctr"/>
+          <a:lstStyle/>
+          <a:p>
+            <a:pPr rtl="1" algn="r" indent="0" marL="0">
+              <a:buNone/>
+            </a:pPr>
+            <a:r>
+              <a:rPr lang="en-US" sz="1400" b="1" dirty="0">
+                <a:solidFill>
+                  <a:srgbClr val="2C6E49"/>
+                </a:solidFill>
+                <a:latin typeface="Arial" pitchFamily="34" charset="0"/>
+                <a:ea typeface="Arial" pitchFamily="34" charset="-122"/>
+                <a:cs typeface="Arial" pitchFamily="34" charset="-120"/>
+              </a:rPr>
+              <a:t>التوسيع</a:t>
+            </a:r>
+            <a:endParaRPr lang="en-US" sz="1400" dirty="0"/>
+          </a:p>
+        </p:txBody>
+      </p:sp>
+      <p:sp>
+        <p:nvSpPr>
+          <p:cNvPr id="23" name="Text 21"/>
+          <p:cNvSpPr txBox="1"/>
+          <p:nvPr/>
+        </p:nvSpPr>
+        <p:spPr>
+          <a:xfrm>
+            <a:off x="9280931" y="3291840"/>
+            <a:ext cx="2087804" cy="1234440"/>
+          </a:xfrm>
+          <a:prstGeom prst="rect">
+            <a:avLst/>
+          </a:prstGeom>
+          <a:noFill/>
+          <a:ln/>
+        </p:spPr>
+        <p:txBody>
+          <a:bodyPr wrap="square" lIns="0" tIns="0" rIns="0" bIns="0" rtlCol="0" anchor="t"/>
+          <a:lstStyle/>
+          <a:p>
+            <a:pPr rtl="1" algn="r" indent="0" marL="0">
+              <a:lnSpc>
+                <a:spcPct val="120000"/>
+              </a:lnSpc>
+              <a:buNone/>
+            </a:pPr>
+            <a:r>
+              <a:rPr lang="en-US" sz="1200" dirty="0">
+                <a:solidFill>
+                  <a:srgbClr val="364239"/>
+                </a:solidFill>
+                <a:latin typeface="Arial" pitchFamily="34" charset="0"/>
+                <a:ea typeface="Arial" pitchFamily="34" charset="-122"/>
+                <a:cs typeface="Arial" pitchFamily="34" charset="-120"/>
+              </a:rPr>
+              <a:t>تعميم تدريجي على بقية القطع استناداً إلى النتائج المسجّلة فعلياً.</a:t>
+            </a:r>
+            <a:endParaRPr lang="en-US" sz="1200" dirty="0"/>
+          </a:p>
+        </p:txBody>
+      </p:sp>
+      <p:sp>
+        <p:nvSpPr>
+          <p:cNvPr id="24" name="Text 22"/>
+          <p:cNvSpPr txBox="1"/>
+          <p:nvPr/>
+        </p:nvSpPr>
+        <p:spPr>
+          <a:xfrm>
+            <a:off x="594360" y="4983480"/>
+            <a:ext cx="11002975" cy="822960"/>
+          </a:xfrm>
+          <a:prstGeom prst="rect">
+            <a:avLst/>
+          </a:prstGeom>
+          <a:noFill/>
+          <a:ln/>
+        </p:spPr>
+        <p:txBody>
+          <a:bodyPr wrap="square" lIns="0" tIns="0" rIns="0" bIns="0" rtlCol="0" anchor="t"/>
+          <a:lstStyle/>
+          <a:p>
+            <a:pPr rtl="1" algn="r" indent="0" marL="0">
+              <a:lnSpc>
+                <a:spcPct val="125000"/>
+              </a:lnSpc>
+              <a:buNone/>
+            </a:pPr>
+            <a:r>
+              <a:rPr lang="en-US" sz="1250" dirty="0">
+                <a:solidFill>
+                  <a:srgbClr val="6F7D71"/>
+                </a:solidFill>
+                <a:latin typeface="Arial" pitchFamily="34" charset="0"/>
+                <a:ea typeface="Arial" pitchFamily="34" charset="-122"/>
+                <a:cs typeface="Arial" pitchFamily="34" charset="-120"/>
+              </a:rPr>
+              <a:t>قاعدة الجرعة واحدة في كل مكان: 3 غرامات لكل لتر من التربة المستغلة. ما يتغيّر من أرض إلى أخرى هو حجم التربة الذي تستكشفه الجذور فعلياً.</a:t>
+            </a:r>
+            <a:endParaRPr lang="en-US" sz="1250" dirty="0"/>
+          </a:p>
+        </p:txBody>
+      </p:sp>
+      <p:sp>
+        <p:nvSpPr>
+          <p:cNvPr id="25" name="Text 23"/>
+          <p:cNvSpPr txBox="1"/>
+          <p:nvPr/>
+        </p:nvSpPr>
+        <p:spPr>
+          <a:xfrm>
+            <a:off x="502920" y="6382512"/>
+            <a:ext cx="8229600" cy="274320"/>
+          </a:xfrm>
+          <a:prstGeom prst="rect">
+            <a:avLst/>
+          </a:prstGeom>
+          <a:noFill/>
+          <a:ln/>
+        </p:spPr>
+        <p:txBody>
+          <a:bodyPr wrap="square" lIns="0" tIns="0" rIns="0" bIns="0" rtlCol="0" anchor="ctr"/>
+          <a:lstStyle/>
+          <a:p>
+            <a:pPr rtl="1" algn="r" indent="0" marL="0">
+              <a:buNone/>
+            </a:pPr>
+            <a:r>
+              <a:rPr lang="en-US" sz="950" dirty="0">
+                <a:solidFill>
+                  <a:srgbClr val="6F7D71">
+                    <a:alpha val="80000"/>
+                  </a:srgbClr>
+                </a:solidFill>
+                <a:latin typeface="Arial" pitchFamily="34" charset="0"/>
+                <a:ea typeface="Arial" pitchFamily="34" charset="-122"/>
+                <a:cs typeface="Arial" pitchFamily="34" charset="-120"/>
+              </a:rPr>
+              <a:t>Green Solutions · ملف السوق الزراعية الأردنية</a:t>
+            </a:r>
+            <a:endParaRPr lang="en-US" sz="950" dirty="0"/>
+          </a:p>
+        </p:txBody>
+      </p:sp>
+      <p:sp>
+        <p:nvSpPr>
+          <p:cNvPr id="26" name="Text 24"/>
+          <p:cNvSpPr txBox="1"/>
+          <p:nvPr/>
+        </p:nvSpPr>
+        <p:spPr>
+          <a:xfrm>
+            <a:off x="11140135" y="6382512"/>
+            <a:ext cx="548640" cy="274320"/>
+          </a:xfrm>
+          <a:prstGeom prst="rect">
+            <a:avLst/>
+          </a:prstGeom>
+          <a:noFill/>
+          <a:ln/>
+        </p:spPr>
+        <p:txBody>
+          <a:bodyPr wrap="square" lIns="0" tIns="0" rIns="0" bIns="0" rtlCol="0" anchor="ctr"/>
+          <a:lstStyle/>
+          <a:p>
+            <a:pPr rtl="1" algn="r" indent="0" marL="0">
+              <a:buNone/>
+            </a:pPr>
+            <a:r>
+              <a:rPr lang="en-US" sz="950" dirty="0">
+                <a:solidFill>
+                  <a:srgbClr val="6F7D71">
+                    <a:alpha val="80000"/>
+                  </a:srgbClr>
+                </a:solidFill>
+                <a:latin typeface="Arial" pitchFamily="34" charset="0"/>
+                <a:ea typeface="Arial" pitchFamily="34" charset="-122"/>
+                <a:cs typeface="Arial" pitchFamily="34" charset="-120"/>
+              </a:rPr>
+              <a:t>13</a:t>
+            </a:r>
+            <a:endParaRPr lang="en-US" sz="950" dirty="0"/>
+          </a:p>
+        </p:txBody>
+      </p:sp>
+    </p:spTree>
+  </p:cSld>
+  <p:clrMapOvr>
+    <a:masterClrMapping/>
+  </p:clrMapOvr>
+</p:sld>
+</file>
+
+<file path=ppt/slides/slide15.xml><?xml version="1.0" encoding="utf-8"?>
+<p:sld xmlns:a="http://schemas.openxmlformats.org/drawingml/2006/main" xmlns:r="http://schemas.openxmlformats.org/officeDocument/2006/relationships" xmlns:p="http://schemas.openxmlformats.org/presentationml/2006/main">
+  <p:cSld name="Slide 15">
+    <p:bg>
+      <p:bgPr>
+        <a:solidFill>
+          <a:srgbClr val="FCFAF5"/>
+        </a:solidFill>
+      </p:bgPr>
+    </p:bg>
+    <p:spTree>
+      <p:nvGrpSpPr>
+        <p:cNvPr id="1" name=""/>
+        <p:cNvGrpSpPr/>
+        <p:nvPr/>
+      </p:nvGrpSpPr>
+      <p:grpSpPr>
+        <a:xfrm>
+          <a:off x="0" y="0"/>
+          <a:ext cx="0" cy="0"/>
+          <a:chOff x="0" y="0"/>
+          <a:chExt cx="0" cy="0"/>
+        </a:xfrm>
+      </p:grpSpPr>
+      <p:sp>
+        <p:nvSpPr>
+          <p:cNvPr id="2" name="Text 0"/>
+          <p:cNvSpPr txBox="1"/>
+          <p:nvPr/>
+        </p:nvSpPr>
+        <p:spPr>
+          <a:xfrm>
+            <a:off x="594360" y="411480"/>
+            <a:ext cx="10515600" cy="274320"/>
+          </a:xfrm>
+          <a:prstGeom prst="rect">
+            <a:avLst/>
+          </a:prstGeom>
+          <a:noFill/>
+          <a:ln/>
+        </p:spPr>
+        <p:txBody>
+          <a:bodyPr wrap="square" lIns="0" tIns="0" rIns="0" bIns="0" rtlCol="0" anchor="ctr"/>
+          <a:lstStyle/>
+          <a:p>
+            <a:pPr rtl="1" algn="r" indent="0" marL="0">
+              <a:buNone/>
+            </a:pPr>
+            <a:r>
+              <a:rPr lang="en-US" sz="1150" b="1" spc="200" kern="0" dirty="0">
+                <a:solidFill>
+                  <a:srgbClr val="D9A441"/>
+                </a:solidFill>
+                <a:latin typeface="Arial" pitchFamily="34" charset="0"/>
+                <a:ea typeface="Arial" pitchFamily="34" charset="-122"/>
+                <a:cs typeface="Arial" pitchFamily="34" charset="-120"/>
+              </a:rPr>
+              <a:t>العمل معاً</a:t>
+            </a:r>
+            <a:endParaRPr lang="en-US" sz="1150" dirty="0"/>
+          </a:p>
+        </p:txBody>
+      </p:sp>
+      <p:sp>
+        <p:nvSpPr>
+          <p:cNvPr id="3" name="Text 1"/>
+          <p:cNvSpPr txBox="1"/>
+          <p:nvPr/>
+        </p:nvSpPr>
+        <p:spPr>
+          <a:xfrm>
+            <a:off x="594360" y="731520"/>
+            <a:ext cx="10881360" cy="731520"/>
+          </a:xfrm>
+          <a:prstGeom prst="rect">
+            <a:avLst/>
+          </a:prstGeom>
+          <a:noFill/>
+          <a:ln/>
+        </p:spPr>
+        <p:txBody>
+          <a:bodyPr wrap="square" lIns="0" tIns="0" rIns="0" bIns="0" rtlCol="0" anchor="ctr"/>
+          <a:lstStyle/>
+          <a:p>
+            <a:pPr rtl="1" algn="r" indent="0" marL="0">
+              <a:buNone/>
+            </a:pPr>
+            <a:r>
+              <a:rPr lang="en-US" sz="3000" b="1" dirty="0">
+                <a:solidFill>
+                  <a:srgbClr val="16412B"/>
+                </a:solidFill>
+                <a:latin typeface="Arial" pitchFamily="34" charset="0"/>
+                <a:ea typeface="Arial" pitchFamily="34" charset="-122"/>
+                <a:cs typeface="Arial" pitchFamily="34" charset="-120"/>
+              </a:rPr>
+              <a:t>شريك محلي في الأردن</a:t>
+            </a:r>
+            <a:endParaRPr lang="en-US" sz="3000" dirty="0"/>
+          </a:p>
+        </p:txBody>
+      </p:sp>
+      <p:sp>
+        <p:nvSpPr>
+          <p:cNvPr id="4" name="Shape 2"/>
+          <p:cNvSpPr/>
+          <p:nvPr/>
+        </p:nvSpPr>
+        <p:spPr>
+          <a:xfrm>
+            <a:off x="594360" y="1874520"/>
+            <a:ext cx="2545004" cy="2834640"/>
+          </a:xfrm>
+          <a:prstGeom prst="roundRect">
+            <a:avLst>
+              <a:gd name="adj" fmla="val 3593"/>
+            </a:avLst>
+          </a:prstGeom>
+          <a:solidFill>
+            <a:srgbClr val="F2F1E8"/>
+          </a:solidFill>
+          <a:ln w="9525">
+            <a:solidFill>
+              <a:srgbClr val="E0DFD0"/>
+            </a:solidFill>
+            <a:prstDash val="solid"/>
+          </a:ln>
+        </p:spPr>
+      </p:sp>
+      <p:sp>
+        <p:nvSpPr>
+          <p:cNvPr id="5" name="Shape 3"/>
+          <p:cNvSpPr/>
+          <p:nvPr/>
+        </p:nvSpPr>
+        <p:spPr>
+          <a:xfrm>
+            <a:off x="822960" y="2103120"/>
+            <a:ext cx="566928" cy="566928"/>
+          </a:xfrm>
+          <a:prstGeom prst="ellipse">
+            <a:avLst/>
+          </a:prstGeom>
+          <a:solidFill>
+            <a:srgbClr val="2C6E49"/>
+          </a:solidFill>
+          <a:ln/>
+        </p:spPr>
+      </p:sp>
+      <p:sp>
+        <p:nvSpPr>
+          <p:cNvPr id="6" name="Text 4"/>
+          <p:cNvSpPr txBox="1"/>
+          <p:nvPr/>
+        </p:nvSpPr>
+        <p:spPr>
+          <a:xfrm>
+            <a:off x="822960" y="2103120"/>
+            <a:ext cx="566928" cy="566928"/>
+          </a:xfrm>
+          <a:prstGeom prst="rect">
+            <a:avLst/>
+          </a:prstGeom>
+          <a:noFill/>
+          <a:ln/>
+        </p:spPr>
+        <p:txBody>
+          <a:bodyPr wrap="square" lIns="0" tIns="0" rIns="0" bIns="0" rtlCol="0" anchor="ctr"/>
+          <a:lstStyle/>
+          <a:p>
+            <a:pPr rtl="1" algn="ctr" indent="0" marL="0">
+              <a:buNone/>
+            </a:pPr>
+            <a:r>
+              <a:rPr lang="en-US" sz="1600" b="1" dirty="0">
+                <a:solidFill>
+                  <a:srgbClr val="FFFFFF"/>
+                </a:solidFill>
+                <a:latin typeface="Arial" pitchFamily="34" charset="0"/>
+                <a:ea typeface="Arial" pitchFamily="34" charset="-122"/>
+                <a:cs typeface="Arial" pitchFamily="34" charset="-120"/>
+              </a:rPr>
+              <a:t>1</a:t>
+            </a:r>
+            <a:endParaRPr lang="en-US" sz="1600" dirty="0"/>
+          </a:p>
+        </p:txBody>
+      </p:sp>
+      <p:sp>
+        <p:nvSpPr>
+          <p:cNvPr id="7" name="Text 5"/>
+          <p:cNvSpPr txBox="1"/>
+          <p:nvPr/>
+        </p:nvSpPr>
+        <p:spPr>
+          <a:xfrm>
+            <a:off x="822960" y="2788920"/>
+            <a:ext cx="2087804" cy="457200"/>
+          </a:xfrm>
+          <a:prstGeom prst="rect">
+            <a:avLst/>
+          </a:prstGeom>
+          <a:noFill/>
+          <a:ln/>
+        </p:spPr>
+        <p:txBody>
+          <a:bodyPr wrap="square" lIns="0" tIns="0" rIns="0" bIns="0" rtlCol="0" anchor="ctr"/>
+          <a:lstStyle/>
+          <a:p>
+            <a:pPr rtl="1" algn="r" indent="0" marL="0">
+              <a:buNone/>
+            </a:pPr>
+            <a:r>
+              <a:rPr lang="en-US" sz="1400" b="1" dirty="0">
+                <a:solidFill>
+                  <a:srgbClr val="2C6E49"/>
+                </a:solidFill>
+                <a:latin typeface="Arial" pitchFamily="34" charset="0"/>
+                <a:ea typeface="Arial" pitchFamily="34" charset="-122"/>
+                <a:cs typeface="Arial" pitchFamily="34" charset="-120"/>
+              </a:rPr>
+              <a:t>التوزيع</a:t>
+            </a:r>
+            <a:endParaRPr lang="en-US" sz="1400" dirty="0"/>
+          </a:p>
+        </p:txBody>
+      </p:sp>
+      <p:sp>
+        <p:nvSpPr>
+          <p:cNvPr id="8" name="Text 6"/>
+          <p:cNvSpPr txBox="1"/>
+          <p:nvPr/>
+        </p:nvSpPr>
+        <p:spPr>
+          <a:xfrm>
+            <a:off x="822960" y="3291840"/>
+            <a:ext cx="2087804" cy="1234440"/>
+          </a:xfrm>
+          <a:prstGeom prst="rect">
+            <a:avLst/>
+          </a:prstGeom>
+          <a:noFill/>
+          <a:ln/>
+        </p:spPr>
+        <p:txBody>
+          <a:bodyPr wrap="square" lIns="0" tIns="0" rIns="0" bIns="0" rtlCol="0" anchor="t"/>
+          <a:lstStyle/>
+          <a:p>
+            <a:pPr rtl="1" algn="r" indent="0" marL="0">
+              <a:lnSpc>
+                <a:spcPct val="120000"/>
+              </a:lnSpc>
+              <a:buNone/>
+            </a:pPr>
+            <a:r>
+              <a:rPr lang="en-US" sz="1200" dirty="0">
+                <a:solidFill>
+                  <a:srgbClr val="364239"/>
+                </a:solidFill>
+                <a:latin typeface="Arial" pitchFamily="34" charset="0"/>
+                <a:ea typeface="Arial" pitchFamily="34" charset="-122"/>
+                <a:cs typeface="Arial" pitchFamily="34" charset="-120"/>
+              </a:rPr>
+              <a:t>حصرية على مستوى الإقليم ومخزون إطلاق للموسم التجاري الأول.</a:t>
+            </a:r>
+            <a:endParaRPr lang="en-US" sz="1200" dirty="0"/>
+          </a:p>
+        </p:txBody>
+      </p:sp>
+      <p:sp>
+        <p:nvSpPr>
+          <p:cNvPr id="9" name="Shape 7"/>
+          <p:cNvSpPr/>
+          <p:nvPr/>
+        </p:nvSpPr>
+        <p:spPr>
+          <a:xfrm>
+            <a:off x="3413684" y="1874520"/>
+            <a:ext cx="2545004" cy="2834640"/>
+          </a:xfrm>
+          <a:prstGeom prst="roundRect">
+            <a:avLst>
+              <a:gd name="adj" fmla="val 3593"/>
+            </a:avLst>
+          </a:prstGeom>
+          <a:solidFill>
+            <a:srgbClr val="F2F1E8"/>
+          </a:solidFill>
+          <a:ln w="9525">
+            <a:solidFill>
+              <a:srgbClr val="E0DFD0"/>
+            </a:solidFill>
+            <a:prstDash val="solid"/>
+          </a:ln>
+        </p:spPr>
+      </p:sp>
+      <p:sp>
+        <p:nvSpPr>
+          <p:cNvPr id="10" name="Shape 8"/>
+          <p:cNvSpPr/>
+          <p:nvPr/>
+        </p:nvSpPr>
+        <p:spPr>
+          <a:xfrm>
+            <a:off x="3642284" y="2103120"/>
+            <a:ext cx="566928" cy="566928"/>
+          </a:xfrm>
+          <a:prstGeom prst="ellipse">
+            <a:avLst/>
+          </a:prstGeom>
+          <a:solidFill>
+            <a:srgbClr val="2C6E49"/>
+          </a:solidFill>
+          <a:ln/>
+        </p:spPr>
+      </p:sp>
+      <p:sp>
+        <p:nvSpPr>
+          <p:cNvPr id="11" name="Text 9"/>
+          <p:cNvSpPr txBox="1"/>
+          <p:nvPr/>
+        </p:nvSpPr>
+        <p:spPr>
+          <a:xfrm>
+            <a:off x="3642284" y="2103120"/>
+            <a:ext cx="566928" cy="566928"/>
+          </a:xfrm>
+          <a:prstGeom prst="rect">
+            <a:avLst/>
+          </a:prstGeom>
+          <a:noFill/>
+          <a:ln/>
+        </p:spPr>
+        <p:txBody>
+          <a:bodyPr wrap="square" lIns="0" tIns="0" rIns="0" bIns="0" rtlCol="0" anchor="ctr"/>
+          <a:lstStyle/>
+          <a:p>
+            <a:pPr rtl="1" algn="ctr" indent="0" marL="0">
+              <a:buNone/>
+            </a:pPr>
+            <a:r>
+              <a:rPr lang="en-US" sz="1600" b="1" dirty="0">
+                <a:solidFill>
+                  <a:srgbClr val="FFFFFF"/>
+                </a:solidFill>
+                <a:latin typeface="Arial" pitchFamily="34" charset="0"/>
+                <a:ea typeface="Arial" pitchFamily="34" charset="-122"/>
+                <a:cs typeface="Arial" pitchFamily="34" charset="-120"/>
+              </a:rPr>
+              <a:t>2</a:t>
+            </a:r>
+            <a:endParaRPr lang="en-US" sz="1600" dirty="0"/>
+          </a:p>
+        </p:txBody>
+      </p:sp>
+      <p:sp>
+        <p:nvSpPr>
+          <p:cNvPr id="12" name="Text 10"/>
+          <p:cNvSpPr txBox="1"/>
+          <p:nvPr/>
+        </p:nvSpPr>
+        <p:spPr>
+          <a:xfrm>
+            <a:off x="3642284" y="2788920"/>
+            <a:ext cx="2087804" cy="457200"/>
+          </a:xfrm>
+          <a:prstGeom prst="rect">
+            <a:avLst/>
+          </a:prstGeom>
+          <a:noFill/>
+          <a:ln/>
+        </p:spPr>
+        <p:txBody>
+          <a:bodyPr wrap="square" lIns="0" tIns="0" rIns="0" bIns="0" rtlCol="0" anchor="ctr"/>
+          <a:lstStyle/>
+          <a:p>
+            <a:pPr rtl="1" algn="r" indent="0" marL="0">
+              <a:buNone/>
+            </a:pPr>
+            <a:r>
+              <a:rPr lang="en-US" sz="1400" b="1" dirty="0">
+                <a:solidFill>
+                  <a:srgbClr val="2C6E49"/>
+                </a:solidFill>
+                <a:latin typeface="Arial" pitchFamily="34" charset="0"/>
+                <a:ea typeface="Arial" pitchFamily="34" charset="-122"/>
+                <a:cs typeface="Arial" pitchFamily="34" charset="-120"/>
+              </a:rPr>
+              <a:t>التدريب</a:t>
+            </a:r>
+            <a:endParaRPr lang="en-US" sz="1400" dirty="0"/>
+          </a:p>
+        </p:txBody>
+      </p:sp>
+      <p:sp>
+        <p:nvSpPr>
+          <p:cNvPr id="13" name="Text 11"/>
+          <p:cNvSpPr txBox="1"/>
+          <p:nvPr/>
+        </p:nvSpPr>
+        <p:spPr>
+          <a:xfrm>
+            <a:off x="3642284" y="3291840"/>
+            <a:ext cx="2087804" cy="1234440"/>
+          </a:xfrm>
+          <a:prstGeom prst="rect">
+            <a:avLst/>
+          </a:prstGeom>
+          <a:noFill/>
+          <a:ln/>
+        </p:spPr>
+        <p:txBody>
+          <a:bodyPr wrap="square" lIns="0" tIns="0" rIns="0" bIns="0" rtlCol="0" anchor="t"/>
+          <a:lstStyle/>
+          <a:p>
+            <a:pPr rtl="1" algn="r" indent="0" marL="0">
+              <a:lnSpc>
+                <a:spcPct val="120000"/>
+              </a:lnSpc>
+              <a:buNone/>
+            </a:pPr>
+            <a:r>
+              <a:rPr lang="en-US" sz="1200" dirty="0">
+                <a:solidFill>
+                  <a:srgbClr val="364239"/>
+                </a:solidFill>
+                <a:latin typeface="Arial" pitchFamily="34" charset="0"/>
+                <a:ea typeface="Arial" pitchFamily="34" charset="-122"/>
+                <a:cs typeface="Arial" pitchFamily="34" charset="-120"/>
+              </a:rPr>
+              <a:t>تدريب فني للفرق، وبروتوكولات الجرعات، وتحديثها في كل موسم.</a:t>
+            </a:r>
+            <a:endParaRPr lang="en-US" sz="1200" dirty="0"/>
+          </a:p>
+        </p:txBody>
+      </p:sp>
+      <p:sp>
+        <p:nvSpPr>
+          <p:cNvPr id="14" name="Shape 12"/>
+          <p:cNvSpPr/>
+          <p:nvPr/>
+        </p:nvSpPr>
+        <p:spPr>
+          <a:xfrm>
+            <a:off x="6233008" y="1874520"/>
+            <a:ext cx="2545004" cy="2834640"/>
+          </a:xfrm>
+          <a:prstGeom prst="roundRect">
+            <a:avLst>
+              <a:gd name="adj" fmla="val 3593"/>
+            </a:avLst>
+          </a:prstGeom>
+          <a:solidFill>
+            <a:srgbClr val="F2F1E8"/>
+          </a:solidFill>
+          <a:ln w="9525">
+            <a:solidFill>
+              <a:srgbClr val="E0DFD0"/>
+            </a:solidFill>
+            <a:prstDash val="solid"/>
+          </a:ln>
+        </p:spPr>
+      </p:sp>
+      <p:sp>
+        <p:nvSpPr>
+          <p:cNvPr id="15" name="Shape 13"/>
+          <p:cNvSpPr/>
+          <p:nvPr/>
+        </p:nvSpPr>
+        <p:spPr>
+          <a:xfrm>
+            <a:off x="6461608" y="2103120"/>
+            <a:ext cx="566928" cy="566928"/>
+          </a:xfrm>
+          <a:prstGeom prst="ellipse">
+            <a:avLst/>
+          </a:prstGeom>
+          <a:solidFill>
+            <a:srgbClr val="2C6E49"/>
+          </a:solidFill>
+          <a:ln/>
+        </p:spPr>
+      </p:sp>
+      <p:sp>
+        <p:nvSpPr>
+          <p:cNvPr id="16" name="Text 14"/>
+          <p:cNvSpPr txBox="1"/>
+          <p:nvPr/>
+        </p:nvSpPr>
+        <p:spPr>
+          <a:xfrm>
+            <a:off x="6461608" y="2103120"/>
+            <a:ext cx="566928" cy="566928"/>
+          </a:xfrm>
+          <a:prstGeom prst="rect">
+            <a:avLst/>
+          </a:prstGeom>
+          <a:noFill/>
+          <a:ln/>
+        </p:spPr>
+        <p:txBody>
+          <a:bodyPr wrap="square" lIns="0" tIns="0" rIns="0" bIns="0" rtlCol="0" anchor="ctr"/>
+          <a:lstStyle/>
+          <a:p>
+            <a:pPr rtl="1" algn="ctr" indent="0" marL="0">
+              <a:buNone/>
+            </a:pPr>
+            <a:r>
+              <a:rPr lang="en-US" sz="1600" b="1" dirty="0">
+                <a:solidFill>
+                  <a:srgbClr val="FFFFFF"/>
+                </a:solidFill>
+                <a:latin typeface="Arial" pitchFamily="34" charset="0"/>
+                <a:ea typeface="Arial" pitchFamily="34" charset="-122"/>
+                <a:cs typeface="Arial" pitchFamily="34" charset="-120"/>
+              </a:rPr>
+              <a:t>3</a:t>
+            </a:r>
+            <a:endParaRPr lang="en-US" sz="1600" dirty="0"/>
+          </a:p>
+        </p:txBody>
+      </p:sp>
+      <p:sp>
+        <p:nvSpPr>
+          <p:cNvPr id="17" name="Text 15"/>
+          <p:cNvSpPr txBox="1"/>
+          <p:nvPr/>
+        </p:nvSpPr>
+        <p:spPr>
+          <a:xfrm>
+            <a:off x="6461608" y="2788920"/>
+            <a:ext cx="2087804" cy="457200"/>
+          </a:xfrm>
+          <a:prstGeom prst="rect">
+            <a:avLst/>
+          </a:prstGeom>
+          <a:noFill/>
+          <a:ln/>
+        </p:spPr>
+        <p:txBody>
+          <a:bodyPr wrap="square" lIns="0" tIns="0" rIns="0" bIns="0" rtlCol="0" anchor="ctr"/>
+          <a:lstStyle/>
+          <a:p>
+            <a:pPr rtl="1" algn="r" indent="0" marL="0">
+              <a:buNone/>
+            </a:pPr>
+            <a:r>
+              <a:rPr lang="en-US" sz="1400" b="1" dirty="0">
+                <a:solidFill>
+                  <a:srgbClr val="2C6E49"/>
+                </a:solidFill>
+                <a:latin typeface="Arial" pitchFamily="34" charset="0"/>
+                <a:ea typeface="Arial" pitchFamily="34" charset="-122"/>
+                <a:cs typeface="Arial" pitchFamily="34" charset="-120"/>
+              </a:rPr>
+              <a:t>تجارب مشتركة</a:t>
+            </a:r>
+            <a:endParaRPr lang="en-US" sz="1400" dirty="0"/>
+          </a:p>
+        </p:txBody>
+      </p:sp>
+      <p:sp>
+        <p:nvSpPr>
+          <p:cNvPr id="18" name="Text 16"/>
+          <p:cNvSpPr txBox="1"/>
+          <p:nvPr/>
+        </p:nvSpPr>
+        <p:spPr>
+          <a:xfrm>
+            <a:off x="6461608" y="3291840"/>
+            <a:ext cx="2087804" cy="1234440"/>
+          </a:xfrm>
+          <a:prstGeom prst="rect">
+            <a:avLst/>
+          </a:prstGeom>
+          <a:noFill/>
+          <a:ln/>
+        </p:spPr>
+        <p:txBody>
+          <a:bodyPr wrap="square" lIns="0" tIns="0" rIns="0" bIns="0" rtlCol="0" anchor="t"/>
+          <a:lstStyle/>
+          <a:p>
+            <a:pPr rtl="1" algn="r" indent="0" marL="0">
+              <a:lnSpc>
+                <a:spcPct val="120000"/>
+              </a:lnSpc>
+              <a:buNone/>
+            </a:pPr>
+            <a:r>
+              <a:rPr lang="en-US" sz="1200" dirty="0">
+                <a:solidFill>
+                  <a:srgbClr val="364239"/>
+                </a:solidFill>
+                <a:latin typeface="Arial" pitchFamily="34" charset="0"/>
+                <a:ea typeface="Arial" pitchFamily="34" charset="-122"/>
+                <a:cs typeface="Arial" pitchFamily="34" charset="-120"/>
+              </a:rPr>
+              <a:t>قطع إرشادية مع قطعة شاهد، ونتائج تُعرض على المزارعين.</a:t>
+            </a:r>
+            <a:endParaRPr lang="en-US" sz="1200" dirty="0"/>
+          </a:p>
+        </p:txBody>
+      </p:sp>
+      <p:sp>
+        <p:nvSpPr>
+          <p:cNvPr id="19" name="Shape 17"/>
+          <p:cNvSpPr/>
+          <p:nvPr/>
+        </p:nvSpPr>
+        <p:spPr>
+          <a:xfrm>
+            <a:off x="9052331" y="1874520"/>
+            <a:ext cx="2545004" cy="2834640"/>
+          </a:xfrm>
+          <a:prstGeom prst="roundRect">
+            <a:avLst>
+              <a:gd name="adj" fmla="val 3593"/>
+            </a:avLst>
+          </a:prstGeom>
+          <a:solidFill>
+            <a:srgbClr val="F2F1E8"/>
+          </a:solidFill>
+          <a:ln w="9525">
+            <a:solidFill>
+              <a:srgbClr val="E0DFD0"/>
+            </a:solidFill>
+            <a:prstDash val="solid"/>
+          </a:ln>
+        </p:spPr>
+      </p:sp>
+      <p:sp>
+        <p:nvSpPr>
+          <p:cNvPr id="20" name="Shape 18"/>
+          <p:cNvSpPr/>
+          <p:nvPr/>
+        </p:nvSpPr>
+        <p:spPr>
+          <a:xfrm>
+            <a:off x="9280931" y="2103120"/>
+            <a:ext cx="566928" cy="566928"/>
+          </a:xfrm>
+          <a:prstGeom prst="ellipse">
+            <a:avLst/>
+          </a:prstGeom>
+          <a:solidFill>
+            <a:srgbClr val="2C6E49"/>
+          </a:solidFill>
+          <a:ln/>
+        </p:spPr>
+      </p:sp>
+      <p:sp>
+        <p:nvSpPr>
+          <p:cNvPr id="21" name="Text 19"/>
+          <p:cNvSpPr txBox="1"/>
+          <p:nvPr/>
+        </p:nvSpPr>
+        <p:spPr>
+          <a:xfrm>
+            <a:off x="9280931" y="2103120"/>
+            <a:ext cx="566928" cy="566928"/>
+          </a:xfrm>
+          <a:prstGeom prst="rect">
+            <a:avLst/>
+          </a:prstGeom>
+          <a:noFill/>
+          <a:ln/>
+        </p:spPr>
+        <p:txBody>
+          <a:bodyPr wrap="square" lIns="0" tIns="0" rIns="0" bIns="0" rtlCol="0" anchor="ctr"/>
+          <a:lstStyle/>
+          <a:p>
+            <a:pPr rtl="1" algn="ctr" indent="0" marL="0">
+              <a:buNone/>
+            </a:pPr>
+            <a:r>
+              <a:rPr lang="en-US" sz="1600" b="1" dirty="0">
+                <a:solidFill>
+                  <a:srgbClr val="FFFFFF"/>
+                </a:solidFill>
+                <a:latin typeface="Arial" pitchFamily="34" charset="0"/>
+                <a:ea typeface="Arial" pitchFamily="34" charset="-122"/>
+                <a:cs typeface="Arial" pitchFamily="34" charset="-120"/>
+              </a:rPr>
+              <a:t>4</a:t>
+            </a:r>
+            <a:endParaRPr lang="en-US" sz="1600" dirty="0"/>
+          </a:p>
+        </p:txBody>
+      </p:sp>
+      <p:sp>
+        <p:nvSpPr>
+          <p:cNvPr id="22" name="Text 20"/>
+          <p:cNvSpPr txBox="1"/>
+          <p:nvPr/>
+        </p:nvSpPr>
+        <p:spPr>
+          <a:xfrm>
+            <a:off x="9280931" y="2788920"/>
+            <a:ext cx="2087804" cy="457200"/>
+          </a:xfrm>
+          <a:prstGeom prst="rect">
+            <a:avLst/>
+          </a:prstGeom>
+          <a:noFill/>
+          <a:ln/>
+        </p:spPr>
+        <p:txBody>
+          <a:bodyPr wrap="square" lIns="0" tIns="0" rIns="0" bIns="0" rtlCol="0" anchor="ctr"/>
+          <a:lstStyle/>
+          <a:p>
+            <a:pPr rtl="1" algn="r" indent="0" marL="0">
+              <a:buNone/>
+            </a:pPr>
+            <a:r>
+              <a:rPr lang="en-US" sz="1400" b="1" dirty="0">
+                <a:solidFill>
+                  <a:srgbClr val="2C6E49"/>
+                </a:solidFill>
+                <a:latin typeface="Arial" pitchFamily="34" charset="0"/>
+                <a:ea typeface="Arial" pitchFamily="34" charset="-122"/>
+                <a:cs typeface="Arial" pitchFamily="34" charset="-120"/>
+              </a:rPr>
+              <a:t>المؤسسات</a:t>
+            </a:r>
+            <a:endParaRPr lang="en-US" sz="1400" dirty="0"/>
+          </a:p>
+        </p:txBody>
+      </p:sp>
+      <p:sp>
+        <p:nvSpPr>
+          <p:cNvPr id="23" name="Text 21"/>
+          <p:cNvSpPr txBox="1"/>
+          <p:nvPr/>
+        </p:nvSpPr>
+        <p:spPr>
+          <a:xfrm>
+            <a:off x="9280931" y="3291840"/>
+            <a:ext cx="2087804" cy="1234440"/>
+          </a:xfrm>
+          <a:prstGeom prst="rect">
+            <a:avLst/>
+          </a:prstGeom>
+          <a:noFill/>
+          <a:ln/>
+        </p:spPr>
+        <p:txBody>
+          <a:bodyPr wrap="square" lIns="0" tIns="0" rIns="0" bIns="0" rtlCol="0" anchor="t"/>
+          <a:lstStyle/>
+          <a:p>
+            <a:pPr rtl="1" algn="r" indent="0" marL="0">
+              <a:lnSpc>
+                <a:spcPct val="120000"/>
+              </a:lnSpc>
+              <a:buNone/>
+            </a:pPr>
+            <a:r>
+              <a:rPr lang="en-US" sz="1200" dirty="0">
+                <a:solidFill>
+                  <a:srgbClr val="364239"/>
+                </a:solidFill>
+                <a:latin typeface="Arial" pitchFamily="34" charset="0"/>
+                <a:ea typeface="Arial" pitchFamily="34" charset="-122"/>
+                <a:cs typeface="Arial" pitchFamily="34" charset="-120"/>
+              </a:rPr>
+              <a:t>حوار مع وزارة الزراعة وبرامج الأمن الغذائي.</a:t>
+            </a:r>
+            <a:endParaRPr lang="en-US" sz="1200" dirty="0"/>
+          </a:p>
+        </p:txBody>
+      </p:sp>
+      <p:sp>
+        <p:nvSpPr>
+          <p:cNvPr id="24" name="Text 22"/>
+          <p:cNvSpPr txBox="1"/>
+          <p:nvPr/>
+        </p:nvSpPr>
+        <p:spPr>
+          <a:xfrm>
+            <a:off x="594360" y="4983480"/>
+            <a:ext cx="11002975" cy="822960"/>
+          </a:xfrm>
+          <a:prstGeom prst="rect">
+            <a:avLst/>
+          </a:prstGeom>
+          <a:noFill/>
+          <a:ln/>
+        </p:spPr>
+        <p:txBody>
+          <a:bodyPr wrap="square" lIns="0" tIns="0" rIns="0" bIns="0" rtlCol="0" anchor="t"/>
+          <a:lstStyle/>
+          <a:p>
+            <a:pPr rtl="1" algn="r" indent="0" marL="0">
+              <a:lnSpc>
+                <a:spcPct val="125000"/>
+              </a:lnSpc>
+              <a:buNone/>
+            </a:pPr>
+            <a:r>
+              <a:rPr lang="en-US" sz="1250" dirty="0">
+                <a:solidFill>
+                  <a:srgbClr val="6F7D71"/>
+                </a:solidFill>
+                <a:latin typeface="Arial" pitchFamily="34" charset="0"/>
+                <a:ea typeface="Arial" pitchFamily="34" charset="-122"/>
+                <a:cs typeface="Arial" pitchFamily="34" charset="-120"/>
+              </a:rPr>
+              <a:t>يتكيف الإطار مع الإقليم: يمكن أن يقود الشراكة مستورد أو موزّع مدخلات زراعية أو جمعية منتجين.</a:t>
+            </a:r>
+            <a:endParaRPr lang="en-US" sz="1250" dirty="0"/>
+          </a:p>
+        </p:txBody>
+      </p:sp>
+      <p:sp>
+        <p:nvSpPr>
+          <p:cNvPr id="25" name="Text 23"/>
+          <p:cNvSpPr txBox="1"/>
+          <p:nvPr/>
+        </p:nvSpPr>
+        <p:spPr>
+          <a:xfrm>
+            <a:off x="502920" y="6382512"/>
+            <a:ext cx="8229600" cy="274320"/>
+          </a:xfrm>
+          <a:prstGeom prst="rect">
+            <a:avLst/>
+          </a:prstGeom>
+          <a:noFill/>
+          <a:ln/>
+        </p:spPr>
+        <p:txBody>
+          <a:bodyPr wrap="square" lIns="0" tIns="0" rIns="0" bIns="0" rtlCol="0" anchor="ctr"/>
+          <a:lstStyle/>
+          <a:p>
+            <a:pPr rtl="1" algn="r" indent="0" marL="0">
+              <a:buNone/>
+            </a:pPr>
+            <a:r>
+              <a:rPr lang="en-US" sz="950" dirty="0">
+                <a:solidFill>
+                  <a:srgbClr val="6F7D71">
+                    <a:alpha val="80000"/>
+                  </a:srgbClr>
+                </a:solidFill>
+                <a:latin typeface="Arial" pitchFamily="34" charset="0"/>
+                <a:ea typeface="Arial" pitchFamily="34" charset="-122"/>
+                <a:cs typeface="Arial" pitchFamily="34" charset="-120"/>
+              </a:rPr>
+              <a:t>Green Solutions · ملف السوق الزراعية الأردنية</a:t>
+            </a:r>
+            <a:endParaRPr lang="en-US" sz="950" dirty="0"/>
+          </a:p>
+        </p:txBody>
+      </p:sp>
+      <p:sp>
+        <p:nvSpPr>
+          <p:cNvPr id="26" name="Text 24"/>
+          <p:cNvSpPr txBox="1"/>
+          <p:nvPr/>
+        </p:nvSpPr>
+        <p:spPr>
+          <a:xfrm>
+            <a:off x="11140135" y="6382512"/>
+            <a:ext cx="548640" cy="274320"/>
+          </a:xfrm>
+          <a:prstGeom prst="rect">
+            <a:avLst/>
+          </a:prstGeom>
+          <a:noFill/>
+          <a:ln/>
+        </p:spPr>
+        <p:txBody>
+          <a:bodyPr wrap="square" lIns="0" tIns="0" rIns="0" bIns="0" rtlCol="0" anchor="ctr"/>
+          <a:lstStyle/>
+          <a:p>
+            <a:pPr rtl="1" algn="r" indent="0" marL="0">
+              <a:buNone/>
+            </a:pPr>
+            <a:r>
+              <a:rPr lang="en-US" sz="950" dirty="0">
+                <a:solidFill>
+                  <a:srgbClr val="6F7D71">
+                    <a:alpha val="80000"/>
+                  </a:srgbClr>
+                </a:solidFill>
+                <a:latin typeface="Arial" pitchFamily="34" charset="0"/>
+                <a:ea typeface="Arial" pitchFamily="34" charset="-122"/>
+                <a:cs typeface="Arial" pitchFamily="34" charset="-120"/>
+              </a:rPr>
+              <a:t>14</a:t>
+            </a:r>
+            <a:endParaRPr lang="en-US" sz="950" dirty="0"/>
+          </a:p>
+        </p:txBody>
+      </p:sp>
+    </p:spTree>
+  </p:cSld>
+  <p:clrMapOvr>
+    <a:masterClrMapping/>
+  </p:clrMapOvr>
+</p:sld>
+</file>
+
+<file path=ppt/slides/slide16.xml><?xml version="1.0" encoding="utf-8"?>
+<p:sld xmlns:a="http://schemas.openxmlformats.org/drawingml/2006/main" xmlns:r="http://schemas.openxmlformats.org/officeDocument/2006/relationships" xmlns:p="http://schemas.openxmlformats.org/presentationml/2006/main">
+  <p:cSld name="Slide 16">
+    <p:bg>
+      <p:bgPr>
+        <a:solidFill>
+          <a:srgbClr val="FCFAF5"/>
+        </a:solidFill>
+      </p:bgPr>
+    </p:bg>
+    <p:spTree>
+      <p:nvGrpSpPr>
+        <p:cNvPr id="1" name=""/>
+        <p:cNvGrpSpPr/>
+        <p:nvPr/>
+      </p:nvGrpSpPr>
+      <p:grpSpPr>
+        <a:xfrm>
+          <a:off x="0" y="0"/>
+          <a:ext cx="0" cy="0"/>
+          <a:chOff x="0" y="0"/>
+          <a:chExt cx="0" cy="0"/>
+        </a:xfrm>
+      </p:grpSpPr>
+      <p:sp>
+        <p:nvSpPr>
+          <p:cNvPr id="2" name="Text 0"/>
+          <p:cNvSpPr txBox="1"/>
+          <p:nvPr/>
+        </p:nvSpPr>
+        <p:spPr>
+          <a:xfrm>
+            <a:off x="594360" y="411480"/>
+            <a:ext cx="10515600" cy="274320"/>
+          </a:xfrm>
+          <a:prstGeom prst="rect">
+            <a:avLst/>
+          </a:prstGeom>
+          <a:noFill/>
+          <a:ln/>
+        </p:spPr>
+        <p:txBody>
+          <a:bodyPr wrap="square" lIns="0" tIns="0" rIns="0" bIns="0" rtlCol="0" anchor="ctr"/>
+          <a:lstStyle/>
+          <a:p>
+            <a:pPr rtl="1" algn="r" indent="0" marL="0">
+              <a:buNone/>
+            </a:pPr>
+            <a:r>
+              <a:rPr lang="en-US" sz="1150" b="1" spc="200" kern="0" dirty="0">
+                <a:solidFill>
+                  <a:srgbClr val="D9A441"/>
+                </a:solidFill>
+                <a:latin typeface="Arial" pitchFamily="34" charset="0"/>
+                <a:ea typeface="Arial" pitchFamily="34" charset="-122"/>
+                <a:cs typeface="Arial" pitchFamily="34" charset="-120"/>
+              </a:rPr>
+              <a:t>ما ينبغي توقّعه</a:t>
+            </a:r>
+            <a:endParaRPr lang="en-US" sz="1150" dirty="0"/>
+          </a:p>
+        </p:txBody>
+      </p:sp>
+      <p:sp>
+        <p:nvSpPr>
+          <p:cNvPr id="3" name="Text 1"/>
+          <p:cNvSpPr txBox="1"/>
+          <p:nvPr/>
+        </p:nvSpPr>
+        <p:spPr>
+          <a:xfrm>
+            <a:off x="594360" y="731520"/>
+            <a:ext cx="10881360" cy="731520"/>
+          </a:xfrm>
+          <a:prstGeom prst="rect">
+            <a:avLst/>
+          </a:prstGeom>
+          <a:noFill/>
+          <a:ln/>
+        </p:spPr>
+        <p:txBody>
+          <a:bodyPr wrap="square" lIns="0" tIns="0" rIns="0" bIns="0" rtlCol="0" anchor="ctr"/>
+          <a:lstStyle/>
+          <a:p>
+            <a:pPr rtl="1" algn="r" indent="0" marL="0">
+              <a:buNone/>
+            </a:pPr>
+            <a:r>
+              <a:rPr lang="en-US" sz="3000" b="1" dirty="0">
+                <a:solidFill>
+                  <a:srgbClr val="16412B"/>
+                </a:solidFill>
+                <a:latin typeface="Arial" pitchFamily="34" charset="0"/>
+                <a:ea typeface="Arial" pitchFamily="34" charset="-122"/>
+                <a:cs typeface="Arial" pitchFamily="34" charset="-120"/>
+              </a:rPr>
+              <a:t>مخاطر محددة وردود عليها</a:t>
+            </a:r>
+            <a:endParaRPr lang="en-US" sz="3000" dirty="0"/>
+          </a:p>
+        </p:txBody>
+      </p:sp>
+      <p:sp>
+        <p:nvSpPr>
+          <p:cNvPr id="4" name="Text 2"/>
+          <p:cNvSpPr txBox="1"/>
+          <p:nvPr/>
+        </p:nvSpPr>
+        <p:spPr>
+          <a:xfrm>
+            <a:off x="594360" y="1783080"/>
+            <a:ext cx="5227168" cy="411480"/>
+          </a:xfrm>
+          <a:prstGeom prst="rect">
+            <a:avLst/>
+          </a:prstGeom>
+          <a:noFill/>
+          <a:ln/>
+        </p:spPr>
+        <p:txBody>
+          <a:bodyPr wrap="square" lIns="0" tIns="0" rIns="0" bIns="0" rtlCol="0" anchor="ctr"/>
+          <a:lstStyle/>
+          <a:p>
+            <a:pPr rtl="1" algn="r" indent="0" marL="0">
+              <a:buNone/>
+            </a:pPr>
+            <a:r>
+              <a:rPr lang="en-US" sz="1600" b="1" dirty="0">
+                <a:solidFill>
+                  <a:srgbClr val="2C6E49"/>
+                </a:solidFill>
+                <a:latin typeface="Arial" pitchFamily="34" charset="0"/>
+                <a:ea typeface="Arial" pitchFamily="34" charset="-122"/>
+                <a:cs typeface="Arial" pitchFamily="34" charset="-120"/>
+              </a:rPr>
+              <a:t>المخاطر</a:t>
+            </a:r>
+            <a:endParaRPr lang="en-US" sz="1600" dirty="0"/>
+          </a:p>
+        </p:txBody>
+      </p:sp>
+      <p:sp>
+        <p:nvSpPr>
+          <p:cNvPr id="5" name="Text 3"/>
+          <p:cNvSpPr txBox="1"/>
+          <p:nvPr/>
+        </p:nvSpPr>
+        <p:spPr>
+          <a:xfrm>
+            <a:off x="594360" y="2286000"/>
+            <a:ext cx="5227168" cy="2468880"/>
+          </a:xfrm>
+          <a:prstGeom prst="rect">
+            <a:avLst/>
+          </a:prstGeom>
+          <a:noFill/>
+          <a:ln/>
+        </p:spPr>
+        <p:txBody>
+          <a:bodyPr wrap="square" lIns="0" tIns="0" rIns="0" bIns="0" rtlCol="0" anchor="t"/>
+          <a:lstStyle/>
+          <a:p>
+            <a:pPr algn="r" marL="342900" indent="-342900">
+              <a:lnSpc>
+                <a:spcPct val="122000"/>
+              </a:lnSpc>
+              <a:spcAft>
+                <a:spcPts val="1000"/>
+              </a:spcAft>
+              <a:buSzPct val="100000"/>
+              <a:buChar char="•"/>
+            </a:pPr>
+            <a:r>
+              <a:rPr lang="en-US" sz="1350" dirty="0">
+                <a:solidFill>
+                  <a:srgbClr val="364239"/>
+                </a:solidFill>
+                <a:latin typeface="Arial" pitchFamily="34" charset="0"/>
+                <a:ea typeface="Arial" pitchFamily="34" charset="-122"/>
+                <a:cs typeface="Arial" pitchFamily="34" charset="-120"/>
+              </a:rPr>
+              <a:t>تفاوت الأمطار بين سنة وأخرى: موسم رطب قد يحجب فائدة المنتج في المرتفعات البعلية.</a:t>
+            </a:r>
+            <a:endParaRPr lang="en-US" sz="1350" dirty="0"/>
+          </a:p>
+          <a:p>
+            <a:pPr algn="r" marL="342900" indent="-342900">
+              <a:lnSpc>
+                <a:spcPct val="122000"/>
+              </a:lnSpc>
+              <a:spcAft>
+                <a:spcPts val="1000"/>
+              </a:spcAft>
+              <a:buSzPct val="100000"/>
+              <a:buChar char="•"/>
+            </a:pPr>
+            <a:r>
+              <a:rPr lang="en-US" sz="1350" dirty="0">
+                <a:solidFill>
+                  <a:srgbClr val="364239"/>
+                </a:solidFill>
+                <a:latin typeface="Arial" pitchFamily="34" charset="0"/>
+                <a:ea typeface="Arial" pitchFamily="34" charset="-122"/>
+                <a:cs typeface="Arial" pitchFamily="34" charset="-120"/>
+              </a:rPr>
+              <a:t>تجزّؤ الحيازات وصغر مساحاتها، ما يشتّت قرار الشراء على عدد كبير من المزارعين.</a:t>
+            </a:r>
+            <a:endParaRPr lang="en-US" sz="1350" dirty="0"/>
+          </a:p>
+          <a:p>
+            <a:pPr algn="r" marL="342900" indent="-342900">
+              <a:lnSpc>
+                <a:spcPct val="122000"/>
+              </a:lnSpc>
+              <a:spcAft>
+                <a:spcPts val="1000"/>
+              </a:spcAft>
+              <a:buSzPct val="100000"/>
+              <a:buChar char="•"/>
+            </a:pPr>
+            <a:r>
+              <a:rPr lang="en-US" sz="1350" dirty="0">
+                <a:solidFill>
+                  <a:srgbClr val="364239"/>
+                </a:solidFill>
+                <a:latin typeface="Arial" pitchFamily="34" charset="0"/>
+                <a:ea typeface="Arial" pitchFamily="34" charset="-122"/>
+                <a:cs typeface="Arial" pitchFamily="34" charset="-120"/>
+              </a:rPr>
+              <a:t>منافسة مواد رخيصة أساسها الصوديوم تركت انطباعاً سيئاً لدى المزارعين.</a:t>
+            </a:r>
+            <a:endParaRPr lang="en-US" sz="1350" dirty="0"/>
+          </a:p>
+          <a:p>
+            <a:pPr algn="r" marL="342900" indent="-342900">
+              <a:lnSpc>
+                <a:spcPct val="122000"/>
+              </a:lnSpc>
+              <a:spcAft>
+                <a:spcPts val="1000"/>
+              </a:spcAft>
+              <a:buSzPct val="100000"/>
+              <a:buChar char="•"/>
+            </a:pPr>
+            <a:r>
+              <a:rPr lang="en-US" sz="1350" dirty="0">
+                <a:solidFill>
+                  <a:srgbClr val="364239"/>
+                </a:solidFill>
+                <a:latin typeface="Arial" pitchFamily="34" charset="0"/>
+                <a:ea typeface="Arial" pitchFamily="34" charset="-122"/>
+                <a:cs typeface="Arial" pitchFamily="34" charset="-120"/>
+              </a:rPr>
+              <a:t>ضغط على السيولة لدى الحيازات بعد مواسم متتالية من ارتفاع كلفة المياه والمدخلات.</a:t>
+            </a:r>
+            <a:endParaRPr lang="en-US" sz="1350" dirty="0"/>
+          </a:p>
+        </p:txBody>
+      </p:sp>
+      <p:sp>
+        <p:nvSpPr>
+          <p:cNvPr id="6" name="Text 4"/>
+          <p:cNvSpPr txBox="1"/>
+          <p:nvPr/>
+        </p:nvSpPr>
+        <p:spPr>
+          <a:xfrm>
+            <a:off x="6370168" y="1783080"/>
+            <a:ext cx="5227168" cy="411480"/>
+          </a:xfrm>
+          <a:prstGeom prst="rect">
+            <a:avLst/>
+          </a:prstGeom>
+          <a:noFill/>
+          <a:ln/>
+        </p:spPr>
+        <p:txBody>
+          <a:bodyPr wrap="square" lIns="0" tIns="0" rIns="0" bIns="0" rtlCol="0" anchor="ctr"/>
+          <a:lstStyle/>
+          <a:p>
+            <a:pPr rtl="1" algn="r" indent="0" marL="0">
+              <a:buNone/>
+            </a:pPr>
+            <a:r>
+              <a:rPr lang="en-US" sz="1600" b="1" dirty="0">
+                <a:solidFill>
+                  <a:srgbClr val="2C6E49"/>
+                </a:solidFill>
+                <a:latin typeface="Arial" pitchFamily="34" charset="0"/>
+                <a:ea typeface="Arial" pitchFamily="34" charset="-122"/>
+                <a:cs typeface="Arial" pitchFamily="34" charset="-120"/>
+              </a:rPr>
+              <a:t>الردود</a:t>
+            </a:r>
+            <a:endParaRPr lang="en-US" sz="1600" dirty="0"/>
+          </a:p>
+        </p:txBody>
+      </p:sp>
+      <p:sp>
+        <p:nvSpPr>
+          <p:cNvPr id="7" name="Text 5"/>
+          <p:cNvSpPr txBox="1"/>
+          <p:nvPr/>
+        </p:nvSpPr>
+        <p:spPr>
+          <a:xfrm>
+            <a:off x="6370168" y="2286000"/>
+            <a:ext cx="5227168" cy="2468880"/>
+          </a:xfrm>
+          <a:prstGeom prst="rect">
+            <a:avLst/>
+          </a:prstGeom>
+          <a:noFill/>
+          <a:ln/>
+        </p:spPr>
+        <p:txBody>
+          <a:bodyPr wrap="square" lIns="0" tIns="0" rIns="0" bIns="0" rtlCol="0" anchor="t"/>
+          <a:lstStyle/>
+          <a:p>
+            <a:pPr algn="r" marL="342900" indent="-342900">
+              <a:lnSpc>
+                <a:spcPct val="122000"/>
+              </a:lnSpc>
+              <a:spcAft>
+                <a:spcPts val="1000"/>
+              </a:spcAft>
+              <a:buSzPct val="100000"/>
+              <a:buChar char="•"/>
+            </a:pPr>
+            <a:r>
+              <a:rPr lang="en-US" sz="1350" dirty="0">
+                <a:solidFill>
+                  <a:srgbClr val="364239"/>
+                </a:solidFill>
+                <a:latin typeface="Arial" pitchFamily="34" charset="0"/>
+                <a:ea typeface="Arial" pitchFamily="34" charset="-122"/>
+                <a:cs typeface="Arial" pitchFamily="34" charset="-120"/>
+              </a:rPr>
+              <a:t>إجراء التجربة على دورة كاملة مع قطعة شاهدة، لتوثيق المكسب حتى في سنة مواتية.</a:t>
+            </a:r>
+            <a:endParaRPr lang="en-US" sz="1350" dirty="0"/>
+          </a:p>
+          <a:p>
+            <a:pPr algn="r" marL="342900" indent="-342900">
+              <a:lnSpc>
+                <a:spcPct val="122000"/>
+              </a:lnSpc>
+              <a:spcAft>
+                <a:spcPts val="1000"/>
+              </a:spcAft>
+              <a:buSzPct val="100000"/>
+              <a:buChar char="•"/>
+            </a:pPr>
+            <a:r>
+              <a:rPr lang="en-US" sz="1350" dirty="0">
+                <a:solidFill>
+                  <a:srgbClr val="364239"/>
+                </a:solidFill>
+                <a:latin typeface="Arial" pitchFamily="34" charset="0"/>
+                <a:ea typeface="Arial" pitchFamily="34" charset="-122"/>
+                <a:cs typeface="Arial" pitchFamily="34" charset="-120"/>
+              </a:rPr>
+              <a:t>المرور عبر الجمعيات التعاونية واتحادات المزارعين بدل التعامل الفردي.</a:t>
+            </a:r>
+            <a:endParaRPr lang="en-US" sz="1350" dirty="0"/>
+          </a:p>
+          <a:p>
+            <a:pPr algn="r" marL="342900" indent="-342900">
+              <a:lnSpc>
+                <a:spcPct val="122000"/>
+              </a:lnSpc>
+              <a:spcAft>
+                <a:spcPts val="1000"/>
+              </a:spcAft>
+              <a:buSzPct val="100000"/>
+              <a:buChar char="•"/>
+            </a:pPr>
+            <a:r>
+              <a:rPr lang="en-US" sz="1350" dirty="0">
+                <a:solidFill>
+                  <a:srgbClr val="364239"/>
+                </a:solidFill>
+                <a:latin typeface="Arial" pitchFamily="34" charset="0"/>
+                <a:ea typeface="Arial" pitchFamily="34" charset="-122"/>
+                <a:cs typeface="Arial" pitchFamily="34" charset="-120"/>
+              </a:rPr>
+              <a:t>توثيق فارق التركيبة: بوتاسيوم لا صوديوم، وملاءمة للمحاصيل الغذائية وللتربة المالحة.</a:t>
+            </a:r>
+            <a:endParaRPr lang="en-US" sz="1350" dirty="0"/>
+          </a:p>
+          <a:p>
+            <a:pPr algn="r" marL="342900" indent="-342900">
+              <a:lnSpc>
+                <a:spcPct val="122000"/>
+              </a:lnSpc>
+              <a:spcAft>
+                <a:spcPts val="1000"/>
+              </a:spcAft>
+              <a:buSzPct val="100000"/>
+              <a:buChar char="•"/>
+            </a:pPr>
+            <a:r>
+              <a:rPr lang="en-US" sz="1350" dirty="0">
+                <a:solidFill>
+                  <a:srgbClr val="364239"/>
+                </a:solidFill>
+                <a:latin typeface="Arial" pitchFamily="34" charset="0"/>
+                <a:ea typeface="Arial" pitchFamily="34" charset="-122"/>
+                <a:cs typeface="Arial" pitchFamily="34" charset="-120"/>
+              </a:rPr>
+              <a:t>توزيع الالتزام على الزمن: أثر يدوم 3 إلى 4 سنوات يوزّع الكلفة على عدة مواسم.</a:t>
+            </a:r>
+            <a:endParaRPr lang="en-US" sz="1350" dirty="0"/>
+          </a:p>
+        </p:txBody>
+      </p:sp>
+      <p:sp>
+        <p:nvSpPr>
+          <p:cNvPr id="8" name="Shape 6"/>
+          <p:cNvSpPr/>
+          <p:nvPr/>
+        </p:nvSpPr>
+        <p:spPr>
+          <a:xfrm>
+            <a:off x="594360" y="4846320"/>
+            <a:ext cx="11002975" cy="960120"/>
+          </a:xfrm>
+          <a:prstGeom prst="roundRect">
+            <a:avLst>
+              <a:gd name="adj" fmla="val 7619"/>
+            </a:avLst>
+          </a:prstGeom>
+          <a:solidFill>
+            <a:srgbClr val="F2F1E8"/>
+          </a:solidFill>
+          <a:ln w="9525">
+            <a:solidFill>
+              <a:srgbClr val="E0DFD0"/>
+            </a:solidFill>
+            <a:prstDash val="solid"/>
+          </a:ln>
+        </p:spPr>
+      </p:sp>
+      <p:sp>
+        <p:nvSpPr>
+          <p:cNvPr id="9" name="Text 7"/>
+          <p:cNvSpPr txBox="1"/>
+          <p:nvPr/>
+        </p:nvSpPr>
+        <p:spPr>
+          <a:xfrm>
+            <a:off x="822960" y="4983480"/>
+            <a:ext cx="10545775" cy="713232"/>
+          </a:xfrm>
+          <a:prstGeom prst="rect">
+            <a:avLst/>
+          </a:prstGeom>
+          <a:noFill/>
+          <a:ln/>
+        </p:spPr>
+        <p:txBody>
+          <a:bodyPr wrap="square" lIns="0" tIns="0" rIns="0" bIns="0" rtlCol="0" anchor="t"/>
+          <a:lstStyle/>
+          <a:p>
+            <a:pPr rtl="1" algn="r" indent="0" marL="0">
+              <a:lnSpc>
+                <a:spcPct val="118000"/>
+              </a:lnSpc>
+              <a:buNone/>
+            </a:pPr>
+            <a:r>
+              <a:rPr lang="en-US" sz="1100" dirty="0">
+                <a:solidFill>
+                  <a:srgbClr val="6F7D71"/>
+                </a:solidFill>
+                <a:latin typeface="Arial" pitchFamily="34" charset="0"/>
+                <a:ea typeface="Arial" pitchFamily="34" charset="-122"/>
+                <a:cs typeface="Arial" pitchFamily="34" charset="-120"/>
+              </a:rPr>
+              <a:t>تحليل الأكريلاميد (مختبر Polymex، ISO 9001، بتركيز أقل من 3,0 ميكروغرام/غرام) وفحص REACH / SVHC (SGS) وشهادة SOHISCERT السارية حتى 4 سبتمبر 2027: متاحة جميعها عند الطلب.</a:t>
+            </a:r>
+            <a:endParaRPr lang="en-US" sz="1100" dirty="0"/>
+          </a:p>
+        </p:txBody>
+      </p:sp>
+      <p:sp>
+        <p:nvSpPr>
+          <p:cNvPr id="10" name="Text 8"/>
+          <p:cNvSpPr txBox="1"/>
+          <p:nvPr/>
+        </p:nvSpPr>
+        <p:spPr>
+          <a:xfrm>
+            <a:off x="502920" y="6382512"/>
+            <a:ext cx="8229600" cy="274320"/>
+          </a:xfrm>
+          <a:prstGeom prst="rect">
+            <a:avLst/>
+          </a:prstGeom>
+          <a:noFill/>
+          <a:ln/>
+        </p:spPr>
+        <p:txBody>
+          <a:bodyPr wrap="square" lIns="0" tIns="0" rIns="0" bIns="0" rtlCol="0" anchor="ctr"/>
+          <a:lstStyle/>
+          <a:p>
+            <a:pPr rtl="1" algn="r" indent="0" marL="0">
+              <a:buNone/>
+            </a:pPr>
+            <a:r>
+              <a:rPr lang="en-US" sz="950" dirty="0">
+                <a:solidFill>
+                  <a:srgbClr val="6F7D71">
+                    <a:alpha val="80000"/>
+                  </a:srgbClr>
+                </a:solidFill>
+                <a:latin typeface="Arial" pitchFamily="34" charset="0"/>
+                <a:ea typeface="Arial" pitchFamily="34" charset="-122"/>
+                <a:cs typeface="Arial" pitchFamily="34" charset="-120"/>
+              </a:rPr>
+              <a:t>Green Solutions · ملف السوق الزراعية الأردنية</a:t>
+            </a:r>
+            <a:endParaRPr lang="en-US" sz="950" dirty="0"/>
+          </a:p>
+        </p:txBody>
+      </p:sp>
+      <p:sp>
+        <p:nvSpPr>
+          <p:cNvPr id="11" name="Text 9"/>
+          <p:cNvSpPr txBox="1"/>
+          <p:nvPr/>
+        </p:nvSpPr>
+        <p:spPr>
+          <a:xfrm>
+            <a:off x="11140135" y="6382512"/>
+            <a:ext cx="548640" cy="274320"/>
+          </a:xfrm>
+          <a:prstGeom prst="rect">
+            <a:avLst/>
+          </a:prstGeom>
+          <a:noFill/>
+          <a:ln/>
+        </p:spPr>
+        <p:txBody>
+          <a:bodyPr wrap="square" lIns="0" tIns="0" rIns="0" bIns="0" rtlCol="0" anchor="ctr"/>
+          <a:lstStyle/>
+          <a:p>
+            <a:pPr rtl="1" algn="r" indent="0" marL="0">
+              <a:buNone/>
+            </a:pPr>
+            <a:r>
+              <a:rPr lang="en-US" sz="950" dirty="0">
+                <a:solidFill>
+                  <a:srgbClr val="6F7D71">
+                    <a:alpha val="80000"/>
+                  </a:srgbClr>
+                </a:solidFill>
+                <a:latin typeface="Arial" pitchFamily="34" charset="0"/>
+                <a:ea typeface="Arial" pitchFamily="34" charset="-122"/>
+                <a:cs typeface="Arial" pitchFamily="34" charset="-120"/>
+              </a:rPr>
+              <a:t>15</a:t>
+            </a:r>
+            <a:endParaRPr lang="en-US" sz="950" dirty="0"/>
+          </a:p>
+        </p:txBody>
+      </p:sp>
+    </p:spTree>
+  </p:cSld>
+  <p:clrMapOvr>
+    <a:masterClrMapping/>
+  </p:clrMapOvr>
+</p:sld>
+</file>
+
+<file path=ppt/slides/slide17.xml><?xml version="1.0" encoding="utf-8"?>
+<p:sld xmlns:a="http://schemas.openxmlformats.org/drawingml/2006/main" xmlns:r="http://schemas.openxmlformats.org/officeDocument/2006/relationships" xmlns:p="http://schemas.openxmlformats.org/presentationml/2006/main">
+  <p:cSld name="Slide 17">
+    <p:bg>
+      <p:bgPr>
+        <a:solidFill>
+          <a:srgbClr val="FCFAF5"/>
+        </a:solidFill>
+      </p:bgPr>
+    </p:bg>
+    <p:spTree>
+      <p:nvGrpSpPr>
+        <p:cNvPr id="1" name=""/>
+        <p:cNvGrpSpPr/>
+        <p:nvPr/>
+      </p:nvGrpSpPr>
+      <p:grpSpPr>
+        <a:xfrm>
+          <a:off x="0" y="0"/>
+          <a:ext cx="0" cy="0"/>
+          <a:chOff x="0" y="0"/>
+          <a:chExt cx="0" cy="0"/>
+        </a:xfrm>
+      </p:grpSpPr>
+      <p:sp>
+        <p:nvSpPr>
+          <p:cNvPr id="2" name="Text 0"/>
+          <p:cNvSpPr txBox="1"/>
+          <p:nvPr/>
+        </p:nvSpPr>
+        <p:spPr>
+          <a:xfrm>
+            <a:off x="594360" y="411480"/>
+            <a:ext cx="10515600" cy="274320"/>
+          </a:xfrm>
+          <a:prstGeom prst="rect">
+            <a:avLst/>
+          </a:prstGeom>
+          <a:noFill/>
+          <a:ln/>
+        </p:spPr>
+        <p:txBody>
+          <a:bodyPr wrap="square" lIns="0" tIns="0" rIns="0" bIns="0" rtlCol="0" anchor="ctr"/>
+          <a:lstStyle/>
+          <a:p>
+            <a:pPr rtl="1" algn="r" indent="0" marL="0">
+              <a:buNone/>
+            </a:pPr>
+            <a:r>
+              <a:rPr lang="en-US" sz="1150" b="1" spc="200" kern="0" dirty="0">
+                <a:solidFill>
+                  <a:srgbClr val="D9A441"/>
+                </a:solidFill>
+                <a:latin typeface="Arial" pitchFamily="34" charset="0"/>
+                <a:ea typeface="Arial" pitchFamily="34" charset="-122"/>
+                <a:cs typeface="Arial" pitchFamily="34" charset="-120"/>
+              </a:rPr>
+              <a:t>المصادر</a:t>
+            </a:r>
+            <a:endParaRPr lang="en-US" sz="1150" dirty="0"/>
+          </a:p>
+        </p:txBody>
+      </p:sp>
+      <p:sp>
+        <p:nvSpPr>
+          <p:cNvPr id="3" name="Text 1"/>
+          <p:cNvSpPr txBox="1"/>
+          <p:nvPr/>
+        </p:nvSpPr>
+        <p:spPr>
+          <a:xfrm>
+            <a:off x="594360" y="731520"/>
+            <a:ext cx="10881360" cy="731520"/>
+          </a:xfrm>
+          <a:prstGeom prst="rect">
+            <a:avLst/>
+          </a:prstGeom>
+          <a:noFill/>
+          <a:ln/>
+        </p:spPr>
+        <p:txBody>
+          <a:bodyPr wrap="square" lIns="0" tIns="0" rIns="0" bIns="0" rtlCol="0" anchor="ctr"/>
+          <a:lstStyle/>
+          <a:p>
+            <a:pPr rtl="1" algn="r" indent="0" marL="0">
+              <a:buNone/>
+            </a:pPr>
+            <a:r>
+              <a:rPr lang="en-US" sz="3000" b="1" dirty="0">
+                <a:solidFill>
+                  <a:srgbClr val="16412B"/>
+                </a:solidFill>
+                <a:latin typeface="Arial" pitchFamily="34" charset="0"/>
+                <a:ea typeface="Arial" pitchFamily="34" charset="-122"/>
+                <a:cs typeface="Arial" pitchFamily="34" charset="-120"/>
+              </a:rPr>
+              <a:t>المصادر وافتراضات العمل</a:t>
+            </a:r>
+            <a:endParaRPr lang="en-US" sz="3000" dirty="0"/>
+          </a:p>
+        </p:txBody>
+      </p:sp>
+      <p:sp>
+        <p:nvSpPr>
+          <p:cNvPr id="4" name="Text 2"/>
+          <p:cNvSpPr txBox="1"/>
+          <p:nvPr/>
+        </p:nvSpPr>
+        <p:spPr>
+          <a:xfrm>
+            <a:off x="594360" y="1783080"/>
+            <a:ext cx="5227168" cy="411480"/>
+          </a:xfrm>
+          <a:prstGeom prst="rect">
+            <a:avLst/>
+          </a:prstGeom>
+          <a:noFill/>
+          <a:ln/>
+        </p:spPr>
+        <p:txBody>
+          <a:bodyPr wrap="square" lIns="0" tIns="0" rIns="0" bIns="0" rtlCol="0" anchor="ctr"/>
+          <a:lstStyle/>
+          <a:p>
+            <a:pPr rtl="1" algn="r" indent="0" marL="0">
+              <a:buNone/>
+            </a:pPr>
+            <a:r>
+              <a:rPr lang="en-US" sz="1600" b="1" dirty="0">
+                <a:solidFill>
+                  <a:srgbClr val="2C6E49"/>
+                </a:solidFill>
+                <a:latin typeface="Arial" pitchFamily="34" charset="0"/>
+                <a:ea typeface="Arial" pitchFamily="34" charset="-122"/>
+                <a:cs typeface="Arial" pitchFamily="34" charset="-120"/>
+              </a:rPr>
+              <a:t>المصادر الرئيسية</a:t>
+            </a:r>
+            <a:endParaRPr lang="en-US" sz="1600" dirty="0"/>
+          </a:p>
+        </p:txBody>
+      </p:sp>
+      <p:sp>
+        <p:nvSpPr>
+          <p:cNvPr id="5" name="Text 3"/>
+          <p:cNvSpPr txBox="1"/>
+          <p:nvPr/>
+        </p:nvSpPr>
+        <p:spPr>
+          <a:xfrm>
+            <a:off x="594360" y="2286000"/>
+            <a:ext cx="5227168" cy="2468880"/>
+          </a:xfrm>
+          <a:prstGeom prst="rect">
+            <a:avLst/>
+          </a:prstGeom>
+          <a:noFill/>
+          <a:ln/>
+        </p:spPr>
+        <p:txBody>
+          <a:bodyPr wrap="square" lIns="0" tIns="0" rIns="0" bIns="0" rtlCol="0" anchor="t"/>
+          <a:lstStyle/>
+          <a:p>
+            <a:pPr algn="r" marL="342900" indent="-342900">
+              <a:lnSpc>
+                <a:spcPct val="122000"/>
+              </a:lnSpc>
+              <a:spcAft>
+                <a:spcPts val="1000"/>
+              </a:spcAft>
+              <a:buSzPct val="100000"/>
+              <a:buChar char="•"/>
+            </a:pPr>
+            <a:r>
+              <a:rPr lang="en-US" sz="1350" dirty="0">
+                <a:solidFill>
+                  <a:srgbClr val="364239"/>
+                </a:solidFill>
+                <a:latin typeface="Arial" pitchFamily="34" charset="0"/>
+                <a:ea typeface="Arial" pitchFamily="34" charset="-122"/>
+                <a:cs typeface="Arial" pitchFamily="34" charset="-120"/>
+              </a:rPr>
+              <a:t>دائرة الإحصاءات العامة: الناتج المحلي الإجمالي والمسوح الزراعية.</a:t>
+            </a:r>
+            <a:endParaRPr lang="en-US" sz="1350" dirty="0"/>
+          </a:p>
+          <a:p>
+            <a:pPr algn="r" marL="342900" indent="-342900">
+              <a:lnSpc>
+                <a:spcPct val="122000"/>
+              </a:lnSpc>
+              <a:spcAft>
+                <a:spcPts val="1000"/>
+              </a:spcAft>
+              <a:buSzPct val="100000"/>
+              <a:buChar char="•"/>
+            </a:pPr>
+            <a:r>
+              <a:rPr lang="en-US" sz="1350" dirty="0">
+                <a:solidFill>
+                  <a:srgbClr val="364239"/>
+                </a:solidFill>
+                <a:latin typeface="Arial" pitchFamily="34" charset="0"/>
+                <a:ea typeface="Arial" pitchFamily="34" charset="-122"/>
+                <a:cs typeface="Arial" pitchFamily="34" charset="-120"/>
+              </a:rPr>
+              <a:t>وزارة الزراعة: الاستراتيجية الوطنية للتنمية الزراعية وإحصاءات الزيتون.</a:t>
+            </a:r>
+            <a:endParaRPr lang="en-US" sz="1350" dirty="0"/>
+          </a:p>
+          <a:p>
+            <a:pPr algn="r" marL="342900" indent="-342900">
+              <a:lnSpc>
+                <a:spcPct val="122000"/>
+              </a:lnSpc>
+              <a:spcAft>
+                <a:spcPts val="1000"/>
+              </a:spcAft>
+              <a:buSzPct val="100000"/>
+              <a:buChar char="•"/>
+            </a:pPr>
+            <a:r>
+              <a:rPr lang="en-US" sz="1350" dirty="0">
+                <a:solidFill>
+                  <a:srgbClr val="364239"/>
+                </a:solidFill>
+                <a:latin typeface="Arial" pitchFamily="34" charset="0"/>
+                <a:ea typeface="Arial" pitchFamily="34" charset="-122"/>
+                <a:cs typeface="Arial" pitchFamily="34" charset="-120"/>
+              </a:rPr>
+              <a:t>وزارة المياه والري وسلطة وادي الأردن: الاستراتيجية الوطنية للمياه وحصص الري.</a:t>
+            </a:r>
+            <a:endParaRPr lang="en-US" sz="1350" dirty="0"/>
+          </a:p>
+          <a:p>
+            <a:pPr algn="r" marL="342900" indent="-342900">
+              <a:lnSpc>
+                <a:spcPct val="122000"/>
+              </a:lnSpc>
+              <a:spcAft>
+                <a:spcPts val="1000"/>
+              </a:spcAft>
+              <a:buSzPct val="100000"/>
+              <a:buChar char="•"/>
+            </a:pPr>
+            <a:r>
+              <a:rPr lang="en-US" sz="1350" dirty="0">
+                <a:solidFill>
+                  <a:srgbClr val="364239"/>
+                </a:solidFill>
+                <a:latin typeface="Arial" pitchFamily="34" charset="0"/>
+                <a:ea typeface="Arial" pitchFamily="34" charset="-122"/>
+                <a:cs typeface="Arial" pitchFamily="34" charset="-120"/>
+              </a:rPr>
+              <a:t>منظمة الأغذية والزراعة (FAOSTAT وAQUASTAT) والبنك الدولي (WDI).</a:t>
+            </a:r>
+            <a:endParaRPr lang="en-US" sz="1350" dirty="0"/>
+          </a:p>
+        </p:txBody>
+      </p:sp>
+      <p:sp>
+        <p:nvSpPr>
+          <p:cNvPr id="6" name="Text 4"/>
+          <p:cNvSpPr txBox="1"/>
+          <p:nvPr/>
+        </p:nvSpPr>
+        <p:spPr>
+          <a:xfrm>
+            <a:off x="6370168" y="1783080"/>
+            <a:ext cx="5227168" cy="411480"/>
+          </a:xfrm>
+          <a:prstGeom prst="rect">
+            <a:avLst/>
+          </a:prstGeom>
+          <a:noFill/>
+          <a:ln/>
+        </p:spPr>
+        <p:txBody>
+          <a:bodyPr wrap="square" lIns="0" tIns="0" rIns="0" bIns="0" rtlCol="0" anchor="ctr"/>
+          <a:lstStyle/>
+          <a:p>
+            <a:pPr rtl="1" algn="r" indent="0" marL="0">
+              <a:buNone/>
+            </a:pPr>
+            <a:r>
+              <a:rPr lang="en-US" sz="1600" b="1" dirty="0">
+                <a:solidFill>
+                  <a:srgbClr val="2C6E49"/>
+                </a:solidFill>
+                <a:latin typeface="Arial" pitchFamily="34" charset="0"/>
+                <a:ea typeface="Arial" pitchFamily="34" charset="-122"/>
+                <a:cs typeface="Arial" pitchFamily="34" charset="-120"/>
+              </a:rPr>
+              <a:t>افتراضات العمل</a:t>
+            </a:r>
+            <a:endParaRPr lang="en-US" sz="1600" dirty="0"/>
+          </a:p>
+        </p:txBody>
+      </p:sp>
+      <p:sp>
+        <p:nvSpPr>
+          <p:cNvPr id="7" name="Text 5"/>
+          <p:cNvSpPr txBox="1"/>
+          <p:nvPr/>
+        </p:nvSpPr>
+        <p:spPr>
+          <a:xfrm>
+            <a:off x="6370168" y="2286000"/>
+            <a:ext cx="5227168" cy="2468880"/>
+          </a:xfrm>
+          <a:prstGeom prst="rect">
+            <a:avLst/>
+          </a:prstGeom>
+          <a:noFill/>
+          <a:ln/>
+        </p:spPr>
+        <p:txBody>
+          <a:bodyPr wrap="square" lIns="0" tIns="0" rIns="0" bIns="0" rtlCol="0" anchor="t"/>
+          <a:lstStyle/>
+          <a:p>
+            <a:pPr algn="r" marL="342900" indent="-342900">
+              <a:lnSpc>
+                <a:spcPct val="122000"/>
+              </a:lnSpc>
+              <a:spcAft>
+                <a:spcPts val="1000"/>
+              </a:spcAft>
+              <a:buSzPct val="100000"/>
+              <a:buChar char="•"/>
+            </a:pPr>
+            <a:r>
+              <a:rPr lang="en-US" sz="1350" dirty="0">
+                <a:solidFill>
+                  <a:srgbClr val="364239"/>
+                </a:solidFill>
+                <a:latin typeface="Arial" pitchFamily="34" charset="0"/>
+                <a:ea typeface="Arial" pitchFamily="34" charset="-122"/>
+                <a:cs typeface="Arial" pitchFamily="34" charset="-120"/>
+              </a:rPr>
+              <a:t>الأرقام رتب حجم مقرّبة، مأخوذة من أحدث البيانات العامة المتاحة.</a:t>
+            </a:r>
+            <a:endParaRPr lang="en-US" sz="1350" dirty="0"/>
+          </a:p>
+          <a:p>
+            <a:pPr algn="r" marL="342900" indent="-342900">
+              <a:lnSpc>
+                <a:spcPct val="122000"/>
+              </a:lnSpc>
+              <a:spcAft>
+                <a:spcPts val="1000"/>
+              </a:spcAft>
+              <a:buSzPct val="100000"/>
+              <a:buChar char="•"/>
+            </a:pPr>
+            <a:r>
+              <a:rPr lang="en-US" sz="1350" dirty="0">
+                <a:solidFill>
+                  <a:srgbClr val="364239"/>
+                </a:solidFill>
+                <a:latin typeface="Arial" pitchFamily="34" charset="0"/>
+                <a:ea typeface="Arial" pitchFamily="34" charset="-122"/>
+                <a:cs typeface="Arial" pitchFamily="34" charset="-120"/>
+              </a:rPr>
+              <a:t>توفير الماء وزيادة الإنتاج أرقام استرشادية تتغير بحسب التربة والمناخ والمحصول.</a:t>
+            </a:r>
+            <a:endParaRPr lang="en-US" sz="1350" dirty="0"/>
+          </a:p>
+          <a:p>
+            <a:pPr algn="r" marL="342900" indent="-342900">
+              <a:lnSpc>
+                <a:spcPct val="122000"/>
+              </a:lnSpc>
+              <a:spcAft>
+                <a:spcPts val="1000"/>
+              </a:spcAft>
+              <a:buSzPct val="100000"/>
+              <a:buChar char="•"/>
+            </a:pPr>
+            <a:r>
+              <a:rPr lang="en-US" sz="1350" dirty="0">
+                <a:solidFill>
+                  <a:srgbClr val="364239"/>
+                </a:solidFill>
+                <a:latin typeface="Arial" pitchFamily="34" charset="0"/>
+                <a:ea typeface="Arial" pitchFamily="34" charset="-122"/>
+                <a:cs typeface="Arial" pitchFamily="34" charset="-120"/>
+              </a:rPr>
+              <a:t>وثيقة عمل تجارية: تُحدَّث الأرقام قبل أي تقديم رسمي.</a:t>
+            </a:r>
+            <a:endParaRPr lang="en-US" sz="1350" dirty="0"/>
+          </a:p>
+        </p:txBody>
+      </p:sp>
+      <p:sp>
+        <p:nvSpPr>
+          <p:cNvPr id="8" name="Shape 6"/>
+          <p:cNvSpPr/>
+          <p:nvPr/>
+        </p:nvSpPr>
+        <p:spPr>
+          <a:xfrm>
+            <a:off x="594360" y="4846320"/>
+            <a:ext cx="11002975" cy="960120"/>
+          </a:xfrm>
+          <a:prstGeom prst="roundRect">
+            <a:avLst>
+              <a:gd name="adj" fmla="val 7619"/>
+            </a:avLst>
+          </a:prstGeom>
+          <a:solidFill>
+            <a:srgbClr val="F2F1E8"/>
+          </a:solidFill>
+          <a:ln w="9525">
+            <a:solidFill>
+              <a:srgbClr val="E0DFD0"/>
+            </a:solidFill>
+            <a:prstDash val="solid"/>
+          </a:ln>
+        </p:spPr>
+      </p:sp>
+      <p:sp>
+        <p:nvSpPr>
+          <p:cNvPr id="9" name="Text 7"/>
+          <p:cNvSpPr txBox="1"/>
+          <p:nvPr/>
+        </p:nvSpPr>
+        <p:spPr>
+          <a:xfrm>
+            <a:off x="822960" y="4983480"/>
+            <a:ext cx="10545775" cy="713232"/>
+          </a:xfrm>
+          <a:prstGeom prst="rect">
+            <a:avLst/>
+          </a:prstGeom>
+          <a:noFill/>
+          <a:ln/>
+        </p:spPr>
+        <p:txBody>
+          <a:bodyPr wrap="square" lIns="0" tIns="0" rIns="0" bIns="0" rtlCol="0" anchor="t"/>
+          <a:lstStyle/>
+          <a:p>
+            <a:pPr rtl="1" algn="r" indent="0" marL="0">
+              <a:lnSpc>
+                <a:spcPct val="118000"/>
+              </a:lnSpc>
+              <a:buNone/>
+            </a:pPr>
+            <a:r>
+              <a:rPr lang="en-US" sz="1100" dirty="0">
+                <a:solidFill>
+                  <a:srgbClr val="6F7D71"/>
+                </a:solidFill>
+                <a:latin typeface="Arial" pitchFamily="34" charset="0"/>
+                <a:ea typeface="Arial" pitchFamily="34" charset="-122"/>
+                <a:cs typeface="Arial" pitchFamily="34" charset="-120"/>
+              </a:rPr>
+              <a:t>تقارير التجارب والشهادات (SOHISCERT، وتحاليل Polymex وSGS) والنشرات الفنية متاحة عند الطلب.</a:t>
+            </a:r>
+            <a:endParaRPr lang="en-US" sz="1100" dirty="0"/>
+          </a:p>
+        </p:txBody>
+      </p:sp>
+      <p:sp>
+        <p:nvSpPr>
+          <p:cNvPr id="10" name="Text 8"/>
+          <p:cNvSpPr txBox="1"/>
+          <p:nvPr/>
+        </p:nvSpPr>
+        <p:spPr>
+          <a:xfrm>
+            <a:off x="502920" y="6382512"/>
+            <a:ext cx="8229600" cy="274320"/>
+          </a:xfrm>
+          <a:prstGeom prst="rect">
+            <a:avLst/>
+          </a:prstGeom>
+          <a:noFill/>
+          <a:ln/>
+        </p:spPr>
+        <p:txBody>
+          <a:bodyPr wrap="square" lIns="0" tIns="0" rIns="0" bIns="0" rtlCol="0" anchor="ctr"/>
+          <a:lstStyle/>
+          <a:p>
+            <a:pPr rtl="1" algn="r" indent="0" marL="0">
+              <a:buNone/>
+            </a:pPr>
+            <a:r>
+              <a:rPr lang="en-US" sz="950" dirty="0">
+                <a:solidFill>
+                  <a:srgbClr val="6F7D71">
+                    <a:alpha val="80000"/>
+                  </a:srgbClr>
+                </a:solidFill>
+                <a:latin typeface="Arial" pitchFamily="34" charset="0"/>
+                <a:ea typeface="Arial" pitchFamily="34" charset="-122"/>
+                <a:cs typeface="Arial" pitchFamily="34" charset="-120"/>
+              </a:rPr>
+              <a:t>Green Solutions · ملف السوق الزراعية الأردنية</a:t>
+            </a:r>
+            <a:endParaRPr lang="en-US" sz="950" dirty="0"/>
+          </a:p>
+        </p:txBody>
+      </p:sp>
+      <p:sp>
+        <p:nvSpPr>
+          <p:cNvPr id="11" name="Text 9"/>
+          <p:cNvSpPr txBox="1"/>
+          <p:nvPr/>
+        </p:nvSpPr>
+        <p:spPr>
+          <a:xfrm>
+            <a:off x="11140135" y="6382512"/>
+            <a:ext cx="548640" cy="274320"/>
+          </a:xfrm>
+          <a:prstGeom prst="rect">
+            <a:avLst/>
+          </a:prstGeom>
+          <a:noFill/>
+          <a:ln/>
+        </p:spPr>
+        <p:txBody>
+          <a:bodyPr wrap="square" lIns="0" tIns="0" rIns="0" bIns="0" rtlCol="0" anchor="ctr"/>
+          <a:lstStyle/>
+          <a:p>
+            <a:pPr rtl="1" algn="r" indent="0" marL="0">
+              <a:buNone/>
+            </a:pPr>
+            <a:r>
+              <a:rPr lang="en-US" sz="950" dirty="0">
+                <a:solidFill>
+                  <a:srgbClr val="6F7D71">
+                    <a:alpha val="80000"/>
+                  </a:srgbClr>
+                </a:solidFill>
+                <a:latin typeface="Arial" pitchFamily="34" charset="0"/>
+                <a:ea typeface="Arial" pitchFamily="34" charset="-122"/>
+                <a:cs typeface="Arial" pitchFamily="34" charset="-120"/>
+              </a:rPr>
+              <a:t>16</a:t>
+            </a:r>
+            <a:endParaRPr lang="en-US" sz="950" dirty="0"/>
+          </a:p>
+        </p:txBody>
+      </p:sp>
+    </p:spTree>
+  </p:cSld>
+  <p:clrMapOvr>
+    <a:masterClrMapping/>
+  </p:clrMapOvr>
+</p:sld>
+</file>
+
+<file path=ppt/slides/slide18.xml><?xml version="1.0" encoding="utf-8"?>
+<p:sld xmlns:a="http://schemas.openxmlformats.org/drawingml/2006/main" xmlns:r="http://schemas.openxmlformats.org/officeDocument/2006/relationships" xmlns:p="http://schemas.openxmlformats.org/presentationml/2006/main">
+  <p:cSld name="Slide 18">
     <p:spTree>
       <p:nvGrpSpPr>
         <p:cNvPr id="1" name=""/>
@@ -3944,7 +9643,7 @@
                 <a:ea typeface="Arial" pitchFamily="34" charset="-122"/>
                 <a:cs typeface="Arial" pitchFamily="34" charset="-120"/>
               </a:rPr>
-              <a:t>10</a:t>
+              <a:t>17</a:t>
             </a:r>
             <a:endParaRPr lang="en-US" sz="950" dirty="0"/>
           </a:p>
@@ -4775,7 +10474,7 @@
               <a:buNone/>
             </a:pPr>
             <a:r>
-              <a:rPr lang="en-US" sz="1000" i="1" dirty="0">
+              <a:rPr lang="en-US" sz="1000" dirty="0">
                 <a:solidFill>
                   <a:srgbClr val="6F7D71"/>
                 </a:solidFill>
@@ -5423,7 +11122,7 @@
                 <a:ea typeface="Arial" pitchFamily="34" charset="-122"/>
                 <a:cs typeface="Arial" pitchFamily="34" charset="-120"/>
               </a:rPr>
-              <a:t>المحاصيل</a:t>
+              <a:t>الاقتصاد والأمن الغذائي</a:t>
             </a:r>
             <a:endParaRPr lang="en-US" sz="1150" dirty="0"/>
           </a:p>
@@ -5462,42 +11161,26 @@
                 <a:ea typeface="Arial" pitchFamily="34" charset="-122"/>
                 <a:cs typeface="Arial" pitchFamily="34" charset="-120"/>
               </a:rPr>
-              <a:t>خمسة محاصيل تشكّل عصب الإنتاج والتصدير</a:t>
+              <a:t>بلد يستورد حبوبه ويصدّر خضرواته</a:t>
             </a:r>
             <a:endParaRPr lang="en-US" sz="3000" dirty="0"/>
           </a:p>
         </p:txBody>
       </p:sp>
-      <p:graphicFrame>
-        <p:nvGraphicFramePr>
-          <p:cNvPr id="4" name="Chart 0" descr=""/>
-          <p:cNvGraphicFramePr/>
-          <p:nvPr/>
-        </p:nvGraphicFramePr>
-        <p:xfrm>
-          <a:off x="594360" y="1783080"/>
-          <a:ext cx="7360920" cy="3977640"/>
-        </p:xfrm>
-        <a:graphic xmlns:a="http://schemas.openxmlformats.org/drawingml/2006/main">
-          <a:graphicData uri="http://schemas.openxmlformats.org/drawingml/2006/chart">
-            <c:chart xmlns:c="http://schemas.openxmlformats.org/drawingml/2006/chart" r:id="rId1"/>
-          </a:graphicData>
-        </a:graphic>
-      </p:graphicFrame>
-      <p:sp>
-        <p:nvSpPr>
-          <p:cNvPr id="5" name="Shape 2"/>
+      <p:sp>
+        <p:nvSpPr>
+          <p:cNvPr id="4" name="Shape 2"/>
           <p:cNvSpPr/>
           <p:nvPr/>
         </p:nvSpPr>
         <p:spPr>
           <a:xfrm>
-            <a:off x="8275320" y="1783080"/>
-            <a:ext cx="3291840" cy="3977640"/>
+            <a:off x="594360" y="1874520"/>
+            <a:ext cx="3484778" cy="2514600"/>
           </a:xfrm>
           <a:prstGeom prst="roundRect">
             <a:avLst>
-              <a:gd name="adj" fmla="val 2778"/>
+              <a:gd name="adj" fmla="val 3636"/>
             </a:avLst>
           </a:prstGeom>
           <a:solidFill>
@@ -5513,14 +11196,14 @@
       </p:sp>
       <p:sp>
         <p:nvSpPr>
-          <p:cNvPr id="6" name="Text 3"/>
-          <p:cNvSpPr txBox="1"/>
-          <p:nvPr/>
-        </p:nvSpPr>
-        <p:spPr>
-          <a:xfrm>
-            <a:off x="8503920" y="2011680"/>
-            <a:ext cx="2834640" cy="457200"/>
+          <p:cNvPr id="5" name="Text 3"/>
+          <p:cNvSpPr txBox="1"/>
+          <p:nvPr/>
+        </p:nvSpPr>
+        <p:spPr>
+          <a:xfrm>
+            <a:off x="777240" y="2148840"/>
+            <a:ext cx="3119018" cy="960120"/>
           </a:xfrm>
           <a:prstGeom prst="rect">
             <a:avLst/>
@@ -5532,11 +11215,11 @@
           <a:bodyPr wrap="square" lIns="0" tIns="0" rIns="0" bIns="0" rtlCol="0" anchor="ctr"/>
           <a:lstStyle/>
           <a:p>
-            <a:pPr rtl="1" algn="r" indent="0" marL="0">
-              <a:buNone/>
-            </a:pPr>
-            <a:r>
-              <a:rPr lang="en-US" sz="1300" b="1" dirty="0">
+            <a:pPr rtl="1" algn="ctr" indent="0" marL="0">
+              <a:buNone/>
+            </a:pPr>
+            <a:r>
+              <a:rPr lang="en-US" sz="3800" b="1" dirty="0">
                 <a:solidFill>
                   <a:srgbClr val="2C6E49"/>
                 </a:solidFill>
@@ -5544,22 +11227,280 @@
                 <a:ea typeface="Arial" pitchFamily="34" charset="-122"/>
                 <a:cs typeface="Arial" pitchFamily="34" charset="-120"/>
               </a:rPr>
-              <a:t>قراءة</a:t>
-            </a:r>
-            <a:endParaRPr lang="en-US" sz="1300" dirty="0"/>
-          </a:p>
-        </p:txBody>
-      </p:sp>
-      <p:sp>
-        <p:nvSpPr>
-          <p:cNvPr id="7" name="Text 4"/>
-          <p:cNvSpPr txBox="1"/>
-          <p:nvPr/>
-        </p:nvSpPr>
-        <p:spPr>
-          <a:xfrm>
-            <a:off x="8503920" y="2560320"/>
-            <a:ext cx="2834640" cy="3017520"/>
+              <a:t>&gt; 90 %</a:t>
+            </a:r>
+            <a:endParaRPr lang="en-US" sz="3800" dirty="0"/>
+          </a:p>
+        </p:txBody>
+      </p:sp>
+      <p:sp>
+        <p:nvSpPr>
+          <p:cNvPr id="6" name="Text 4"/>
+          <p:cNvSpPr txBox="1"/>
+          <p:nvPr/>
+        </p:nvSpPr>
+        <p:spPr>
+          <a:xfrm>
+            <a:off x="795528" y="3154680"/>
+            <a:ext cx="3082442" cy="1051560"/>
+          </a:xfrm>
+          <a:prstGeom prst="rect">
+            <a:avLst/>
+          </a:prstGeom>
+          <a:noFill/>
+          <a:ln/>
+        </p:spPr>
+        <p:txBody>
+          <a:bodyPr wrap="square" lIns="0" tIns="0" rIns="0" bIns="0" rtlCol="0" anchor="t"/>
+          <a:lstStyle/>
+          <a:p>
+            <a:pPr rtl="1" algn="ctr" indent="0" marL="0">
+              <a:lnSpc>
+                <a:spcPct val="118000"/>
+              </a:lnSpc>
+              <a:buNone/>
+            </a:pPr>
+            <a:r>
+              <a:rPr lang="en-US" sz="1250" dirty="0">
+                <a:solidFill>
+                  <a:srgbClr val="364239"/>
+                </a:solidFill>
+                <a:latin typeface="Arial" pitchFamily="34" charset="0"/>
+                <a:ea typeface="Arial" pitchFamily="34" charset="-122"/>
+                <a:cs typeface="Arial" pitchFamily="34" charset="-120"/>
+              </a:rPr>
+              <a:t>من القمح والحبوب المستهلكة مستوردة</a:t>
+            </a:r>
+            <a:endParaRPr lang="en-US" sz="1250" dirty="0"/>
+          </a:p>
+        </p:txBody>
+      </p:sp>
+      <p:sp>
+        <p:nvSpPr>
+          <p:cNvPr id="7" name="Shape 5"/>
+          <p:cNvSpPr/>
+          <p:nvPr/>
+        </p:nvSpPr>
+        <p:spPr>
+          <a:xfrm>
+            <a:off x="4353458" y="1874520"/>
+            <a:ext cx="3484778" cy="2514600"/>
+          </a:xfrm>
+          <a:prstGeom prst="roundRect">
+            <a:avLst>
+              <a:gd name="adj" fmla="val 3636"/>
+            </a:avLst>
+          </a:prstGeom>
+          <a:solidFill>
+            <a:srgbClr val="F2F1E8"/>
+          </a:solidFill>
+          <a:ln w="9525">
+            <a:solidFill>
+              <a:srgbClr val="E0DFD0"/>
+            </a:solidFill>
+            <a:prstDash val="solid"/>
+          </a:ln>
+        </p:spPr>
+      </p:sp>
+      <p:sp>
+        <p:nvSpPr>
+          <p:cNvPr id="8" name="Text 6"/>
+          <p:cNvSpPr txBox="1"/>
+          <p:nvPr/>
+        </p:nvSpPr>
+        <p:spPr>
+          <a:xfrm>
+            <a:off x="4536338" y="2148840"/>
+            <a:ext cx="3119018" cy="960120"/>
+          </a:xfrm>
+          <a:prstGeom prst="rect">
+            <a:avLst/>
+          </a:prstGeom>
+          <a:noFill/>
+          <a:ln/>
+        </p:spPr>
+        <p:txBody>
+          <a:bodyPr wrap="square" lIns="0" tIns="0" rIns="0" bIns="0" rtlCol="0" anchor="ctr"/>
+          <a:lstStyle/>
+          <a:p>
+            <a:pPr rtl="1" algn="ctr" indent="0" marL="0">
+              <a:buNone/>
+            </a:pPr>
+            <a:r>
+              <a:rPr lang="en-US" sz="3000" b="1" dirty="0">
+                <a:solidFill>
+                  <a:srgbClr val="2C6E49"/>
+                </a:solidFill>
+                <a:latin typeface="Arial" pitchFamily="34" charset="0"/>
+                <a:ea typeface="Arial" pitchFamily="34" charset="-122"/>
+                <a:cs typeface="Arial" pitchFamily="34" charset="-120"/>
+              </a:rPr>
+              <a:t>≈ 17 مليون</a:t>
+            </a:r>
+            <a:endParaRPr lang="en-US" sz="3000" dirty="0"/>
+          </a:p>
+        </p:txBody>
+      </p:sp>
+      <p:sp>
+        <p:nvSpPr>
+          <p:cNvPr id="9" name="Text 7"/>
+          <p:cNvSpPr txBox="1"/>
+          <p:nvPr/>
+        </p:nvSpPr>
+        <p:spPr>
+          <a:xfrm>
+            <a:off x="4554626" y="3154680"/>
+            <a:ext cx="3082442" cy="1051560"/>
+          </a:xfrm>
+          <a:prstGeom prst="rect">
+            <a:avLst/>
+          </a:prstGeom>
+          <a:noFill/>
+          <a:ln/>
+        </p:spPr>
+        <p:txBody>
+          <a:bodyPr wrap="square" lIns="0" tIns="0" rIns="0" bIns="0" rtlCol="0" anchor="t"/>
+          <a:lstStyle/>
+          <a:p>
+            <a:pPr rtl="1" algn="ctr" indent="0" marL="0">
+              <a:lnSpc>
+                <a:spcPct val="118000"/>
+              </a:lnSpc>
+              <a:buNone/>
+            </a:pPr>
+            <a:r>
+              <a:rPr lang="en-US" sz="1250" dirty="0">
+                <a:solidFill>
+                  <a:srgbClr val="364239"/>
+                </a:solidFill>
+                <a:latin typeface="Arial" pitchFamily="34" charset="0"/>
+                <a:ea typeface="Arial" pitchFamily="34" charset="-122"/>
+                <a:cs typeface="Arial" pitchFamily="34" charset="-120"/>
+              </a:rPr>
+              <a:t>شجرة زيتون، أهم شجرة مثمرة في المملكة</a:t>
+            </a:r>
+            <a:endParaRPr lang="en-US" sz="1250" dirty="0"/>
+          </a:p>
+        </p:txBody>
+      </p:sp>
+      <p:sp>
+        <p:nvSpPr>
+          <p:cNvPr id="10" name="Shape 8"/>
+          <p:cNvSpPr/>
+          <p:nvPr/>
+        </p:nvSpPr>
+        <p:spPr>
+          <a:xfrm>
+            <a:off x="8112557" y="1874520"/>
+            <a:ext cx="3484778" cy="2514600"/>
+          </a:xfrm>
+          <a:prstGeom prst="roundRect">
+            <a:avLst>
+              <a:gd name="adj" fmla="val 3636"/>
+            </a:avLst>
+          </a:prstGeom>
+          <a:solidFill>
+            <a:srgbClr val="F2F1E8"/>
+          </a:solidFill>
+          <a:ln w="9525">
+            <a:solidFill>
+              <a:srgbClr val="E0DFD0"/>
+            </a:solidFill>
+            <a:prstDash val="solid"/>
+          </a:ln>
+        </p:spPr>
+      </p:sp>
+      <p:sp>
+        <p:nvSpPr>
+          <p:cNvPr id="11" name="Text 9"/>
+          <p:cNvSpPr txBox="1"/>
+          <p:nvPr/>
+        </p:nvSpPr>
+        <p:spPr>
+          <a:xfrm>
+            <a:off x="8295437" y="2148840"/>
+            <a:ext cx="3119018" cy="960120"/>
+          </a:xfrm>
+          <a:prstGeom prst="rect">
+            <a:avLst/>
+          </a:prstGeom>
+          <a:noFill/>
+          <a:ln/>
+        </p:spPr>
+        <p:txBody>
+          <a:bodyPr wrap="square" lIns="0" tIns="0" rIns="0" bIns="0" rtlCol="0" anchor="ctr"/>
+          <a:lstStyle/>
+          <a:p>
+            <a:pPr rtl="1" algn="ctr" indent="0" marL="0">
+              <a:buNone/>
+            </a:pPr>
+            <a:r>
+              <a:rPr lang="en-US" sz="3800" b="1" dirty="0">
+                <a:solidFill>
+                  <a:srgbClr val="2C6E49"/>
+                </a:solidFill>
+                <a:latin typeface="Arial" pitchFamily="34" charset="0"/>
+                <a:ea typeface="Arial" pitchFamily="34" charset="-122"/>
+                <a:cs typeface="Arial" pitchFamily="34" charset="-120"/>
+              </a:rPr>
+              <a:t>≈ 2 %</a:t>
+            </a:r>
+            <a:endParaRPr lang="en-US" sz="3800" dirty="0"/>
+          </a:p>
+        </p:txBody>
+      </p:sp>
+      <p:sp>
+        <p:nvSpPr>
+          <p:cNvPr id="12" name="Text 10"/>
+          <p:cNvSpPr txBox="1"/>
+          <p:nvPr/>
+        </p:nvSpPr>
+        <p:spPr>
+          <a:xfrm>
+            <a:off x="8313725" y="3154680"/>
+            <a:ext cx="3082442" cy="1051560"/>
+          </a:xfrm>
+          <a:prstGeom prst="rect">
+            <a:avLst/>
+          </a:prstGeom>
+          <a:noFill/>
+          <a:ln/>
+        </p:spPr>
+        <p:txBody>
+          <a:bodyPr wrap="square" lIns="0" tIns="0" rIns="0" bIns="0" rtlCol="0" anchor="t"/>
+          <a:lstStyle/>
+          <a:p>
+            <a:pPr rtl="1" algn="ctr" indent="0" marL="0">
+              <a:lnSpc>
+                <a:spcPct val="118000"/>
+              </a:lnSpc>
+              <a:buNone/>
+            </a:pPr>
+            <a:r>
+              <a:rPr lang="en-US" sz="1250" dirty="0">
+                <a:solidFill>
+                  <a:srgbClr val="364239"/>
+                </a:solidFill>
+                <a:latin typeface="Arial" pitchFamily="34" charset="0"/>
+                <a:ea typeface="Arial" pitchFamily="34" charset="-122"/>
+                <a:cs typeface="Arial" pitchFamily="34" charset="-120"/>
+              </a:rPr>
+              <a:t>من مساحة المملكة أراضٍ صالحة للزراعة</a:t>
+            </a:r>
+            <a:endParaRPr lang="en-US" sz="1250" dirty="0"/>
+          </a:p>
+        </p:txBody>
+      </p:sp>
+      <p:sp>
+        <p:nvSpPr>
+          <p:cNvPr id="13" name="Text 11"/>
+          <p:cNvSpPr txBox="1"/>
+          <p:nvPr/>
+        </p:nvSpPr>
+        <p:spPr>
+          <a:xfrm>
+            <a:off x="594360" y="4709160"/>
+            <a:ext cx="11002975" cy="1097280"/>
           </a:xfrm>
           <a:prstGeom prst="rect">
             <a:avLst/>
@@ -5573,12 +11514,12 @@
           <a:p>
             <a:pPr rtl="1" algn="r" indent="0" marL="0">
               <a:lnSpc>
-                <a:spcPct val="125000"/>
+                <a:spcPct val="130000"/>
               </a:lnSpc>
               <a:buNone/>
             </a:pPr>
             <a:r>
-              <a:rPr lang="en-US" sz="1200" dirty="0">
+              <a:rPr lang="en-US" sz="1350" dirty="0">
                 <a:solidFill>
                   <a:srgbClr val="364239"/>
                 </a:solidFill>
@@ -5586,44 +11527,15 @@
                 <a:ea typeface="Arial" pitchFamily="34" charset="-122"/>
                 <a:cs typeface="Arial" pitchFamily="34" charset="-120"/>
               </a:rPr>
-              <a:t>الطماطم والخيار محصولان مرويان موجّهان أساساً إلى أسواق الخليج: فيهما يتحوّل توفير الماء مباشرة إلى هامش.</a:t>
-            </a:r>
-            <a:endParaRPr lang="en-US" sz="1200" dirty="0"/>
-          </a:p>
-          <a:p>
-            <a:pPr rtl="1" algn="r" indent="0" marL="0">
-              <a:lnSpc>
-                <a:spcPct val="125000"/>
-              </a:lnSpc>
-              <a:buNone/>
-            </a:pPr>
-            <a:endParaRPr lang="en-US" sz="1200" dirty="0"/>
-          </a:p>
-          <a:p>
-            <a:pPr rtl="1" algn="r" indent="0" marL="0">
-              <a:lnSpc>
-                <a:spcPct val="125000"/>
-              </a:lnSpc>
-              <a:buNone/>
-            </a:pPr>
-            <a:r>
-              <a:rPr lang="en-US" sz="1200" dirty="0">
-                <a:solidFill>
-                  <a:srgbClr val="364239"/>
-                </a:solidFill>
-                <a:latin typeface="Arial" pitchFamily="34" charset="0"/>
-                <a:ea typeface="Arial" pitchFamily="34" charset="-122"/>
-                <a:cs typeface="Arial" pitchFamily="34" charset="-120"/>
-              </a:rPr>
-              <a:t>* إنتاج الزيتون يتذبذب بين موسم وآخر بحكم المعاومة. أما تمور المجهول فحجمها أصغر (نحو 35 ألف طن) لكن قيمتها التصديرية للطن هي الأعلى.</a:t>
-            </a:r>
-            <a:endParaRPr lang="en-US" sz="1200" dirty="0"/>
-          </a:p>
-        </p:txBody>
-      </p:sp>
-      <p:sp>
-        <p:nvSpPr>
-          <p:cNvPr id="8" name="Text 5"/>
+              <a:t>تتركز صادرات الأردن الزراعية في الخضروات والفواكه المتجهة أساساً إلى أسواق الخليج، بينما يعتمد على الخارج في القمح والأعلاف. وتضع الاستراتيجية الوطنية للمياه إعادة استخدام المياه المعالجة وترشيد الري في قلب أي توسع زراعي.</a:t>
+            </a:r>
+            <a:endParaRPr lang="en-US" sz="1350" dirty="0"/>
+          </a:p>
+        </p:txBody>
+      </p:sp>
+      <p:sp>
+        <p:nvSpPr>
+          <p:cNvPr id="14" name="Text 12"/>
           <p:cNvSpPr txBox="1"/>
           <p:nvPr/>
         </p:nvSpPr>
@@ -5664,7 +11576,7 @@
       </p:sp>
       <p:sp>
         <p:nvSpPr>
-          <p:cNvPr id="9" name="Text 6"/>
+          <p:cNvPr id="15" name="Text 13"/>
           <p:cNvSpPr txBox="1"/>
           <p:nvPr/>
         </p:nvSpPr>
@@ -5768,7 +11680,7 @@
                 <a:ea typeface="Arial" pitchFamily="34" charset="-122"/>
                 <a:cs typeface="Arial" pitchFamily="34" charset="-120"/>
               </a:rPr>
-              <a:t>استجابتنا</a:t>
+              <a:t>المحاصيل</a:t>
             </a:r>
             <a:endParaRPr lang="en-US" sz="1150" dirty="0"/>
           </a:p>
@@ -5807,340 +11719,42 @@
                 <a:ea typeface="Arial" pitchFamily="34" charset="-122"/>
                 <a:cs typeface="Arial" pitchFamily="34" charset="-120"/>
               </a:rPr>
-              <a:t>تقنيتان لقيدين مختلفين</a:t>
+              <a:t>خمسة محاصيل تشكّل عصب الإنتاج والتصدير</a:t>
             </a:r>
             <a:endParaRPr lang="en-US" sz="3000" dirty="0"/>
           </a:p>
         </p:txBody>
       </p:sp>
-      <p:sp>
-        <p:nvSpPr>
-          <p:cNvPr id="4" name="Text 2"/>
-          <p:cNvSpPr txBox="1"/>
-          <p:nvPr/>
-        </p:nvSpPr>
-        <p:spPr>
-          <a:xfrm>
-            <a:off x="594360" y="1783080"/>
-            <a:ext cx="5227168" cy="411480"/>
-          </a:xfrm>
-          <a:prstGeom prst="rect">
-            <a:avLst/>
-          </a:prstGeom>
-          <a:noFill/>
-          <a:ln/>
-        </p:spPr>
-        <p:txBody>
-          <a:bodyPr wrap="square" lIns="0" tIns="0" rIns="0" bIns="0" rtlCol="0" anchor="ctr"/>
-          <a:lstStyle/>
-          <a:p>
-            <a:pPr rtl="1" algn="r" indent="0" marL="0">
-              <a:buNone/>
-            </a:pPr>
-            <a:r>
-              <a:rPr lang="en-US" sz="1600" b="1" dirty="0">
-                <a:solidFill>
-                  <a:srgbClr val="2C6E49"/>
-                </a:solidFill>
-                <a:latin typeface="Arial" pitchFamily="34" charset="0"/>
-                <a:ea typeface="Arial" pitchFamily="34" charset="-122"/>
-                <a:cs typeface="Arial" pitchFamily="34" charset="-120"/>
-              </a:rPr>
-              <a:t>EVERGREEN® — الاحتفاظ بالماء</a:t>
-            </a:r>
-            <a:endParaRPr lang="en-US" sz="1600" dirty="0"/>
-          </a:p>
-        </p:txBody>
-      </p:sp>
-      <p:sp>
-        <p:nvSpPr>
-          <p:cNvPr id="5" name="Text 3"/>
-          <p:cNvSpPr txBox="1"/>
-          <p:nvPr/>
-        </p:nvSpPr>
-        <p:spPr>
-          <a:xfrm>
-            <a:off x="594360" y="2286000"/>
-            <a:ext cx="5227168" cy="2468880"/>
-          </a:xfrm>
-          <a:prstGeom prst="rect">
-            <a:avLst/>
-          </a:prstGeom>
-          <a:noFill/>
-          <a:ln/>
-        </p:spPr>
-        <p:txBody>
-          <a:bodyPr wrap="square" lIns="0" tIns="0" rIns="0" bIns="0" rtlCol="0" anchor="t"/>
-          <a:lstStyle/>
-          <a:p>
-            <a:pPr algn="r" marL="342900" indent="-342900">
-              <a:lnSpc>
-                <a:spcPct val="122000"/>
-              </a:lnSpc>
-              <a:spcAft>
-                <a:spcPts val="1000"/>
-              </a:spcAft>
-              <a:buSzPct val="100000"/>
-              <a:buChar char="•"/>
-            </a:pPr>
-            <a:r>
-              <a:rPr lang="en-US" sz="1350" dirty="0">
-                <a:solidFill>
-                  <a:srgbClr val="364239"/>
-                </a:solidFill>
-                <a:latin typeface="Arial" pitchFamily="34" charset="0"/>
-                <a:ea typeface="Arial" pitchFamily="34" charset="-122"/>
-                <a:cs typeface="Arial" pitchFamily="34" charset="-120"/>
-              </a:rPr>
-              <a:t>مادة محتفظة بالماء أساسها البوتاسيوم، توضع في منطقة الجذور عند الزراعة أو عند التجديد.</a:t>
-            </a:r>
-            <a:endParaRPr lang="en-US" sz="1350" dirty="0"/>
-          </a:p>
-          <a:p>
-            <a:pPr algn="r" marL="342900" indent="-342900">
-              <a:lnSpc>
-                <a:spcPct val="122000"/>
-              </a:lnSpc>
-              <a:spcAft>
-                <a:spcPts val="1000"/>
-              </a:spcAft>
-              <a:buSzPct val="100000"/>
-              <a:buChar char="•"/>
-            </a:pPr>
-            <a:r>
-              <a:rPr lang="en-US" sz="1350" dirty="0">
-                <a:solidFill>
-                  <a:srgbClr val="364239"/>
-                </a:solidFill>
-                <a:latin typeface="Arial" pitchFamily="34" charset="0"/>
-                <a:ea typeface="Arial" pitchFamily="34" charset="-122"/>
-                <a:cs typeface="Arial" pitchFamily="34" charset="-120"/>
-              </a:rPr>
-              <a:t>تلتقط ماء المطر أو الري وتعيده إلى النبات تدريجياً، فتزيل الإجهاد المائي في المراحل الحرجة.</a:t>
-            </a:r>
-            <a:endParaRPr lang="en-US" sz="1350" dirty="0"/>
-          </a:p>
-          <a:p>
-            <a:pPr algn="r" marL="342900" indent="-342900">
-              <a:lnSpc>
-                <a:spcPct val="122000"/>
-              </a:lnSpc>
-              <a:spcAft>
-                <a:spcPts val="1000"/>
-              </a:spcAft>
-              <a:buSzPct val="100000"/>
-              <a:buChar char="•"/>
-            </a:pPr>
-            <a:r>
-              <a:rPr lang="en-US" sz="1350" dirty="0">
-                <a:solidFill>
-                  <a:srgbClr val="364239"/>
-                </a:solidFill>
-                <a:latin typeface="Arial" pitchFamily="34" charset="0"/>
-                <a:ea typeface="Arial" pitchFamily="34" charset="-122"/>
-                <a:cs typeface="Arial" pitchFamily="34" charset="-120"/>
-              </a:rPr>
-              <a:t>قدرة امتصاص تبلغ نحو 300 ضعف وزنها، ومدة أثر مفيد من 3 إلى 4 سنوات في التربة.</a:t>
-            </a:r>
-            <a:endParaRPr lang="en-US" sz="1350" dirty="0"/>
-          </a:p>
-          <a:p>
-            <a:pPr algn="r" marL="342900" indent="-342900">
-              <a:lnSpc>
-                <a:spcPct val="122000"/>
-              </a:lnSpc>
-              <a:spcAft>
-                <a:spcPts val="1000"/>
-              </a:spcAft>
-              <a:buSzPct val="100000"/>
-              <a:buChar char="•"/>
-            </a:pPr>
-            <a:r>
-              <a:rPr lang="en-US" sz="1350" dirty="0">
-                <a:solidFill>
-                  <a:srgbClr val="364239"/>
-                </a:solidFill>
-                <a:latin typeface="Arial" pitchFamily="34" charset="0"/>
-                <a:ea typeface="Arial" pitchFamily="34" charset="-122"/>
-                <a:cs typeface="Arial" pitchFamily="34" charset="-120"/>
-              </a:rPr>
-              <a:t>تتحلل بنسبة 20 إلى 25 % سنوياً، دون تراكم ودون خطر جرعة زائدة.</a:t>
-            </a:r>
-            <a:endParaRPr lang="en-US" sz="1350" dirty="0"/>
-          </a:p>
-        </p:txBody>
-      </p:sp>
-      <p:sp>
-        <p:nvSpPr>
-          <p:cNvPr id="6" name="Text 4"/>
-          <p:cNvSpPr txBox="1"/>
-          <p:nvPr/>
-        </p:nvSpPr>
-        <p:spPr>
-          <a:xfrm>
-            <a:off x="6370168" y="1783080"/>
-            <a:ext cx="5227168" cy="411480"/>
-          </a:xfrm>
-          <a:prstGeom prst="rect">
-            <a:avLst/>
-          </a:prstGeom>
-          <a:noFill/>
-          <a:ln/>
-        </p:spPr>
-        <p:txBody>
-          <a:bodyPr wrap="square" lIns="0" tIns="0" rIns="0" bIns="0" rtlCol="0" anchor="ctr"/>
-          <a:lstStyle/>
-          <a:p>
-            <a:pPr rtl="1" algn="r" indent="0" marL="0">
-              <a:buNone/>
-            </a:pPr>
-            <a:r>
-              <a:rPr lang="en-US" sz="1600" b="1" dirty="0">
-                <a:solidFill>
-                  <a:srgbClr val="2C6E49"/>
-                </a:solidFill>
-                <a:latin typeface="Arial" pitchFamily="34" charset="0"/>
-                <a:ea typeface="Arial" pitchFamily="34" charset="-122"/>
-                <a:cs typeface="Arial" pitchFamily="34" charset="-120"/>
-              </a:rPr>
-              <a:t>ECOFERT® — تغذية دون استنزاف</a:t>
-            </a:r>
-            <a:endParaRPr lang="en-US" sz="1600" dirty="0"/>
-          </a:p>
-        </p:txBody>
-      </p:sp>
-      <p:sp>
-        <p:nvSpPr>
-          <p:cNvPr id="7" name="Text 5"/>
-          <p:cNvSpPr txBox="1"/>
-          <p:nvPr/>
-        </p:nvSpPr>
-        <p:spPr>
-          <a:xfrm>
-            <a:off x="6370168" y="2286000"/>
-            <a:ext cx="5227168" cy="2468880"/>
-          </a:xfrm>
-          <a:prstGeom prst="rect">
-            <a:avLst/>
-          </a:prstGeom>
-          <a:noFill/>
-          <a:ln/>
-        </p:spPr>
-        <p:txBody>
-          <a:bodyPr wrap="square" lIns="0" tIns="0" rIns="0" bIns="0" rtlCol="0" anchor="t"/>
-          <a:lstStyle/>
-          <a:p>
-            <a:pPr algn="r" marL="342900" indent="-342900">
-              <a:lnSpc>
-                <a:spcPct val="122000"/>
-              </a:lnSpc>
-              <a:spcAft>
-                <a:spcPts val="1000"/>
-              </a:spcAft>
-              <a:buSzPct val="100000"/>
-              <a:buChar char="•"/>
-            </a:pPr>
-            <a:r>
-              <a:rPr lang="en-US" sz="1350" dirty="0">
-                <a:solidFill>
-                  <a:srgbClr val="364239"/>
-                </a:solidFill>
-                <a:latin typeface="Arial" pitchFamily="34" charset="0"/>
-                <a:ea typeface="Arial" pitchFamily="34" charset="-122"/>
-                <a:cs typeface="Arial" pitchFamily="34" charset="-120"/>
-              </a:rPr>
-              <a:t>مخصّب بجرعات دقيقة من الأحماض الأمينية والنيتروجين والفوسفور والبوتاسيوم، من موارد متجددة.</a:t>
-            </a:r>
-            <a:endParaRPr lang="en-US" sz="1350" dirty="0"/>
-          </a:p>
-          <a:p>
-            <a:pPr algn="r" marL="342900" indent="-342900">
-              <a:lnSpc>
-                <a:spcPct val="122000"/>
-              </a:lnSpc>
-              <a:spcAft>
-                <a:spcPts val="1000"/>
-              </a:spcAft>
-              <a:buSzPct val="100000"/>
-              <a:buChar char="•"/>
-            </a:pPr>
-            <a:r>
-              <a:rPr lang="en-US" sz="1350" dirty="0">
-                <a:solidFill>
-                  <a:srgbClr val="364239"/>
-                </a:solidFill>
-                <a:latin typeface="Arial" pitchFamily="34" charset="0"/>
-                <a:ea typeface="Arial" pitchFamily="34" charset="-122"/>
-                <a:cs typeface="Arial" pitchFamily="34" charset="-120"/>
-              </a:rPr>
-              <a:t>غير مخلبي: لا يفقر مركّب الطين والدبال، ولا يرفع ملوحة التربة ولا محتواها من النترات.</a:t>
-            </a:r>
-            <a:endParaRPr lang="en-US" sz="1350" dirty="0"/>
-          </a:p>
-          <a:p>
-            <a:pPr algn="r" marL="342900" indent="-342900">
-              <a:lnSpc>
-                <a:spcPct val="122000"/>
-              </a:lnSpc>
-              <a:spcAft>
-                <a:spcPts val="1000"/>
-              </a:spcAft>
-              <a:buSzPct val="100000"/>
-              <a:buChar char="•"/>
-            </a:pPr>
-            <a:r>
-              <a:rPr lang="en-US" sz="1350" dirty="0">
-                <a:solidFill>
-                  <a:srgbClr val="364239"/>
-                </a:solidFill>
-                <a:latin typeface="Arial" pitchFamily="34" charset="0"/>
-                <a:ea typeface="Arial" pitchFamily="34" charset="-122"/>
-                <a:cs typeface="Arial" pitchFamily="34" charset="-120"/>
-              </a:rPr>
-              <a:t>حائز شهادتي SOHISCERT والعضوية الأوروبية — شرط للدخول إلى دفاتر شروط المشترين الأوروبيين.</a:t>
-            </a:r>
-            <a:endParaRPr lang="en-US" sz="1350" dirty="0"/>
-          </a:p>
-          <a:p>
-            <a:pPr algn="r" marL="342900" indent="-342900">
-              <a:lnSpc>
-                <a:spcPct val="122000"/>
-              </a:lnSpc>
-              <a:spcAft>
-                <a:spcPts val="1000"/>
-              </a:spcAft>
-              <a:buSzPct val="100000"/>
-              <a:buChar char="•"/>
-            </a:pPr>
-            <a:r>
-              <a:rPr lang="en-US" sz="1350" dirty="0">
-                <a:solidFill>
-                  <a:srgbClr val="364239"/>
-                </a:solidFill>
-                <a:latin typeface="Arial" pitchFamily="34" charset="0"/>
-                <a:ea typeface="Arial" pitchFamily="34" charset="-122"/>
-                <a:cs typeface="Arial" pitchFamily="34" charset="-120"/>
-              </a:rPr>
-              <a:t>من 1 إلى 4 عبوات سعة 140 مل للهكتار، متوافق مع تجهيزات الري بالتسميد القائمة.</a:t>
-            </a:r>
-            <a:endParaRPr lang="en-US" sz="1350" dirty="0"/>
-          </a:p>
-        </p:txBody>
-      </p:sp>
-      <p:sp>
-        <p:nvSpPr>
-          <p:cNvPr id="8" name="Shape 6"/>
+      <p:graphicFrame>
+        <p:nvGraphicFramePr>
+          <p:cNvPr id="4" name="Chart 0" descr=""/>
+          <p:cNvGraphicFramePr/>
+          <p:nvPr/>
+        </p:nvGraphicFramePr>
+        <p:xfrm>
+          <a:off x="594360" y="1783080"/>
+          <a:ext cx="7360920" cy="3977640"/>
+        </p:xfrm>
+        <a:graphic xmlns:a="http://schemas.openxmlformats.org/drawingml/2006/main">
+          <a:graphicData uri="http://schemas.openxmlformats.org/drawingml/2006/chart">
+            <c:chart xmlns:c="http://schemas.openxmlformats.org/drawingml/2006/chart" r:id="rId1"/>
+          </a:graphicData>
+        </a:graphic>
+      </p:graphicFrame>
+      <p:sp>
+        <p:nvSpPr>
+          <p:cNvPr id="5" name="Shape 2"/>
           <p:cNvSpPr/>
           <p:nvPr/>
         </p:nvSpPr>
         <p:spPr>
           <a:xfrm>
-            <a:off x="594360" y="4846320"/>
-            <a:ext cx="11002975" cy="960120"/>
+            <a:off x="8275320" y="1783080"/>
+            <a:ext cx="3291840" cy="3977640"/>
           </a:xfrm>
           <a:prstGeom prst="roundRect">
             <a:avLst>
-              <a:gd name="adj" fmla="val 7619"/>
+              <a:gd name="adj" fmla="val 2778"/>
             </a:avLst>
           </a:prstGeom>
           <a:solidFill>
@@ -6156,14 +11770,53 @@
       </p:sp>
       <p:sp>
         <p:nvSpPr>
-          <p:cNvPr id="9" name="Text 7"/>
-          <p:cNvSpPr txBox="1"/>
-          <p:nvPr/>
-        </p:nvSpPr>
-        <p:spPr>
-          <a:xfrm>
-            <a:off x="822960" y="4983480"/>
-            <a:ext cx="10545775" cy="713232"/>
+          <p:cNvPr id="6" name="Text 3"/>
+          <p:cNvSpPr txBox="1"/>
+          <p:nvPr/>
+        </p:nvSpPr>
+        <p:spPr>
+          <a:xfrm>
+            <a:off x="8503920" y="2011680"/>
+            <a:ext cx="2834640" cy="457200"/>
+          </a:xfrm>
+          <a:prstGeom prst="rect">
+            <a:avLst/>
+          </a:prstGeom>
+          <a:noFill/>
+          <a:ln/>
+        </p:spPr>
+        <p:txBody>
+          <a:bodyPr wrap="square" lIns="0" tIns="0" rIns="0" bIns="0" rtlCol="0" anchor="ctr"/>
+          <a:lstStyle/>
+          <a:p>
+            <a:pPr rtl="1" algn="r" indent="0" marL="0">
+              <a:buNone/>
+            </a:pPr>
+            <a:r>
+              <a:rPr lang="en-US" sz="1300" b="1" dirty="0">
+                <a:solidFill>
+                  <a:srgbClr val="2C6E49"/>
+                </a:solidFill>
+                <a:latin typeface="Arial" pitchFamily="34" charset="0"/>
+                <a:ea typeface="Arial" pitchFamily="34" charset="-122"/>
+                <a:cs typeface="Arial" pitchFamily="34" charset="-120"/>
+              </a:rPr>
+              <a:t>قراءة</a:t>
+            </a:r>
+            <a:endParaRPr lang="en-US" sz="1300" dirty="0"/>
+          </a:p>
+        </p:txBody>
+      </p:sp>
+      <p:sp>
+        <p:nvSpPr>
+          <p:cNvPr id="7" name="Text 4"/>
+          <p:cNvSpPr txBox="1"/>
+          <p:nvPr/>
+        </p:nvSpPr>
+        <p:spPr>
+          <a:xfrm>
+            <a:off x="8503920" y="2560320"/>
+            <a:ext cx="2834640" cy="3017520"/>
           </a:xfrm>
           <a:prstGeom prst="rect">
             <a:avLst/>
@@ -6177,28 +11830,57 @@
           <a:p>
             <a:pPr rtl="1" algn="r" indent="0" marL="0">
               <a:lnSpc>
-                <a:spcPct val="118000"/>
+                <a:spcPct val="125000"/>
               </a:lnSpc>
               <a:buNone/>
             </a:pPr>
             <a:r>
-              <a:rPr lang="en-US" sz="1100" dirty="0">
-                <a:solidFill>
-                  <a:srgbClr val="6F7D71"/>
-                </a:solidFill>
-                <a:latin typeface="Arial" pitchFamily="34" charset="0"/>
-                <a:ea typeface="Arial" pitchFamily="34" charset="-122"/>
-                <a:cs typeface="Arial" pitchFamily="34" charset="-120"/>
-              </a:rPr>
-              <a:t>المنتجان يُباعان منفصلين لكنهما صُمّما ليعزز أحدهما الآخر: المادة المحتفظة بالماء تطيل توفّره في منطقة الجذور، والمخصّب يثمّن هذا الماء المتاح دون إرهاق التربة.</a:t>
-            </a:r>
-            <a:endParaRPr lang="en-US" sz="1100" dirty="0"/>
-          </a:p>
-        </p:txBody>
-      </p:sp>
-      <p:sp>
-        <p:nvSpPr>
-          <p:cNvPr id="10" name="Text 8"/>
+              <a:rPr lang="en-US" sz="1200" dirty="0">
+                <a:solidFill>
+                  <a:srgbClr val="364239"/>
+                </a:solidFill>
+                <a:latin typeface="Arial" pitchFamily="34" charset="0"/>
+                <a:ea typeface="Arial" pitchFamily="34" charset="-122"/>
+                <a:cs typeface="Arial" pitchFamily="34" charset="-120"/>
+              </a:rPr>
+              <a:t>الطماطم والخيار محصولان مرويان موجّهان أساساً إلى أسواق الخليج: فيهما يتحوّل توفير الماء مباشرة إلى هامش.</a:t>
+            </a:r>
+            <a:endParaRPr lang="en-US" sz="1200" dirty="0"/>
+          </a:p>
+          <a:p>
+            <a:pPr rtl="1" algn="r" indent="0" marL="0">
+              <a:lnSpc>
+                <a:spcPct val="125000"/>
+              </a:lnSpc>
+              <a:buNone/>
+            </a:pPr>
+            <a:endParaRPr lang="en-US" sz="1200" dirty="0"/>
+          </a:p>
+          <a:p>
+            <a:pPr rtl="1" algn="r" indent="0" marL="0">
+              <a:lnSpc>
+                <a:spcPct val="125000"/>
+              </a:lnSpc>
+              <a:buNone/>
+            </a:pPr>
+            <a:r>
+              <a:rPr lang="en-US" sz="1200" dirty="0">
+                <a:solidFill>
+                  <a:srgbClr val="364239"/>
+                </a:solidFill>
+                <a:latin typeface="Arial" pitchFamily="34" charset="0"/>
+                <a:ea typeface="Arial" pitchFamily="34" charset="-122"/>
+                <a:cs typeface="Arial" pitchFamily="34" charset="-120"/>
+              </a:rPr>
+              <a:t>* إنتاج الزيتون يتذبذب بين موسم وآخر بحكم المعاومة. أما تمور المجهول فحجمها أصغر (نحو 35 ألف طن) لكن قيمتها التصديرية للطن هي الأعلى.</a:t>
+            </a:r>
+            <a:endParaRPr lang="en-US" sz="1200" dirty="0"/>
+          </a:p>
+        </p:txBody>
+      </p:sp>
+      <p:sp>
+        <p:nvSpPr>
+          <p:cNvPr id="8" name="Text 5"/>
           <p:cNvSpPr txBox="1"/>
           <p:nvPr/>
         </p:nvSpPr>
@@ -6239,7 +11921,7 @@
       </p:sp>
       <p:sp>
         <p:nvSpPr>
-          <p:cNvPr id="11" name="Text 9"/>
+          <p:cNvPr id="9" name="Text 6"/>
           <p:cNvSpPr txBox="1"/>
           <p:nvPr/>
         </p:nvSpPr>
@@ -6343,7 +12025,7 @@
                 <a:ea typeface="Arial" pitchFamily="34" charset="-122"/>
                 <a:cs typeface="Arial" pitchFamily="34" charset="-120"/>
               </a:rPr>
-              <a:t>أحجام تقديرية</a:t>
+              <a:t>القطاع الأول</a:t>
             </a:r>
             <a:endParaRPr lang="en-US" sz="1150" dirty="0"/>
           </a:p>
@@ -6382,168 +12064,181 @@
                 <a:ea typeface="Arial" pitchFamily="34" charset="-122"/>
                 <a:cs typeface="Arial" pitchFamily="34" charset="-120"/>
               </a:rPr>
-              <a:t>توفير المياه المتوقع حسب أسلوب الري</a:t>
+              <a:t>الزيتون: شجرة المرتفعات البعلية</a:t>
             </a:r>
             <a:endParaRPr lang="en-US" sz="3000" dirty="0"/>
           </a:p>
         </p:txBody>
       </p:sp>
-      <p:graphicFrame>
-        <p:nvGraphicFramePr>
-          <p:cNvPr id="4" name="Chart 0" descr=""/>
-          <p:cNvGraphicFramePr/>
-          <p:nvPr/>
-        </p:nvGraphicFramePr>
-        <p:xfrm>
-          <a:off x="594360" y="1783080"/>
-          <a:ext cx="7360920" cy="3977640"/>
-        </p:xfrm>
-        <a:graphic xmlns:a="http://schemas.openxmlformats.org/drawingml/2006/main">
-          <a:graphicData uri="http://schemas.openxmlformats.org/drawingml/2006/chart">
-            <c:chart xmlns:c="http://schemas.openxmlformats.org/drawingml/2006/chart" r:id="rId1"/>
-          </a:graphicData>
-        </a:graphic>
-      </p:graphicFrame>
-      <p:sp>
-        <p:nvSpPr>
-          <p:cNvPr id="5" name="Shape 2"/>
-          <p:cNvSpPr/>
-          <p:nvPr/>
-        </p:nvSpPr>
-        <p:spPr>
-          <a:xfrm>
-            <a:off x="8275320" y="1783080"/>
-            <a:ext cx="3291840" cy="3977640"/>
-          </a:xfrm>
-          <a:prstGeom prst="roundRect">
-            <a:avLst>
-              <a:gd name="adj" fmla="val 2778"/>
-            </a:avLst>
-          </a:prstGeom>
-          <a:solidFill>
-            <a:srgbClr val="F2F1E8"/>
-          </a:solidFill>
-          <a:ln w="9525">
-            <a:solidFill>
-              <a:srgbClr val="E0DFD0"/>
-            </a:solidFill>
-            <a:prstDash val="solid"/>
-          </a:ln>
-        </p:spPr>
+      <p:pic>
+        <p:nvPicPr>
+          <p:cNvPr id="4" name="Image 0" descr="preencoded.png">    </p:cNvPr>
+          <p:cNvPicPr>
+            <a:picLocks noChangeAspect="1"/>
+          </p:cNvPicPr>
+          <p:nvPr/>
+        </p:nvPicPr>
+        <p:blipFill>
+          <a:blip r:embed="rId1"/>
+          <a:stretch>
+            <a:fillRect/>
+          </a:stretch>
+        </p:blipFill>
+        <p:spPr>
+          <a:xfrm>
+            <a:off x="6522415" y="1783080"/>
+            <a:ext cx="5074920" cy="3794760"/>
+          </a:xfrm>
+          <a:prstGeom prst="rect">
+            <a:avLst/>
+          </a:prstGeom>
+        </p:spPr>
+      </p:pic>
+      <p:sp>
+        <p:nvSpPr>
+          <p:cNvPr id="5" name="Text 2"/>
+          <p:cNvSpPr txBox="1"/>
+          <p:nvPr/>
+        </p:nvSpPr>
+        <p:spPr>
+          <a:xfrm>
+            <a:off x="594360" y="1783080"/>
+            <a:ext cx="5379415" cy="4251960"/>
+          </a:xfrm>
+          <a:prstGeom prst="rect">
+            <a:avLst/>
+          </a:prstGeom>
+          <a:noFill/>
+          <a:ln/>
+        </p:spPr>
+        <p:txBody>
+          <a:bodyPr wrap="square" lIns="0" tIns="0" rIns="0" bIns="0" rtlCol="0" anchor="t"/>
+          <a:lstStyle/>
+          <a:p>
+            <a:pPr algn="r" marL="342900" indent="-342900">
+              <a:lnSpc>
+                <a:spcPct val="122000"/>
+              </a:lnSpc>
+              <a:spcAft>
+                <a:spcPts val="1100"/>
+              </a:spcAft>
+              <a:buSzPct val="100000"/>
+              <a:buChar char="•"/>
+            </a:pPr>
+            <a:r>
+              <a:rPr lang="en-US" sz="1400" dirty="0">
+                <a:solidFill>
+                  <a:srgbClr val="364239"/>
+                </a:solidFill>
+                <a:latin typeface="Arial" pitchFamily="34" charset="0"/>
+                <a:ea typeface="Arial" pitchFamily="34" charset="-122"/>
+                <a:cs typeface="Arial" pitchFamily="34" charset="-120"/>
+              </a:rPr>
+              <a:t>يغطي الزيتون الجزء الأكبر من المساحة المزروعة بالأشجار، في إربد وعجلون وجرش والبلقاء والمفرق.</a:t>
+            </a:r>
+            <a:endParaRPr lang="en-US" sz="1400" dirty="0"/>
+          </a:p>
+          <a:p>
+            <a:pPr algn="r" marL="342900" indent="-342900">
+              <a:lnSpc>
+                <a:spcPct val="122000"/>
+              </a:lnSpc>
+              <a:spcAft>
+                <a:spcPts val="1100"/>
+              </a:spcAft>
+              <a:buSzPct val="100000"/>
+              <a:buChar char="•"/>
+            </a:pPr>
+            <a:r>
+              <a:rPr lang="en-US" sz="1400" dirty="0">
+                <a:solidFill>
+                  <a:srgbClr val="364239"/>
+                </a:solidFill>
+                <a:latin typeface="Arial" pitchFamily="34" charset="0"/>
+                <a:ea typeface="Arial" pitchFamily="34" charset="-122"/>
+                <a:cs typeface="Arial" pitchFamily="34" charset="-120"/>
+              </a:rPr>
+              <a:t>معظم البساتين بعلية: تتوقف غلة السنة على أمطار الشتاء، وتتراجع كثيراً في سنوات الجفاف.</a:t>
+            </a:r>
+            <a:endParaRPr lang="en-US" sz="1400" dirty="0"/>
+          </a:p>
+          <a:p>
+            <a:pPr algn="r" marL="342900" indent="-342900">
+              <a:lnSpc>
+                <a:spcPct val="122000"/>
+              </a:lnSpc>
+              <a:spcAft>
+                <a:spcPts val="1100"/>
+              </a:spcAft>
+              <a:buSzPct val="100000"/>
+              <a:buChar char="•"/>
+            </a:pPr>
+            <a:r>
+              <a:rPr lang="en-US" sz="1400" dirty="0">
+                <a:solidFill>
+                  <a:srgbClr val="364239"/>
+                </a:solidFill>
+                <a:latin typeface="Arial" pitchFamily="34" charset="0"/>
+                <a:ea typeface="Arial" pitchFamily="34" charset="-122"/>
+                <a:cs typeface="Arial" pitchFamily="34" charset="-120"/>
+              </a:rPr>
+              <a:t>تذبذب الحمل بين سنة وأخرى يُضعف دخل المزارع ويصعّب تثبيت عقود بيع الزيت.</a:t>
+            </a:r>
+            <a:endParaRPr lang="en-US" sz="1400" dirty="0"/>
+          </a:p>
+          <a:p>
+            <a:pPr algn="r" marL="342900" indent="-342900">
+              <a:lnSpc>
+                <a:spcPct val="122000"/>
+              </a:lnSpc>
+              <a:spcAft>
+                <a:spcPts val="1100"/>
+              </a:spcAft>
+              <a:buSzPct val="100000"/>
+              <a:buChar char="•"/>
+            </a:pPr>
+            <a:r>
+              <a:rPr lang="en-US" sz="1400" dirty="0">
+                <a:solidFill>
+                  <a:srgbClr val="364239"/>
+                </a:solidFill>
+                <a:latin typeface="Arial" pitchFamily="34" charset="0"/>
+                <a:ea typeface="Arial" pitchFamily="34" charset="-122"/>
+                <a:cs typeface="Arial" pitchFamily="34" charset="-120"/>
+              </a:rPr>
+              <a:t>الغراس الجديدة هي الأكثر عرضة للموت في صيفها الأول دون ري تكميلي.</a:t>
+            </a:r>
+            <a:endParaRPr lang="en-US" sz="1400" dirty="0"/>
+          </a:p>
+          <a:p>
+            <a:pPr algn="r" marL="342900" indent="-342900">
+              <a:lnSpc>
+                <a:spcPct val="122000"/>
+              </a:lnSpc>
+              <a:spcAft>
+                <a:spcPts val="1100"/>
+              </a:spcAft>
+              <a:buSzPct val="100000"/>
+              <a:buChar char="•"/>
+            </a:pPr>
+            <a:r>
+              <a:rPr lang="en-US" sz="1400" dirty="0">
+                <a:solidFill>
+                  <a:srgbClr val="364239"/>
+                </a:solidFill>
+                <a:latin typeface="Arial" pitchFamily="34" charset="0"/>
+                <a:ea typeface="Arial" pitchFamily="34" charset="-122"/>
+                <a:cs typeface="Arial" pitchFamily="34" charset="-120"/>
+              </a:rPr>
+              <a:t>وضع EVERGREEN® في حفرة الغرس يحتفظ بمياه المطر حول الجذور لأسابيع إضافية.</a:t>
+            </a:r>
+            <a:endParaRPr lang="en-US" sz="1400" dirty="0"/>
+          </a:p>
+        </p:txBody>
       </p:sp>
       <p:sp>
         <p:nvSpPr>
           <p:cNvPr id="6" name="Text 3"/>
-          <p:cNvSpPr txBox="1"/>
-          <p:nvPr/>
-        </p:nvSpPr>
-        <p:spPr>
-          <a:xfrm>
-            <a:off x="8503920" y="2011680"/>
-            <a:ext cx="2834640" cy="457200"/>
-          </a:xfrm>
-          <a:prstGeom prst="rect">
-            <a:avLst/>
-          </a:prstGeom>
-          <a:noFill/>
-          <a:ln/>
-        </p:spPr>
-        <p:txBody>
-          <a:bodyPr wrap="square" lIns="0" tIns="0" rIns="0" bIns="0" rtlCol="0" anchor="ctr"/>
-          <a:lstStyle/>
-          <a:p>
-            <a:pPr rtl="1" algn="r" indent="0" marL="0">
-              <a:buNone/>
-            </a:pPr>
-            <a:r>
-              <a:rPr lang="en-US" sz="1300" b="1" dirty="0">
-                <a:solidFill>
-                  <a:srgbClr val="2C6E49"/>
-                </a:solidFill>
-                <a:latin typeface="Arial" pitchFamily="34" charset="0"/>
-                <a:ea typeface="Arial" pitchFamily="34" charset="-122"/>
-                <a:cs typeface="Arial" pitchFamily="34" charset="-120"/>
-              </a:rPr>
-              <a:t>تُقرأ بحذر</a:t>
-            </a:r>
-            <a:endParaRPr lang="en-US" sz="1300" dirty="0"/>
-          </a:p>
-        </p:txBody>
-      </p:sp>
-      <p:sp>
-        <p:nvSpPr>
-          <p:cNvPr id="7" name="Text 4"/>
-          <p:cNvSpPr txBox="1"/>
-          <p:nvPr/>
-        </p:nvSpPr>
-        <p:spPr>
-          <a:xfrm>
-            <a:off x="8503920" y="2560320"/>
-            <a:ext cx="2834640" cy="3017520"/>
-          </a:xfrm>
-          <a:prstGeom prst="rect">
-            <a:avLst/>
-          </a:prstGeom>
-          <a:noFill/>
-          <a:ln/>
-        </p:spPr>
-        <p:txBody>
-          <a:bodyPr wrap="square" lIns="0" tIns="0" rIns="0" bIns="0" rtlCol="0" anchor="t"/>
-          <a:lstStyle/>
-          <a:p>
-            <a:pPr rtl="1" algn="r" indent="0" marL="0">
-              <a:lnSpc>
-                <a:spcPct val="125000"/>
-              </a:lnSpc>
-              <a:buNone/>
-            </a:pPr>
-            <a:r>
-              <a:rPr lang="en-US" sz="1200" dirty="0">
-                <a:solidFill>
-                  <a:srgbClr val="364239"/>
-                </a:solidFill>
-                <a:latin typeface="Arial" pitchFamily="34" charset="0"/>
-                <a:ea typeface="Arial" pitchFamily="34" charset="-122"/>
-                <a:cs typeface="Arial" pitchFamily="34" charset="-120"/>
-              </a:rPr>
-              <a:t>هذه النطاقات تقديرية استرشادية، مبنية على المكاسب الموثقة لموادنا المحتفظة بالماء.</a:t>
-            </a:r>
-            <a:endParaRPr lang="en-US" sz="1200" dirty="0"/>
-          </a:p>
-          <a:p>
-            <a:pPr rtl="1" algn="r" indent="0" marL="0">
-              <a:lnSpc>
-                <a:spcPct val="125000"/>
-              </a:lnSpc>
-              <a:buNone/>
-            </a:pPr>
-            <a:endParaRPr lang="en-US" sz="1200" dirty="0"/>
-          </a:p>
-          <a:p>
-            <a:pPr rtl="1" algn="r" indent="0" marL="0">
-              <a:lnSpc>
-                <a:spcPct val="125000"/>
-              </a:lnSpc>
-              <a:buNone/>
-            </a:pPr>
-            <a:r>
-              <a:rPr lang="en-US" sz="1200" dirty="0">
-                <a:solidFill>
-                  <a:srgbClr val="364239"/>
-                </a:solidFill>
-                <a:latin typeface="Arial" pitchFamily="34" charset="0"/>
-                <a:ea typeface="Arial" pitchFamily="34" charset="-122"/>
-                <a:cs typeface="Arial" pitchFamily="34" charset="-120"/>
-              </a:rPr>
-              <a:t>النتيجة الفعلية تتوقف على التربة والمناخ والمحصول. الأرقام تعطي حجماً تقريبياً لا أكثر، وهي لا تشكّل بأي حال قيمة مضمونة أو تعاقدية أو مطلقة.</a:t>
-            </a:r>
-            <a:endParaRPr lang="en-US" sz="1200" dirty="0"/>
-          </a:p>
-        </p:txBody>
-      </p:sp>
-      <p:sp>
-        <p:nvSpPr>
-          <p:cNvPr id="8" name="Text 5"/>
           <p:cNvSpPr txBox="1"/>
           <p:nvPr/>
         </p:nvSpPr>
@@ -6584,7 +12279,7 @@
       </p:sp>
       <p:sp>
         <p:nvSpPr>
-          <p:cNvPr id="9" name="Text 6"/>
+          <p:cNvPr id="7" name="Text 4"/>
           <p:cNvSpPr txBox="1"/>
           <p:nvPr/>
         </p:nvSpPr>
@@ -6688,7 +12383,7 @@
                 <a:ea typeface="Arial" pitchFamily="34" charset="-122"/>
                 <a:cs typeface="Arial" pitchFamily="34" charset="-120"/>
               </a:rPr>
-              <a:t>ثلاثة ميادين أولوية</a:t>
+              <a:t>القطاع الثاني</a:t>
             </a:r>
             <a:endParaRPr lang="en-US" sz="1150" dirty="0"/>
           </a:p>
@@ -6727,42 +12422,15 @@
                 <a:ea typeface="Arial" pitchFamily="34" charset="-122"/>
                 <a:cs typeface="Arial" pitchFamily="34" charset="-120"/>
               </a:rPr>
-              <a:t>أين تُجرى التجارب الأولى</a:t>
+              <a:t>خضروات وادي الأردن: إنتاج الشتاء للتصدير</a:t>
             </a:r>
             <a:endParaRPr lang="en-US" sz="3000" dirty="0"/>
           </a:p>
         </p:txBody>
-      </p:sp>
-      <p:sp>
-        <p:nvSpPr>
-          <p:cNvPr id="4" name="Shape 2"/>
-          <p:cNvSpPr/>
-          <p:nvPr/>
-        </p:nvSpPr>
-        <p:spPr>
-          <a:xfrm>
-            <a:off x="594360" y="1783080"/>
-            <a:ext cx="3472586" cy="4069080"/>
-          </a:xfrm>
-          <a:prstGeom prst="roundRect">
-            <a:avLst>
-              <a:gd name="adj" fmla="val 2633"/>
-            </a:avLst>
-          </a:prstGeom>
-          <a:solidFill>
-            <a:srgbClr val="F2F1E8"/>
-          </a:solidFill>
-          <a:ln w="9525">
-            <a:solidFill>
-              <a:srgbClr val="E0DFD0"/>
-            </a:solidFill>
-            <a:prstDash val="solid"/>
-          </a:ln>
-        </p:spPr>
       </p:sp>
       <p:pic>
         <p:nvPicPr>
-          <p:cNvPr id="5" name="Image 0" descr="preencoded.png">    </p:cNvPr>
+          <p:cNvPr id="4" name="Image 0" descr="preencoded.png">    </p:cNvPr>
           <p:cNvPicPr>
             <a:picLocks noChangeAspect="1"/>
           </p:cNvPicPr>
@@ -6777,7 +12445,7 @@
         <p:spPr>
           <a:xfrm>
             <a:off x="594360" y="1783080"/>
-            <a:ext cx="3472586" cy="1691640"/>
+            <a:ext cx="5074920" cy="3794760"/>
           </a:xfrm>
           <a:prstGeom prst="rect">
             <a:avLst/>
@@ -6786,92 +12454,14 @@
       </p:pic>
       <p:sp>
         <p:nvSpPr>
-          <p:cNvPr id="6" name="Text 3"/>
-          <p:cNvSpPr txBox="1"/>
-          <p:nvPr/>
-        </p:nvSpPr>
-        <p:spPr>
-          <a:xfrm>
-            <a:off x="795528" y="3639312"/>
-            <a:ext cx="3070250" cy="384048"/>
-          </a:xfrm>
-          <a:prstGeom prst="rect">
-            <a:avLst/>
-          </a:prstGeom>
-          <a:noFill/>
-          <a:ln/>
-        </p:spPr>
-        <p:txBody>
-          <a:bodyPr wrap="square" lIns="0" tIns="0" rIns="0" bIns="0" rtlCol="0" anchor="ctr"/>
-          <a:lstStyle/>
-          <a:p>
-            <a:pPr rtl="1" algn="r" indent="0" marL="0">
-              <a:buNone/>
-            </a:pPr>
-            <a:r>
-              <a:rPr lang="en-US" sz="1500" b="1" dirty="0">
-                <a:solidFill>
-                  <a:srgbClr val="2C6E49"/>
-                </a:solidFill>
-                <a:latin typeface="Arial" pitchFamily="34" charset="0"/>
-                <a:ea typeface="Arial" pitchFamily="34" charset="-122"/>
-                <a:cs typeface="Arial" pitchFamily="34" charset="-120"/>
-              </a:rPr>
-              <a:t>وادي الأردن — الأغوار</a:t>
-            </a:r>
-            <a:endParaRPr lang="en-US" sz="1500" dirty="0"/>
-          </a:p>
-        </p:txBody>
-      </p:sp>
-      <p:sp>
-        <p:nvSpPr>
-          <p:cNvPr id="7" name="Text 4"/>
-          <p:cNvSpPr txBox="1"/>
-          <p:nvPr/>
-        </p:nvSpPr>
-        <p:spPr>
-          <a:xfrm>
-            <a:off x="795528" y="4041648"/>
-            <a:ext cx="3070250" cy="329184"/>
-          </a:xfrm>
-          <a:prstGeom prst="rect">
-            <a:avLst/>
-          </a:prstGeom>
-          <a:noFill/>
-          <a:ln/>
-        </p:spPr>
-        <p:txBody>
-          <a:bodyPr wrap="square" lIns="0" tIns="0" rIns="0" bIns="0" rtlCol="0" anchor="ctr"/>
-          <a:lstStyle/>
-          <a:p>
-            <a:pPr rtl="1" algn="r" indent="0" marL="0">
-              <a:buNone/>
-            </a:pPr>
-            <a:r>
-              <a:rPr lang="en-US" sz="1250" b="1" dirty="0">
-                <a:solidFill>
-                  <a:srgbClr val="9C6C12"/>
-                </a:solidFill>
-                <a:latin typeface="Arial" pitchFamily="34" charset="0"/>
-                <a:ea typeface="Arial" pitchFamily="34" charset="-122"/>
-                <a:cs typeface="Arial" pitchFamily="34" charset="-120"/>
-              </a:rPr>
-              <a:t>≈ 35 ألف هكتار مروية</a:t>
-            </a:r>
-            <a:endParaRPr lang="en-US" sz="1250" dirty="0"/>
-          </a:p>
-        </p:txBody>
-      </p:sp>
-      <p:sp>
-        <p:nvSpPr>
-          <p:cNvPr id="8" name="Text 5"/>
-          <p:cNvSpPr txBox="1"/>
-          <p:nvPr/>
-        </p:nvSpPr>
-        <p:spPr>
-          <a:xfrm>
-            <a:off x="795528" y="4407408"/>
-            <a:ext cx="3070250" cy="1280160"/>
+          <p:cNvPr id="5" name="Text 2"/>
+          <p:cNvSpPr txBox="1"/>
+          <p:nvPr/>
+        </p:nvSpPr>
+        <p:spPr>
+          <a:xfrm>
+            <a:off x="6217920" y="1783080"/>
+            <a:ext cx="5379415" cy="4251960"/>
           </a:xfrm>
           <a:prstGeom prst="rect">
             <a:avLst/>
@@ -6885,16 +12475,16 @@
           <a:p>
             <a:pPr algn="r" marL="342900" indent="-342900">
               <a:lnSpc>
-                <a:spcPct val="116000"/>
+                <a:spcPct val="122000"/>
               </a:lnSpc>
               <a:spcAft>
-                <a:spcPts val="700"/>
+                <a:spcPts val="1100"/>
               </a:spcAft>
               <a:buSzPct val="100000"/>
               <a:buChar char="•"/>
             </a:pPr>
             <a:r>
-              <a:rPr lang="en-US" sz="1150" dirty="0">
+              <a:rPr lang="en-US" sz="1400" dirty="0">
                 <a:solidFill>
                   <a:srgbClr val="364239"/>
                 </a:solidFill>
@@ -6902,23 +12492,23 @@
                 <a:ea typeface="Arial" pitchFamily="34" charset="-122"/>
                 <a:cs typeface="Arial" pitchFamily="34" charset="-120"/>
               </a:rPr>
-              <a:t>قلب الإنتاج التصديري الشتوي: خضار محمية ومكشوفة موجّهة إلى أسواق الخليج، معظمها مروي بالتنقيط.</a:t>
-            </a:r>
-            <a:endParaRPr lang="en-US" sz="1150" dirty="0"/>
+              <a:t>يسمح دفء وادي الأردن بإنتاج الطماطم والخيار والفلفل في الشتاء، حين تكون أسعار التصدير في أعلاها.</a:t>
+            </a:r>
+            <a:endParaRPr lang="en-US" sz="1400" dirty="0"/>
           </a:p>
           <a:p>
             <a:pPr algn="r" marL="342900" indent="-342900">
               <a:lnSpc>
-                <a:spcPct val="116000"/>
+                <a:spcPct val="122000"/>
               </a:lnSpc>
               <a:spcAft>
-                <a:spcPts val="700"/>
+                <a:spcPts val="1100"/>
               </a:spcAft>
               <a:buSzPct val="100000"/>
               <a:buChar char="•"/>
             </a:pPr>
             <a:r>
-              <a:rPr lang="en-US" sz="1150" dirty="0">
+              <a:rPr lang="en-US" sz="1400" dirty="0">
                 <a:solidFill>
                   <a:srgbClr val="364239"/>
                 </a:solidFill>
@@ -6926,23 +12516,23 @@
                 <a:ea typeface="Arial" pitchFamily="34" charset="-122"/>
                 <a:cs typeface="Arial" pitchFamily="34" charset="-120"/>
               </a:rPr>
-              <a:t>الزراعة دون مستوى سطح البحر بنحو 200 إلى 400 م، مع تبخّر مرتفع طوال الموسم.</a:t>
-            </a:r>
-            <a:endParaRPr lang="en-US" sz="1150" dirty="0"/>
+              <a:t>يُروى الوادي من قناة الملك عبد الله بمزيج من مياه اليرموك والمياه المعالجة، وبحصص محدودة.</a:t>
+            </a:r>
+            <a:endParaRPr lang="en-US" sz="1400" dirty="0"/>
           </a:p>
           <a:p>
             <a:pPr algn="r" marL="342900" indent="-342900">
               <a:lnSpc>
-                <a:spcPct val="116000"/>
+                <a:spcPct val="122000"/>
               </a:lnSpc>
               <a:spcAft>
-                <a:spcPts val="700"/>
+                <a:spcPts val="1100"/>
               </a:spcAft>
               <a:buSzPct val="100000"/>
               <a:buChar char="•"/>
             </a:pPr>
             <a:r>
-              <a:rPr lang="en-US" sz="1150" dirty="0">
+              <a:rPr lang="en-US" sz="1400" dirty="0">
                 <a:solidFill>
                   <a:srgbClr val="364239"/>
                 </a:solidFill>
@@ -6950,174 +12540,23 @@
                 <a:ea typeface="Arial" pitchFamily="34" charset="-122"/>
                 <a:cs typeface="Arial" pitchFamily="34" charset="-120"/>
               </a:rPr>
-              <a:t>حصص مائية مقننة عبر قناة الملك عبدالله، وجزء متزايد منها مياه صرف معالجة.</a:t>
-            </a:r>
-            <a:endParaRPr lang="en-US" sz="1150" dirty="0"/>
-          </a:p>
-        </p:txBody>
-      </p:sp>
-      <p:sp>
-        <p:nvSpPr>
-          <p:cNvPr id="9" name="Shape 6"/>
-          <p:cNvSpPr/>
-          <p:nvPr/>
-        </p:nvSpPr>
-        <p:spPr>
-          <a:xfrm>
-            <a:off x="4359554" y="1783080"/>
-            <a:ext cx="3472586" cy="4069080"/>
-          </a:xfrm>
-          <a:prstGeom prst="roundRect">
-            <a:avLst>
-              <a:gd name="adj" fmla="val 2633"/>
-            </a:avLst>
-          </a:prstGeom>
-          <a:solidFill>
-            <a:srgbClr val="F2F1E8"/>
-          </a:solidFill>
-          <a:ln w="9525">
-            <a:solidFill>
-              <a:srgbClr val="E0DFD0"/>
-            </a:solidFill>
-            <a:prstDash val="solid"/>
-          </a:ln>
-        </p:spPr>
-      </p:sp>
-      <p:pic>
-        <p:nvPicPr>
-          <p:cNvPr id="10" name="Image 1" descr="preencoded.png">    </p:cNvPr>
-          <p:cNvPicPr>
-            <a:picLocks noChangeAspect="1"/>
-          </p:cNvPicPr>
-          <p:nvPr/>
-        </p:nvPicPr>
-        <p:blipFill>
-          <a:blip r:embed="rId2"/>
-          <a:stretch>
-            <a:fillRect/>
-          </a:stretch>
-        </p:blipFill>
-        <p:spPr>
-          <a:xfrm>
-            <a:off x="4359554" y="1783080"/>
-            <a:ext cx="3472586" cy="1691640"/>
-          </a:xfrm>
-          <a:prstGeom prst="rect">
-            <a:avLst/>
-          </a:prstGeom>
-        </p:spPr>
-      </p:pic>
-      <p:sp>
-        <p:nvSpPr>
-          <p:cNvPr id="11" name="Text 7"/>
-          <p:cNvSpPr txBox="1"/>
-          <p:nvPr/>
-        </p:nvSpPr>
-        <p:spPr>
-          <a:xfrm>
-            <a:off x="4560722" y="3639312"/>
-            <a:ext cx="3070250" cy="384048"/>
-          </a:xfrm>
-          <a:prstGeom prst="rect">
-            <a:avLst/>
-          </a:prstGeom>
-          <a:noFill/>
-          <a:ln/>
-        </p:spPr>
-        <p:txBody>
-          <a:bodyPr wrap="square" lIns="0" tIns="0" rIns="0" bIns="0" rtlCol="0" anchor="ctr"/>
-          <a:lstStyle/>
-          <a:p>
-            <a:pPr rtl="1" algn="r" indent="0" marL="0">
-              <a:buNone/>
-            </a:pPr>
-            <a:r>
-              <a:rPr lang="en-US" sz="1500" b="1" dirty="0">
-                <a:solidFill>
-                  <a:srgbClr val="2C6E49"/>
-                </a:solidFill>
-                <a:latin typeface="Arial" pitchFamily="34" charset="0"/>
-                <a:ea typeface="Arial" pitchFamily="34" charset="-122"/>
-                <a:cs typeface="Arial" pitchFamily="34" charset="-120"/>
-              </a:rPr>
-              <a:t>المرتفعات الشمالية</a:t>
-            </a:r>
-            <a:endParaRPr lang="en-US" sz="1500" dirty="0"/>
-          </a:p>
-        </p:txBody>
-      </p:sp>
-      <p:sp>
-        <p:nvSpPr>
-          <p:cNvPr id="12" name="Text 8"/>
-          <p:cNvSpPr txBox="1"/>
-          <p:nvPr/>
-        </p:nvSpPr>
-        <p:spPr>
-          <a:xfrm>
-            <a:off x="4560722" y="4041648"/>
-            <a:ext cx="3070250" cy="329184"/>
-          </a:xfrm>
-          <a:prstGeom prst="rect">
-            <a:avLst/>
-          </a:prstGeom>
-          <a:noFill/>
-          <a:ln/>
-        </p:spPr>
-        <p:txBody>
-          <a:bodyPr wrap="square" lIns="0" tIns="0" rIns="0" bIns="0" rtlCol="0" anchor="ctr"/>
-          <a:lstStyle/>
-          <a:p>
-            <a:pPr rtl="1" algn="r" indent="0" marL="0">
-              <a:buNone/>
-            </a:pPr>
-            <a:r>
-              <a:rPr lang="en-US" sz="1250" b="1" dirty="0">
-                <a:solidFill>
-                  <a:srgbClr val="9C6C12"/>
-                </a:solidFill>
-                <a:latin typeface="Arial" pitchFamily="34" charset="0"/>
-                <a:ea typeface="Arial" pitchFamily="34" charset="-122"/>
-                <a:cs typeface="Arial" pitchFamily="34" charset="-120"/>
-              </a:rPr>
-              <a:t>زيتون بعلي — إربد وعجلون وجرش</a:t>
-            </a:r>
-            <a:endParaRPr lang="en-US" sz="1250" dirty="0"/>
-          </a:p>
-        </p:txBody>
-      </p:sp>
-      <p:sp>
-        <p:nvSpPr>
-          <p:cNvPr id="13" name="Text 9"/>
-          <p:cNvSpPr txBox="1"/>
-          <p:nvPr/>
-        </p:nvSpPr>
-        <p:spPr>
-          <a:xfrm>
-            <a:off x="4560722" y="4407408"/>
-            <a:ext cx="3070250" cy="1280160"/>
-          </a:xfrm>
-          <a:prstGeom prst="rect">
-            <a:avLst/>
-          </a:prstGeom>
-          <a:noFill/>
-          <a:ln/>
-        </p:spPr>
-        <p:txBody>
-          <a:bodyPr wrap="square" lIns="0" tIns="0" rIns="0" bIns="0" rtlCol="0" anchor="t"/>
-          <a:lstStyle/>
+              <a:t>ملوحة المياه والتربة في جنوب الوادي تخفض الإنتاج وتفرض غسل التربة بكميات ماء إضافية.</a:t>
+            </a:r>
+            <a:endParaRPr lang="en-US" sz="1400" dirty="0"/>
+          </a:p>
           <a:p>
             <a:pPr algn="r" marL="342900" indent="-342900">
               <a:lnSpc>
-                <a:spcPct val="116000"/>
+                <a:spcPct val="122000"/>
               </a:lnSpc>
               <a:spcAft>
-                <a:spcPts val="700"/>
+                <a:spcPts val="1100"/>
               </a:spcAft>
               <a:buSzPct val="100000"/>
               <a:buChar char="•"/>
             </a:pPr>
             <a:r>
-              <a:rPr lang="en-US" sz="1150" dirty="0">
+              <a:rPr lang="en-US" sz="1400" dirty="0">
                 <a:solidFill>
                   <a:srgbClr val="364239"/>
                 </a:solidFill>
@@ -7125,23 +12564,23 @@
                 <a:ea typeface="Arial" pitchFamily="34" charset="-122"/>
                 <a:cs typeface="Arial" pitchFamily="34" charset="-120"/>
               </a:rPr>
-              <a:t>نحو نصف مساحة الزيتون في المملكة، وهي زراعة بعلية يتحدد إنتاجها بمطر الموسم مباشرة.</a:t>
-            </a:r>
-            <a:endParaRPr lang="en-US" sz="1150" dirty="0"/>
+              <a:t>الري بالتنقيط منتشر، لذلك يأتي أي توفير جديد من الاحتفاظ بالماء في التربة نفسها.</a:t>
+            </a:r>
+            <a:endParaRPr lang="en-US" sz="1400" dirty="0"/>
           </a:p>
           <a:p>
             <a:pPr algn="r" marL="342900" indent="-342900">
               <a:lnSpc>
-                <a:spcPct val="116000"/>
+                <a:spcPct val="122000"/>
               </a:lnSpc>
               <a:spcAft>
-                <a:spcPts val="700"/>
+                <a:spcPts val="1100"/>
               </a:spcAft>
               <a:buSzPct val="100000"/>
               <a:buChar char="•"/>
             </a:pPr>
             <a:r>
-              <a:rPr lang="en-US" sz="1150" dirty="0">
+              <a:rPr lang="en-US" sz="1400" dirty="0">
                 <a:solidFill>
                   <a:srgbClr val="364239"/>
                 </a:solidFill>
@@ -7149,262 +12588,15 @@
                 <a:ea typeface="Arial" pitchFamily="34" charset="-122"/>
                 <a:cs typeface="Arial" pitchFamily="34" charset="-120"/>
               </a:rPr>
-              <a:t>أمطار بين 400 و600 مم سنوياً، لكنها متركزة في أشهر قليلة ومتفاوتة بين سنة وأخرى.</a:t>
-            </a:r>
-            <a:endParaRPr lang="en-US" sz="1150" dirty="0"/>
-          </a:p>
-          <a:p>
-            <a:pPr algn="r" marL="342900" indent="-342900">
-              <a:lnSpc>
-                <a:spcPct val="116000"/>
-              </a:lnSpc>
-              <a:spcAft>
-                <a:spcPts val="700"/>
-              </a:spcAft>
-              <a:buSzPct val="100000"/>
-              <a:buChar char="•"/>
-            </a:pPr>
-            <a:r>
-              <a:rPr lang="en-US" sz="1150" dirty="0">
-                <a:solidFill>
-                  <a:srgbClr val="364239"/>
-                </a:solidFill>
-                <a:latin typeface="Arial" pitchFamily="34" charset="0"/>
-                <a:ea typeface="Arial" pitchFamily="34" charset="-122"/>
-                <a:cs typeface="Arial" pitchFamily="34" charset="-120"/>
-              </a:rPr>
-              <a:t>الاحتفاظ بالماء في منطقة الجذور يمدّ أثر المطر إلى ما بعد توقّفه: هذا هو الرهان هنا.</a:t>
-            </a:r>
-            <a:endParaRPr lang="en-US" sz="1150" dirty="0"/>
-          </a:p>
-        </p:txBody>
-      </p:sp>
-      <p:sp>
-        <p:nvSpPr>
-          <p:cNvPr id="14" name="Shape 10"/>
-          <p:cNvSpPr/>
-          <p:nvPr/>
-        </p:nvSpPr>
-        <p:spPr>
-          <a:xfrm>
-            <a:off x="8124749" y="1783080"/>
-            <a:ext cx="3472586" cy="4069080"/>
-          </a:xfrm>
-          <a:prstGeom prst="roundRect">
-            <a:avLst>
-              <a:gd name="adj" fmla="val 2633"/>
-            </a:avLst>
-          </a:prstGeom>
-          <a:solidFill>
-            <a:srgbClr val="F2F1E8"/>
-          </a:solidFill>
-          <a:ln w="9525">
-            <a:solidFill>
-              <a:srgbClr val="E0DFD0"/>
-            </a:solidFill>
-            <a:prstDash val="solid"/>
-          </a:ln>
-        </p:spPr>
-      </p:sp>
-      <p:pic>
-        <p:nvPicPr>
-          <p:cNvPr id="15" name="Image 2" descr="preencoded.png">    </p:cNvPr>
-          <p:cNvPicPr>
-            <a:picLocks noChangeAspect="1"/>
-          </p:cNvPicPr>
-          <p:nvPr/>
-        </p:nvPicPr>
-        <p:blipFill>
-          <a:blip r:embed="rId3"/>
-          <a:stretch>
-            <a:fillRect/>
-          </a:stretch>
-        </p:blipFill>
-        <p:spPr>
-          <a:xfrm>
-            <a:off x="8124749" y="1783080"/>
-            <a:ext cx="3472586" cy="1691640"/>
-          </a:xfrm>
-          <a:prstGeom prst="rect">
-            <a:avLst/>
-          </a:prstGeom>
-        </p:spPr>
-      </p:pic>
-      <p:sp>
-        <p:nvSpPr>
-          <p:cNvPr id="16" name="Text 11"/>
-          <p:cNvSpPr txBox="1"/>
-          <p:nvPr/>
-        </p:nvSpPr>
-        <p:spPr>
-          <a:xfrm>
-            <a:off x="8325917" y="3639312"/>
-            <a:ext cx="3070250" cy="384048"/>
-          </a:xfrm>
-          <a:prstGeom prst="rect">
-            <a:avLst/>
-          </a:prstGeom>
-          <a:noFill/>
-          <a:ln/>
-        </p:spPr>
-        <p:txBody>
-          <a:bodyPr wrap="square" lIns="0" tIns="0" rIns="0" bIns="0" rtlCol="0" anchor="ctr"/>
-          <a:lstStyle/>
-          <a:p>
-            <a:pPr rtl="1" algn="r" indent="0" marL="0">
-              <a:buNone/>
-            </a:pPr>
-            <a:r>
-              <a:rPr lang="en-US" sz="1500" b="1" dirty="0">
-                <a:solidFill>
-                  <a:srgbClr val="2C6E49"/>
-                </a:solidFill>
-                <a:latin typeface="Arial" pitchFamily="34" charset="0"/>
-                <a:ea typeface="Arial" pitchFamily="34" charset="-122"/>
-                <a:cs typeface="Arial" pitchFamily="34" charset="-120"/>
-              </a:rPr>
-              <a:t>المفرق وحوض الأزرق</a:t>
-            </a:r>
-            <a:endParaRPr lang="en-US" sz="1500" dirty="0"/>
-          </a:p>
-        </p:txBody>
-      </p:sp>
-      <p:sp>
-        <p:nvSpPr>
-          <p:cNvPr id="17" name="Text 12"/>
-          <p:cNvSpPr txBox="1"/>
-          <p:nvPr/>
-        </p:nvSpPr>
-        <p:spPr>
-          <a:xfrm>
-            <a:off x="8325917" y="4041648"/>
-            <a:ext cx="3070250" cy="329184"/>
-          </a:xfrm>
-          <a:prstGeom prst="rect">
-            <a:avLst/>
-          </a:prstGeom>
-          <a:noFill/>
-          <a:ln/>
-        </p:spPr>
-        <p:txBody>
-          <a:bodyPr wrap="square" lIns="0" tIns="0" rIns="0" bIns="0" rtlCol="0" anchor="ctr"/>
-          <a:lstStyle/>
-          <a:p>
-            <a:pPr rtl="1" algn="r" indent="0" marL="0">
-              <a:buNone/>
-            </a:pPr>
-            <a:r>
-              <a:rPr lang="en-US" sz="1250" b="1" dirty="0">
-                <a:solidFill>
-                  <a:srgbClr val="9C6C12"/>
-                </a:solidFill>
-                <a:latin typeface="Arial" pitchFamily="34" charset="0"/>
-                <a:ea typeface="Arial" pitchFamily="34" charset="-122"/>
-                <a:cs typeface="Arial" pitchFamily="34" charset="-120"/>
-              </a:rPr>
-              <a:t>ضخ جوفي يقارب ضعف الحد الآمن</a:t>
-            </a:r>
-            <a:endParaRPr lang="en-US" sz="1250" dirty="0"/>
-          </a:p>
-        </p:txBody>
-      </p:sp>
-      <p:sp>
-        <p:nvSpPr>
-          <p:cNvPr id="18" name="Text 13"/>
-          <p:cNvSpPr txBox="1"/>
-          <p:nvPr/>
-        </p:nvSpPr>
-        <p:spPr>
-          <a:xfrm>
-            <a:off x="8325917" y="4407408"/>
-            <a:ext cx="3070250" cy="1280160"/>
-          </a:xfrm>
-          <a:prstGeom prst="rect">
-            <a:avLst/>
-          </a:prstGeom>
-          <a:noFill/>
-          <a:ln/>
-        </p:spPr>
-        <p:txBody>
-          <a:bodyPr wrap="square" lIns="0" tIns="0" rIns="0" bIns="0" rtlCol="0" anchor="t"/>
-          <a:lstStyle/>
-          <a:p>
-            <a:pPr algn="r" marL="342900" indent="-342900">
-              <a:lnSpc>
-                <a:spcPct val="116000"/>
-              </a:lnSpc>
-              <a:spcAft>
-                <a:spcPts val="700"/>
-              </a:spcAft>
-              <a:buSzPct val="100000"/>
-              <a:buChar char="•"/>
-            </a:pPr>
-            <a:r>
-              <a:rPr lang="en-US" sz="1150" dirty="0">
-                <a:solidFill>
-                  <a:srgbClr val="364239"/>
-                </a:solidFill>
-                <a:latin typeface="Arial" pitchFamily="34" charset="0"/>
-                <a:ea typeface="Arial" pitchFamily="34" charset="-122"/>
-                <a:cs typeface="Arial" pitchFamily="34" charset="-120"/>
-              </a:rPr>
-              <a:t>مزارع مروية بالكامل من الآبار: خضار مكشوفة وأشجار مثمرة وزيتون مروي في مناخ شبه صحراوي.</a:t>
-            </a:r>
-            <a:endParaRPr lang="en-US" sz="1150" dirty="0"/>
-          </a:p>
-          <a:p>
-            <a:pPr algn="r" marL="342900" indent="-342900">
-              <a:lnSpc>
-                <a:spcPct val="116000"/>
-              </a:lnSpc>
-              <a:spcAft>
-                <a:spcPts val="700"/>
-              </a:spcAft>
-              <a:buSzPct val="100000"/>
-              <a:buChar char="•"/>
-            </a:pPr>
-            <a:r>
-              <a:rPr lang="en-US" sz="1150" dirty="0">
-                <a:solidFill>
-                  <a:srgbClr val="364239"/>
-                </a:solidFill>
-                <a:latin typeface="Arial" pitchFamily="34" charset="0"/>
-                <a:ea typeface="Arial" pitchFamily="34" charset="-122"/>
-                <a:cs typeface="Arial" pitchFamily="34" charset="-120"/>
-              </a:rPr>
-              <a:t>قيود متزايدة على تراخيص الآبار وعلى حصص الضخ، ما يجعل كل متر مكعب موفَّر ذا قيمة مباشرة.</a:t>
-            </a:r>
-            <a:endParaRPr lang="en-US" sz="1150" dirty="0"/>
-          </a:p>
-          <a:p>
-            <a:pPr algn="r" marL="342900" indent="-342900">
-              <a:lnSpc>
-                <a:spcPct val="116000"/>
-              </a:lnSpc>
-              <a:spcAft>
-                <a:spcPts val="700"/>
-              </a:spcAft>
-              <a:buSzPct val="100000"/>
-              <a:buChar char="•"/>
-            </a:pPr>
-            <a:r>
-              <a:rPr lang="en-US" sz="1150" dirty="0">
-                <a:solidFill>
-                  <a:srgbClr val="364239"/>
-                </a:solidFill>
-                <a:latin typeface="Arial" pitchFamily="34" charset="0"/>
-                <a:ea typeface="Arial" pitchFamily="34" charset="-122"/>
-                <a:cs typeface="Arial" pitchFamily="34" charset="-120"/>
-              </a:rPr>
-              <a:t>ملوحة مياه الآبار في ارتفاع، وهو ما يستوجب مادة بوتاسية لا صوديومية في منطقة الجذور.</a:t>
-            </a:r>
-            <a:endParaRPr lang="en-US" sz="1150" dirty="0"/>
-          </a:p>
-        </p:txBody>
-      </p:sp>
-      <p:sp>
-        <p:nvSpPr>
-          <p:cNvPr id="19" name="Text 14"/>
+              <a:t>‏NAPEMA® يعالج الآفات دون متبقيات، وهو شرط لقبول الشحنات في أسواق التصدير.</a:t>
+            </a:r>
+            <a:endParaRPr lang="en-US" sz="1400" dirty="0"/>
+          </a:p>
+        </p:txBody>
+      </p:sp>
+      <p:sp>
+        <p:nvSpPr>
+          <p:cNvPr id="6" name="Text 3"/>
           <p:cNvSpPr txBox="1"/>
           <p:nvPr/>
         </p:nvSpPr>
@@ -7445,7 +12637,7 @@
       </p:sp>
       <p:sp>
         <p:nvSpPr>
-          <p:cNvPr id="20" name="Text 15"/>
+          <p:cNvPr id="7" name="Text 4"/>
           <p:cNvSpPr txBox="1"/>
           <p:nvPr/>
         </p:nvSpPr>
@@ -7549,7 +12741,7 @@
                 <a:ea typeface="Arial" pitchFamily="34" charset="-122"/>
                 <a:cs typeface="Arial" pitchFamily="34" charset="-120"/>
               </a:rPr>
-              <a:t>كيف نعمل</a:t>
+              <a:t>إمكانات الإنتاج</a:t>
             </a:r>
             <a:endParaRPr lang="en-US" sz="1150" dirty="0"/>
           </a:p>
@@ -7588,26 +12780,42 @@
                 <a:ea typeface="Arial" pitchFamily="34" charset="-122"/>
                 <a:cs typeface="Arial" pitchFamily="34" charset="-120"/>
               </a:rPr>
-              <a:t>انتشار على مراحل، يُقاس عند كل مرحلة</a:t>
+              <a:t>الزيادة المتوقعة في الإنتاج حسب المحصول</a:t>
             </a:r>
             <a:endParaRPr lang="en-US" sz="3000" dirty="0"/>
           </a:p>
         </p:txBody>
       </p:sp>
-      <p:sp>
-        <p:nvSpPr>
-          <p:cNvPr id="4" name="Shape 2"/>
+      <p:graphicFrame>
+        <p:nvGraphicFramePr>
+          <p:cNvPr id="4" name="Chart 0" descr=""/>
+          <p:cNvGraphicFramePr/>
+          <p:nvPr/>
+        </p:nvGraphicFramePr>
+        <p:xfrm>
+          <a:off x="594360" y="1783080"/>
+          <a:ext cx="7360920" cy="3977640"/>
+        </p:xfrm>
+        <a:graphic xmlns:a="http://schemas.openxmlformats.org/drawingml/2006/main">
+          <a:graphicData uri="http://schemas.openxmlformats.org/drawingml/2006/chart">
+            <c:chart xmlns:c="http://schemas.openxmlformats.org/drawingml/2006/chart" r:id="rId1"/>
+          </a:graphicData>
+        </a:graphic>
+      </p:graphicFrame>
+      <p:sp>
+        <p:nvSpPr>
+          <p:cNvPr id="5" name="Shape 2"/>
           <p:cNvSpPr/>
           <p:nvPr/>
         </p:nvSpPr>
         <p:spPr>
           <a:xfrm>
-            <a:off x="594360" y="1874520"/>
-            <a:ext cx="2545004" cy="2834640"/>
+            <a:off x="8275320" y="1783080"/>
+            <a:ext cx="3291840" cy="3977640"/>
           </a:xfrm>
           <a:prstGeom prst="roundRect">
             <a:avLst>
-              <a:gd name="adj" fmla="val 3593"/>
+              <a:gd name="adj" fmla="val 2778"/>
             </a:avLst>
           </a:prstGeom>
           <a:solidFill>
@@ -7623,34 +12831,14 @@
       </p:sp>
       <p:sp>
         <p:nvSpPr>
-          <p:cNvPr id="5" name="Shape 3"/>
-          <p:cNvSpPr/>
-          <p:nvPr/>
-        </p:nvSpPr>
-        <p:spPr>
-          <a:xfrm>
-            <a:off x="822960" y="2103120"/>
-            <a:ext cx="566928" cy="566928"/>
-          </a:xfrm>
-          <a:prstGeom prst="ellipse">
-            <a:avLst/>
-          </a:prstGeom>
-          <a:solidFill>
-            <a:srgbClr val="2C6E49"/>
-          </a:solidFill>
-          <a:ln/>
-        </p:spPr>
-      </p:sp>
-      <p:sp>
-        <p:nvSpPr>
-          <p:cNvPr id="6" name="Text 4"/>
-          <p:cNvSpPr txBox="1"/>
-          <p:nvPr/>
-        </p:nvSpPr>
-        <p:spPr>
-          <a:xfrm>
-            <a:off x="822960" y="2103120"/>
-            <a:ext cx="566928" cy="566928"/>
+          <p:cNvPr id="6" name="Text 3"/>
+          <p:cNvSpPr txBox="1"/>
+          <p:nvPr/>
+        </p:nvSpPr>
+        <p:spPr>
+          <a:xfrm>
+            <a:off x="8503920" y="2011680"/>
+            <a:ext cx="2834640" cy="457200"/>
           </a:xfrm>
           <a:prstGeom prst="rect">
             <a:avLst/>
@@ -7662,50 +12850,11 @@
           <a:bodyPr wrap="square" lIns="0" tIns="0" rIns="0" bIns="0" rtlCol="0" anchor="ctr"/>
           <a:lstStyle/>
           <a:p>
-            <a:pPr rtl="1" algn="ctr" indent="0" marL="0">
-              <a:buNone/>
-            </a:pPr>
-            <a:r>
-              <a:rPr lang="en-US" sz="1600" b="1" dirty="0">
-                <a:solidFill>
-                  <a:srgbClr val="FFFFFF"/>
-                </a:solidFill>
-                <a:latin typeface="Arial" pitchFamily="34" charset="0"/>
-                <a:ea typeface="Arial" pitchFamily="34" charset="-122"/>
-                <a:cs typeface="Arial" pitchFamily="34" charset="-120"/>
-              </a:rPr>
-              <a:t>1</a:t>
-            </a:r>
-            <a:endParaRPr lang="en-US" sz="1600" dirty="0"/>
-          </a:p>
-        </p:txBody>
-      </p:sp>
-      <p:sp>
-        <p:nvSpPr>
-          <p:cNvPr id="7" name="Text 5"/>
-          <p:cNvSpPr txBox="1"/>
-          <p:nvPr/>
-        </p:nvSpPr>
-        <p:spPr>
-          <a:xfrm>
-            <a:off x="822960" y="2788920"/>
-            <a:ext cx="2087804" cy="457200"/>
-          </a:xfrm>
-          <a:prstGeom prst="rect">
-            <a:avLst/>
-          </a:prstGeom>
-          <a:noFill/>
-          <a:ln/>
-        </p:spPr>
-        <p:txBody>
-          <a:bodyPr wrap="square" lIns="0" tIns="0" rIns="0" bIns="0" rtlCol="0" anchor="ctr"/>
-          <a:lstStyle/>
-          <a:p>
             <a:pPr rtl="1" algn="r" indent="0" marL="0">
               <a:buNone/>
             </a:pPr>
             <a:r>
-              <a:rPr lang="en-US" sz="1400" b="1" dirty="0">
+              <a:rPr lang="en-US" sz="1300" b="1" dirty="0">
                 <a:solidFill>
                   <a:srgbClr val="2C6E49"/>
                 </a:solidFill>
@@ -7713,565 +12862,22 @@
                 <a:ea typeface="Arial" pitchFamily="34" charset="-122"/>
                 <a:cs typeface="Arial" pitchFamily="34" charset="-120"/>
               </a:rPr>
-              <a:t>التشخيص</a:t>
-            </a:r>
-            <a:endParaRPr lang="en-US" sz="1400" dirty="0"/>
-          </a:p>
-        </p:txBody>
-      </p:sp>
-      <p:sp>
-        <p:nvSpPr>
-          <p:cNvPr id="8" name="Text 6"/>
-          <p:cNvSpPr txBox="1"/>
-          <p:nvPr/>
-        </p:nvSpPr>
-        <p:spPr>
-          <a:xfrm>
-            <a:off x="822960" y="3291840"/>
-            <a:ext cx="2087804" cy="1234440"/>
-          </a:xfrm>
-          <a:prstGeom prst="rect">
-            <a:avLst/>
-          </a:prstGeom>
-          <a:noFill/>
-          <a:ln/>
-        </p:spPr>
-        <p:txBody>
-          <a:bodyPr wrap="square" lIns="0" tIns="0" rIns="0" bIns="0" rtlCol="0" anchor="t"/>
-          <a:lstStyle/>
-          <a:p>
-            <a:pPr rtl="1" algn="r" indent="0" marL="0">
-              <a:lnSpc>
-                <a:spcPct val="120000"/>
-              </a:lnSpc>
-              <a:buNone/>
-            </a:pPr>
-            <a:r>
-              <a:rPr lang="en-US" sz="1200" dirty="0">
-                <a:solidFill>
-                  <a:srgbClr val="364239"/>
-                </a:solidFill>
-                <a:latin typeface="Arial" pitchFamily="34" charset="0"/>
-                <a:ea typeface="Arial" pitchFamily="34" charset="-122"/>
-                <a:cs typeface="Arial" pitchFamily="34" charset="-120"/>
-              </a:rPr>
-              <a:t>تحليل التربة وأسلوب الري والمحصول. لا التزام على الإطلاق في هذه المرحلة.</a:t>
-            </a:r>
-            <a:endParaRPr lang="en-US" sz="1200" dirty="0"/>
-          </a:p>
-        </p:txBody>
-      </p:sp>
-      <p:sp>
-        <p:nvSpPr>
-          <p:cNvPr id="9" name="Shape 7"/>
-          <p:cNvSpPr/>
-          <p:nvPr/>
-        </p:nvSpPr>
-        <p:spPr>
-          <a:xfrm>
-            <a:off x="3413684" y="1874520"/>
-            <a:ext cx="2545004" cy="2834640"/>
-          </a:xfrm>
-          <a:prstGeom prst="roundRect">
-            <a:avLst>
-              <a:gd name="adj" fmla="val 3593"/>
-            </a:avLst>
-          </a:prstGeom>
-          <a:solidFill>
-            <a:srgbClr val="F2F1E8"/>
-          </a:solidFill>
-          <a:ln w="9525">
-            <a:solidFill>
-              <a:srgbClr val="E0DFD0"/>
-            </a:solidFill>
-            <a:prstDash val="solid"/>
-          </a:ln>
-        </p:spPr>
-      </p:sp>
-      <p:sp>
-        <p:nvSpPr>
-          <p:cNvPr id="10" name="Shape 8"/>
-          <p:cNvSpPr/>
-          <p:nvPr/>
-        </p:nvSpPr>
-        <p:spPr>
-          <a:xfrm>
-            <a:off x="3642284" y="2103120"/>
-            <a:ext cx="566928" cy="566928"/>
-          </a:xfrm>
-          <a:prstGeom prst="ellipse">
-            <a:avLst/>
-          </a:prstGeom>
-          <a:solidFill>
-            <a:srgbClr val="2C6E49"/>
-          </a:solidFill>
-          <a:ln/>
-        </p:spPr>
-      </p:sp>
-      <p:sp>
-        <p:nvSpPr>
-          <p:cNvPr id="11" name="Text 9"/>
-          <p:cNvSpPr txBox="1"/>
-          <p:nvPr/>
-        </p:nvSpPr>
-        <p:spPr>
-          <a:xfrm>
-            <a:off x="3642284" y="2103120"/>
-            <a:ext cx="566928" cy="566928"/>
-          </a:xfrm>
-          <a:prstGeom prst="rect">
-            <a:avLst/>
-          </a:prstGeom>
-          <a:noFill/>
-          <a:ln/>
-        </p:spPr>
-        <p:txBody>
-          <a:bodyPr wrap="square" lIns="0" tIns="0" rIns="0" bIns="0" rtlCol="0" anchor="ctr"/>
-          <a:lstStyle/>
-          <a:p>
-            <a:pPr rtl="1" algn="ctr" indent="0" marL="0">
-              <a:buNone/>
-            </a:pPr>
-            <a:r>
-              <a:rPr lang="en-US" sz="1600" b="1" dirty="0">
-                <a:solidFill>
-                  <a:srgbClr val="FFFFFF"/>
-                </a:solidFill>
-                <a:latin typeface="Arial" pitchFamily="34" charset="0"/>
-                <a:ea typeface="Arial" pitchFamily="34" charset="-122"/>
-                <a:cs typeface="Arial" pitchFamily="34" charset="-120"/>
-              </a:rPr>
-              <a:t>2</a:t>
-            </a:r>
-            <a:endParaRPr lang="en-US" sz="1600" dirty="0"/>
-          </a:p>
-        </p:txBody>
-      </p:sp>
-      <p:sp>
-        <p:nvSpPr>
-          <p:cNvPr id="12" name="Text 10"/>
-          <p:cNvSpPr txBox="1"/>
-          <p:nvPr/>
-        </p:nvSpPr>
-        <p:spPr>
-          <a:xfrm>
-            <a:off x="3642284" y="2788920"/>
-            <a:ext cx="2087804" cy="457200"/>
-          </a:xfrm>
-          <a:prstGeom prst="rect">
-            <a:avLst/>
-          </a:prstGeom>
-          <a:noFill/>
-          <a:ln/>
-        </p:spPr>
-        <p:txBody>
-          <a:bodyPr wrap="square" lIns="0" tIns="0" rIns="0" bIns="0" rtlCol="0" anchor="ctr"/>
-          <a:lstStyle/>
-          <a:p>
-            <a:pPr rtl="1" algn="r" indent="0" marL="0">
-              <a:buNone/>
-            </a:pPr>
-            <a:r>
-              <a:rPr lang="en-US" sz="1400" b="1" dirty="0">
-                <a:solidFill>
-                  <a:srgbClr val="2C6E49"/>
-                </a:solidFill>
-                <a:latin typeface="Arial" pitchFamily="34" charset="0"/>
-                <a:ea typeface="Arial" pitchFamily="34" charset="-122"/>
-                <a:cs typeface="Arial" pitchFamily="34" charset="-120"/>
-              </a:rPr>
-              <a:t>قطعة تجريبية</a:t>
-            </a:r>
-            <a:endParaRPr lang="en-US" sz="1400" dirty="0"/>
-          </a:p>
-        </p:txBody>
-      </p:sp>
-      <p:sp>
-        <p:nvSpPr>
-          <p:cNvPr id="13" name="Text 11"/>
-          <p:cNvSpPr txBox="1"/>
-          <p:nvPr/>
-        </p:nvSpPr>
-        <p:spPr>
-          <a:xfrm>
-            <a:off x="3642284" y="3291840"/>
-            <a:ext cx="2087804" cy="1234440"/>
-          </a:xfrm>
-          <a:prstGeom prst="rect">
-            <a:avLst/>
-          </a:prstGeom>
-          <a:noFill/>
-          <a:ln/>
-        </p:spPr>
-        <p:txBody>
-          <a:bodyPr wrap="square" lIns="0" tIns="0" rIns="0" bIns="0" rtlCol="0" anchor="t"/>
-          <a:lstStyle/>
-          <a:p>
-            <a:pPr rtl="1" algn="r" indent="0" marL="0">
-              <a:lnSpc>
-                <a:spcPct val="120000"/>
-              </a:lnSpc>
-              <a:buNone/>
-            </a:pPr>
-            <a:r>
-              <a:rPr lang="en-US" sz="1200" dirty="0">
-                <a:solidFill>
-                  <a:srgbClr val="364239"/>
-                </a:solidFill>
-                <a:latin typeface="Arial" pitchFamily="34" charset="0"/>
-                <a:ea typeface="Arial" pitchFamily="34" charset="-122"/>
-                <a:cs typeface="Arial" pitchFamily="34" charset="-120"/>
-              </a:rPr>
-              <a:t>تجربة مقارنة على قطعة واحدة، مع قطعة شاهدة تُدار بالطريقة نفسها.</a:t>
-            </a:r>
-            <a:endParaRPr lang="en-US" sz="1200" dirty="0"/>
-          </a:p>
-        </p:txBody>
-      </p:sp>
-      <p:sp>
-        <p:nvSpPr>
-          <p:cNvPr id="14" name="Shape 12"/>
-          <p:cNvSpPr/>
-          <p:nvPr/>
-        </p:nvSpPr>
-        <p:spPr>
-          <a:xfrm>
-            <a:off x="6233008" y="1874520"/>
-            <a:ext cx="2545004" cy="2834640"/>
-          </a:xfrm>
-          <a:prstGeom prst="roundRect">
-            <a:avLst>
-              <a:gd name="adj" fmla="val 3593"/>
-            </a:avLst>
-          </a:prstGeom>
-          <a:solidFill>
-            <a:srgbClr val="F2F1E8"/>
-          </a:solidFill>
-          <a:ln w="9525">
-            <a:solidFill>
-              <a:srgbClr val="E0DFD0"/>
-            </a:solidFill>
-            <a:prstDash val="solid"/>
-          </a:ln>
-        </p:spPr>
-      </p:sp>
-      <p:sp>
-        <p:nvSpPr>
-          <p:cNvPr id="15" name="Shape 13"/>
-          <p:cNvSpPr/>
-          <p:nvPr/>
-        </p:nvSpPr>
-        <p:spPr>
-          <a:xfrm>
-            <a:off x="6461608" y="2103120"/>
-            <a:ext cx="566928" cy="566928"/>
-          </a:xfrm>
-          <a:prstGeom prst="ellipse">
-            <a:avLst/>
-          </a:prstGeom>
-          <a:solidFill>
-            <a:srgbClr val="2C6E49"/>
-          </a:solidFill>
-          <a:ln/>
-        </p:spPr>
-      </p:sp>
-      <p:sp>
-        <p:nvSpPr>
-          <p:cNvPr id="16" name="Text 14"/>
-          <p:cNvSpPr txBox="1"/>
-          <p:nvPr/>
-        </p:nvSpPr>
-        <p:spPr>
-          <a:xfrm>
-            <a:off x="6461608" y="2103120"/>
-            <a:ext cx="566928" cy="566928"/>
-          </a:xfrm>
-          <a:prstGeom prst="rect">
-            <a:avLst/>
-          </a:prstGeom>
-          <a:noFill/>
-          <a:ln/>
-        </p:spPr>
-        <p:txBody>
-          <a:bodyPr wrap="square" lIns="0" tIns="0" rIns="0" bIns="0" rtlCol="0" anchor="ctr"/>
-          <a:lstStyle/>
-          <a:p>
-            <a:pPr rtl="1" algn="ctr" indent="0" marL="0">
-              <a:buNone/>
-            </a:pPr>
-            <a:r>
-              <a:rPr lang="en-US" sz="1600" b="1" dirty="0">
-                <a:solidFill>
-                  <a:srgbClr val="FFFFFF"/>
-                </a:solidFill>
-                <a:latin typeface="Arial" pitchFamily="34" charset="0"/>
-                <a:ea typeface="Arial" pitchFamily="34" charset="-122"/>
-                <a:cs typeface="Arial" pitchFamily="34" charset="-120"/>
-              </a:rPr>
-              <a:t>3</a:t>
-            </a:r>
-            <a:endParaRPr lang="en-US" sz="1600" dirty="0"/>
-          </a:p>
-        </p:txBody>
-      </p:sp>
-      <p:sp>
-        <p:nvSpPr>
-          <p:cNvPr id="17" name="Text 15"/>
-          <p:cNvSpPr txBox="1"/>
-          <p:nvPr/>
-        </p:nvSpPr>
-        <p:spPr>
-          <a:xfrm>
-            <a:off x="6461608" y="2788920"/>
-            <a:ext cx="2087804" cy="457200"/>
-          </a:xfrm>
-          <a:prstGeom prst="rect">
-            <a:avLst/>
-          </a:prstGeom>
-          <a:noFill/>
-          <a:ln/>
-        </p:spPr>
-        <p:txBody>
-          <a:bodyPr wrap="square" lIns="0" tIns="0" rIns="0" bIns="0" rtlCol="0" anchor="ctr"/>
-          <a:lstStyle/>
-          <a:p>
-            <a:pPr rtl="1" algn="r" indent="0" marL="0">
-              <a:buNone/>
-            </a:pPr>
-            <a:r>
-              <a:rPr lang="en-US" sz="1400" b="1" dirty="0">
-                <a:solidFill>
-                  <a:srgbClr val="2C6E49"/>
-                </a:solidFill>
-                <a:latin typeface="Arial" pitchFamily="34" charset="0"/>
-                <a:ea typeface="Arial" pitchFamily="34" charset="-122"/>
-                <a:cs typeface="Arial" pitchFamily="34" charset="-120"/>
-              </a:rPr>
-              <a:t>القياس</a:t>
-            </a:r>
-            <a:endParaRPr lang="en-US" sz="1400" dirty="0"/>
-          </a:p>
-        </p:txBody>
-      </p:sp>
-      <p:sp>
-        <p:nvSpPr>
-          <p:cNvPr id="18" name="Text 16"/>
-          <p:cNvSpPr txBox="1"/>
-          <p:nvPr/>
-        </p:nvSpPr>
-        <p:spPr>
-          <a:xfrm>
-            <a:off x="6461608" y="3291840"/>
-            <a:ext cx="2087804" cy="1234440"/>
-          </a:xfrm>
-          <a:prstGeom prst="rect">
-            <a:avLst/>
-          </a:prstGeom>
-          <a:noFill/>
-          <a:ln/>
-        </p:spPr>
-        <p:txBody>
-          <a:bodyPr wrap="square" lIns="0" tIns="0" rIns="0" bIns="0" rtlCol="0" anchor="t"/>
-          <a:lstStyle/>
-          <a:p>
-            <a:pPr rtl="1" algn="r" indent="0" marL="0">
-              <a:lnSpc>
-                <a:spcPct val="120000"/>
-              </a:lnSpc>
-              <a:buNone/>
-            </a:pPr>
-            <a:r>
-              <a:rPr lang="en-US" sz="1200" dirty="0">
-                <a:solidFill>
-                  <a:srgbClr val="364239"/>
-                </a:solidFill>
-                <a:latin typeface="Arial" pitchFamily="34" charset="0"/>
-                <a:ea typeface="Arial" pitchFamily="34" charset="-122"/>
-                <a:cs typeface="Arial" pitchFamily="34" charset="-120"/>
-              </a:rPr>
-              <a:t>رصد الاستهلاك المائي والمردود على مدى دورة زراعية كاملة.</a:t>
-            </a:r>
-            <a:endParaRPr lang="en-US" sz="1200" dirty="0"/>
-          </a:p>
-        </p:txBody>
-      </p:sp>
-      <p:sp>
-        <p:nvSpPr>
-          <p:cNvPr id="19" name="Shape 17"/>
-          <p:cNvSpPr/>
-          <p:nvPr/>
-        </p:nvSpPr>
-        <p:spPr>
-          <a:xfrm>
-            <a:off x="9052331" y="1874520"/>
-            <a:ext cx="2545004" cy="2834640"/>
-          </a:xfrm>
-          <a:prstGeom prst="roundRect">
-            <a:avLst>
-              <a:gd name="adj" fmla="val 3593"/>
-            </a:avLst>
-          </a:prstGeom>
-          <a:solidFill>
-            <a:srgbClr val="F2F1E8"/>
-          </a:solidFill>
-          <a:ln w="9525">
-            <a:solidFill>
-              <a:srgbClr val="E0DFD0"/>
-            </a:solidFill>
-            <a:prstDash val="solid"/>
-          </a:ln>
-        </p:spPr>
-      </p:sp>
-      <p:sp>
-        <p:nvSpPr>
-          <p:cNvPr id="20" name="Shape 18"/>
-          <p:cNvSpPr/>
-          <p:nvPr/>
-        </p:nvSpPr>
-        <p:spPr>
-          <a:xfrm>
-            <a:off x="9280931" y="2103120"/>
-            <a:ext cx="566928" cy="566928"/>
-          </a:xfrm>
-          <a:prstGeom prst="ellipse">
-            <a:avLst/>
-          </a:prstGeom>
-          <a:solidFill>
-            <a:srgbClr val="2C6E49"/>
-          </a:solidFill>
-          <a:ln/>
-        </p:spPr>
-      </p:sp>
-      <p:sp>
-        <p:nvSpPr>
-          <p:cNvPr id="21" name="Text 19"/>
-          <p:cNvSpPr txBox="1"/>
-          <p:nvPr/>
-        </p:nvSpPr>
-        <p:spPr>
-          <a:xfrm>
-            <a:off x="9280931" y="2103120"/>
-            <a:ext cx="566928" cy="566928"/>
-          </a:xfrm>
-          <a:prstGeom prst="rect">
-            <a:avLst/>
-          </a:prstGeom>
-          <a:noFill/>
-          <a:ln/>
-        </p:spPr>
-        <p:txBody>
-          <a:bodyPr wrap="square" lIns="0" tIns="0" rIns="0" bIns="0" rtlCol="0" anchor="ctr"/>
-          <a:lstStyle/>
-          <a:p>
-            <a:pPr rtl="1" algn="ctr" indent="0" marL="0">
-              <a:buNone/>
-            </a:pPr>
-            <a:r>
-              <a:rPr lang="en-US" sz="1600" b="1" dirty="0">
-                <a:solidFill>
-                  <a:srgbClr val="FFFFFF"/>
-                </a:solidFill>
-                <a:latin typeface="Arial" pitchFamily="34" charset="0"/>
-                <a:ea typeface="Arial" pitchFamily="34" charset="-122"/>
-                <a:cs typeface="Arial" pitchFamily="34" charset="-120"/>
-              </a:rPr>
-              <a:t>4</a:t>
-            </a:r>
-            <a:endParaRPr lang="en-US" sz="1600" dirty="0"/>
-          </a:p>
-        </p:txBody>
-      </p:sp>
-      <p:sp>
-        <p:nvSpPr>
-          <p:cNvPr id="22" name="Text 20"/>
-          <p:cNvSpPr txBox="1"/>
-          <p:nvPr/>
-        </p:nvSpPr>
-        <p:spPr>
-          <a:xfrm>
-            <a:off x="9280931" y="2788920"/>
-            <a:ext cx="2087804" cy="457200"/>
-          </a:xfrm>
-          <a:prstGeom prst="rect">
-            <a:avLst/>
-          </a:prstGeom>
-          <a:noFill/>
-          <a:ln/>
-        </p:spPr>
-        <p:txBody>
-          <a:bodyPr wrap="square" lIns="0" tIns="0" rIns="0" bIns="0" rtlCol="0" anchor="ctr"/>
-          <a:lstStyle/>
-          <a:p>
-            <a:pPr rtl="1" algn="r" indent="0" marL="0">
-              <a:buNone/>
-            </a:pPr>
-            <a:r>
-              <a:rPr lang="en-US" sz="1400" b="1" dirty="0">
-                <a:solidFill>
-                  <a:srgbClr val="2C6E49"/>
-                </a:solidFill>
-                <a:latin typeface="Arial" pitchFamily="34" charset="0"/>
-                <a:ea typeface="Arial" pitchFamily="34" charset="-122"/>
-                <a:cs typeface="Arial" pitchFamily="34" charset="-120"/>
-              </a:rPr>
-              <a:t>التوسيع</a:t>
-            </a:r>
-            <a:endParaRPr lang="en-US" sz="1400" dirty="0"/>
-          </a:p>
-        </p:txBody>
-      </p:sp>
-      <p:sp>
-        <p:nvSpPr>
-          <p:cNvPr id="23" name="Text 21"/>
-          <p:cNvSpPr txBox="1"/>
-          <p:nvPr/>
-        </p:nvSpPr>
-        <p:spPr>
-          <a:xfrm>
-            <a:off x="9280931" y="3291840"/>
-            <a:ext cx="2087804" cy="1234440"/>
-          </a:xfrm>
-          <a:prstGeom prst="rect">
-            <a:avLst/>
-          </a:prstGeom>
-          <a:noFill/>
-          <a:ln/>
-        </p:spPr>
-        <p:txBody>
-          <a:bodyPr wrap="square" lIns="0" tIns="0" rIns="0" bIns="0" rtlCol="0" anchor="t"/>
-          <a:lstStyle/>
-          <a:p>
-            <a:pPr rtl="1" algn="r" indent="0" marL="0">
-              <a:lnSpc>
-                <a:spcPct val="120000"/>
-              </a:lnSpc>
-              <a:buNone/>
-            </a:pPr>
-            <a:r>
-              <a:rPr lang="en-US" sz="1200" dirty="0">
-                <a:solidFill>
-                  <a:srgbClr val="364239"/>
-                </a:solidFill>
-                <a:latin typeface="Arial" pitchFamily="34" charset="0"/>
-                <a:ea typeface="Arial" pitchFamily="34" charset="-122"/>
-                <a:cs typeface="Arial" pitchFamily="34" charset="-120"/>
-              </a:rPr>
-              <a:t>تعميم تدريجي على بقية القطع استناداً إلى النتائج المسجّلة فعلياً.</a:t>
-            </a:r>
-            <a:endParaRPr lang="en-US" sz="1200" dirty="0"/>
-          </a:p>
-        </p:txBody>
-      </p:sp>
-      <p:sp>
-        <p:nvSpPr>
-          <p:cNvPr id="24" name="Text 22"/>
-          <p:cNvSpPr txBox="1"/>
-          <p:nvPr/>
-        </p:nvSpPr>
-        <p:spPr>
-          <a:xfrm>
-            <a:off x="594360" y="4983480"/>
-            <a:ext cx="11002975" cy="822960"/>
+              <a:t>تُقرأ بتحفّظ</a:t>
+            </a:r>
+            <a:endParaRPr lang="en-US" sz="1300" dirty="0"/>
+          </a:p>
+        </p:txBody>
+      </p:sp>
+      <p:sp>
+        <p:nvSpPr>
+          <p:cNvPr id="7" name="Text 4"/>
+          <p:cNvSpPr txBox="1"/>
+          <p:nvPr/>
+        </p:nvSpPr>
+        <p:spPr>
+          <a:xfrm>
+            <a:off x="8503920" y="2560320"/>
+            <a:ext cx="2834640" cy="3017520"/>
           </a:xfrm>
           <a:prstGeom prst="rect">
             <a:avLst/>
@@ -8290,23 +12896,52 @@
               <a:buNone/>
             </a:pPr>
             <a:r>
-              <a:rPr lang="en-US" sz="1250" i="1" dirty="0">
-                <a:solidFill>
-                  <a:srgbClr val="6F7D71"/>
-                </a:solidFill>
-                <a:latin typeface="Arial" pitchFamily="34" charset="0"/>
-                <a:ea typeface="Arial" pitchFamily="34" charset="-122"/>
-                <a:cs typeface="Arial" pitchFamily="34" charset="-120"/>
-              </a:rPr>
-              <a:t>قاعدة الجرعة واحدة في كل مكان: 3 غرامات لكل لتر من التربة المستغلة. ما يتغيّر من أرض إلى أخرى هو حجم التربة الذي تستكشفه الجذور فعلياً.</a:t>
-            </a:r>
-            <a:endParaRPr lang="en-US" sz="1250" dirty="0"/>
-          </a:p>
-        </p:txBody>
-      </p:sp>
-      <p:sp>
-        <p:nvSpPr>
-          <p:cNvPr id="25" name="Text 23"/>
+              <a:rPr lang="en-US" sz="1200" dirty="0">
+                <a:solidFill>
+                  <a:srgbClr val="364239"/>
+                </a:solidFill>
+                <a:latin typeface="Arial" pitchFamily="34" charset="0"/>
+                <a:ea typeface="Arial" pitchFamily="34" charset="-122"/>
+                <a:cs typeface="Arial" pitchFamily="34" charset="-120"/>
+              </a:rPr>
+              <a:t>نطاقات يعتمدها حاسب الجرعات على موقعنا، لمحصول يُدار إدارة عادية مع وضع EVERGREEN® عند الزراعة.</a:t>
+            </a:r>
+            <a:endParaRPr lang="en-US" sz="1200" dirty="0"/>
+          </a:p>
+          <a:p>
+            <a:pPr rtl="1" algn="r" indent="0" marL="0">
+              <a:lnSpc>
+                <a:spcPct val="125000"/>
+              </a:lnSpc>
+              <a:buNone/>
+            </a:pPr>
+            <a:endParaRPr lang="en-US" sz="1200" dirty="0"/>
+          </a:p>
+          <a:p>
+            <a:pPr rtl="1" algn="r" indent="0" marL="0">
+              <a:lnSpc>
+                <a:spcPct val="125000"/>
+              </a:lnSpc>
+              <a:buNone/>
+            </a:pPr>
+            <a:r>
+              <a:rPr lang="en-US" sz="1200" dirty="0">
+                <a:solidFill>
+                  <a:srgbClr val="364239"/>
+                </a:solidFill>
+                <a:latin typeface="Arial" pitchFamily="34" charset="0"/>
+                <a:ea typeface="Arial" pitchFamily="34" charset="-122"/>
+                <a:cs typeface="Arial" pitchFamily="34" charset="-120"/>
+              </a:rPr>
+              <a:t>النتيجة الفعلية تتوقف على التربة والمناخ وأسلوب الإدارة. أما الحبوب فلا نعلن فيها أي زيادة دون تجربة ميدانية.</a:t>
+            </a:r>
+            <a:endParaRPr lang="en-US" sz="1200" dirty="0"/>
+          </a:p>
+        </p:txBody>
+      </p:sp>
+      <p:sp>
+        <p:nvSpPr>
+          <p:cNvPr id="8" name="Text 5"/>
           <p:cNvSpPr txBox="1"/>
           <p:nvPr/>
         </p:nvSpPr>
@@ -8347,7 +12982,7 @@
       </p:sp>
       <p:sp>
         <p:nvSpPr>
-          <p:cNvPr id="26" name="Text 24"/>
+          <p:cNvPr id="9" name="Text 6"/>
           <p:cNvSpPr txBox="1"/>
           <p:nvPr/>
         </p:nvSpPr>

--- a/public/documents/countries/jordanie.pptx
+++ b/public/documents/countries/jordanie.pptx
@@ -3744,7 +3744,7 @@
       </p:sp>
       <p:pic>
         <p:nvPicPr>
-          <p:cNvPr id="5" name="Image 1" descr="C:\Users\Utilisateur\dev\green-solutions-web\public\images\logo-icon.png">    </p:cNvPr>
+          <p:cNvPr id="5" name="Image 1" descr="C:\Users\Utilisateur\dev\gsw-dossiers\public\images\logo-icon.png">    </p:cNvPr>
           <p:cNvPicPr>
             <a:picLocks noChangeAspect="1"/>
           </p:cNvPicPr>
@@ -3768,7 +3768,7 @@
       </p:pic>
       <p:pic>
         <p:nvPicPr>
-          <p:cNvPr id="6" name="Image 2" descr="C:\Users\Utilisateur\dev\green-solutions-web\scripts\dossiers\drapeaux\jordanie.png">    </p:cNvPr>
+          <p:cNvPr id="6" name="Image 2" descr="C:\Users\Utilisateur\dev\gsw-dossiers\scripts\dossiers\drapeaux\jordanie.png">    </p:cNvPr>
           <p:cNvPicPr>
             <a:picLocks noChangeAspect="1"/>
           </p:cNvPicPr>
@@ -9535,7 +9535,7 @@
                 <a:ea typeface="Arial" pitchFamily="34" charset="-122"/>
                 <a:cs typeface="Arial" pitchFamily="34" charset="-120"/>
               </a:rPr>
-              <a:t>contact@evergreen-ecosorb.com · 821 Chemin des Clapiers, 83220 Le Pradet, France</a:t>
+              <a:t>contact@evergreen-ecosorb.com · Green Solutions Groupe AIM SA, 46, route de la Condémine, 1475 Forel, Switzerland</a:t>
             </a:r>
             <a:endParaRPr lang="en-US" sz="1400" dirty="0"/>
           </a:p>
@@ -9543,7 +9543,7 @@
       </p:sp>
       <p:pic>
         <p:nvPicPr>
-          <p:cNvPr id="6" name="Image 1" descr="C:\Users\Utilisateur\dev\green-solutions-web\scripts\dossiers\sceau-aim-clair.png">    </p:cNvPr>
+          <p:cNvPr id="6" name="Image 1" descr="C:\Users\Utilisateur\dev\gsw-dossiers\scripts\dossiers\sceau-aim-clair.png">    </p:cNvPr>
           <p:cNvPicPr>
             <a:picLocks noChangeAspect="1"/>
           </p:cNvPicPr>

--- a/public/documents/countries/jordanie.pptx
+++ b/public/documents/countries/jordanie.pptx
@@ -124,7 +124,7 @@
 </p:presentation>
 </file>
 
-<file path=ppt/charts/chart41.xml><?xml version="1.0" encoding="utf-8"?>
+<file path=ppt/charts/chart17.xml><?xml version="1.0" encoding="utf-8"?>
 <c:chartSpace xmlns:c="http://schemas.openxmlformats.org/drawingml/2006/chart" xmlns:a="http://schemas.openxmlformats.org/drawingml/2006/main" xmlns:r="http://schemas.openxmlformats.org/officeDocument/2006/relationships">
   <c:date1904 val="0"/>
   <c:roundedCorners val="1"/>
@@ -369,7 +369,7 @@
 </c:chartSpace>
 </file>
 
-<file path=ppt/charts/chart42.xml><?xml version="1.0" encoding="utf-8"?>
+<file path=ppt/charts/chart18.xml><?xml version="1.0" encoding="utf-8"?>
 <c:chartSpace xmlns:c="http://schemas.openxmlformats.org/drawingml/2006/chart" xmlns:a="http://schemas.openxmlformats.org/drawingml/2006/main" xmlns:r="http://schemas.openxmlformats.org/officeDocument/2006/relationships">
   <c:date1904 val="0"/>
   <c:roundedCorners val="1"/>
@@ -677,7 +677,7 @@
 </c:chartSpace>
 </file>
 
-<file path=ppt/charts/chart43.xml><?xml version="1.0" encoding="utf-8"?>
+<file path=ppt/charts/chart19.xml><?xml version="1.0" encoding="utf-8"?>
 <c:chartSpace xmlns:c="http://schemas.openxmlformats.org/drawingml/2006/chart" xmlns:a="http://schemas.openxmlformats.org/drawingml/2006/main" xmlns:r="http://schemas.openxmlformats.org/officeDocument/2006/relationships">
   <c:date1904 val="0"/>
   <c:roundedCorners val="1"/>
@@ -1042,7 +1042,7 @@
 </c:chartSpace>
 </file>
 
-<file path=ppt/charts/chart44.xml><?xml version="1.0" encoding="utf-8"?>
+<file path=ppt/charts/chart20.xml><?xml version="1.0" encoding="utf-8"?>
 <c:chartSpace xmlns:c="http://schemas.openxmlformats.org/drawingml/2006/chart" xmlns:a="http://schemas.openxmlformats.org/drawingml/2006/main" xmlns:r="http://schemas.openxmlformats.org/officeDocument/2006/relationships">
   <c:date1904 val="0"/>
   <c:roundedCorners val="1"/>
@@ -3782,8 +3782,8 @@
         </p:blipFill>
         <p:spPr>
           <a:xfrm>
-            <a:off x="6577279" y="1389888"/>
-            <a:ext cx="1965960" cy="1310640"/>
+            <a:off x="6577279" y="1553718"/>
+            <a:ext cx="1965960" cy="982980"/>
           </a:xfrm>
           <a:prstGeom prst="rect">
             <a:avLst/>
@@ -3798,8 +3798,8 @@
         </p:nvSpPr>
         <p:spPr>
           <a:xfrm>
-            <a:off x="6577279" y="1389888"/>
-            <a:ext cx="1965960" cy="1310640"/>
+            <a:off x="6577279" y="1553718"/>
+            <a:ext cx="1965960" cy="982980"/>
           </a:xfrm>
           <a:prstGeom prst="rect">
             <a:avLst/>

--- a/public/documents/countries/jordanie.pptx
+++ b/public/documents/countries/jordanie.pptx
@@ -124,7 +124,7 @@
 </p:presentation>
 </file>
 
-<file path=ppt/charts/chart17.xml><?xml version="1.0" encoding="utf-8"?>
+<file path=ppt/charts/chart41.xml><?xml version="1.0" encoding="utf-8"?>
 <c:chartSpace xmlns:c="http://schemas.openxmlformats.org/drawingml/2006/chart" xmlns:a="http://schemas.openxmlformats.org/drawingml/2006/main" xmlns:r="http://schemas.openxmlformats.org/officeDocument/2006/relationships">
   <c:date1904 val="0"/>
   <c:roundedCorners val="1"/>
@@ -369,7 +369,7 @@
 </c:chartSpace>
 </file>
 
-<file path=ppt/charts/chart18.xml><?xml version="1.0" encoding="utf-8"?>
+<file path=ppt/charts/chart42.xml><?xml version="1.0" encoding="utf-8"?>
 <c:chartSpace xmlns:c="http://schemas.openxmlformats.org/drawingml/2006/chart" xmlns:a="http://schemas.openxmlformats.org/drawingml/2006/main" xmlns:r="http://schemas.openxmlformats.org/officeDocument/2006/relationships">
   <c:date1904 val="0"/>
   <c:roundedCorners val="1"/>
@@ -677,7 +677,7 @@
 </c:chartSpace>
 </file>
 
-<file path=ppt/charts/chart19.xml><?xml version="1.0" encoding="utf-8"?>
+<file path=ppt/charts/chart43.xml><?xml version="1.0" encoding="utf-8"?>
 <c:chartSpace xmlns:c="http://schemas.openxmlformats.org/drawingml/2006/chart" xmlns:a="http://schemas.openxmlformats.org/drawingml/2006/main" xmlns:r="http://schemas.openxmlformats.org/officeDocument/2006/relationships">
   <c:date1904 val="0"/>
   <c:roundedCorners val="1"/>
@@ -1042,7 +1042,7 @@
 </c:chartSpace>
 </file>
 
-<file path=ppt/charts/chart20.xml><?xml version="1.0" encoding="utf-8"?>
+<file path=ppt/charts/chart44.xml><?xml version="1.0" encoding="utf-8"?>
 <c:chartSpace xmlns:c="http://schemas.openxmlformats.org/drawingml/2006/chart" xmlns:a="http://schemas.openxmlformats.org/drawingml/2006/main" xmlns:r="http://schemas.openxmlformats.org/officeDocument/2006/relationships">
   <c:date1904 val="0"/>
   <c:roundedCorners val="1"/>
@@ -3744,7 +3744,7 @@
       </p:sp>
       <p:pic>
         <p:nvPicPr>
-          <p:cNvPr id="5" name="Image 1" descr="C:\Users\Utilisateur\dev\gsw-dossiers\public\images\logo-icon.png">    </p:cNvPr>
+          <p:cNvPr id="5" name="Image 1" descr="C:\Users\Utilisateur\dev\green-solutions-web\public\images\logo-icon.png">    </p:cNvPr>
           <p:cNvPicPr>
             <a:picLocks noChangeAspect="1"/>
           </p:cNvPicPr>
@@ -3768,7 +3768,7 @@
       </p:pic>
       <p:pic>
         <p:nvPicPr>
-          <p:cNvPr id="6" name="Image 2" descr="C:\Users\Utilisateur\dev\gsw-dossiers\scripts\dossiers\drapeaux\jordanie.png">    </p:cNvPr>
+          <p:cNvPr id="6" name="Image 2" descr="C:\Users\Utilisateur\dev\green-solutions-web\scripts\dossiers\drapeaux\jordanie.png">    </p:cNvPr>
           <p:cNvPicPr>
             <a:picLocks noChangeAspect="1"/>
           </p:cNvPicPr>
@@ -9053,6 +9053,30 @@
             </a:r>
             <a:endParaRPr lang="en-US" sz="1350" dirty="0"/>
           </a:p>
+          <a:p>
+            <a:pPr algn="r" marL="342900" indent="-342900">
+              <a:lnSpc>
+                <a:spcPct val="122000"/>
+              </a:lnSpc>
+              <a:spcAft>
+                <a:spcPts val="1000"/>
+              </a:spcAft>
+              <a:buSzPct val="100000"/>
+              <a:buChar char="•"/>
+            </a:pPr>
+            <a:r>
+              <a:rPr lang="en-US" sz="1350" dirty="0">
+                <a:solidFill>
+                  <a:srgbClr val="364239"/>
+                </a:solidFill>
+                <a:latin typeface="Arial" pitchFamily="34" charset="0"/>
+                <a:ea typeface="Arial" pitchFamily="34" charset="-122"/>
+                <a:cs typeface="Arial" pitchFamily="34" charset="-120"/>
+              </a:rPr>
+              <a:t>الصور الفوتوغرافية: User:Issagm (CC BY-SA 3.0), Omarbrodsd (CC BY-SA 4.0) — عبر ويكيميديا كومنز.</a:t>
+            </a:r>
+            <a:endParaRPr lang="en-US" sz="1350" dirty="0"/>
+          </a:p>
         </p:txBody>
       </p:sp>
       <p:sp>
@@ -9543,7 +9567,7 @@
       </p:sp>
       <p:pic>
         <p:nvPicPr>
-          <p:cNvPr id="6" name="Image 1" descr="C:\Users\Utilisateur\dev\gsw-dossiers\scripts\dossiers\sceau-aim-clair.png">    </p:cNvPr>
+          <p:cNvPr id="6" name="Image 1" descr="C:\Users\Utilisateur\dev\green-solutions-web\scripts\dossiers\sceau-aim-clair.png">    </p:cNvPr>
           <p:cNvPicPr>
             <a:picLocks noChangeAspect="1"/>
           </p:cNvPicPr>

--- a/public/documents/countries/jordanie.pptx
+++ b/public/documents/countries/jordanie.pptx
@@ -23,9 +23,10 @@
     <p:sldId id="271" r:id="rId17"/>
     <p:sldId id="272" r:id="rId18"/>
     <p:sldId id="273" r:id="rId19"/>
+    <p:sldId id="274" r:id="rId20"/>
   </p:sldIdLst>
   <p:notesMasterIdLst>
-    <p:notesMasterId r:id="rId20"/>
+    <p:notesMasterId r:id="rId21"/>
   </p:notesMasterIdLst>
   <p:sldSz cx="12192000" cy="6858000"/>
   <p:notesSz cx="6858000" cy="12192000"/>
@@ -124,7 +125,266 @@
 </p:presentation>
 </file>
 
-<file path=ppt/charts/chart41.xml><?xml version="1.0" encoding="utf-8"?>
+<file path=ppt/charts/chart64.xml><?xml version="1.0" encoding="utf-8"?>
+<c:chartSpace xmlns:c="http://schemas.openxmlformats.org/drawingml/2006/chart" xmlns:a="http://schemas.openxmlformats.org/drawingml/2006/main" xmlns:r="http://schemas.openxmlformats.org/officeDocument/2006/relationships">
+  <c:date1904 val="0"/>
+  <c:roundedCorners val="1"/>
+  <c:chart>
+    <c:autoTitleDeleted val="1"/>
+    <c:plotArea>
+      <c:layout/>
+      <c:barChart>
+        <c:barDir val="col"/>
+        <c:grouping val="clustered"/>
+        <c:varyColors val="0"/>
+        <c:ser>
+          <c:idx val="0"/>
+          <c:order val="0"/>
+          <c:tx>
+            <c:strRef>
+              <c:f>Sheet1!$B$1</c:f>
+              <c:strCache>
+                <c:ptCount val="1"/>
+                <c:pt idx="0">
+                  <c:v>مؤشر عالمي لعدد فترات الجفاف ومدتها</c:v>
+                </c:pt>
+              </c:strCache>
+            </c:strRef>
+          </c:tx>
+          <c:spPr>
+            <a:solidFill>
+              <a:srgbClr val="2C6E49"/>
+            </a:solidFill>
+            <a:effectLst/>
+          </c:spPr>
+          <c:invertIfNegative val="0"/>
+          <c:dLbls>
+            <c:numFmt formatCode="[$-401]0" sourceLinked="0"/>
+            <c:txPr>
+              <a:bodyPr/>
+              <a:lstStyle/>
+              <a:p>
+                <a:pPr>
+                  <a:defRPr b="0" i="0" strike="noStrike" sz="1100" u="none">
+                    <a:solidFill>
+                      <a:srgbClr val="16412B"/>
+                    </a:solidFill>
+                    <a:latin typeface="Calibri"/>
+                  </a:defRPr>
+                </a:pPr>
+              </a:p>
+            </c:txPr>
+            <c:showLegendKey val="0"/>
+            <c:showVal val="1"/>
+            <c:showCatName val="0"/>
+            <c:showSerName val="0"/>
+            <c:showPercent val="0"/>
+            <c:showBubbleSize val="0"/>
+            <c:showLeaderLines val="0"/>
+          </c:dLbls>
+          <c:dPt>
+            <c:idx val="0"/>
+            <c:invertIfNegative val="0"/>
+            <c:bubble3D val="0"/>
+            <c:spPr>
+              <a:solidFill>
+                <a:srgbClr val="2C6E49"/>
+              </a:solidFill>
+              <a:effectLst/>
+            </c:spPr>
+          </c:dPt>
+          <c:dPt>
+            <c:idx val="1"/>
+            <c:invertIfNegative val="0"/>
+            <c:bubble3D val="0"/>
+            <c:spPr>
+              <a:solidFill>
+                <a:srgbClr val="D9A441"/>
+              </a:solidFill>
+              <a:effectLst/>
+            </c:spPr>
+          </c:dPt>
+          <c:cat>
+            <c:multiLvlStrRef>
+              <c:f>Sheet1!$A$2:$A$3</c:f>
+              <c:multiLvlStrCache>
+                <c:ptCount val="2"/>
+                <c:lvl>
+                  <c:pt idx="0">
+                    <c:v>1980–1999</c:v>
+                  </c:pt>
+                  <c:pt idx="1">
+                    <c:v>منذ 2000</c:v>
+                  </c:pt>
+                </c:lvl>
+              </c:multiLvlStrCache>
+            </c:multiLvlStrRef>
+          </c:cat>
+          <c:val>
+            <c:numRef>
+              <c:f>Sheet1!$B$2:$B$3</c:f>
+              <c:numCache>
+                <c:formatCode>General</c:formatCode>
+                <c:ptCount val="2"/>
+                <c:pt idx="0">
+                  <c:v>100</c:v>
+                </c:pt>
+                <c:pt idx="1">
+                  <c:v>129</c:v>
+                </c:pt>
+              </c:numCache>
+            </c:numRef>
+          </c:val>
+        </c:ser>
+        <c:dLbls>
+          <c:numFmt formatCode="[$-401]0" sourceLinked="0"/>
+          <c:txPr>
+            <a:bodyPr/>
+            <a:lstStyle/>
+            <a:p>
+              <a:pPr>
+                <a:defRPr b="0" i="0" strike="noStrike" sz="1100" u="none">
+                  <a:solidFill>
+                    <a:srgbClr val="16412B"/>
+                  </a:solidFill>
+                  <a:latin typeface="Calibri"/>
+                </a:defRPr>
+              </a:pPr>
+            </a:p>
+          </c:txPr>
+          <c:showLegendKey val="0"/>
+          <c:showVal val="1"/>
+          <c:showCatName val="0"/>
+          <c:showSerName val="0"/>
+          <c:showPercent val="0"/>
+          <c:showBubbleSize val="0"/>
+          <c:showLeaderLines val="0"/>
+        </c:dLbls>
+        <c:gapWidth val="150"/>
+        <c:overlap val="0"/>
+        <c:axId val="2094734554"/>
+        <c:axId val="2094734552"/>
+        <c:axId val="2094734556"/>
+      </c:barChart>
+      <c:catAx>
+        <c:axId val="2094734554"/>
+        <c:scaling>
+          <c:orientation val="minMax"/>
+        </c:scaling>
+        <c:delete val="0"/>
+        <c:axPos val="b"/>
+        <c:numFmt formatCode="General" sourceLinked="1"/>
+        <c:majorTickMark val="out"/>
+        <c:minorTickMark val="none"/>
+        <c:tickLblPos val="low"/>
+        <c:spPr>
+          <a:ln w="12700" cap="flat">
+            <a:solidFill>
+              <a:srgbClr val="888888"/>
+            </a:solidFill>
+            <a:prstDash val="solid"/>
+            <a:round/>
+          </a:ln>
+        </c:spPr>
+        <c:txPr>
+          <a:bodyPr/>
+          <a:lstStyle/>
+          <a:p>
+            <a:pPr>
+              <a:defRPr sz="1100" b="0" i="0" u="none" strike="noStrike">
+                <a:solidFill>
+                  <a:srgbClr val="6F7D71"/>
+                </a:solidFill>
+                <a:latin typeface="Calibri"/>
+              </a:defRPr>
+            </a:pPr>
+            <a:endParaRPr lang="en-US"/>
+          </a:p>
+        </c:txPr>
+        <c:crossAx val="2094734552"/>
+        <c:crosses val="autoZero"/>
+        <c:auto val="1"/>
+        <c:lblAlgn val="ctr"/>
+        <c:noMultiLvlLbl val="1"/>
+      </c:catAx>
+      <c:valAx>
+        <c:axId val="2094734552"/>
+        <c:scaling>
+          <c:orientation val="minMax"/>
+          <c:max val="140"/>
+          <c:min val="0"/>
+        </c:scaling>
+        <c:delete val="0"/>
+        <c:axPos val="l"/>
+        <c:majorGridlines>
+          <c:spPr>
+            <a:ln w="9525" cap="flat">
+              <a:solidFill>
+                <a:srgbClr val="E0DFD0"/>
+              </a:solidFill>
+              <a:prstDash val="solid"/>
+              <a:round/>
+            </a:ln>
+          </c:spPr>
+        </c:majorGridlines>
+        <c:numFmt formatCode="General" sourceLinked="0"/>
+        <c:majorTickMark val="out"/>
+        <c:minorTickMark val="none"/>
+        <c:tickLblPos val="nextTo"/>
+        <c:spPr>
+          <a:ln w="12700" cap="flat">
+            <a:solidFill>
+              <a:srgbClr val="888888"/>
+            </a:solidFill>
+            <a:prstDash val="solid"/>
+            <a:round/>
+          </a:ln>
+        </c:spPr>
+        <c:txPr>
+          <a:bodyPr/>
+          <a:lstStyle/>
+          <a:p>
+            <a:pPr>
+              <a:defRPr sz="1100" b="0" i="0" u="none" strike="noStrike">
+                <a:solidFill>
+                  <a:srgbClr val="6F7D71"/>
+                </a:solidFill>
+                <a:latin typeface="Calibri"/>
+              </a:defRPr>
+            </a:pPr>
+            <a:endParaRPr lang="en-US"/>
+          </a:p>
+        </c:txPr>
+        <c:crossAx val="2094734554"/>
+        <c:crosses val="autoZero"/>
+        <c:crossBetween val="between"/>
+        <c:majorUnit val="20"/>
+      </c:valAx>
+      <c:spPr>
+        <a:noFill/>
+        <a:ln>
+          <a:noFill/>
+        </a:ln>
+        <a:effectLst/>
+      </c:spPr>
+    </c:plotArea>
+    <c:plotVisOnly val="1"/>
+    <c:dispBlanksAs val="span"/>
+  </c:chart>
+  <c:spPr>
+    <a:noFill/>
+    <a:ln>
+      <a:noFill/>
+    </a:ln>
+    <a:effectLst/>
+  </c:spPr>
+  <c:externalData r:id="rId1">
+    <c:autoUpdate val="0"/>
+  </c:externalData>
+</c:chartSpace>
+</file>
+
+<file path=ppt/charts/chart65.xml><?xml version="1.0" encoding="utf-8"?>
 <c:chartSpace xmlns:c="http://schemas.openxmlformats.org/drawingml/2006/chart" xmlns:a="http://schemas.openxmlformats.org/drawingml/2006/main" xmlns:r="http://schemas.openxmlformats.org/officeDocument/2006/relationships">
   <c:date1904 val="0"/>
   <c:roundedCorners val="1"/>
@@ -369,7 +629,7 @@
 </c:chartSpace>
 </file>
 
-<file path=ppt/charts/chart42.xml><?xml version="1.0" encoding="utf-8"?>
+<file path=ppt/charts/chart66.xml><?xml version="1.0" encoding="utf-8"?>
 <c:chartSpace xmlns:c="http://schemas.openxmlformats.org/drawingml/2006/chart" xmlns:a="http://schemas.openxmlformats.org/drawingml/2006/main" xmlns:r="http://schemas.openxmlformats.org/officeDocument/2006/relationships">
   <c:date1904 val="0"/>
   <c:roundedCorners val="1"/>
@@ -677,7 +937,7 @@
 </c:chartSpace>
 </file>
 
-<file path=ppt/charts/chart43.xml><?xml version="1.0" encoding="utf-8"?>
+<file path=ppt/charts/chart67.xml><?xml version="1.0" encoding="utf-8"?>
 <c:chartSpace xmlns:c="http://schemas.openxmlformats.org/drawingml/2006/chart" xmlns:a="http://schemas.openxmlformats.org/drawingml/2006/main" xmlns:r="http://schemas.openxmlformats.org/officeDocument/2006/relationships">
   <c:date1904 val="0"/>
   <c:roundedCorners val="1"/>
@@ -1042,7 +1302,7 @@
 </c:chartSpace>
 </file>
 
-<file path=ppt/charts/chart44.xml><?xml version="1.0" encoding="utf-8"?>
+<file path=ppt/charts/chart68.xml><?xml version="1.0" encoding="utf-8"?>
 <c:chartSpace xmlns:c="http://schemas.openxmlformats.org/drawingml/2006/chart" xmlns:a="http://schemas.openxmlformats.org/drawingml/2006/main" xmlns:r="http://schemas.openxmlformats.org/officeDocument/2006/relationships">
   <c:date1904 val="0"/>
   <c:roundedCorners val="1"/>
@@ -2606,6 +2866,94 @@
             <a:fld id="{F7021451-1387-4CA6-816F-3879F97B5CBC}" type="slidenum">
               <a:rPr lang="en-US"/>
               <a:t>18</a:t>
+            </a:fld>
+            <a:endParaRPr lang="en-US"/>
+          </a:p>
+        </p:txBody>
+      </p:sp>
+    </p:spTree>
+    <p:extLst>
+      <p:ext uri="{BB962C8B-B14F-4D97-AF65-F5344CB8AC3E}">
+        <p14:creationId xmlns:p14="http://schemas.microsoft.com/office/powerpoint/2010/main" val="1024086991"/>
+      </p:ext>
+    </p:extLst>
+  </p:cSld>
+  <p:clrMapOvr>
+    <a:masterClrMapping/>
+  </p:clrMapOvr>
+</p:notes>
+</file>
+
+<file path=ppt/notesSlides/notesSlide19.xml><?xml version="1.0" encoding="utf-8"?>
+<p:notes xmlns:a="http://schemas.openxmlformats.org/drawingml/2006/main" xmlns:r="http://schemas.openxmlformats.org/officeDocument/2006/relationships" xmlns:p="http://schemas.openxmlformats.org/presentationml/2006/main">
+  <p:cSld>
+    <p:spTree>
+      <p:nvGrpSpPr>
+        <p:cNvPr id="1" name=""/>
+        <p:cNvGrpSpPr/>
+        <p:nvPr/>
+      </p:nvGrpSpPr>
+      <p:grpSpPr>
+        <a:xfrm>
+          <a:off x="0" y="0"/>
+          <a:ext cx="0" cy="0"/>
+          <a:chOff x="0" y="0"/>
+          <a:chExt cx="0" cy="0"/>
+        </a:xfrm>
+      </p:grpSpPr>
+      <p:sp>
+        <p:nvSpPr>
+          <p:cNvPr id="2" name="Slide Image Placeholder 1"/>
+          <p:cNvSpPr>
+            <a:spLocks noGrp="1" noRot="1" noChangeAspect="1"/>
+          </p:cNvSpPr>
+          <p:nvPr>
+            <p:ph type="sldImg"/>
+          </p:nvPr>
+        </p:nvSpPr>
+        <p:spPr/>
+      </p:sp>
+      <p:sp>
+        <p:nvSpPr>
+          <p:cNvPr id="3" name="Notes Placeholder 2"/>
+          <p:cNvSpPr>
+            <a:spLocks noGrp="1"/>
+          </p:cNvSpPr>
+          <p:nvPr>
+            <p:ph type="body" idx="1"/>
+          </p:nvPr>
+        </p:nvSpPr>
+        <p:spPr/>
+        <p:txBody>
+          <a:bodyPr/>
+          <a:lstStyle/>
+          <a:p>
+            <a:r>
+              <a:rPr lang="en-US" dirty="0"/>
+              <a:t/>
+            </a:r>
+            <a:endParaRPr lang="en-US" dirty="0"/>
+          </a:p>
+        </p:txBody>
+      </p:sp>
+      <p:sp>
+        <p:nvSpPr>
+          <p:cNvPr id="4" name="Slide Number Placeholder 3"/>
+          <p:cNvSpPr>
+            <a:spLocks noGrp="1"/>
+          </p:cNvSpPr>
+          <p:nvPr>
+            <p:ph type="sldNum" sz="quarter" idx="10"/>
+          </p:nvPr>
+        </p:nvSpPr>
+        <p:spPr/>
+        <p:txBody>
+          <a:bodyPr/>
+          <a:lstStyle/>
+          <a:p>
+            <a:fld id="{F7021451-1387-4CA6-816F-3879F97B5CBC}" type="slidenum">
+              <a:rPr lang="en-US"/>
+              <a:t>19</a:t>
             </a:fld>
             <a:endParaRPr lang="en-US"/>
           </a:p>
@@ -3744,7 +4092,7 @@
       </p:sp>
       <p:pic>
         <p:nvPicPr>
-          <p:cNvPr id="5" name="Image 1" descr="C:\Users\Utilisateur\dev\green-solutions-web\public\images\logo-icon.png">    </p:cNvPr>
+          <p:cNvPr id="5" name="Image 1" descr="/workspace/scratch/50eb4f7d8e13/green-solutions-web/public/images/logo-icon.png">    </p:cNvPr>
           <p:cNvPicPr>
             <a:picLocks noChangeAspect="1"/>
           </p:cNvPicPr>
@@ -3768,7 +4116,7 @@
       </p:pic>
       <p:pic>
         <p:nvPicPr>
-          <p:cNvPr id="6" name="Image 2" descr="C:\Users\Utilisateur\dev\green-solutions-web\scripts\dossiers\drapeaux\jordanie.png">    </p:cNvPr>
+          <p:cNvPr id="6" name="Image 2" descr="/workspace/scratch/50eb4f7d8e13/green-solutions-web/scripts/dossiers/drapeaux/jordanie.png">    </p:cNvPr>
           <p:cNvPicPr>
             <a:picLocks noChangeAspect="1"/>
           </p:cNvPicPr>
@@ -4118,7 +4466,7 @@
                 <a:ea typeface="Arial" pitchFamily="34" charset="-122"/>
                 <a:cs typeface="Arial" pitchFamily="34" charset="-120"/>
               </a:rPr>
-              <a:t>استجابتنا</a:t>
+              <a:t>إمكانات الإنتاج</a:t>
             </a:r>
             <a:endParaRPr lang="en-US" sz="1150" dirty="0"/>
           </a:p>
@@ -4157,340 +4505,42 @@
                 <a:ea typeface="Arial" pitchFamily="34" charset="-122"/>
                 <a:cs typeface="Arial" pitchFamily="34" charset="-120"/>
               </a:rPr>
-              <a:t>تقنيتان لقيدين مختلفين</a:t>
+              <a:t>الزيادة المتوقعة في الإنتاج حسب المحصول</a:t>
             </a:r>
             <a:endParaRPr lang="en-US" sz="3000" dirty="0"/>
           </a:p>
         </p:txBody>
       </p:sp>
-      <p:sp>
-        <p:nvSpPr>
-          <p:cNvPr id="4" name="Text 2"/>
-          <p:cNvSpPr txBox="1"/>
-          <p:nvPr/>
-        </p:nvSpPr>
-        <p:spPr>
-          <a:xfrm>
-            <a:off x="594360" y="1783080"/>
-            <a:ext cx="5227168" cy="411480"/>
-          </a:xfrm>
-          <a:prstGeom prst="rect">
-            <a:avLst/>
-          </a:prstGeom>
-          <a:noFill/>
-          <a:ln/>
-        </p:spPr>
-        <p:txBody>
-          <a:bodyPr wrap="square" lIns="0" tIns="0" rIns="0" bIns="0" rtlCol="0" anchor="ctr"/>
-          <a:lstStyle/>
-          <a:p>
-            <a:pPr rtl="1" algn="r" indent="0" marL="0">
-              <a:buNone/>
-            </a:pPr>
-            <a:r>
-              <a:rPr lang="en-US" sz="1600" b="1" dirty="0">
-                <a:solidFill>
-                  <a:srgbClr val="2C6E49"/>
-                </a:solidFill>
-                <a:latin typeface="Arial" pitchFamily="34" charset="0"/>
-                <a:ea typeface="Arial" pitchFamily="34" charset="-122"/>
-                <a:cs typeface="Arial" pitchFamily="34" charset="-120"/>
-              </a:rPr>
-              <a:t>EVERGREEN® — الاحتفاظ بالماء</a:t>
-            </a:r>
-            <a:endParaRPr lang="en-US" sz="1600" dirty="0"/>
-          </a:p>
-        </p:txBody>
-      </p:sp>
-      <p:sp>
-        <p:nvSpPr>
-          <p:cNvPr id="5" name="Text 3"/>
-          <p:cNvSpPr txBox="1"/>
-          <p:nvPr/>
-        </p:nvSpPr>
-        <p:spPr>
-          <a:xfrm>
-            <a:off x="594360" y="2286000"/>
-            <a:ext cx="5227168" cy="2468880"/>
-          </a:xfrm>
-          <a:prstGeom prst="rect">
-            <a:avLst/>
-          </a:prstGeom>
-          <a:noFill/>
-          <a:ln/>
-        </p:spPr>
-        <p:txBody>
-          <a:bodyPr wrap="square" lIns="0" tIns="0" rIns="0" bIns="0" rtlCol="0" anchor="t"/>
-          <a:lstStyle/>
-          <a:p>
-            <a:pPr algn="r" marL="342900" indent="-342900">
-              <a:lnSpc>
-                <a:spcPct val="122000"/>
-              </a:lnSpc>
-              <a:spcAft>
-                <a:spcPts val="1000"/>
-              </a:spcAft>
-              <a:buSzPct val="100000"/>
-              <a:buChar char="•"/>
-            </a:pPr>
-            <a:r>
-              <a:rPr lang="en-US" sz="1350" dirty="0">
-                <a:solidFill>
-                  <a:srgbClr val="364239"/>
-                </a:solidFill>
-                <a:latin typeface="Arial" pitchFamily="34" charset="0"/>
-                <a:ea typeface="Arial" pitchFamily="34" charset="-122"/>
-                <a:cs typeface="Arial" pitchFamily="34" charset="-120"/>
-              </a:rPr>
-              <a:t>مادة محتفظة بالماء أساسها البوتاسيوم، توضع في منطقة الجذور عند الزراعة أو عند التجديد.</a:t>
-            </a:r>
-            <a:endParaRPr lang="en-US" sz="1350" dirty="0"/>
-          </a:p>
-          <a:p>
-            <a:pPr algn="r" marL="342900" indent="-342900">
-              <a:lnSpc>
-                <a:spcPct val="122000"/>
-              </a:lnSpc>
-              <a:spcAft>
-                <a:spcPts val="1000"/>
-              </a:spcAft>
-              <a:buSzPct val="100000"/>
-              <a:buChar char="•"/>
-            </a:pPr>
-            <a:r>
-              <a:rPr lang="en-US" sz="1350" dirty="0">
-                <a:solidFill>
-                  <a:srgbClr val="364239"/>
-                </a:solidFill>
-                <a:latin typeface="Arial" pitchFamily="34" charset="0"/>
-                <a:ea typeface="Arial" pitchFamily="34" charset="-122"/>
-                <a:cs typeface="Arial" pitchFamily="34" charset="-120"/>
-              </a:rPr>
-              <a:t>تلتقط ماء المطر أو الري وتعيده إلى النبات تدريجياً، فتزيل الإجهاد المائي في المراحل الحرجة.</a:t>
-            </a:r>
-            <a:endParaRPr lang="en-US" sz="1350" dirty="0"/>
-          </a:p>
-          <a:p>
-            <a:pPr algn="r" marL="342900" indent="-342900">
-              <a:lnSpc>
-                <a:spcPct val="122000"/>
-              </a:lnSpc>
-              <a:spcAft>
-                <a:spcPts val="1000"/>
-              </a:spcAft>
-              <a:buSzPct val="100000"/>
-              <a:buChar char="•"/>
-            </a:pPr>
-            <a:r>
-              <a:rPr lang="en-US" sz="1350" dirty="0">
-                <a:solidFill>
-                  <a:srgbClr val="364239"/>
-                </a:solidFill>
-                <a:latin typeface="Arial" pitchFamily="34" charset="0"/>
-                <a:ea typeface="Arial" pitchFamily="34" charset="-122"/>
-                <a:cs typeface="Arial" pitchFamily="34" charset="-120"/>
-              </a:rPr>
-              <a:t>قدرة امتصاص تبلغ نحو 300 ضعف وزنها، ومدة أثر مفيد من 3 إلى 4 سنوات في التربة.</a:t>
-            </a:r>
-            <a:endParaRPr lang="en-US" sz="1350" dirty="0"/>
-          </a:p>
-          <a:p>
-            <a:pPr algn="r" marL="342900" indent="-342900">
-              <a:lnSpc>
-                <a:spcPct val="122000"/>
-              </a:lnSpc>
-              <a:spcAft>
-                <a:spcPts val="1000"/>
-              </a:spcAft>
-              <a:buSzPct val="100000"/>
-              <a:buChar char="•"/>
-            </a:pPr>
-            <a:r>
-              <a:rPr lang="en-US" sz="1350" dirty="0">
-                <a:solidFill>
-                  <a:srgbClr val="364239"/>
-                </a:solidFill>
-                <a:latin typeface="Arial" pitchFamily="34" charset="0"/>
-                <a:ea typeface="Arial" pitchFamily="34" charset="-122"/>
-                <a:cs typeface="Arial" pitchFamily="34" charset="-120"/>
-              </a:rPr>
-              <a:t>تتحلل بنسبة 20 إلى 25 % سنوياً، دون تراكم ودون خطر جرعة زائدة.</a:t>
-            </a:r>
-            <a:endParaRPr lang="en-US" sz="1350" dirty="0"/>
-          </a:p>
-        </p:txBody>
-      </p:sp>
-      <p:sp>
-        <p:nvSpPr>
-          <p:cNvPr id="6" name="Text 4"/>
-          <p:cNvSpPr txBox="1"/>
-          <p:nvPr/>
-        </p:nvSpPr>
-        <p:spPr>
-          <a:xfrm>
-            <a:off x="6370168" y="1783080"/>
-            <a:ext cx="5227168" cy="411480"/>
-          </a:xfrm>
-          <a:prstGeom prst="rect">
-            <a:avLst/>
-          </a:prstGeom>
-          <a:noFill/>
-          <a:ln/>
-        </p:spPr>
-        <p:txBody>
-          <a:bodyPr wrap="square" lIns="0" tIns="0" rIns="0" bIns="0" rtlCol="0" anchor="ctr"/>
-          <a:lstStyle/>
-          <a:p>
-            <a:pPr rtl="1" algn="r" indent="0" marL="0">
-              <a:buNone/>
-            </a:pPr>
-            <a:r>
-              <a:rPr lang="en-US" sz="1600" b="1" dirty="0">
-                <a:solidFill>
-                  <a:srgbClr val="2C6E49"/>
-                </a:solidFill>
-                <a:latin typeface="Arial" pitchFamily="34" charset="0"/>
-                <a:ea typeface="Arial" pitchFamily="34" charset="-122"/>
-                <a:cs typeface="Arial" pitchFamily="34" charset="-120"/>
-              </a:rPr>
-              <a:t>ECOFERT® — تغذية دون استنزاف</a:t>
-            </a:r>
-            <a:endParaRPr lang="en-US" sz="1600" dirty="0"/>
-          </a:p>
-        </p:txBody>
-      </p:sp>
-      <p:sp>
-        <p:nvSpPr>
-          <p:cNvPr id="7" name="Text 5"/>
-          <p:cNvSpPr txBox="1"/>
-          <p:nvPr/>
-        </p:nvSpPr>
-        <p:spPr>
-          <a:xfrm>
-            <a:off x="6370168" y="2286000"/>
-            <a:ext cx="5227168" cy="2468880"/>
-          </a:xfrm>
-          <a:prstGeom prst="rect">
-            <a:avLst/>
-          </a:prstGeom>
-          <a:noFill/>
-          <a:ln/>
-        </p:spPr>
-        <p:txBody>
-          <a:bodyPr wrap="square" lIns="0" tIns="0" rIns="0" bIns="0" rtlCol="0" anchor="t"/>
-          <a:lstStyle/>
-          <a:p>
-            <a:pPr algn="r" marL="342900" indent="-342900">
-              <a:lnSpc>
-                <a:spcPct val="122000"/>
-              </a:lnSpc>
-              <a:spcAft>
-                <a:spcPts val="1000"/>
-              </a:spcAft>
-              <a:buSzPct val="100000"/>
-              <a:buChar char="•"/>
-            </a:pPr>
-            <a:r>
-              <a:rPr lang="en-US" sz="1350" dirty="0">
-                <a:solidFill>
-                  <a:srgbClr val="364239"/>
-                </a:solidFill>
-                <a:latin typeface="Arial" pitchFamily="34" charset="0"/>
-                <a:ea typeface="Arial" pitchFamily="34" charset="-122"/>
-                <a:cs typeface="Arial" pitchFamily="34" charset="-120"/>
-              </a:rPr>
-              <a:t>مخصّب بجرعات دقيقة من الأحماض الأمينية والنيتروجين والفوسفور والبوتاسيوم، من موارد متجددة.</a:t>
-            </a:r>
-            <a:endParaRPr lang="en-US" sz="1350" dirty="0"/>
-          </a:p>
-          <a:p>
-            <a:pPr algn="r" marL="342900" indent="-342900">
-              <a:lnSpc>
-                <a:spcPct val="122000"/>
-              </a:lnSpc>
-              <a:spcAft>
-                <a:spcPts val="1000"/>
-              </a:spcAft>
-              <a:buSzPct val="100000"/>
-              <a:buChar char="•"/>
-            </a:pPr>
-            <a:r>
-              <a:rPr lang="en-US" sz="1350" dirty="0">
-                <a:solidFill>
-                  <a:srgbClr val="364239"/>
-                </a:solidFill>
-                <a:latin typeface="Arial" pitchFamily="34" charset="0"/>
-                <a:ea typeface="Arial" pitchFamily="34" charset="-122"/>
-                <a:cs typeface="Arial" pitchFamily="34" charset="-120"/>
-              </a:rPr>
-              <a:t>غير مخلبي: لا يفقر مركّب الطين والدبال، ولا يرفع ملوحة التربة ولا محتواها من النترات.</a:t>
-            </a:r>
-            <a:endParaRPr lang="en-US" sz="1350" dirty="0"/>
-          </a:p>
-          <a:p>
-            <a:pPr algn="r" marL="342900" indent="-342900">
-              <a:lnSpc>
-                <a:spcPct val="122000"/>
-              </a:lnSpc>
-              <a:spcAft>
-                <a:spcPts val="1000"/>
-              </a:spcAft>
-              <a:buSzPct val="100000"/>
-              <a:buChar char="•"/>
-            </a:pPr>
-            <a:r>
-              <a:rPr lang="en-US" sz="1350" dirty="0">
-                <a:solidFill>
-                  <a:srgbClr val="364239"/>
-                </a:solidFill>
-                <a:latin typeface="Arial" pitchFamily="34" charset="0"/>
-                <a:ea typeface="Arial" pitchFamily="34" charset="-122"/>
-                <a:cs typeface="Arial" pitchFamily="34" charset="-120"/>
-              </a:rPr>
-              <a:t>حائز شهادتي SOHISCERT والعضوية الأوروبية — شرط للدخول إلى دفاتر شروط المشترين الأوروبيين.</a:t>
-            </a:r>
-            <a:endParaRPr lang="en-US" sz="1350" dirty="0"/>
-          </a:p>
-          <a:p>
-            <a:pPr algn="r" marL="342900" indent="-342900">
-              <a:lnSpc>
-                <a:spcPct val="122000"/>
-              </a:lnSpc>
-              <a:spcAft>
-                <a:spcPts val="1000"/>
-              </a:spcAft>
-              <a:buSzPct val="100000"/>
-              <a:buChar char="•"/>
-            </a:pPr>
-            <a:r>
-              <a:rPr lang="en-US" sz="1350" dirty="0">
-                <a:solidFill>
-                  <a:srgbClr val="364239"/>
-                </a:solidFill>
-                <a:latin typeface="Arial" pitchFamily="34" charset="0"/>
-                <a:ea typeface="Arial" pitchFamily="34" charset="-122"/>
-                <a:cs typeface="Arial" pitchFamily="34" charset="-120"/>
-              </a:rPr>
-              <a:t>من 1 إلى 4 عبوات سعة 140 مل للهكتار، متوافق مع تجهيزات الري بالتسميد القائمة.</a:t>
-            </a:r>
-            <a:endParaRPr lang="en-US" sz="1350" dirty="0"/>
-          </a:p>
-        </p:txBody>
-      </p:sp>
-      <p:sp>
-        <p:nvSpPr>
-          <p:cNvPr id="8" name="Shape 6"/>
+      <p:graphicFrame>
+        <p:nvGraphicFramePr>
+          <p:cNvPr id="4" name="Chart 0" descr=""/>
+          <p:cNvGraphicFramePr/>
+          <p:nvPr/>
+        </p:nvGraphicFramePr>
+        <p:xfrm>
+          <a:off x="594360" y="1783080"/>
+          <a:ext cx="7360920" cy="3977640"/>
+        </p:xfrm>
+        <a:graphic xmlns:a="http://schemas.openxmlformats.org/drawingml/2006/main">
+          <a:graphicData uri="http://schemas.openxmlformats.org/drawingml/2006/chart">
+            <c:chart xmlns:c="http://schemas.openxmlformats.org/drawingml/2006/chart" r:id="rId1"/>
+          </a:graphicData>
+        </a:graphic>
+      </p:graphicFrame>
+      <p:sp>
+        <p:nvSpPr>
+          <p:cNvPr id="5" name="Shape 2"/>
           <p:cNvSpPr/>
           <p:nvPr/>
         </p:nvSpPr>
         <p:spPr>
           <a:xfrm>
-            <a:off x="594360" y="4846320"/>
-            <a:ext cx="11002975" cy="960120"/>
+            <a:off x="8275320" y="1783080"/>
+            <a:ext cx="3291840" cy="3977640"/>
           </a:xfrm>
           <a:prstGeom prst="roundRect">
             <a:avLst>
-              <a:gd name="adj" fmla="val 7619"/>
+              <a:gd name="adj" fmla="val 2778"/>
             </a:avLst>
           </a:prstGeom>
           <a:solidFill>
@@ -4506,14 +4556,53 @@
       </p:sp>
       <p:sp>
         <p:nvSpPr>
-          <p:cNvPr id="9" name="Text 7"/>
-          <p:cNvSpPr txBox="1"/>
-          <p:nvPr/>
-        </p:nvSpPr>
-        <p:spPr>
-          <a:xfrm>
-            <a:off x="822960" y="4983480"/>
-            <a:ext cx="10545775" cy="713232"/>
+          <p:cNvPr id="6" name="Text 3"/>
+          <p:cNvSpPr txBox="1"/>
+          <p:nvPr/>
+        </p:nvSpPr>
+        <p:spPr>
+          <a:xfrm>
+            <a:off x="8503920" y="2011680"/>
+            <a:ext cx="2834640" cy="457200"/>
+          </a:xfrm>
+          <a:prstGeom prst="rect">
+            <a:avLst/>
+          </a:prstGeom>
+          <a:noFill/>
+          <a:ln/>
+        </p:spPr>
+        <p:txBody>
+          <a:bodyPr wrap="square" lIns="0" tIns="0" rIns="0" bIns="0" rtlCol="0" anchor="ctr"/>
+          <a:lstStyle/>
+          <a:p>
+            <a:pPr rtl="1" algn="r" indent="0" marL="0">
+              <a:buNone/>
+            </a:pPr>
+            <a:r>
+              <a:rPr lang="en-US" sz="1300" b="1" dirty="0">
+                <a:solidFill>
+                  <a:srgbClr val="2C6E49"/>
+                </a:solidFill>
+                <a:latin typeface="Arial" pitchFamily="34" charset="0"/>
+                <a:ea typeface="Arial" pitchFamily="34" charset="-122"/>
+                <a:cs typeface="Arial" pitchFamily="34" charset="-120"/>
+              </a:rPr>
+              <a:t>تُقرأ بتحفّظ</a:t>
+            </a:r>
+            <a:endParaRPr lang="en-US" sz="1300" dirty="0"/>
+          </a:p>
+        </p:txBody>
+      </p:sp>
+      <p:sp>
+        <p:nvSpPr>
+          <p:cNvPr id="7" name="Text 4"/>
+          <p:cNvSpPr txBox="1"/>
+          <p:nvPr/>
+        </p:nvSpPr>
+        <p:spPr>
+          <a:xfrm>
+            <a:off x="8503920" y="2560320"/>
+            <a:ext cx="2834640" cy="3017520"/>
           </a:xfrm>
           <a:prstGeom prst="rect">
             <a:avLst/>
@@ -4527,28 +4616,57 @@
           <a:p>
             <a:pPr rtl="1" algn="r" indent="0" marL="0">
               <a:lnSpc>
-                <a:spcPct val="118000"/>
+                <a:spcPct val="125000"/>
               </a:lnSpc>
               <a:buNone/>
             </a:pPr>
             <a:r>
-              <a:rPr lang="en-US" sz="1100" dirty="0">
-                <a:solidFill>
-                  <a:srgbClr val="6F7D71"/>
-                </a:solidFill>
-                <a:latin typeface="Arial" pitchFamily="34" charset="0"/>
-                <a:ea typeface="Arial" pitchFamily="34" charset="-122"/>
-                <a:cs typeface="Arial" pitchFamily="34" charset="-120"/>
-              </a:rPr>
-              <a:t>المنتجان يُباعان منفصلين لكنهما صُمّما ليعزز أحدهما الآخر: المادة المحتفظة بالماء تطيل توفّره في منطقة الجذور، والمخصّب يثمّن هذا الماء المتاح دون إرهاق التربة.</a:t>
-            </a:r>
-            <a:endParaRPr lang="en-US" sz="1100" dirty="0"/>
-          </a:p>
-        </p:txBody>
-      </p:sp>
-      <p:sp>
-        <p:nvSpPr>
-          <p:cNvPr id="10" name="Text 8"/>
+              <a:rPr lang="en-US" sz="1200" dirty="0">
+                <a:solidFill>
+                  <a:srgbClr val="364239"/>
+                </a:solidFill>
+                <a:latin typeface="Arial" pitchFamily="34" charset="0"/>
+                <a:ea typeface="Arial" pitchFamily="34" charset="-122"/>
+                <a:cs typeface="Arial" pitchFamily="34" charset="-120"/>
+              </a:rPr>
+              <a:t>نطاقات يعتمدها حاسب الجرعات على موقعنا، لمحصول يُدار إدارة عادية مع وضع EVERGREEN® عند الزراعة.</a:t>
+            </a:r>
+            <a:endParaRPr lang="en-US" sz="1200" dirty="0"/>
+          </a:p>
+          <a:p>
+            <a:pPr rtl="1" algn="r" indent="0" marL="0">
+              <a:lnSpc>
+                <a:spcPct val="125000"/>
+              </a:lnSpc>
+              <a:buNone/>
+            </a:pPr>
+            <a:endParaRPr lang="en-US" sz="1200" dirty="0"/>
+          </a:p>
+          <a:p>
+            <a:pPr rtl="1" algn="r" indent="0" marL="0">
+              <a:lnSpc>
+                <a:spcPct val="125000"/>
+              </a:lnSpc>
+              <a:buNone/>
+            </a:pPr>
+            <a:r>
+              <a:rPr lang="en-US" sz="1200" dirty="0">
+                <a:solidFill>
+                  <a:srgbClr val="364239"/>
+                </a:solidFill>
+                <a:latin typeface="Arial" pitchFamily="34" charset="0"/>
+                <a:ea typeface="Arial" pitchFamily="34" charset="-122"/>
+                <a:cs typeface="Arial" pitchFamily="34" charset="-120"/>
+              </a:rPr>
+              <a:t>النتيجة الفعلية تتوقف على التربة والمناخ وأسلوب الإدارة. أما الحبوب فلا نعلن فيها أي زيادة دون تجربة ميدانية.</a:t>
+            </a:r>
+            <a:endParaRPr lang="en-US" sz="1200" dirty="0"/>
+          </a:p>
+        </p:txBody>
+      </p:sp>
+      <p:sp>
+        <p:nvSpPr>
+          <p:cNvPr id="8" name="Text 5"/>
           <p:cNvSpPr txBox="1"/>
           <p:nvPr/>
         </p:nvSpPr>
@@ -4589,7 +4707,7 @@
       </p:sp>
       <p:sp>
         <p:nvSpPr>
-          <p:cNvPr id="11" name="Text 9"/>
+          <p:cNvPr id="9" name="Text 6"/>
           <p:cNvSpPr txBox="1"/>
           <p:nvPr/>
         </p:nvSpPr>
@@ -4693,7 +4811,7 @@
                 <a:ea typeface="Arial" pitchFamily="34" charset="-122"/>
                 <a:cs typeface="Arial" pitchFamily="34" charset="-120"/>
               </a:rPr>
-              <a:t>بقية المنتجات</a:t>
+              <a:t>استجابتنا</a:t>
             </a:r>
             <a:endParaRPr lang="en-US" sz="1150" dirty="0"/>
           </a:p>
@@ -4732,7 +4850,7 @@
                 <a:ea typeface="Arial" pitchFamily="34" charset="-122"/>
                 <a:cs typeface="Arial" pitchFamily="34" charset="-120"/>
               </a:rPr>
-              <a:t>حماية المحاصيل وتثبيت التربة</a:t>
+              <a:t>تقنيتان لقيدين مختلفين</a:t>
             </a:r>
             <a:endParaRPr lang="en-US" sz="3000" dirty="0"/>
           </a:p>
@@ -4771,7 +4889,7 @@
                 <a:ea typeface="Arial" pitchFamily="34" charset="-122"/>
                 <a:cs typeface="Arial" pitchFamily="34" charset="-120"/>
               </a:rPr>
-              <a:t>NAPEMA® — حماية دون متبقيات</a:t>
+              <a:t>EVERGREEN® — الاحتفاظ بالماء</a:t>
             </a:r>
             <a:endParaRPr lang="en-US" sz="1600" dirty="0"/>
           </a:p>
@@ -4817,7 +4935,7 @@
                 <a:ea typeface="Arial" pitchFamily="34" charset="-122"/>
                 <a:cs typeface="Arial" pitchFamily="34" charset="-120"/>
               </a:rPr>
-              <a:t>مكافحة الأمراض والطفيليات والفطريات والآفات، دون أي جزيء كيميائي مُصنَّع.</a:t>
+              <a:t>مادة محتفظة بالماء أساسها البوتاسيوم، توضع في منطقة الجذور عند الزراعة أو عند التجديد.</a:t>
             </a:r>
             <a:endParaRPr lang="en-US" sz="1350" dirty="0"/>
           </a:p>
@@ -4841,7 +4959,7 @@
                 <a:ea typeface="Arial" pitchFamily="34" charset="-122"/>
                 <a:cs typeface="Arial" pitchFamily="34" charset="-120"/>
               </a:rPr>
-              <a:t>رشّ على الأوراق والجذور، بمفعول وقائي وعلاجي في آن واحد.</a:t>
+              <a:t>تلتقط ماء المطر أو الري وتعيده إلى النبات تدريجياً، فتزيل الإجهاد المائي في المراحل الحرجة.</a:t>
             </a:r>
             <a:endParaRPr lang="en-US" sz="1350" dirty="0"/>
           </a:p>
@@ -4865,7 +4983,7 @@
                 <a:ea typeface="Arial" pitchFamily="34" charset="-122"/>
                 <a:cs typeface="Arial" pitchFamily="34" charset="-120"/>
               </a:rPr>
-              <a:t>لا متبقيات في التربة ولا في النبات ولا في الهواء، مع الحفاظ على الملقِّحات والحشرات النافعة.</a:t>
+              <a:t>قدرة امتصاص تبلغ نحو 300 ضعف وزنها، ومدة أثر مفيد من 3 إلى 4 سنوات في التربة.</a:t>
             </a:r>
             <a:endParaRPr lang="en-US" sz="1350" dirty="0"/>
           </a:p>
@@ -4889,7 +5007,7 @@
                 <a:ea typeface="Arial" pitchFamily="34" charset="-122"/>
                 <a:cs typeface="Arial" pitchFamily="34" charset="-120"/>
               </a:rPr>
-              <a:t>تركيبة مصمَّمة لمشكلة محددة: البق الدقيقي، واخضرار الحمضيات (HLB)، والنيماتودا.</a:t>
+              <a:t>تتحلل بنسبة 20 إلى 25 % سنوياً، دون تراكم ودون خطر جرعة زائدة.</a:t>
             </a:r>
             <a:endParaRPr lang="en-US" sz="1350" dirty="0"/>
           </a:p>
@@ -4928,7 +5046,7 @@
                 <a:ea typeface="Arial" pitchFamily="34" charset="-122"/>
                 <a:cs typeface="Arial" pitchFamily="34" charset="-120"/>
               </a:rPr>
-              <a:t>Paulownia ALTIFOLIA® — شجرة المناطق الحارة</a:t>
+              <a:t>ECOFERT® — تغذية دون استنزاف</a:t>
             </a:r>
             <a:endParaRPr lang="en-US" sz="1600" dirty="0"/>
           </a:p>
@@ -4974,7 +5092,7 @@
                 <a:ea typeface="Arial" pitchFamily="34" charset="-122"/>
                 <a:cs typeface="Arial" pitchFamily="34" charset="-120"/>
               </a:rPr>
-              <a:t>من 13 إلى 15 متراً خلال ست إلى ثماني سنوات، بجذع كبير القطر.</a:t>
+              <a:t>مخصّب بجرعات دقيقة من الأحماض الأمينية والنيتروجين والفوسفور والبوتاسيوم، من موارد متجددة.</a:t>
             </a:r>
             <a:endParaRPr lang="en-US" sz="1350" dirty="0"/>
           </a:p>
@@ -4998,7 +5116,7 @@
                 <a:ea typeface="Arial" pitchFamily="34" charset="-122"/>
                 <a:cs typeface="Arial" pitchFamily="34" charset="-120"/>
               </a:rPr>
-              <a:t>مع 100 غرام من EVERGREEN® لكل شتلة، تنخفض حاجة الري بنسبة 50 %.</a:t>
+              <a:t>غير مخلبي: لا يفقر مركّب الطين والدبال، ولا يرفع ملوحة التربة ولا محتواها من النترات.</a:t>
             </a:r>
             <a:endParaRPr lang="en-US" sz="1350" dirty="0"/>
           </a:p>
@@ -5022,7 +5140,7 @@
                 <a:ea typeface="Arial" pitchFamily="34" charset="-122"/>
                 <a:cs typeface="Arial" pitchFamily="34" charset="-120"/>
               </a:rPr>
-              <a:t>تتحمّل من −25 إلى +45 درجة مئوية، ولا يشتعل خشبها قبل 426 درجة.</a:t>
+              <a:t>حائز شهادتي SOHISCERT والعضوية الأوروبية — شرط للدخول إلى دفاتر شروط المشترين الأوروبيين.</a:t>
             </a:r>
             <a:endParaRPr lang="en-US" sz="1350" dirty="0"/>
           </a:p>
@@ -5046,7 +5164,7 @@
                 <a:ea typeface="Arial" pitchFamily="34" charset="-122"/>
                 <a:cs typeface="Arial" pitchFamily="34" charset="-120"/>
               </a:rPr>
-              <a:t>مصدّ للرياح، وحماية للتربة من التعرية، و400 إلى 700 كغ من العسل للهكتار.</a:t>
+              <a:t>من 1 إلى 4 عبوات سعة 140 مل للهكتار، متوافق مع تجهيزات الري بالتسميد القائمة.</a:t>
             </a:r>
             <a:endParaRPr lang="en-US" sz="1350" dirty="0"/>
           </a:p>
@@ -5115,7 +5233,7 @@
                 <a:ea typeface="Arial" pitchFamily="34" charset="-122"/>
                 <a:cs typeface="Arial" pitchFamily="34" charset="-120"/>
               </a:rPr>
-              <a:t>تُسلَّم الشتلات في أصص (25 إلى 30 سم)، معتمدة خالية من الأمراض، وتُستبدل بالضمان عند تلفها. أول قطع في نهاية السنة السادسة، ويُقدَّر الخشب بنحو 400 إلى 450 يورو للمتر المكعب.</a:t>
+              <a:t>المنتجان يُباعان منفصلين لكنهما صُمّما ليعزز أحدهما الآخر: المادة المحتفظة بالماء تطيل توفّره في منطقة الجذور، والمخصّب يثمّن هذا الماء المتاح دون إرهاق التربة.</a:t>
             </a:r>
             <a:endParaRPr lang="en-US" sz="1100" dirty="0"/>
           </a:p>
@@ -5268,7 +5386,7 @@
                 <a:ea typeface="Arial" pitchFamily="34" charset="-122"/>
                 <a:cs typeface="Arial" pitchFamily="34" charset="-120"/>
               </a:rPr>
-              <a:t>أحجام تقديرية</a:t>
+              <a:t>بقية المنتجات</a:t>
             </a:r>
             <a:endParaRPr lang="en-US" sz="1150" dirty="0"/>
           </a:p>
@@ -5307,42 +5425,340 @@
                 <a:ea typeface="Arial" pitchFamily="34" charset="-122"/>
                 <a:cs typeface="Arial" pitchFamily="34" charset="-120"/>
               </a:rPr>
-              <a:t>توفير المياه المتوقع حسب أسلوب الري</a:t>
+              <a:t>حماية المحاصيل وتثبيت التربة</a:t>
             </a:r>
             <a:endParaRPr lang="en-US" sz="3000" dirty="0"/>
           </a:p>
         </p:txBody>
       </p:sp>
-      <p:graphicFrame>
-        <p:nvGraphicFramePr>
-          <p:cNvPr id="4" name="Chart 0" descr=""/>
-          <p:cNvGraphicFramePr/>
-          <p:nvPr/>
-        </p:nvGraphicFramePr>
-        <p:xfrm>
-          <a:off x="594360" y="1783080"/>
-          <a:ext cx="7360920" cy="3977640"/>
-        </p:xfrm>
-        <a:graphic xmlns:a="http://schemas.openxmlformats.org/drawingml/2006/main">
-          <a:graphicData uri="http://schemas.openxmlformats.org/drawingml/2006/chart">
-            <c:chart xmlns:c="http://schemas.openxmlformats.org/drawingml/2006/chart" r:id="rId1"/>
-          </a:graphicData>
-        </a:graphic>
-      </p:graphicFrame>
-      <p:sp>
-        <p:nvSpPr>
-          <p:cNvPr id="5" name="Shape 2"/>
+      <p:sp>
+        <p:nvSpPr>
+          <p:cNvPr id="4" name="Text 2"/>
+          <p:cNvSpPr txBox="1"/>
+          <p:nvPr/>
+        </p:nvSpPr>
+        <p:spPr>
+          <a:xfrm>
+            <a:off x="594360" y="1783080"/>
+            <a:ext cx="5227168" cy="411480"/>
+          </a:xfrm>
+          <a:prstGeom prst="rect">
+            <a:avLst/>
+          </a:prstGeom>
+          <a:noFill/>
+          <a:ln/>
+        </p:spPr>
+        <p:txBody>
+          <a:bodyPr wrap="square" lIns="0" tIns="0" rIns="0" bIns="0" rtlCol="0" anchor="ctr"/>
+          <a:lstStyle/>
+          <a:p>
+            <a:pPr rtl="1" algn="r" indent="0" marL="0">
+              <a:buNone/>
+            </a:pPr>
+            <a:r>
+              <a:rPr lang="en-US" sz="1600" b="1" dirty="0">
+                <a:solidFill>
+                  <a:srgbClr val="2C6E49"/>
+                </a:solidFill>
+                <a:latin typeface="Arial" pitchFamily="34" charset="0"/>
+                <a:ea typeface="Arial" pitchFamily="34" charset="-122"/>
+                <a:cs typeface="Arial" pitchFamily="34" charset="-120"/>
+              </a:rPr>
+              <a:t>NAPEMA® — حماية دون متبقيات</a:t>
+            </a:r>
+            <a:endParaRPr lang="en-US" sz="1600" dirty="0"/>
+          </a:p>
+        </p:txBody>
+      </p:sp>
+      <p:sp>
+        <p:nvSpPr>
+          <p:cNvPr id="5" name="Text 3"/>
+          <p:cNvSpPr txBox="1"/>
+          <p:nvPr/>
+        </p:nvSpPr>
+        <p:spPr>
+          <a:xfrm>
+            <a:off x="594360" y="2286000"/>
+            <a:ext cx="5227168" cy="2468880"/>
+          </a:xfrm>
+          <a:prstGeom prst="rect">
+            <a:avLst/>
+          </a:prstGeom>
+          <a:noFill/>
+          <a:ln/>
+        </p:spPr>
+        <p:txBody>
+          <a:bodyPr wrap="square" lIns="0" tIns="0" rIns="0" bIns="0" rtlCol="0" anchor="t"/>
+          <a:lstStyle/>
+          <a:p>
+            <a:pPr algn="r" marL="342900" indent="-342900">
+              <a:lnSpc>
+                <a:spcPct val="122000"/>
+              </a:lnSpc>
+              <a:spcAft>
+                <a:spcPts val="1000"/>
+              </a:spcAft>
+              <a:buSzPct val="100000"/>
+              <a:buChar char="•"/>
+            </a:pPr>
+            <a:r>
+              <a:rPr lang="en-US" sz="1350" dirty="0">
+                <a:solidFill>
+                  <a:srgbClr val="364239"/>
+                </a:solidFill>
+                <a:latin typeface="Arial" pitchFamily="34" charset="0"/>
+                <a:ea typeface="Arial" pitchFamily="34" charset="-122"/>
+                <a:cs typeface="Arial" pitchFamily="34" charset="-120"/>
+              </a:rPr>
+              <a:t>مكافحة الأمراض والطفيليات والفطريات والآفات، دون أي جزيء كيميائي مُصنَّع.</a:t>
+            </a:r>
+            <a:endParaRPr lang="en-US" sz="1350" dirty="0"/>
+          </a:p>
+          <a:p>
+            <a:pPr algn="r" marL="342900" indent="-342900">
+              <a:lnSpc>
+                <a:spcPct val="122000"/>
+              </a:lnSpc>
+              <a:spcAft>
+                <a:spcPts val="1000"/>
+              </a:spcAft>
+              <a:buSzPct val="100000"/>
+              <a:buChar char="•"/>
+            </a:pPr>
+            <a:r>
+              <a:rPr lang="en-US" sz="1350" dirty="0">
+                <a:solidFill>
+                  <a:srgbClr val="364239"/>
+                </a:solidFill>
+                <a:latin typeface="Arial" pitchFamily="34" charset="0"/>
+                <a:ea typeface="Arial" pitchFamily="34" charset="-122"/>
+                <a:cs typeface="Arial" pitchFamily="34" charset="-120"/>
+              </a:rPr>
+              <a:t>رشّ على الأوراق والجذور، بمفعول وقائي وعلاجي في آن واحد.</a:t>
+            </a:r>
+            <a:endParaRPr lang="en-US" sz="1350" dirty="0"/>
+          </a:p>
+          <a:p>
+            <a:pPr algn="r" marL="342900" indent="-342900">
+              <a:lnSpc>
+                <a:spcPct val="122000"/>
+              </a:lnSpc>
+              <a:spcAft>
+                <a:spcPts val="1000"/>
+              </a:spcAft>
+              <a:buSzPct val="100000"/>
+              <a:buChar char="•"/>
+            </a:pPr>
+            <a:r>
+              <a:rPr lang="en-US" sz="1350" dirty="0">
+                <a:solidFill>
+                  <a:srgbClr val="364239"/>
+                </a:solidFill>
+                <a:latin typeface="Arial" pitchFamily="34" charset="0"/>
+                <a:ea typeface="Arial" pitchFamily="34" charset="-122"/>
+                <a:cs typeface="Arial" pitchFamily="34" charset="-120"/>
+              </a:rPr>
+              <a:t>لا متبقيات في التربة ولا في النبات ولا في الهواء، مع الحفاظ على الملقِّحات والحشرات النافعة.</a:t>
+            </a:r>
+            <a:endParaRPr lang="en-US" sz="1350" dirty="0"/>
+          </a:p>
+          <a:p>
+            <a:pPr algn="r" marL="342900" indent="-342900">
+              <a:lnSpc>
+                <a:spcPct val="122000"/>
+              </a:lnSpc>
+              <a:spcAft>
+                <a:spcPts val="1000"/>
+              </a:spcAft>
+              <a:buSzPct val="100000"/>
+              <a:buChar char="•"/>
+            </a:pPr>
+            <a:r>
+              <a:rPr lang="en-US" sz="1350" dirty="0">
+                <a:solidFill>
+                  <a:srgbClr val="364239"/>
+                </a:solidFill>
+                <a:latin typeface="Arial" pitchFamily="34" charset="0"/>
+                <a:ea typeface="Arial" pitchFamily="34" charset="-122"/>
+                <a:cs typeface="Arial" pitchFamily="34" charset="-120"/>
+              </a:rPr>
+              <a:t>تركيبة مصمَّمة لمشكلة محددة: البق الدقيقي، واخضرار الحمضيات (HLB)، والنيماتودا.</a:t>
+            </a:r>
+            <a:endParaRPr lang="en-US" sz="1350" dirty="0"/>
+          </a:p>
+        </p:txBody>
+      </p:sp>
+      <p:sp>
+        <p:nvSpPr>
+          <p:cNvPr id="6" name="Text 4"/>
+          <p:cNvSpPr txBox="1"/>
+          <p:nvPr/>
+        </p:nvSpPr>
+        <p:spPr>
+          <a:xfrm>
+            <a:off x="6370168" y="1783080"/>
+            <a:ext cx="5227168" cy="411480"/>
+          </a:xfrm>
+          <a:prstGeom prst="rect">
+            <a:avLst/>
+          </a:prstGeom>
+          <a:noFill/>
+          <a:ln/>
+        </p:spPr>
+        <p:txBody>
+          <a:bodyPr wrap="square" lIns="0" tIns="0" rIns="0" bIns="0" rtlCol="0" anchor="ctr"/>
+          <a:lstStyle/>
+          <a:p>
+            <a:pPr rtl="1" algn="r" indent="0" marL="0">
+              <a:buNone/>
+            </a:pPr>
+            <a:r>
+              <a:rPr lang="en-US" sz="1600" b="1" dirty="0">
+                <a:solidFill>
+                  <a:srgbClr val="2C6E49"/>
+                </a:solidFill>
+                <a:latin typeface="Arial" pitchFamily="34" charset="0"/>
+                <a:ea typeface="Arial" pitchFamily="34" charset="-122"/>
+                <a:cs typeface="Arial" pitchFamily="34" charset="-120"/>
+              </a:rPr>
+              <a:t>Paulownia ALTIFOLIA® — شجرة المناطق الحارة</a:t>
+            </a:r>
+            <a:endParaRPr lang="en-US" sz="1600" dirty="0"/>
+          </a:p>
+        </p:txBody>
+      </p:sp>
+      <p:sp>
+        <p:nvSpPr>
+          <p:cNvPr id="7" name="Text 5"/>
+          <p:cNvSpPr txBox="1"/>
+          <p:nvPr/>
+        </p:nvSpPr>
+        <p:spPr>
+          <a:xfrm>
+            <a:off x="6370168" y="2286000"/>
+            <a:ext cx="5227168" cy="2468880"/>
+          </a:xfrm>
+          <a:prstGeom prst="rect">
+            <a:avLst/>
+          </a:prstGeom>
+          <a:noFill/>
+          <a:ln/>
+        </p:spPr>
+        <p:txBody>
+          <a:bodyPr wrap="square" lIns="0" tIns="0" rIns="0" bIns="0" rtlCol="0" anchor="t"/>
+          <a:lstStyle/>
+          <a:p>
+            <a:pPr algn="r" marL="342900" indent="-342900">
+              <a:lnSpc>
+                <a:spcPct val="122000"/>
+              </a:lnSpc>
+              <a:spcAft>
+                <a:spcPts val="1000"/>
+              </a:spcAft>
+              <a:buSzPct val="100000"/>
+              <a:buChar char="•"/>
+            </a:pPr>
+            <a:r>
+              <a:rPr lang="en-US" sz="1350" dirty="0">
+                <a:solidFill>
+                  <a:srgbClr val="364239"/>
+                </a:solidFill>
+                <a:latin typeface="Arial" pitchFamily="34" charset="0"/>
+                <a:ea typeface="Arial" pitchFamily="34" charset="-122"/>
+                <a:cs typeface="Arial" pitchFamily="34" charset="-120"/>
+              </a:rPr>
+              <a:t>من 13 إلى 15 متراً خلال ست إلى ثماني سنوات، بجذع كبير القطر.</a:t>
+            </a:r>
+            <a:endParaRPr lang="en-US" sz="1350" dirty="0"/>
+          </a:p>
+          <a:p>
+            <a:pPr algn="r" marL="342900" indent="-342900">
+              <a:lnSpc>
+                <a:spcPct val="122000"/>
+              </a:lnSpc>
+              <a:spcAft>
+                <a:spcPts val="1000"/>
+              </a:spcAft>
+              <a:buSzPct val="100000"/>
+              <a:buChar char="•"/>
+            </a:pPr>
+            <a:r>
+              <a:rPr lang="en-US" sz="1350" dirty="0">
+                <a:solidFill>
+                  <a:srgbClr val="364239"/>
+                </a:solidFill>
+                <a:latin typeface="Arial" pitchFamily="34" charset="0"/>
+                <a:ea typeface="Arial" pitchFamily="34" charset="-122"/>
+                <a:cs typeface="Arial" pitchFamily="34" charset="-120"/>
+              </a:rPr>
+              <a:t>مع 100 غرام من EVERGREEN® لكل شتلة، تنخفض حاجة الري بنسبة 50 %.</a:t>
+            </a:r>
+            <a:endParaRPr lang="en-US" sz="1350" dirty="0"/>
+          </a:p>
+          <a:p>
+            <a:pPr algn="r" marL="342900" indent="-342900">
+              <a:lnSpc>
+                <a:spcPct val="122000"/>
+              </a:lnSpc>
+              <a:spcAft>
+                <a:spcPts val="1000"/>
+              </a:spcAft>
+              <a:buSzPct val="100000"/>
+              <a:buChar char="•"/>
+            </a:pPr>
+            <a:r>
+              <a:rPr lang="en-US" sz="1350" dirty="0">
+                <a:solidFill>
+                  <a:srgbClr val="364239"/>
+                </a:solidFill>
+                <a:latin typeface="Arial" pitchFamily="34" charset="0"/>
+                <a:ea typeface="Arial" pitchFamily="34" charset="-122"/>
+                <a:cs typeface="Arial" pitchFamily="34" charset="-120"/>
+              </a:rPr>
+              <a:t>تتحمّل من −25 إلى +45 درجة مئوية، ولا يشتعل خشبها قبل 426 درجة.</a:t>
+            </a:r>
+            <a:endParaRPr lang="en-US" sz="1350" dirty="0"/>
+          </a:p>
+          <a:p>
+            <a:pPr algn="r" marL="342900" indent="-342900">
+              <a:lnSpc>
+                <a:spcPct val="122000"/>
+              </a:lnSpc>
+              <a:spcAft>
+                <a:spcPts val="1000"/>
+              </a:spcAft>
+              <a:buSzPct val="100000"/>
+              <a:buChar char="•"/>
+            </a:pPr>
+            <a:r>
+              <a:rPr lang="en-US" sz="1350" dirty="0">
+                <a:solidFill>
+                  <a:srgbClr val="364239"/>
+                </a:solidFill>
+                <a:latin typeface="Arial" pitchFamily="34" charset="0"/>
+                <a:ea typeface="Arial" pitchFamily="34" charset="-122"/>
+                <a:cs typeface="Arial" pitchFamily="34" charset="-120"/>
+              </a:rPr>
+              <a:t>مصدّ للرياح، وحماية للتربة من التعرية، و400 إلى 700 كغ من العسل للهكتار.</a:t>
+            </a:r>
+            <a:endParaRPr lang="en-US" sz="1350" dirty="0"/>
+          </a:p>
+        </p:txBody>
+      </p:sp>
+      <p:sp>
+        <p:nvSpPr>
+          <p:cNvPr id="8" name="Shape 6"/>
           <p:cNvSpPr/>
           <p:nvPr/>
         </p:nvSpPr>
         <p:spPr>
           <a:xfrm>
-            <a:off x="8275320" y="1783080"/>
-            <a:ext cx="3291840" cy="3977640"/>
+            <a:off x="594360" y="4846320"/>
+            <a:ext cx="11002975" cy="960120"/>
           </a:xfrm>
           <a:prstGeom prst="roundRect">
             <a:avLst>
-              <a:gd name="adj" fmla="val 2778"/>
+              <a:gd name="adj" fmla="val 7619"/>
             </a:avLst>
           </a:prstGeom>
           <a:solidFill>
@@ -5358,53 +5774,14 @@
       </p:sp>
       <p:sp>
         <p:nvSpPr>
-          <p:cNvPr id="6" name="Text 3"/>
-          <p:cNvSpPr txBox="1"/>
-          <p:nvPr/>
-        </p:nvSpPr>
-        <p:spPr>
-          <a:xfrm>
-            <a:off x="8503920" y="2011680"/>
-            <a:ext cx="2834640" cy="457200"/>
-          </a:xfrm>
-          <a:prstGeom prst="rect">
-            <a:avLst/>
-          </a:prstGeom>
-          <a:noFill/>
-          <a:ln/>
-        </p:spPr>
-        <p:txBody>
-          <a:bodyPr wrap="square" lIns="0" tIns="0" rIns="0" bIns="0" rtlCol="0" anchor="ctr"/>
-          <a:lstStyle/>
-          <a:p>
-            <a:pPr rtl="1" algn="r" indent="0" marL="0">
-              <a:buNone/>
-            </a:pPr>
-            <a:r>
-              <a:rPr lang="en-US" sz="1300" b="1" dirty="0">
-                <a:solidFill>
-                  <a:srgbClr val="2C6E49"/>
-                </a:solidFill>
-                <a:latin typeface="Arial" pitchFamily="34" charset="0"/>
-                <a:ea typeface="Arial" pitchFamily="34" charset="-122"/>
-                <a:cs typeface="Arial" pitchFamily="34" charset="-120"/>
-              </a:rPr>
-              <a:t>تُقرأ بحذر</a:t>
-            </a:r>
-            <a:endParaRPr lang="en-US" sz="1300" dirty="0"/>
-          </a:p>
-        </p:txBody>
-      </p:sp>
-      <p:sp>
-        <p:nvSpPr>
-          <p:cNvPr id="7" name="Text 4"/>
-          <p:cNvSpPr txBox="1"/>
-          <p:nvPr/>
-        </p:nvSpPr>
-        <p:spPr>
-          <a:xfrm>
-            <a:off x="8503920" y="2560320"/>
-            <a:ext cx="2834640" cy="3017520"/>
+          <p:cNvPr id="9" name="Text 7"/>
+          <p:cNvSpPr txBox="1"/>
+          <p:nvPr/>
+        </p:nvSpPr>
+        <p:spPr>
+          <a:xfrm>
+            <a:off x="822960" y="4983480"/>
+            <a:ext cx="10545775" cy="713232"/>
           </a:xfrm>
           <a:prstGeom prst="rect">
             <a:avLst/>
@@ -5418,57 +5795,28 @@
           <a:p>
             <a:pPr rtl="1" algn="r" indent="0" marL="0">
               <a:lnSpc>
-                <a:spcPct val="125000"/>
+                <a:spcPct val="118000"/>
               </a:lnSpc>
               <a:buNone/>
             </a:pPr>
             <a:r>
-              <a:rPr lang="en-US" sz="1200" dirty="0">
-                <a:solidFill>
-                  <a:srgbClr val="364239"/>
-                </a:solidFill>
-                <a:latin typeface="Arial" pitchFamily="34" charset="0"/>
-                <a:ea typeface="Arial" pitchFamily="34" charset="-122"/>
-                <a:cs typeface="Arial" pitchFamily="34" charset="-120"/>
-              </a:rPr>
-              <a:t>هذه النطاقات تقديرية استرشادية، مبنية على المكاسب الموثقة لموادنا المحتفظة بالماء.</a:t>
-            </a:r>
-            <a:endParaRPr lang="en-US" sz="1200" dirty="0"/>
-          </a:p>
-          <a:p>
-            <a:pPr rtl="1" algn="r" indent="0" marL="0">
-              <a:lnSpc>
-                <a:spcPct val="125000"/>
-              </a:lnSpc>
-              <a:buNone/>
-            </a:pPr>
-            <a:endParaRPr lang="en-US" sz="1200" dirty="0"/>
-          </a:p>
-          <a:p>
-            <a:pPr rtl="1" algn="r" indent="0" marL="0">
-              <a:lnSpc>
-                <a:spcPct val="125000"/>
-              </a:lnSpc>
-              <a:buNone/>
-            </a:pPr>
-            <a:r>
-              <a:rPr lang="en-US" sz="1200" dirty="0">
-                <a:solidFill>
-                  <a:srgbClr val="364239"/>
-                </a:solidFill>
-                <a:latin typeface="Arial" pitchFamily="34" charset="0"/>
-                <a:ea typeface="Arial" pitchFamily="34" charset="-122"/>
-                <a:cs typeface="Arial" pitchFamily="34" charset="-120"/>
-              </a:rPr>
-              <a:t>النتيجة الفعلية تتوقف على التربة والمناخ والمحصول. الأرقام تعطي حجماً تقريبياً لا أكثر، وهي لا تشكّل بأي حال قيمة مضمونة أو تعاقدية أو مطلقة.</a:t>
-            </a:r>
-            <a:endParaRPr lang="en-US" sz="1200" dirty="0"/>
-          </a:p>
-        </p:txBody>
-      </p:sp>
-      <p:sp>
-        <p:nvSpPr>
-          <p:cNvPr id="8" name="Text 5"/>
+              <a:rPr lang="en-US" sz="1100" dirty="0">
+                <a:solidFill>
+                  <a:srgbClr val="6F7D71"/>
+                </a:solidFill>
+                <a:latin typeface="Arial" pitchFamily="34" charset="0"/>
+                <a:ea typeface="Arial" pitchFamily="34" charset="-122"/>
+                <a:cs typeface="Arial" pitchFamily="34" charset="-120"/>
+              </a:rPr>
+              <a:t>تُسلَّم الشتلات في أصص (25 إلى 30 سم)، معتمدة خالية من الأمراض، وتُستبدل بالضمان عند تلفها. أول قطع في نهاية السنة السادسة، ويُقدَّر الخشب بنحو 400 إلى 450 يورو للمتر المكعب.</a:t>
+            </a:r>
+            <a:endParaRPr lang="en-US" sz="1100" dirty="0"/>
+          </a:p>
+        </p:txBody>
+      </p:sp>
+      <p:sp>
+        <p:nvSpPr>
+          <p:cNvPr id="10" name="Text 8"/>
           <p:cNvSpPr txBox="1"/>
           <p:nvPr/>
         </p:nvSpPr>
@@ -5509,7 +5857,7 @@
       </p:sp>
       <p:sp>
         <p:nvSpPr>
-          <p:cNvPr id="9" name="Text 6"/>
+          <p:cNvPr id="11" name="Text 9"/>
           <p:cNvSpPr txBox="1"/>
           <p:nvPr/>
         </p:nvSpPr>
@@ -5613,7 +5961,7 @@
                 <a:ea typeface="Arial" pitchFamily="34" charset="-122"/>
                 <a:cs typeface="Arial" pitchFamily="34" charset="-120"/>
               </a:rPr>
-              <a:t>ثلاثة ميادين أولوية</a:t>
+              <a:t>أحجام تقديرية</a:t>
             </a:r>
             <a:endParaRPr lang="en-US" sz="1150" dirty="0"/>
           </a:p>
@@ -5652,26 +6000,42 @@
                 <a:ea typeface="Arial" pitchFamily="34" charset="-122"/>
                 <a:cs typeface="Arial" pitchFamily="34" charset="-120"/>
               </a:rPr>
-              <a:t>أين تُجرى التجارب الأولى</a:t>
+              <a:t>توفير المياه المتوقع حسب أسلوب الري</a:t>
             </a:r>
             <a:endParaRPr lang="en-US" sz="3000" dirty="0"/>
           </a:p>
         </p:txBody>
       </p:sp>
-      <p:sp>
-        <p:nvSpPr>
-          <p:cNvPr id="4" name="Shape 2"/>
+      <p:graphicFrame>
+        <p:nvGraphicFramePr>
+          <p:cNvPr id="4" name="Chart 0" descr=""/>
+          <p:cNvGraphicFramePr/>
+          <p:nvPr/>
+        </p:nvGraphicFramePr>
+        <p:xfrm>
+          <a:off x="594360" y="1783080"/>
+          <a:ext cx="7360920" cy="3977640"/>
+        </p:xfrm>
+        <a:graphic xmlns:a="http://schemas.openxmlformats.org/drawingml/2006/main">
+          <a:graphicData uri="http://schemas.openxmlformats.org/drawingml/2006/chart">
+            <c:chart xmlns:c="http://schemas.openxmlformats.org/drawingml/2006/chart" r:id="rId1"/>
+          </a:graphicData>
+        </a:graphic>
+      </p:graphicFrame>
+      <p:sp>
+        <p:nvSpPr>
+          <p:cNvPr id="5" name="Shape 2"/>
           <p:cNvSpPr/>
           <p:nvPr/>
         </p:nvSpPr>
         <p:spPr>
           <a:xfrm>
-            <a:off x="594360" y="1783080"/>
-            <a:ext cx="3472586" cy="4069080"/>
+            <a:off x="8275320" y="1783080"/>
+            <a:ext cx="3291840" cy="3977640"/>
           </a:xfrm>
           <a:prstGeom prst="roundRect">
             <a:avLst>
-              <a:gd name="adj" fmla="val 2633"/>
+              <a:gd name="adj" fmla="val 2778"/>
             </a:avLst>
           </a:prstGeom>
           <a:solidFill>
@@ -5685,30 +6049,6 @@
           </a:ln>
         </p:spPr>
       </p:sp>
-      <p:pic>
-        <p:nvPicPr>
-          <p:cNvPr id="5" name="Image 0" descr="preencoded.png">    </p:cNvPr>
-          <p:cNvPicPr>
-            <a:picLocks noChangeAspect="1"/>
-          </p:cNvPicPr>
-          <p:nvPr/>
-        </p:nvPicPr>
-        <p:blipFill>
-          <a:blip r:embed="rId1"/>
-          <a:stretch>
-            <a:fillRect/>
-          </a:stretch>
-        </p:blipFill>
-        <p:spPr>
-          <a:xfrm>
-            <a:off x="594360" y="1783080"/>
-            <a:ext cx="3472586" cy="1691640"/>
-          </a:xfrm>
-          <a:prstGeom prst="rect">
-            <a:avLst/>
-          </a:prstGeom>
-        </p:spPr>
-      </p:pic>
       <p:sp>
         <p:nvSpPr>
           <p:cNvPr id="6" name="Text 3"/>
@@ -5717,8 +6057,8 @@
         </p:nvSpPr>
         <p:spPr>
           <a:xfrm>
-            <a:off x="795528" y="3639312"/>
-            <a:ext cx="3070250" cy="384048"/>
+            <a:off x="8503920" y="2011680"/>
+            <a:ext cx="2834640" cy="457200"/>
           </a:xfrm>
           <a:prstGeom prst="rect">
             <a:avLst/>
@@ -5734,7 +6074,7 @@
               <a:buNone/>
             </a:pPr>
             <a:r>
-              <a:rPr lang="en-US" sz="1500" b="1" dirty="0">
+              <a:rPr lang="en-US" sz="1300" b="1" dirty="0">
                 <a:solidFill>
                   <a:srgbClr val="2C6E49"/>
                 </a:solidFill>
@@ -5742,9 +6082,9 @@
                 <a:ea typeface="Arial" pitchFamily="34" charset="-122"/>
                 <a:cs typeface="Arial" pitchFamily="34" charset="-120"/>
               </a:rPr>
-              <a:t>وادي الأردن — الأغوار</a:t>
-            </a:r>
-            <a:endParaRPr lang="en-US" sz="1500" dirty="0"/>
+              <a:t>تُقرأ بحذر</a:t>
+            </a:r>
+            <a:endParaRPr lang="en-US" sz="1300" dirty="0"/>
           </a:p>
         </p:txBody>
       </p:sp>
@@ -5756,580 +6096,72 @@
         </p:nvSpPr>
         <p:spPr>
           <a:xfrm>
-            <a:off x="795528" y="4041648"/>
-            <a:ext cx="3070250" cy="329184"/>
-          </a:xfrm>
-          <a:prstGeom prst="rect">
-            <a:avLst/>
-          </a:prstGeom>
-          <a:noFill/>
-          <a:ln/>
-        </p:spPr>
-        <p:txBody>
-          <a:bodyPr wrap="square" lIns="0" tIns="0" rIns="0" bIns="0" rtlCol="0" anchor="ctr"/>
+            <a:off x="8503920" y="2560320"/>
+            <a:ext cx="2834640" cy="3017520"/>
+          </a:xfrm>
+          <a:prstGeom prst="rect">
+            <a:avLst/>
+          </a:prstGeom>
+          <a:noFill/>
+          <a:ln/>
+        </p:spPr>
+        <p:txBody>
+          <a:bodyPr wrap="square" lIns="0" tIns="0" rIns="0" bIns="0" rtlCol="0" anchor="t"/>
           <a:lstStyle/>
           <a:p>
             <a:pPr rtl="1" algn="r" indent="0" marL="0">
-              <a:buNone/>
-            </a:pPr>
-            <a:r>
-              <a:rPr lang="en-US" sz="1250" b="1" dirty="0">
-                <a:solidFill>
-                  <a:srgbClr val="9C6C12"/>
-                </a:solidFill>
-                <a:latin typeface="Arial" pitchFamily="34" charset="0"/>
-                <a:ea typeface="Arial" pitchFamily="34" charset="-122"/>
-                <a:cs typeface="Arial" pitchFamily="34" charset="-120"/>
-              </a:rPr>
-              <a:t>≈ 35 ألف هكتار مروية</a:t>
-            </a:r>
-            <a:endParaRPr lang="en-US" sz="1250" dirty="0"/>
+              <a:lnSpc>
+                <a:spcPct val="125000"/>
+              </a:lnSpc>
+              <a:buNone/>
+            </a:pPr>
+            <a:r>
+              <a:rPr lang="en-US" sz="1200" dirty="0">
+                <a:solidFill>
+                  <a:srgbClr val="364239"/>
+                </a:solidFill>
+                <a:latin typeface="Arial" pitchFamily="34" charset="0"/>
+                <a:ea typeface="Arial" pitchFamily="34" charset="-122"/>
+                <a:cs typeface="Arial" pitchFamily="34" charset="-120"/>
+              </a:rPr>
+              <a:t>هذه النطاقات تقديرية استرشادية، مبنية على المكاسب الموثقة لموادنا المحتفظة بالماء.</a:t>
+            </a:r>
+            <a:endParaRPr lang="en-US" sz="1200" dirty="0"/>
+          </a:p>
+          <a:p>
+            <a:pPr rtl="1" algn="r" indent="0" marL="0">
+              <a:lnSpc>
+                <a:spcPct val="125000"/>
+              </a:lnSpc>
+              <a:buNone/>
+            </a:pPr>
+            <a:endParaRPr lang="en-US" sz="1200" dirty="0"/>
+          </a:p>
+          <a:p>
+            <a:pPr rtl="1" algn="r" indent="0" marL="0">
+              <a:lnSpc>
+                <a:spcPct val="125000"/>
+              </a:lnSpc>
+              <a:buNone/>
+            </a:pPr>
+            <a:r>
+              <a:rPr lang="en-US" sz="1200" dirty="0">
+                <a:solidFill>
+                  <a:srgbClr val="364239"/>
+                </a:solidFill>
+                <a:latin typeface="Arial" pitchFamily="34" charset="0"/>
+                <a:ea typeface="Arial" pitchFamily="34" charset="-122"/>
+                <a:cs typeface="Arial" pitchFamily="34" charset="-120"/>
+              </a:rPr>
+              <a:t>النتيجة الفعلية تتوقف على التربة والمناخ والمحصول. الأرقام تعطي حجماً تقريبياً لا أكثر، وهي لا تشكّل بأي حال قيمة مضمونة أو تعاقدية أو مطلقة.</a:t>
+            </a:r>
+            <a:endParaRPr lang="en-US" sz="1200" dirty="0"/>
           </a:p>
         </p:txBody>
       </p:sp>
       <p:sp>
         <p:nvSpPr>
           <p:cNvPr id="8" name="Text 5"/>
-          <p:cNvSpPr txBox="1"/>
-          <p:nvPr/>
-        </p:nvSpPr>
-        <p:spPr>
-          <a:xfrm>
-            <a:off x="795528" y="4407408"/>
-            <a:ext cx="3070250" cy="1280160"/>
-          </a:xfrm>
-          <a:prstGeom prst="rect">
-            <a:avLst/>
-          </a:prstGeom>
-          <a:noFill/>
-          <a:ln/>
-        </p:spPr>
-        <p:txBody>
-          <a:bodyPr wrap="square" lIns="0" tIns="0" rIns="0" bIns="0" rtlCol="0" anchor="t"/>
-          <a:lstStyle/>
-          <a:p>
-            <a:pPr algn="r" marL="342900" indent="-342900">
-              <a:lnSpc>
-                <a:spcPct val="116000"/>
-              </a:lnSpc>
-              <a:spcAft>
-                <a:spcPts val="700"/>
-              </a:spcAft>
-              <a:buSzPct val="100000"/>
-              <a:buChar char="•"/>
-            </a:pPr>
-            <a:r>
-              <a:rPr lang="en-US" sz="1150" dirty="0">
-                <a:solidFill>
-                  <a:srgbClr val="364239"/>
-                </a:solidFill>
-                <a:latin typeface="Arial" pitchFamily="34" charset="0"/>
-                <a:ea typeface="Arial" pitchFamily="34" charset="-122"/>
-                <a:cs typeface="Arial" pitchFamily="34" charset="-120"/>
-              </a:rPr>
-              <a:t>قلب الإنتاج التصديري الشتوي: خضار محمية ومكشوفة موجّهة إلى أسواق الخليج، معظمها مروي بالتنقيط.</a:t>
-            </a:r>
-            <a:endParaRPr lang="en-US" sz="1150" dirty="0"/>
-          </a:p>
-          <a:p>
-            <a:pPr algn="r" marL="342900" indent="-342900">
-              <a:lnSpc>
-                <a:spcPct val="116000"/>
-              </a:lnSpc>
-              <a:spcAft>
-                <a:spcPts val="700"/>
-              </a:spcAft>
-              <a:buSzPct val="100000"/>
-              <a:buChar char="•"/>
-            </a:pPr>
-            <a:r>
-              <a:rPr lang="en-US" sz="1150" dirty="0">
-                <a:solidFill>
-                  <a:srgbClr val="364239"/>
-                </a:solidFill>
-                <a:latin typeface="Arial" pitchFamily="34" charset="0"/>
-                <a:ea typeface="Arial" pitchFamily="34" charset="-122"/>
-                <a:cs typeface="Arial" pitchFamily="34" charset="-120"/>
-              </a:rPr>
-              <a:t>الزراعة دون مستوى سطح البحر بنحو 200 إلى 400 م، مع تبخّر مرتفع طوال الموسم.</a:t>
-            </a:r>
-            <a:endParaRPr lang="en-US" sz="1150" dirty="0"/>
-          </a:p>
-          <a:p>
-            <a:pPr algn="r" marL="342900" indent="-342900">
-              <a:lnSpc>
-                <a:spcPct val="116000"/>
-              </a:lnSpc>
-              <a:spcAft>
-                <a:spcPts val="700"/>
-              </a:spcAft>
-              <a:buSzPct val="100000"/>
-              <a:buChar char="•"/>
-            </a:pPr>
-            <a:r>
-              <a:rPr lang="en-US" sz="1150" dirty="0">
-                <a:solidFill>
-                  <a:srgbClr val="364239"/>
-                </a:solidFill>
-                <a:latin typeface="Arial" pitchFamily="34" charset="0"/>
-                <a:ea typeface="Arial" pitchFamily="34" charset="-122"/>
-                <a:cs typeface="Arial" pitchFamily="34" charset="-120"/>
-              </a:rPr>
-              <a:t>حصص مائية مقننة عبر قناة الملك عبدالله، وجزء متزايد منها مياه صرف معالجة.</a:t>
-            </a:r>
-            <a:endParaRPr lang="en-US" sz="1150" dirty="0"/>
-          </a:p>
-        </p:txBody>
-      </p:sp>
-      <p:sp>
-        <p:nvSpPr>
-          <p:cNvPr id="9" name="Shape 6"/>
-          <p:cNvSpPr/>
-          <p:nvPr/>
-        </p:nvSpPr>
-        <p:spPr>
-          <a:xfrm>
-            <a:off x="4359554" y="1783080"/>
-            <a:ext cx="3472586" cy="4069080"/>
-          </a:xfrm>
-          <a:prstGeom prst="roundRect">
-            <a:avLst>
-              <a:gd name="adj" fmla="val 2633"/>
-            </a:avLst>
-          </a:prstGeom>
-          <a:solidFill>
-            <a:srgbClr val="F2F1E8"/>
-          </a:solidFill>
-          <a:ln w="9525">
-            <a:solidFill>
-              <a:srgbClr val="E0DFD0"/>
-            </a:solidFill>
-            <a:prstDash val="solid"/>
-          </a:ln>
-        </p:spPr>
-      </p:sp>
-      <p:pic>
-        <p:nvPicPr>
-          <p:cNvPr id="10" name="Image 1" descr="preencoded.png">    </p:cNvPr>
-          <p:cNvPicPr>
-            <a:picLocks noChangeAspect="1"/>
-          </p:cNvPicPr>
-          <p:nvPr/>
-        </p:nvPicPr>
-        <p:blipFill>
-          <a:blip r:embed="rId2"/>
-          <a:stretch>
-            <a:fillRect/>
-          </a:stretch>
-        </p:blipFill>
-        <p:spPr>
-          <a:xfrm>
-            <a:off x="4359554" y="1783080"/>
-            <a:ext cx="3472586" cy="1691640"/>
-          </a:xfrm>
-          <a:prstGeom prst="rect">
-            <a:avLst/>
-          </a:prstGeom>
-        </p:spPr>
-      </p:pic>
-      <p:sp>
-        <p:nvSpPr>
-          <p:cNvPr id="11" name="Text 7"/>
-          <p:cNvSpPr txBox="1"/>
-          <p:nvPr/>
-        </p:nvSpPr>
-        <p:spPr>
-          <a:xfrm>
-            <a:off x="4560722" y="3639312"/>
-            <a:ext cx="3070250" cy="384048"/>
-          </a:xfrm>
-          <a:prstGeom prst="rect">
-            <a:avLst/>
-          </a:prstGeom>
-          <a:noFill/>
-          <a:ln/>
-        </p:spPr>
-        <p:txBody>
-          <a:bodyPr wrap="square" lIns="0" tIns="0" rIns="0" bIns="0" rtlCol="0" anchor="ctr"/>
-          <a:lstStyle/>
-          <a:p>
-            <a:pPr rtl="1" algn="r" indent="0" marL="0">
-              <a:buNone/>
-            </a:pPr>
-            <a:r>
-              <a:rPr lang="en-US" sz="1500" b="1" dirty="0">
-                <a:solidFill>
-                  <a:srgbClr val="2C6E49"/>
-                </a:solidFill>
-                <a:latin typeface="Arial" pitchFamily="34" charset="0"/>
-                <a:ea typeface="Arial" pitchFamily="34" charset="-122"/>
-                <a:cs typeface="Arial" pitchFamily="34" charset="-120"/>
-              </a:rPr>
-              <a:t>المرتفعات الشمالية</a:t>
-            </a:r>
-            <a:endParaRPr lang="en-US" sz="1500" dirty="0"/>
-          </a:p>
-        </p:txBody>
-      </p:sp>
-      <p:sp>
-        <p:nvSpPr>
-          <p:cNvPr id="12" name="Text 8"/>
-          <p:cNvSpPr txBox="1"/>
-          <p:nvPr/>
-        </p:nvSpPr>
-        <p:spPr>
-          <a:xfrm>
-            <a:off x="4560722" y="4041648"/>
-            <a:ext cx="3070250" cy="329184"/>
-          </a:xfrm>
-          <a:prstGeom prst="rect">
-            <a:avLst/>
-          </a:prstGeom>
-          <a:noFill/>
-          <a:ln/>
-        </p:spPr>
-        <p:txBody>
-          <a:bodyPr wrap="square" lIns="0" tIns="0" rIns="0" bIns="0" rtlCol="0" anchor="ctr"/>
-          <a:lstStyle/>
-          <a:p>
-            <a:pPr rtl="1" algn="r" indent="0" marL="0">
-              <a:buNone/>
-            </a:pPr>
-            <a:r>
-              <a:rPr lang="en-US" sz="1250" b="1" dirty="0">
-                <a:solidFill>
-                  <a:srgbClr val="9C6C12"/>
-                </a:solidFill>
-                <a:latin typeface="Arial" pitchFamily="34" charset="0"/>
-                <a:ea typeface="Arial" pitchFamily="34" charset="-122"/>
-                <a:cs typeface="Arial" pitchFamily="34" charset="-120"/>
-              </a:rPr>
-              <a:t>زيتون بعلي — إربد وعجلون وجرش</a:t>
-            </a:r>
-            <a:endParaRPr lang="en-US" sz="1250" dirty="0"/>
-          </a:p>
-        </p:txBody>
-      </p:sp>
-      <p:sp>
-        <p:nvSpPr>
-          <p:cNvPr id="13" name="Text 9"/>
-          <p:cNvSpPr txBox="1"/>
-          <p:nvPr/>
-        </p:nvSpPr>
-        <p:spPr>
-          <a:xfrm>
-            <a:off x="4560722" y="4407408"/>
-            <a:ext cx="3070250" cy="1280160"/>
-          </a:xfrm>
-          <a:prstGeom prst="rect">
-            <a:avLst/>
-          </a:prstGeom>
-          <a:noFill/>
-          <a:ln/>
-        </p:spPr>
-        <p:txBody>
-          <a:bodyPr wrap="square" lIns="0" tIns="0" rIns="0" bIns="0" rtlCol="0" anchor="t"/>
-          <a:lstStyle/>
-          <a:p>
-            <a:pPr algn="r" marL="342900" indent="-342900">
-              <a:lnSpc>
-                <a:spcPct val="116000"/>
-              </a:lnSpc>
-              <a:spcAft>
-                <a:spcPts val="700"/>
-              </a:spcAft>
-              <a:buSzPct val="100000"/>
-              <a:buChar char="•"/>
-            </a:pPr>
-            <a:r>
-              <a:rPr lang="en-US" sz="1150" dirty="0">
-                <a:solidFill>
-                  <a:srgbClr val="364239"/>
-                </a:solidFill>
-                <a:latin typeface="Arial" pitchFamily="34" charset="0"/>
-                <a:ea typeface="Arial" pitchFamily="34" charset="-122"/>
-                <a:cs typeface="Arial" pitchFamily="34" charset="-120"/>
-              </a:rPr>
-              <a:t>نحو نصف مساحة الزيتون في المملكة، وهي زراعة بعلية يتحدد إنتاجها بمطر الموسم مباشرة.</a:t>
-            </a:r>
-            <a:endParaRPr lang="en-US" sz="1150" dirty="0"/>
-          </a:p>
-          <a:p>
-            <a:pPr algn="r" marL="342900" indent="-342900">
-              <a:lnSpc>
-                <a:spcPct val="116000"/>
-              </a:lnSpc>
-              <a:spcAft>
-                <a:spcPts val="700"/>
-              </a:spcAft>
-              <a:buSzPct val="100000"/>
-              <a:buChar char="•"/>
-            </a:pPr>
-            <a:r>
-              <a:rPr lang="en-US" sz="1150" dirty="0">
-                <a:solidFill>
-                  <a:srgbClr val="364239"/>
-                </a:solidFill>
-                <a:latin typeface="Arial" pitchFamily="34" charset="0"/>
-                <a:ea typeface="Arial" pitchFamily="34" charset="-122"/>
-                <a:cs typeface="Arial" pitchFamily="34" charset="-120"/>
-              </a:rPr>
-              <a:t>أمطار بين 400 و600 مم سنوياً، لكنها متركزة في أشهر قليلة ومتفاوتة بين سنة وأخرى.</a:t>
-            </a:r>
-            <a:endParaRPr lang="en-US" sz="1150" dirty="0"/>
-          </a:p>
-          <a:p>
-            <a:pPr algn="r" marL="342900" indent="-342900">
-              <a:lnSpc>
-                <a:spcPct val="116000"/>
-              </a:lnSpc>
-              <a:spcAft>
-                <a:spcPts val="700"/>
-              </a:spcAft>
-              <a:buSzPct val="100000"/>
-              <a:buChar char="•"/>
-            </a:pPr>
-            <a:r>
-              <a:rPr lang="en-US" sz="1150" dirty="0">
-                <a:solidFill>
-                  <a:srgbClr val="364239"/>
-                </a:solidFill>
-                <a:latin typeface="Arial" pitchFamily="34" charset="0"/>
-                <a:ea typeface="Arial" pitchFamily="34" charset="-122"/>
-                <a:cs typeface="Arial" pitchFamily="34" charset="-120"/>
-              </a:rPr>
-              <a:t>الاحتفاظ بالماء في منطقة الجذور يمدّ أثر المطر إلى ما بعد توقّفه: هذا هو الرهان هنا.</a:t>
-            </a:r>
-            <a:endParaRPr lang="en-US" sz="1150" dirty="0"/>
-          </a:p>
-        </p:txBody>
-      </p:sp>
-      <p:sp>
-        <p:nvSpPr>
-          <p:cNvPr id="14" name="Shape 10"/>
-          <p:cNvSpPr/>
-          <p:nvPr/>
-        </p:nvSpPr>
-        <p:spPr>
-          <a:xfrm>
-            <a:off x="8124749" y="1783080"/>
-            <a:ext cx="3472586" cy="4069080"/>
-          </a:xfrm>
-          <a:prstGeom prst="roundRect">
-            <a:avLst>
-              <a:gd name="adj" fmla="val 2633"/>
-            </a:avLst>
-          </a:prstGeom>
-          <a:solidFill>
-            <a:srgbClr val="F2F1E8"/>
-          </a:solidFill>
-          <a:ln w="9525">
-            <a:solidFill>
-              <a:srgbClr val="E0DFD0"/>
-            </a:solidFill>
-            <a:prstDash val="solid"/>
-          </a:ln>
-        </p:spPr>
-      </p:sp>
-      <p:pic>
-        <p:nvPicPr>
-          <p:cNvPr id="15" name="Image 2" descr="preencoded.png">    </p:cNvPr>
-          <p:cNvPicPr>
-            <a:picLocks noChangeAspect="1"/>
-          </p:cNvPicPr>
-          <p:nvPr/>
-        </p:nvPicPr>
-        <p:blipFill>
-          <a:blip r:embed="rId3"/>
-          <a:stretch>
-            <a:fillRect/>
-          </a:stretch>
-        </p:blipFill>
-        <p:spPr>
-          <a:xfrm>
-            <a:off x="8124749" y="1783080"/>
-            <a:ext cx="3472586" cy="1691640"/>
-          </a:xfrm>
-          <a:prstGeom prst="rect">
-            <a:avLst/>
-          </a:prstGeom>
-        </p:spPr>
-      </p:pic>
-      <p:sp>
-        <p:nvSpPr>
-          <p:cNvPr id="16" name="Text 11"/>
-          <p:cNvSpPr txBox="1"/>
-          <p:nvPr/>
-        </p:nvSpPr>
-        <p:spPr>
-          <a:xfrm>
-            <a:off x="8325917" y="3639312"/>
-            <a:ext cx="3070250" cy="384048"/>
-          </a:xfrm>
-          <a:prstGeom prst="rect">
-            <a:avLst/>
-          </a:prstGeom>
-          <a:noFill/>
-          <a:ln/>
-        </p:spPr>
-        <p:txBody>
-          <a:bodyPr wrap="square" lIns="0" tIns="0" rIns="0" bIns="0" rtlCol="0" anchor="ctr"/>
-          <a:lstStyle/>
-          <a:p>
-            <a:pPr rtl="1" algn="r" indent="0" marL="0">
-              <a:buNone/>
-            </a:pPr>
-            <a:r>
-              <a:rPr lang="en-US" sz="1500" b="1" dirty="0">
-                <a:solidFill>
-                  <a:srgbClr val="2C6E49"/>
-                </a:solidFill>
-                <a:latin typeface="Arial" pitchFamily="34" charset="0"/>
-                <a:ea typeface="Arial" pitchFamily="34" charset="-122"/>
-                <a:cs typeface="Arial" pitchFamily="34" charset="-120"/>
-              </a:rPr>
-              <a:t>المفرق وحوض الأزرق</a:t>
-            </a:r>
-            <a:endParaRPr lang="en-US" sz="1500" dirty="0"/>
-          </a:p>
-        </p:txBody>
-      </p:sp>
-      <p:sp>
-        <p:nvSpPr>
-          <p:cNvPr id="17" name="Text 12"/>
-          <p:cNvSpPr txBox="1"/>
-          <p:nvPr/>
-        </p:nvSpPr>
-        <p:spPr>
-          <a:xfrm>
-            <a:off x="8325917" y="4041648"/>
-            <a:ext cx="3070250" cy="329184"/>
-          </a:xfrm>
-          <a:prstGeom prst="rect">
-            <a:avLst/>
-          </a:prstGeom>
-          <a:noFill/>
-          <a:ln/>
-        </p:spPr>
-        <p:txBody>
-          <a:bodyPr wrap="square" lIns="0" tIns="0" rIns="0" bIns="0" rtlCol="0" anchor="ctr"/>
-          <a:lstStyle/>
-          <a:p>
-            <a:pPr rtl="1" algn="r" indent="0" marL="0">
-              <a:buNone/>
-            </a:pPr>
-            <a:r>
-              <a:rPr lang="en-US" sz="1250" b="1" dirty="0">
-                <a:solidFill>
-                  <a:srgbClr val="9C6C12"/>
-                </a:solidFill>
-                <a:latin typeface="Arial" pitchFamily="34" charset="0"/>
-                <a:ea typeface="Arial" pitchFamily="34" charset="-122"/>
-                <a:cs typeface="Arial" pitchFamily="34" charset="-120"/>
-              </a:rPr>
-              <a:t>ضخ جوفي يقارب ضعف الحد الآمن</a:t>
-            </a:r>
-            <a:endParaRPr lang="en-US" sz="1250" dirty="0"/>
-          </a:p>
-        </p:txBody>
-      </p:sp>
-      <p:sp>
-        <p:nvSpPr>
-          <p:cNvPr id="18" name="Text 13"/>
-          <p:cNvSpPr txBox="1"/>
-          <p:nvPr/>
-        </p:nvSpPr>
-        <p:spPr>
-          <a:xfrm>
-            <a:off x="8325917" y="4407408"/>
-            <a:ext cx="3070250" cy="1280160"/>
-          </a:xfrm>
-          <a:prstGeom prst="rect">
-            <a:avLst/>
-          </a:prstGeom>
-          <a:noFill/>
-          <a:ln/>
-        </p:spPr>
-        <p:txBody>
-          <a:bodyPr wrap="square" lIns="0" tIns="0" rIns="0" bIns="0" rtlCol="0" anchor="t"/>
-          <a:lstStyle/>
-          <a:p>
-            <a:pPr algn="r" marL="342900" indent="-342900">
-              <a:lnSpc>
-                <a:spcPct val="116000"/>
-              </a:lnSpc>
-              <a:spcAft>
-                <a:spcPts val="700"/>
-              </a:spcAft>
-              <a:buSzPct val="100000"/>
-              <a:buChar char="•"/>
-            </a:pPr>
-            <a:r>
-              <a:rPr lang="en-US" sz="1150" dirty="0">
-                <a:solidFill>
-                  <a:srgbClr val="364239"/>
-                </a:solidFill>
-                <a:latin typeface="Arial" pitchFamily="34" charset="0"/>
-                <a:ea typeface="Arial" pitchFamily="34" charset="-122"/>
-                <a:cs typeface="Arial" pitchFamily="34" charset="-120"/>
-              </a:rPr>
-              <a:t>مزارع مروية بالكامل من الآبار: خضار مكشوفة وأشجار مثمرة وزيتون مروي في مناخ شبه صحراوي.</a:t>
-            </a:r>
-            <a:endParaRPr lang="en-US" sz="1150" dirty="0"/>
-          </a:p>
-          <a:p>
-            <a:pPr algn="r" marL="342900" indent="-342900">
-              <a:lnSpc>
-                <a:spcPct val="116000"/>
-              </a:lnSpc>
-              <a:spcAft>
-                <a:spcPts val="700"/>
-              </a:spcAft>
-              <a:buSzPct val="100000"/>
-              <a:buChar char="•"/>
-            </a:pPr>
-            <a:r>
-              <a:rPr lang="en-US" sz="1150" dirty="0">
-                <a:solidFill>
-                  <a:srgbClr val="364239"/>
-                </a:solidFill>
-                <a:latin typeface="Arial" pitchFamily="34" charset="0"/>
-                <a:ea typeface="Arial" pitchFamily="34" charset="-122"/>
-                <a:cs typeface="Arial" pitchFamily="34" charset="-120"/>
-              </a:rPr>
-              <a:t>قيود متزايدة على تراخيص الآبار وعلى حصص الضخ، ما يجعل كل متر مكعب موفَّر ذا قيمة مباشرة.</a:t>
-            </a:r>
-            <a:endParaRPr lang="en-US" sz="1150" dirty="0"/>
-          </a:p>
-          <a:p>
-            <a:pPr algn="r" marL="342900" indent="-342900">
-              <a:lnSpc>
-                <a:spcPct val="116000"/>
-              </a:lnSpc>
-              <a:spcAft>
-                <a:spcPts val="700"/>
-              </a:spcAft>
-              <a:buSzPct val="100000"/>
-              <a:buChar char="•"/>
-            </a:pPr>
-            <a:r>
-              <a:rPr lang="en-US" sz="1150" dirty="0">
-                <a:solidFill>
-                  <a:srgbClr val="364239"/>
-                </a:solidFill>
-                <a:latin typeface="Arial" pitchFamily="34" charset="0"/>
-                <a:ea typeface="Arial" pitchFamily="34" charset="-122"/>
-                <a:cs typeface="Arial" pitchFamily="34" charset="-120"/>
-              </a:rPr>
-              <a:t>ملوحة مياه الآبار في ارتفاع، وهو ما يستوجب مادة بوتاسية لا صوديومية في منطقة الجذور.</a:t>
-            </a:r>
-            <a:endParaRPr lang="en-US" sz="1150" dirty="0"/>
-          </a:p>
-        </p:txBody>
-      </p:sp>
-      <p:sp>
-        <p:nvSpPr>
-          <p:cNvPr id="19" name="Text 14"/>
           <p:cNvSpPr txBox="1"/>
           <p:nvPr/>
         </p:nvSpPr>
@@ -6370,7 +6202,7 @@
       </p:sp>
       <p:sp>
         <p:nvSpPr>
-          <p:cNvPr id="20" name="Text 15"/>
+          <p:cNvPr id="9" name="Text 6"/>
           <p:cNvSpPr txBox="1"/>
           <p:nvPr/>
         </p:nvSpPr>
@@ -6474,7 +6306,7 @@
                 <a:ea typeface="Arial" pitchFamily="34" charset="-122"/>
                 <a:cs typeface="Arial" pitchFamily="34" charset="-120"/>
               </a:rPr>
-              <a:t>كيف نعمل</a:t>
+              <a:t>ثلاثة ميادين أولوية</a:t>
             </a:r>
             <a:endParaRPr lang="en-US" sz="1150" dirty="0"/>
           </a:p>
@@ -6513,7 +6345,7 @@
                 <a:ea typeface="Arial" pitchFamily="34" charset="-122"/>
                 <a:cs typeface="Arial" pitchFamily="34" charset="-120"/>
               </a:rPr>
-              <a:t>انتشار على مراحل، يُقاس عند كل مرحلة</a:t>
+              <a:t>أين تُجرى التجارب الأولى</a:t>
             </a:r>
             <a:endParaRPr lang="en-US" sz="3000" dirty="0"/>
           </a:p>
@@ -6527,12 +6359,12 @@
         </p:nvSpPr>
         <p:spPr>
           <a:xfrm>
-            <a:off x="594360" y="1874520"/>
-            <a:ext cx="2545004" cy="2834640"/>
+            <a:off x="594360" y="1783080"/>
+            <a:ext cx="3472586" cy="4069080"/>
           </a:xfrm>
           <a:prstGeom prst="roundRect">
             <a:avLst>
-              <a:gd name="adj" fmla="val 3593"/>
+              <a:gd name="adj" fmla="val 2633"/>
             </a:avLst>
           </a:prstGeom>
           <a:solidFill>
@@ -6546,160 +6378,216 @@
           </a:ln>
         </p:spPr>
       </p:sp>
-      <p:sp>
-        <p:nvSpPr>
-          <p:cNvPr id="5" name="Shape 3"/>
+      <p:pic>
+        <p:nvPicPr>
+          <p:cNvPr id="5" name="Image 0" descr="preencoded.png">    </p:cNvPr>
+          <p:cNvPicPr>
+            <a:picLocks noChangeAspect="1"/>
+          </p:cNvPicPr>
+          <p:nvPr/>
+        </p:nvPicPr>
+        <p:blipFill>
+          <a:blip r:embed="rId1"/>
+          <a:stretch>
+            <a:fillRect/>
+          </a:stretch>
+        </p:blipFill>
+        <p:spPr>
+          <a:xfrm>
+            <a:off x="594360" y="1783080"/>
+            <a:ext cx="3472586" cy="1691640"/>
+          </a:xfrm>
+          <a:prstGeom prst="rect">
+            <a:avLst/>
+          </a:prstGeom>
+        </p:spPr>
+      </p:pic>
+      <p:sp>
+        <p:nvSpPr>
+          <p:cNvPr id="6" name="Text 3"/>
+          <p:cNvSpPr txBox="1"/>
+          <p:nvPr/>
+        </p:nvSpPr>
+        <p:spPr>
+          <a:xfrm>
+            <a:off x="795528" y="3639312"/>
+            <a:ext cx="3070250" cy="384048"/>
+          </a:xfrm>
+          <a:prstGeom prst="rect">
+            <a:avLst/>
+          </a:prstGeom>
+          <a:noFill/>
+          <a:ln/>
+        </p:spPr>
+        <p:txBody>
+          <a:bodyPr wrap="square" lIns="0" tIns="0" rIns="0" bIns="0" rtlCol="0" anchor="ctr"/>
+          <a:lstStyle/>
+          <a:p>
+            <a:pPr rtl="1" algn="r" indent="0" marL="0">
+              <a:buNone/>
+            </a:pPr>
+            <a:r>
+              <a:rPr lang="en-US" sz="1500" b="1" dirty="0">
+                <a:solidFill>
+                  <a:srgbClr val="2C6E49"/>
+                </a:solidFill>
+                <a:latin typeface="Arial" pitchFamily="34" charset="0"/>
+                <a:ea typeface="Arial" pitchFamily="34" charset="-122"/>
+                <a:cs typeface="Arial" pitchFamily="34" charset="-120"/>
+              </a:rPr>
+              <a:t>وادي الأردن — الأغوار</a:t>
+            </a:r>
+            <a:endParaRPr lang="en-US" sz="1500" dirty="0"/>
+          </a:p>
+        </p:txBody>
+      </p:sp>
+      <p:sp>
+        <p:nvSpPr>
+          <p:cNvPr id="7" name="Text 4"/>
+          <p:cNvSpPr txBox="1"/>
+          <p:nvPr/>
+        </p:nvSpPr>
+        <p:spPr>
+          <a:xfrm>
+            <a:off x="795528" y="4041648"/>
+            <a:ext cx="3070250" cy="329184"/>
+          </a:xfrm>
+          <a:prstGeom prst="rect">
+            <a:avLst/>
+          </a:prstGeom>
+          <a:noFill/>
+          <a:ln/>
+        </p:spPr>
+        <p:txBody>
+          <a:bodyPr wrap="square" lIns="0" tIns="0" rIns="0" bIns="0" rtlCol="0" anchor="ctr"/>
+          <a:lstStyle/>
+          <a:p>
+            <a:pPr rtl="1" algn="r" indent="0" marL="0">
+              <a:buNone/>
+            </a:pPr>
+            <a:r>
+              <a:rPr lang="en-US" sz="1250" b="1" dirty="0">
+                <a:solidFill>
+                  <a:srgbClr val="9C6C12"/>
+                </a:solidFill>
+                <a:latin typeface="Arial" pitchFamily="34" charset="0"/>
+                <a:ea typeface="Arial" pitchFamily="34" charset="-122"/>
+                <a:cs typeface="Arial" pitchFamily="34" charset="-120"/>
+              </a:rPr>
+              <a:t>≈ 35 ألف هكتار مروية</a:t>
+            </a:r>
+            <a:endParaRPr lang="en-US" sz="1250" dirty="0"/>
+          </a:p>
+        </p:txBody>
+      </p:sp>
+      <p:sp>
+        <p:nvSpPr>
+          <p:cNvPr id="8" name="Text 5"/>
+          <p:cNvSpPr txBox="1"/>
+          <p:nvPr/>
+        </p:nvSpPr>
+        <p:spPr>
+          <a:xfrm>
+            <a:off x="795528" y="4407408"/>
+            <a:ext cx="3070250" cy="1280160"/>
+          </a:xfrm>
+          <a:prstGeom prst="rect">
+            <a:avLst/>
+          </a:prstGeom>
+          <a:noFill/>
+          <a:ln/>
+        </p:spPr>
+        <p:txBody>
+          <a:bodyPr wrap="square" lIns="0" tIns="0" rIns="0" bIns="0" rtlCol="0" anchor="t"/>
+          <a:lstStyle/>
+          <a:p>
+            <a:pPr algn="r" marL="342900" indent="-342900">
+              <a:lnSpc>
+                <a:spcPct val="116000"/>
+              </a:lnSpc>
+              <a:spcAft>
+                <a:spcPts val="700"/>
+              </a:spcAft>
+              <a:buSzPct val="100000"/>
+              <a:buChar char="•"/>
+            </a:pPr>
+            <a:r>
+              <a:rPr lang="en-US" sz="1150" dirty="0">
+                <a:solidFill>
+                  <a:srgbClr val="364239"/>
+                </a:solidFill>
+                <a:latin typeface="Arial" pitchFamily="34" charset="0"/>
+                <a:ea typeface="Arial" pitchFamily="34" charset="-122"/>
+                <a:cs typeface="Arial" pitchFamily="34" charset="-120"/>
+              </a:rPr>
+              <a:t>قلب الإنتاج التصديري الشتوي: خضار محمية ومكشوفة موجّهة إلى أسواق الخليج، معظمها مروي بالتنقيط.</a:t>
+            </a:r>
+            <a:endParaRPr lang="en-US" sz="1150" dirty="0"/>
+          </a:p>
+          <a:p>
+            <a:pPr algn="r" marL="342900" indent="-342900">
+              <a:lnSpc>
+                <a:spcPct val="116000"/>
+              </a:lnSpc>
+              <a:spcAft>
+                <a:spcPts val="700"/>
+              </a:spcAft>
+              <a:buSzPct val="100000"/>
+              <a:buChar char="•"/>
+            </a:pPr>
+            <a:r>
+              <a:rPr lang="en-US" sz="1150" dirty="0">
+                <a:solidFill>
+                  <a:srgbClr val="364239"/>
+                </a:solidFill>
+                <a:latin typeface="Arial" pitchFamily="34" charset="0"/>
+                <a:ea typeface="Arial" pitchFamily="34" charset="-122"/>
+                <a:cs typeface="Arial" pitchFamily="34" charset="-120"/>
+              </a:rPr>
+              <a:t>الزراعة دون مستوى سطح البحر بنحو 200 إلى 400 م، مع تبخّر مرتفع طوال الموسم.</a:t>
+            </a:r>
+            <a:endParaRPr lang="en-US" sz="1150" dirty="0"/>
+          </a:p>
+          <a:p>
+            <a:pPr algn="r" marL="342900" indent="-342900">
+              <a:lnSpc>
+                <a:spcPct val="116000"/>
+              </a:lnSpc>
+              <a:spcAft>
+                <a:spcPts val="700"/>
+              </a:spcAft>
+              <a:buSzPct val="100000"/>
+              <a:buChar char="•"/>
+            </a:pPr>
+            <a:r>
+              <a:rPr lang="en-US" sz="1150" dirty="0">
+                <a:solidFill>
+                  <a:srgbClr val="364239"/>
+                </a:solidFill>
+                <a:latin typeface="Arial" pitchFamily="34" charset="0"/>
+                <a:ea typeface="Arial" pitchFamily="34" charset="-122"/>
+                <a:cs typeface="Arial" pitchFamily="34" charset="-120"/>
+              </a:rPr>
+              <a:t>حصص مائية مقننة عبر قناة الملك عبدالله، وجزء متزايد منها مياه صرف معالجة.</a:t>
+            </a:r>
+            <a:endParaRPr lang="en-US" sz="1150" dirty="0"/>
+          </a:p>
+        </p:txBody>
+      </p:sp>
+      <p:sp>
+        <p:nvSpPr>
+          <p:cNvPr id="9" name="Shape 6"/>
           <p:cNvSpPr/>
           <p:nvPr/>
         </p:nvSpPr>
         <p:spPr>
           <a:xfrm>
-            <a:off x="822960" y="2103120"/>
-            <a:ext cx="566928" cy="566928"/>
-          </a:xfrm>
-          <a:prstGeom prst="ellipse">
-            <a:avLst/>
-          </a:prstGeom>
-          <a:solidFill>
-            <a:srgbClr val="2C6E49"/>
-          </a:solidFill>
-          <a:ln/>
-        </p:spPr>
-      </p:sp>
-      <p:sp>
-        <p:nvSpPr>
-          <p:cNvPr id="6" name="Text 4"/>
-          <p:cNvSpPr txBox="1"/>
-          <p:nvPr/>
-        </p:nvSpPr>
-        <p:spPr>
-          <a:xfrm>
-            <a:off x="822960" y="2103120"/>
-            <a:ext cx="566928" cy="566928"/>
-          </a:xfrm>
-          <a:prstGeom prst="rect">
-            <a:avLst/>
-          </a:prstGeom>
-          <a:noFill/>
-          <a:ln/>
-        </p:spPr>
-        <p:txBody>
-          <a:bodyPr wrap="square" lIns="0" tIns="0" rIns="0" bIns="0" rtlCol="0" anchor="ctr"/>
-          <a:lstStyle/>
-          <a:p>
-            <a:pPr rtl="1" algn="ctr" indent="0" marL="0">
-              <a:buNone/>
-            </a:pPr>
-            <a:r>
-              <a:rPr lang="en-US" sz="1600" b="1" dirty="0">
-                <a:solidFill>
-                  <a:srgbClr val="FFFFFF"/>
-                </a:solidFill>
-                <a:latin typeface="Arial" pitchFamily="34" charset="0"/>
-                <a:ea typeface="Arial" pitchFamily="34" charset="-122"/>
-                <a:cs typeface="Arial" pitchFamily="34" charset="-120"/>
-              </a:rPr>
-              <a:t>1</a:t>
-            </a:r>
-            <a:endParaRPr lang="en-US" sz="1600" dirty="0"/>
-          </a:p>
-        </p:txBody>
-      </p:sp>
-      <p:sp>
-        <p:nvSpPr>
-          <p:cNvPr id="7" name="Text 5"/>
-          <p:cNvSpPr txBox="1"/>
-          <p:nvPr/>
-        </p:nvSpPr>
-        <p:spPr>
-          <a:xfrm>
-            <a:off x="822960" y="2788920"/>
-            <a:ext cx="2087804" cy="457200"/>
-          </a:xfrm>
-          <a:prstGeom prst="rect">
-            <a:avLst/>
-          </a:prstGeom>
-          <a:noFill/>
-          <a:ln/>
-        </p:spPr>
-        <p:txBody>
-          <a:bodyPr wrap="square" lIns="0" tIns="0" rIns="0" bIns="0" rtlCol="0" anchor="ctr"/>
-          <a:lstStyle/>
-          <a:p>
-            <a:pPr rtl="1" algn="r" indent="0" marL="0">
-              <a:buNone/>
-            </a:pPr>
-            <a:r>
-              <a:rPr lang="en-US" sz="1400" b="1" dirty="0">
-                <a:solidFill>
-                  <a:srgbClr val="2C6E49"/>
-                </a:solidFill>
-                <a:latin typeface="Arial" pitchFamily="34" charset="0"/>
-                <a:ea typeface="Arial" pitchFamily="34" charset="-122"/>
-                <a:cs typeface="Arial" pitchFamily="34" charset="-120"/>
-              </a:rPr>
-              <a:t>التشخيص</a:t>
-            </a:r>
-            <a:endParaRPr lang="en-US" sz="1400" dirty="0"/>
-          </a:p>
-        </p:txBody>
-      </p:sp>
-      <p:sp>
-        <p:nvSpPr>
-          <p:cNvPr id="8" name="Text 6"/>
-          <p:cNvSpPr txBox="1"/>
-          <p:nvPr/>
-        </p:nvSpPr>
-        <p:spPr>
-          <a:xfrm>
-            <a:off x="822960" y="3291840"/>
-            <a:ext cx="2087804" cy="1234440"/>
-          </a:xfrm>
-          <a:prstGeom prst="rect">
-            <a:avLst/>
-          </a:prstGeom>
-          <a:noFill/>
-          <a:ln/>
-        </p:spPr>
-        <p:txBody>
-          <a:bodyPr wrap="square" lIns="0" tIns="0" rIns="0" bIns="0" rtlCol="0" anchor="t"/>
-          <a:lstStyle/>
-          <a:p>
-            <a:pPr rtl="1" algn="r" indent="0" marL="0">
-              <a:lnSpc>
-                <a:spcPct val="120000"/>
-              </a:lnSpc>
-              <a:buNone/>
-            </a:pPr>
-            <a:r>
-              <a:rPr lang="en-US" sz="1200" dirty="0">
-                <a:solidFill>
-                  <a:srgbClr val="364239"/>
-                </a:solidFill>
-                <a:latin typeface="Arial" pitchFamily="34" charset="0"/>
-                <a:ea typeface="Arial" pitchFamily="34" charset="-122"/>
-                <a:cs typeface="Arial" pitchFamily="34" charset="-120"/>
-              </a:rPr>
-              <a:t>تحليل التربة وأسلوب الري والمحصول. لا التزام على الإطلاق في هذه المرحلة.</a:t>
-            </a:r>
-            <a:endParaRPr lang="en-US" sz="1200" dirty="0"/>
-          </a:p>
-        </p:txBody>
-      </p:sp>
-      <p:sp>
-        <p:nvSpPr>
-          <p:cNvPr id="9" name="Shape 7"/>
-          <p:cNvSpPr/>
-          <p:nvPr/>
-        </p:nvSpPr>
-        <p:spPr>
-          <a:xfrm>
-            <a:off x="3413684" y="1874520"/>
-            <a:ext cx="2545004" cy="2834640"/>
+            <a:off x="4359554" y="1783080"/>
+            <a:ext cx="3472586" cy="4069080"/>
           </a:xfrm>
           <a:prstGeom prst="roundRect">
             <a:avLst>
-              <a:gd name="adj" fmla="val 3593"/>
+              <a:gd name="adj" fmla="val 2633"/>
             </a:avLst>
           </a:prstGeom>
           <a:solidFill>
@@ -6713,160 +6601,216 @@
           </a:ln>
         </p:spPr>
       </p:sp>
-      <p:sp>
-        <p:nvSpPr>
-          <p:cNvPr id="10" name="Shape 8"/>
+      <p:pic>
+        <p:nvPicPr>
+          <p:cNvPr id="10" name="Image 1" descr="preencoded.png">    </p:cNvPr>
+          <p:cNvPicPr>
+            <a:picLocks noChangeAspect="1"/>
+          </p:cNvPicPr>
+          <p:nvPr/>
+        </p:nvPicPr>
+        <p:blipFill>
+          <a:blip r:embed="rId2"/>
+          <a:stretch>
+            <a:fillRect/>
+          </a:stretch>
+        </p:blipFill>
+        <p:spPr>
+          <a:xfrm>
+            <a:off x="4359554" y="1783080"/>
+            <a:ext cx="3472586" cy="1691640"/>
+          </a:xfrm>
+          <a:prstGeom prst="rect">
+            <a:avLst/>
+          </a:prstGeom>
+        </p:spPr>
+      </p:pic>
+      <p:sp>
+        <p:nvSpPr>
+          <p:cNvPr id="11" name="Text 7"/>
+          <p:cNvSpPr txBox="1"/>
+          <p:nvPr/>
+        </p:nvSpPr>
+        <p:spPr>
+          <a:xfrm>
+            <a:off x="4560722" y="3639312"/>
+            <a:ext cx="3070250" cy="384048"/>
+          </a:xfrm>
+          <a:prstGeom prst="rect">
+            <a:avLst/>
+          </a:prstGeom>
+          <a:noFill/>
+          <a:ln/>
+        </p:spPr>
+        <p:txBody>
+          <a:bodyPr wrap="square" lIns="0" tIns="0" rIns="0" bIns="0" rtlCol="0" anchor="ctr"/>
+          <a:lstStyle/>
+          <a:p>
+            <a:pPr rtl="1" algn="r" indent="0" marL="0">
+              <a:buNone/>
+            </a:pPr>
+            <a:r>
+              <a:rPr lang="en-US" sz="1500" b="1" dirty="0">
+                <a:solidFill>
+                  <a:srgbClr val="2C6E49"/>
+                </a:solidFill>
+                <a:latin typeface="Arial" pitchFamily="34" charset="0"/>
+                <a:ea typeface="Arial" pitchFamily="34" charset="-122"/>
+                <a:cs typeface="Arial" pitchFamily="34" charset="-120"/>
+              </a:rPr>
+              <a:t>المرتفعات الشمالية</a:t>
+            </a:r>
+            <a:endParaRPr lang="en-US" sz="1500" dirty="0"/>
+          </a:p>
+        </p:txBody>
+      </p:sp>
+      <p:sp>
+        <p:nvSpPr>
+          <p:cNvPr id="12" name="Text 8"/>
+          <p:cNvSpPr txBox="1"/>
+          <p:nvPr/>
+        </p:nvSpPr>
+        <p:spPr>
+          <a:xfrm>
+            <a:off x="4560722" y="4041648"/>
+            <a:ext cx="3070250" cy="329184"/>
+          </a:xfrm>
+          <a:prstGeom prst="rect">
+            <a:avLst/>
+          </a:prstGeom>
+          <a:noFill/>
+          <a:ln/>
+        </p:spPr>
+        <p:txBody>
+          <a:bodyPr wrap="square" lIns="0" tIns="0" rIns="0" bIns="0" rtlCol="0" anchor="ctr"/>
+          <a:lstStyle/>
+          <a:p>
+            <a:pPr rtl="1" algn="r" indent="0" marL="0">
+              <a:buNone/>
+            </a:pPr>
+            <a:r>
+              <a:rPr lang="en-US" sz="1250" b="1" dirty="0">
+                <a:solidFill>
+                  <a:srgbClr val="9C6C12"/>
+                </a:solidFill>
+                <a:latin typeface="Arial" pitchFamily="34" charset="0"/>
+                <a:ea typeface="Arial" pitchFamily="34" charset="-122"/>
+                <a:cs typeface="Arial" pitchFamily="34" charset="-120"/>
+              </a:rPr>
+              <a:t>زيتون بعلي — إربد وعجلون وجرش</a:t>
+            </a:r>
+            <a:endParaRPr lang="en-US" sz="1250" dirty="0"/>
+          </a:p>
+        </p:txBody>
+      </p:sp>
+      <p:sp>
+        <p:nvSpPr>
+          <p:cNvPr id="13" name="Text 9"/>
+          <p:cNvSpPr txBox="1"/>
+          <p:nvPr/>
+        </p:nvSpPr>
+        <p:spPr>
+          <a:xfrm>
+            <a:off x="4560722" y="4407408"/>
+            <a:ext cx="3070250" cy="1280160"/>
+          </a:xfrm>
+          <a:prstGeom prst="rect">
+            <a:avLst/>
+          </a:prstGeom>
+          <a:noFill/>
+          <a:ln/>
+        </p:spPr>
+        <p:txBody>
+          <a:bodyPr wrap="square" lIns="0" tIns="0" rIns="0" bIns="0" rtlCol="0" anchor="t"/>
+          <a:lstStyle/>
+          <a:p>
+            <a:pPr algn="r" marL="342900" indent="-342900">
+              <a:lnSpc>
+                <a:spcPct val="116000"/>
+              </a:lnSpc>
+              <a:spcAft>
+                <a:spcPts val="700"/>
+              </a:spcAft>
+              <a:buSzPct val="100000"/>
+              <a:buChar char="•"/>
+            </a:pPr>
+            <a:r>
+              <a:rPr lang="en-US" sz="1150" dirty="0">
+                <a:solidFill>
+                  <a:srgbClr val="364239"/>
+                </a:solidFill>
+                <a:latin typeface="Arial" pitchFamily="34" charset="0"/>
+                <a:ea typeface="Arial" pitchFamily="34" charset="-122"/>
+                <a:cs typeface="Arial" pitchFamily="34" charset="-120"/>
+              </a:rPr>
+              <a:t>نحو نصف مساحة الزيتون في المملكة، وهي زراعة بعلية يتحدد إنتاجها بمطر الموسم مباشرة.</a:t>
+            </a:r>
+            <a:endParaRPr lang="en-US" sz="1150" dirty="0"/>
+          </a:p>
+          <a:p>
+            <a:pPr algn="r" marL="342900" indent="-342900">
+              <a:lnSpc>
+                <a:spcPct val="116000"/>
+              </a:lnSpc>
+              <a:spcAft>
+                <a:spcPts val="700"/>
+              </a:spcAft>
+              <a:buSzPct val="100000"/>
+              <a:buChar char="•"/>
+            </a:pPr>
+            <a:r>
+              <a:rPr lang="en-US" sz="1150" dirty="0">
+                <a:solidFill>
+                  <a:srgbClr val="364239"/>
+                </a:solidFill>
+                <a:latin typeface="Arial" pitchFamily="34" charset="0"/>
+                <a:ea typeface="Arial" pitchFamily="34" charset="-122"/>
+                <a:cs typeface="Arial" pitchFamily="34" charset="-120"/>
+              </a:rPr>
+              <a:t>أمطار بين 400 و600 مم سنوياً، لكنها متركزة في أشهر قليلة ومتفاوتة بين سنة وأخرى.</a:t>
+            </a:r>
+            <a:endParaRPr lang="en-US" sz="1150" dirty="0"/>
+          </a:p>
+          <a:p>
+            <a:pPr algn="r" marL="342900" indent="-342900">
+              <a:lnSpc>
+                <a:spcPct val="116000"/>
+              </a:lnSpc>
+              <a:spcAft>
+                <a:spcPts val="700"/>
+              </a:spcAft>
+              <a:buSzPct val="100000"/>
+              <a:buChar char="•"/>
+            </a:pPr>
+            <a:r>
+              <a:rPr lang="en-US" sz="1150" dirty="0">
+                <a:solidFill>
+                  <a:srgbClr val="364239"/>
+                </a:solidFill>
+                <a:latin typeface="Arial" pitchFamily="34" charset="0"/>
+                <a:ea typeface="Arial" pitchFamily="34" charset="-122"/>
+                <a:cs typeface="Arial" pitchFamily="34" charset="-120"/>
+              </a:rPr>
+              <a:t>الاحتفاظ بالماء في منطقة الجذور يمدّ أثر المطر إلى ما بعد توقّفه: هذا هو الرهان هنا.</a:t>
+            </a:r>
+            <a:endParaRPr lang="en-US" sz="1150" dirty="0"/>
+          </a:p>
+        </p:txBody>
+      </p:sp>
+      <p:sp>
+        <p:nvSpPr>
+          <p:cNvPr id="14" name="Shape 10"/>
           <p:cNvSpPr/>
           <p:nvPr/>
         </p:nvSpPr>
         <p:spPr>
           <a:xfrm>
-            <a:off x="3642284" y="2103120"/>
-            <a:ext cx="566928" cy="566928"/>
-          </a:xfrm>
-          <a:prstGeom prst="ellipse">
-            <a:avLst/>
-          </a:prstGeom>
-          <a:solidFill>
-            <a:srgbClr val="2C6E49"/>
-          </a:solidFill>
-          <a:ln/>
-        </p:spPr>
-      </p:sp>
-      <p:sp>
-        <p:nvSpPr>
-          <p:cNvPr id="11" name="Text 9"/>
-          <p:cNvSpPr txBox="1"/>
-          <p:nvPr/>
-        </p:nvSpPr>
-        <p:spPr>
-          <a:xfrm>
-            <a:off x="3642284" y="2103120"/>
-            <a:ext cx="566928" cy="566928"/>
-          </a:xfrm>
-          <a:prstGeom prst="rect">
-            <a:avLst/>
-          </a:prstGeom>
-          <a:noFill/>
-          <a:ln/>
-        </p:spPr>
-        <p:txBody>
-          <a:bodyPr wrap="square" lIns="0" tIns="0" rIns="0" bIns="0" rtlCol="0" anchor="ctr"/>
-          <a:lstStyle/>
-          <a:p>
-            <a:pPr rtl="1" algn="ctr" indent="0" marL="0">
-              <a:buNone/>
-            </a:pPr>
-            <a:r>
-              <a:rPr lang="en-US" sz="1600" b="1" dirty="0">
-                <a:solidFill>
-                  <a:srgbClr val="FFFFFF"/>
-                </a:solidFill>
-                <a:latin typeface="Arial" pitchFamily="34" charset="0"/>
-                <a:ea typeface="Arial" pitchFamily="34" charset="-122"/>
-                <a:cs typeface="Arial" pitchFamily="34" charset="-120"/>
-              </a:rPr>
-              <a:t>2</a:t>
-            </a:r>
-            <a:endParaRPr lang="en-US" sz="1600" dirty="0"/>
-          </a:p>
-        </p:txBody>
-      </p:sp>
-      <p:sp>
-        <p:nvSpPr>
-          <p:cNvPr id="12" name="Text 10"/>
-          <p:cNvSpPr txBox="1"/>
-          <p:nvPr/>
-        </p:nvSpPr>
-        <p:spPr>
-          <a:xfrm>
-            <a:off x="3642284" y="2788920"/>
-            <a:ext cx="2087804" cy="457200"/>
-          </a:xfrm>
-          <a:prstGeom prst="rect">
-            <a:avLst/>
-          </a:prstGeom>
-          <a:noFill/>
-          <a:ln/>
-        </p:spPr>
-        <p:txBody>
-          <a:bodyPr wrap="square" lIns="0" tIns="0" rIns="0" bIns="0" rtlCol="0" anchor="ctr"/>
-          <a:lstStyle/>
-          <a:p>
-            <a:pPr rtl="1" algn="r" indent="0" marL="0">
-              <a:buNone/>
-            </a:pPr>
-            <a:r>
-              <a:rPr lang="en-US" sz="1400" b="1" dirty="0">
-                <a:solidFill>
-                  <a:srgbClr val="2C6E49"/>
-                </a:solidFill>
-                <a:latin typeface="Arial" pitchFamily="34" charset="0"/>
-                <a:ea typeface="Arial" pitchFamily="34" charset="-122"/>
-                <a:cs typeface="Arial" pitchFamily="34" charset="-120"/>
-              </a:rPr>
-              <a:t>قطعة تجريبية</a:t>
-            </a:r>
-            <a:endParaRPr lang="en-US" sz="1400" dirty="0"/>
-          </a:p>
-        </p:txBody>
-      </p:sp>
-      <p:sp>
-        <p:nvSpPr>
-          <p:cNvPr id="13" name="Text 11"/>
-          <p:cNvSpPr txBox="1"/>
-          <p:nvPr/>
-        </p:nvSpPr>
-        <p:spPr>
-          <a:xfrm>
-            <a:off x="3642284" y="3291840"/>
-            <a:ext cx="2087804" cy="1234440"/>
-          </a:xfrm>
-          <a:prstGeom prst="rect">
-            <a:avLst/>
-          </a:prstGeom>
-          <a:noFill/>
-          <a:ln/>
-        </p:spPr>
-        <p:txBody>
-          <a:bodyPr wrap="square" lIns="0" tIns="0" rIns="0" bIns="0" rtlCol="0" anchor="t"/>
-          <a:lstStyle/>
-          <a:p>
-            <a:pPr rtl="1" algn="r" indent="0" marL="0">
-              <a:lnSpc>
-                <a:spcPct val="120000"/>
-              </a:lnSpc>
-              <a:buNone/>
-            </a:pPr>
-            <a:r>
-              <a:rPr lang="en-US" sz="1200" dirty="0">
-                <a:solidFill>
-                  <a:srgbClr val="364239"/>
-                </a:solidFill>
-                <a:latin typeface="Arial" pitchFamily="34" charset="0"/>
-                <a:ea typeface="Arial" pitchFamily="34" charset="-122"/>
-                <a:cs typeface="Arial" pitchFamily="34" charset="-120"/>
-              </a:rPr>
-              <a:t>تجربة مقارنة على قطعة واحدة، مع قطعة شاهدة تُدار بالطريقة نفسها.</a:t>
-            </a:r>
-            <a:endParaRPr lang="en-US" sz="1200" dirty="0"/>
-          </a:p>
-        </p:txBody>
-      </p:sp>
-      <p:sp>
-        <p:nvSpPr>
-          <p:cNvPr id="14" name="Shape 12"/>
-          <p:cNvSpPr/>
-          <p:nvPr/>
-        </p:nvSpPr>
-        <p:spPr>
-          <a:xfrm>
-            <a:off x="6233008" y="1874520"/>
-            <a:ext cx="2545004" cy="2834640"/>
+            <a:off x="8124749" y="1783080"/>
+            <a:ext cx="3472586" cy="4069080"/>
           </a:xfrm>
           <a:prstGeom prst="roundRect">
             <a:avLst>
-              <a:gd name="adj" fmla="val 3593"/>
+              <a:gd name="adj" fmla="val 2633"/>
             </a:avLst>
           </a:prstGeom>
           <a:solidFill>
@@ -6880,36 +6824,40 @@
           </a:ln>
         </p:spPr>
       </p:sp>
-      <p:sp>
-        <p:nvSpPr>
-          <p:cNvPr id="15" name="Shape 13"/>
-          <p:cNvSpPr/>
-          <p:nvPr/>
-        </p:nvSpPr>
-        <p:spPr>
-          <a:xfrm>
-            <a:off x="6461608" y="2103120"/>
-            <a:ext cx="566928" cy="566928"/>
-          </a:xfrm>
-          <a:prstGeom prst="ellipse">
-            <a:avLst/>
-          </a:prstGeom>
-          <a:solidFill>
-            <a:srgbClr val="2C6E49"/>
-          </a:solidFill>
-          <a:ln/>
-        </p:spPr>
-      </p:sp>
-      <p:sp>
-        <p:nvSpPr>
-          <p:cNvPr id="16" name="Text 14"/>
-          <p:cNvSpPr txBox="1"/>
-          <p:nvPr/>
-        </p:nvSpPr>
-        <p:spPr>
-          <a:xfrm>
-            <a:off x="6461608" y="2103120"/>
-            <a:ext cx="566928" cy="566928"/>
+      <p:pic>
+        <p:nvPicPr>
+          <p:cNvPr id="15" name="Image 2" descr="preencoded.png">    </p:cNvPr>
+          <p:cNvPicPr>
+            <a:picLocks noChangeAspect="1"/>
+          </p:cNvPicPr>
+          <p:nvPr/>
+        </p:nvPicPr>
+        <p:blipFill>
+          <a:blip r:embed="rId3"/>
+          <a:stretch>
+            <a:fillRect/>
+          </a:stretch>
+        </p:blipFill>
+        <p:spPr>
+          <a:xfrm>
+            <a:off x="8124749" y="1783080"/>
+            <a:ext cx="3472586" cy="1691640"/>
+          </a:xfrm>
+          <a:prstGeom prst="rect">
+            <a:avLst/>
+          </a:prstGeom>
+        </p:spPr>
+      </p:pic>
+      <p:sp>
+        <p:nvSpPr>
+          <p:cNvPr id="16" name="Text 11"/>
+          <p:cNvSpPr txBox="1"/>
+          <p:nvPr/>
+        </p:nvSpPr>
+        <p:spPr>
+          <a:xfrm>
+            <a:off x="8325917" y="3639312"/>
+            <a:ext cx="3070250" cy="384048"/>
           </a:xfrm>
           <a:prstGeom prst="rect">
             <a:avLst/>
@@ -6921,34 +6869,34 @@
           <a:bodyPr wrap="square" lIns="0" tIns="0" rIns="0" bIns="0" rtlCol="0" anchor="ctr"/>
           <a:lstStyle/>
           <a:p>
-            <a:pPr rtl="1" algn="ctr" indent="0" marL="0">
-              <a:buNone/>
-            </a:pPr>
-            <a:r>
-              <a:rPr lang="en-US" sz="1600" b="1" dirty="0">
-                <a:solidFill>
-                  <a:srgbClr val="FFFFFF"/>
-                </a:solidFill>
-                <a:latin typeface="Arial" pitchFamily="34" charset="0"/>
-                <a:ea typeface="Arial" pitchFamily="34" charset="-122"/>
-                <a:cs typeface="Arial" pitchFamily="34" charset="-120"/>
-              </a:rPr>
-              <a:t>3</a:t>
-            </a:r>
-            <a:endParaRPr lang="en-US" sz="1600" dirty="0"/>
-          </a:p>
-        </p:txBody>
-      </p:sp>
-      <p:sp>
-        <p:nvSpPr>
-          <p:cNvPr id="17" name="Text 15"/>
-          <p:cNvSpPr txBox="1"/>
-          <p:nvPr/>
-        </p:nvSpPr>
-        <p:spPr>
-          <a:xfrm>
-            <a:off x="6461608" y="2788920"/>
-            <a:ext cx="2087804" cy="457200"/>
+            <a:pPr rtl="1" algn="r" indent="0" marL="0">
+              <a:buNone/>
+            </a:pPr>
+            <a:r>
+              <a:rPr lang="en-US" sz="1500" b="1" dirty="0">
+                <a:solidFill>
+                  <a:srgbClr val="2C6E49"/>
+                </a:solidFill>
+                <a:latin typeface="Arial" pitchFamily="34" charset="0"/>
+                <a:ea typeface="Arial" pitchFamily="34" charset="-122"/>
+                <a:cs typeface="Arial" pitchFamily="34" charset="-120"/>
+              </a:rPr>
+              <a:t>المفرق وحوض الأزرق</a:t>
+            </a:r>
+            <a:endParaRPr lang="en-US" sz="1500" dirty="0"/>
+          </a:p>
+        </p:txBody>
+      </p:sp>
+      <p:sp>
+        <p:nvSpPr>
+          <p:cNvPr id="17" name="Text 12"/>
+          <p:cNvSpPr txBox="1"/>
+          <p:nvPr/>
+        </p:nvSpPr>
+        <p:spPr>
+          <a:xfrm>
+            <a:off x="8325917" y="4041648"/>
+            <a:ext cx="3070250" cy="329184"/>
           </a:xfrm>
           <a:prstGeom prst="rect">
             <a:avLst/>
@@ -6964,30 +6912,30 @@
               <a:buNone/>
             </a:pPr>
             <a:r>
-              <a:rPr lang="en-US" sz="1400" b="1" dirty="0">
-                <a:solidFill>
-                  <a:srgbClr val="2C6E49"/>
-                </a:solidFill>
-                <a:latin typeface="Arial" pitchFamily="34" charset="0"/>
-                <a:ea typeface="Arial" pitchFamily="34" charset="-122"/>
-                <a:cs typeface="Arial" pitchFamily="34" charset="-120"/>
-              </a:rPr>
-              <a:t>القياس</a:t>
-            </a:r>
-            <a:endParaRPr lang="en-US" sz="1400" dirty="0"/>
-          </a:p>
-        </p:txBody>
-      </p:sp>
-      <p:sp>
-        <p:nvSpPr>
-          <p:cNvPr id="18" name="Text 16"/>
-          <p:cNvSpPr txBox="1"/>
-          <p:nvPr/>
-        </p:nvSpPr>
-        <p:spPr>
-          <a:xfrm>
-            <a:off x="6461608" y="3291840"/>
-            <a:ext cx="2087804" cy="1234440"/>
+              <a:rPr lang="en-US" sz="1250" b="1" dirty="0">
+                <a:solidFill>
+                  <a:srgbClr val="9C6C12"/>
+                </a:solidFill>
+                <a:latin typeface="Arial" pitchFamily="34" charset="0"/>
+                <a:ea typeface="Arial" pitchFamily="34" charset="-122"/>
+                <a:cs typeface="Arial" pitchFamily="34" charset="-120"/>
+              </a:rPr>
+              <a:t>ضخ جوفي يقارب ضعف الحد الآمن</a:t>
+            </a:r>
+            <a:endParaRPr lang="en-US" sz="1250" dirty="0"/>
+          </a:p>
+        </p:txBody>
+      </p:sp>
+      <p:sp>
+        <p:nvSpPr>
+          <p:cNvPr id="18" name="Text 13"/>
+          <p:cNvSpPr txBox="1"/>
+          <p:nvPr/>
+        </p:nvSpPr>
+        <p:spPr>
+          <a:xfrm>
+            <a:off x="8325917" y="4407408"/>
+            <a:ext cx="3070250" cy="1280160"/>
           </a:xfrm>
           <a:prstGeom prst="rect">
             <a:avLst/>
@@ -6999,14 +6947,18 @@
           <a:bodyPr wrap="square" lIns="0" tIns="0" rIns="0" bIns="0" rtlCol="0" anchor="t"/>
           <a:lstStyle/>
           <a:p>
-            <a:pPr rtl="1" algn="r" indent="0" marL="0">
+            <a:pPr algn="r" marL="342900" indent="-342900">
               <a:lnSpc>
-                <a:spcPct val="120000"/>
+                <a:spcPct val="116000"/>
               </a:lnSpc>
-              <a:buNone/>
-            </a:pPr>
-            <a:r>
-              <a:rPr lang="en-US" sz="1200" dirty="0">
+              <a:spcAft>
+                <a:spcPts val="700"/>
+              </a:spcAft>
+              <a:buSzPct val="100000"/>
+              <a:buChar char="•"/>
+            </a:pPr>
+            <a:r>
+              <a:rPr lang="en-US" sz="1150" dirty="0">
                 <a:solidFill>
                   <a:srgbClr val="364239"/>
                 </a:solidFill>
@@ -7014,166 +6966,23 @@
                 <a:ea typeface="Arial" pitchFamily="34" charset="-122"/>
                 <a:cs typeface="Arial" pitchFamily="34" charset="-120"/>
               </a:rPr>
-              <a:t>رصد الاستهلاك المائي والمردود على مدى دورة زراعية كاملة.</a:t>
-            </a:r>
-            <a:endParaRPr lang="en-US" sz="1200" dirty="0"/>
-          </a:p>
-        </p:txBody>
-      </p:sp>
-      <p:sp>
-        <p:nvSpPr>
-          <p:cNvPr id="19" name="Shape 17"/>
-          <p:cNvSpPr/>
-          <p:nvPr/>
-        </p:nvSpPr>
-        <p:spPr>
-          <a:xfrm>
-            <a:off x="9052331" y="1874520"/>
-            <a:ext cx="2545004" cy="2834640"/>
-          </a:xfrm>
-          <a:prstGeom prst="roundRect">
-            <a:avLst>
-              <a:gd name="adj" fmla="val 3593"/>
-            </a:avLst>
-          </a:prstGeom>
-          <a:solidFill>
-            <a:srgbClr val="F2F1E8"/>
-          </a:solidFill>
-          <a:ln w="9525">
-            <a:solidFill>
-              <a:srgbClr val="E0DFD0"/>
-            </a:solidFill>
-            <a:prstDash val="solid"/>
-          </a:ln>
-        </p:spPr>
-      </p:sp>
-      <p:sp>
-        <p:nvSpPr>
-          <p:cNvPr id="20" name="Shape 18"/>
-          <p:cNvSpPr/>
-          <p:nvPr/>
-        </p:nvSpPr>
-        <p:spPr>
-          <a:xfrm>
-            <a:off x="9280931" y="2103120"/>
-            <a:ext cx="566928" cy="566928"/>
-          </a:xfrm>
-          <a:prstGeom prst="ellipse">
-            <a:avLst/>
-          </a:prstGeom>
-          <a:solidFill>
-            <a:srgbClr val="2C6E49"/>
-          </a:solidFill>
-          <a:ln/>
-        </p:spPr>
-      </p:sp>
-      <p:sp>
-        <p:nvSpPr>
-          <p:cNvPr id="21" name="Text 19"/>
-          <p:cNvSpPr txBox="1"/>
-          <p:nvPr/>
-        </p:nvSpPr>
-        <p:spPr>
-          <a:xfrm>
-            <a:off x="9280931" y="2103120"/>
-            <a:ext cx="566928" cy="566928"/>
-          </a:xfrm>
-          <a:prstGeom prst="rect">
-            <a:avLst/>
-          </a:prstGeom>
-          <a:noFill/>
-          <a:ln/>
-        </p:spPr>
-        <p:txBody>
-          <a:bodyPr wrap="square" lIns="0" tIns="0" rIns="0" bIns="0" rtlCol="0" anchor="ctr"/>
-          <a:lstStyle/>
-          <a:p>
-            <a:pPr rtl="1" algn="ctr" indent="0" marL="0">
-              <a:buNone/>
-            </a:pPr>
-            <a:r>
-              <a:rPr lang="en-US" sz="1600" b="1" dirty="0">
-                <a:solidFill>
-                  <a:srgbClr val="FFFFFF"/>
-                </a:solidFill>
-                <a:latin typeface="Arial" pitchFamily="34" charset="0"/>
-                <a:ea typeface="Arial" pitchFamily="34" charset="-122"/>
-                <a:cs typeface="Arial" pitchFamily="34" charset="-120"/>
-              </a:rPr>
-              <a:t>4</a:t>
-            </a:r>
-            <a:endParaRPr lang="en-US" sz="1600" dirty="0"/>
-          </a:p>
-        </p:txBody>
-      </p:sp>
-      <p:sp>
-        <p:nvSpPr>
-          <p:cNvPr id="22" name="Text 20"/>
-          <p:cNvSpPr txBox="1"/>
-          <p:nvPr/>
-        </p:nvSpPr>
-        <p:spPr>
-          <a:xfrm>
-            <a:off x="9280931" y="2788920"/>
-            <a:ext cx="2087804" cy="457200"/>
-          </a:xfrm>
-          <a:prstGeom prst="rect">
-            <a:avLst/>
-          </a:prstGeom>
-          <a:noFill/>
-          <a:ln/>
-        </p:spPr>
-        <p:txBody>
-          <a:bodyPr wrap="square" lIns="0" tIns="0" rIns="0" bIns="0" rtlCol="0" anchor="ctr"/>
-          <a:lstStyle/>
-          <a:p>
-            <a:pPr rtl="1" algn="r" indent="0" marL="0">
-              <a:buNone/>
-            </a:pPr>
-            <a:r>
-              <a:rPr lang="en-US" sz="1400" b="1" dirty="0">
-                <a:solidFill>
-                  <a:srgbClr val="2C6E49"/>
-                </a:solidFill>
-                <a:latin typeface="Arial" pitchFamily="34" charset="0"/>
-                <a:ea typeface="Arial" pitchFamily="34" charset="-122"/>
-                <a:cs typeface="Arial" pitchFamily="34" charset="-120"/>
-              </a:rPr>
-              <a:t>التوسيع</a:t>
-            </a:r>
-            <a:endParaRPr lang="en-US" sz="1400" dirty="0"/>
-          </a:p>
-        </p:txBody>
-      </p:sp>
-      <p:sp>
-        <p:nvSpPr>
-          <p:cNvPr id="23" name="Text 21"/>
-          <p:cNvSpPr txBox="1"/>
-          <p:nvPr/>
-        </p:nvSpPr>
-        <p:spPr>
-          <a:xfrm>
-            <a:off x="9280931" y="3291840"/>
-            <a:ext cx="2087804" cy="1234440"/>
-          </a:xfrm>
-          <a:prstGeom prst="rect">
-            <a:avLst/>
-          </a:prstGeom>
-          <a:noFill/>
-          <a:ln/>
-        </p:spPr>
-        <p:txBody>
-          <a:bodyPr wrap="square" lIns="0" tIns="0" rIns="0" bIns="0" rtlCol="0" anchor="t"/>
-          <a:lstStyle/>
-          <a:p>
-            <a:pPr rtl="1" algn="r" indent="0" marL="0">
+              <a:t>مزارع مروية بالكامل من الآبار: خضار مكشوفة وأشجار مثمرة وزيتون مروي في مناخ شبه صحراوي.</a:t>
+            </a:r>
+            <a:endParaRPr lang="en-US" sz="1150" dirty="0"/>
+          </a:p>
+          <a:p>
+            <a:pPr algn="r" marL="342900" indent="-342900">
               <a:lnSpc>
-                <a:spcPct val="120000"/>
+                <a:spcPct val="116000"/>
               </a:lnSpc>
-              <a:buNone/>
-            </a:pPr>
-            <a:r>
-              <a:rPr lang="en-US" sz="1200" dirty="0">
+              <a:spcAft>
+                <a:spcPts val="700"/>
+              </a:spcAft>
+              <a:buSzPct val="100000"/>
+              <a:buChar char="•"/>
+            </a:pPr>
+            <a:r>
+              <a:rPr lang="en-US" sz="1150" dirty="0">
                 <a:solidFill>
                   <a:srgbClr val="364239"/>
                 </a:solidFill>
@@ -7181,57 +6990,39 @@
                 <a:ea typeface="Arial" pitchFamily="34" charset="-122"/>
                 <a:cs typeface="Arial" pitchFamily="34" charset="-120"/>
               </a:rPr>
-              <a:t>تعميم تدريجي على بقية القطع استناداً إلى النتائج المسجّلة فعلياً.</a:t>
-            </a:r>
-            <a:endParaRPr lang="en-US" sz="1200" dirty="0"/>
-          </a:p>
-        </p:txBody>
-      </p:sp>
-      <p:sp>
-        <p:nvSpPr>
-          <p:cNvPr id="24" name="Text 22"/>
-          <p:cNvSpPr txBox="1"/>
-          <p:nvPr/>
-        </p:nvSpPr>
-        <p:spPr>
-          <a:xfrm>
-            <a:off x="594360" y="4983480"/>
-            <a:ext cx="11002975" cy="822960"/>
-          </a:xfrm>
-          <a:prstGeom prst="rect">
-            <a:avLst/>
-          </a:prstGeom>
-          <a:noFill/>
-          <a:ln/>
-        </p:spPr>
-        <p:txBody>
-          <a:bodyPr wrap="square" lIns="0" tIns="0" rIns="0" bIns="0" rtlCol="0" anchor="t"/>
-          <a:lstStyle/>
-          <a:p>
-            <a:pPr rtl="1" algn="r" indent="0" marL="0">
+              <a:t>قيود متزايدة على تراخيص الآبار وعلى حصص الضخ، ما يجعل كل متر مكعب موفَّر ذا قيمة مباشرة.</a:t>
+            </a:r>
+            <a:endParaRPr lang="en-US" sz="1150" dirty="0"/>
+          </a:p>
+          <a:p>
+            <a:pPr algn="r" marL="342900" indent="-342900">
               <a:lnSpc>
-                <a:spcPct val="125000"/>
+                <a:spcPct val="116000"/>
               </a:lnSpc>
-              <a:buNone/>
-            </a:pPr>
-            <a:r>
-              <a:rPr lang="en-US" sz="1250" dirty="0">
-                <a:solidFill>
-                  <a:srgbClr val="6F7D71"/>
-                </a:solidFill>
-                <a:latin typeface="Arial" pitchFamily="34" charset="0"/>
-                <a:ea typeface="Arial" pitchFamily="34" charset="-122"/>
-                <a:cs typeface="Arial" pitchFamily="34" charset="-120"/>
-              </a:rPr>
-              <a:t>قاعدة الجرعة واحدة في كل مكان: 3 غرامات لكل لتر من التربة المستغلة. ما يتغيّر من أرض إلى أخرى هو حجم التربة الذي تستكشفه الجذور فعلياً.</a:t>
-            </a:r>
-            <a:endParaRPr lang="en-US" sz="1250" dirty="0"/>
-          </a:p>
-        </p:txBody>
-      </p:sp>
-      <p:sp>
-        <p:nvSpPr>
-          <p:cNvPr id="25" name="Text 23"/>
+              <a:spcAft>
+                <a:spcPts val="700"/>
+              </a:spcAft>
+              <a:buSzPct val="100000"/>
+              <a:buChar char="•"/>
+            </a:pPr>
+            <a:r>
+              <a:rPr lang="en-US" sz="1150" dirty="0">
+                <a:solidFill>
+                  <a:srgbClr val="364239"/>
+                </a:solidFill>
+                <a:latin typeface="Arial" pitchFamily="34" charset="0"/>
+                <a:ea typeface="Arial" pitchFamily="34" charset="-122"/>
+                <a:cs typeface="Arial" pitchFamily="34" charset="-120"/>
+              </a:rPr>
+              <a:t>ملوحة مياه الآبار في ارتفاع، وهو ما يستوجب مادة بوتاسية لا صوديومية في منطقة الجذور.</a:t>
+            </a:r>
+            <a:endParaRPr lang="en-US" sz="1150" dirty="0"/>
+          </a:p>
+        </p:txBody>
+      </p:sp>
+      <p:sp>
+        <p:nvSpPr>
+          <p:cNvPr id="19" name="Text 14"/>
           <p:cNvSpPr txBox="1"/>
           <p:nvPr/>
         </p:nvSpPr>
@@ -7272,7 +7063,7 @@
       </p:sp>
       <p:sp>
         <p:nvSpPr>
-          <p:cNvPr id="26" name="Text 24"/>
+          <p:cNvPr id="20" name="Text 15"/>
           <p:cNvSpPr txBox="1"/>
           <p:nvPr/>
         </p:nvSpPr>
@@ -7376,7 +7167,7 @@
                 <a:ea typeface="Arial" pitchFamily="34" charset="-122"/>
                 <a:cs typeface="Arial" pitchFamily="34" charset="-120"/>
               </a:rPr>
-              <a:t>العمل معاً</a:t>
+              <a:t>كيف نعمل</a:t>
             </a:r>
             <a:endParaRPr lang="en-US" sz="1150" dirty="0"/>
           </a:p>
@@ -7415,7 +7206,7 @@
                 <a:ea typeface="Arial" pitchFamily="34" charset="-122"/>
                 <a:cs typeface="Arial" pitchFamily="34" charset="-120"/>
               </a:rPr>
-              <a:t>شريك محلي في الأردن</a:t>
+              <a:t>انتشار على مراحل، يُقاس عند كل مرحلة</a:t>
             </a:r>
             <a:endParaRPr lang="en-US" sz="3000" dirty="0"/>
           </a:p>
@@ -7540,7 +7331,7 @@
                 <a:ea typeface="Arial" pitchFamily="34" charset="-122"/>
                 <a:cs typeface="Arial" pitchFamily="34" charset="-120"/>
               </a:rPr>
-              <a:t>التوزيع</a:t>
+              <a:t>التشخيص</a:t>
             </a:r>
             <a:endParaRPr lang="en-US" sz="1400" dirty="0"/>
           </a:p>
@@ -7582,7 +7373,7 @@
                 <a:ea typeface="Arial" pitchFamily="34" charset="-122"/>
                 <a:cs typeface="Arial" pitchFamily="34" charset="-120"/>
               </a:rPr>
-              <a:t>حصرية على مستوى الإقليم ومخزون إطلاق للموسم التجاري الأول.</a:t>
+              <a:t>تحليل التربة وأسلوب الري والمحصول. لا التزام على الإطلاق في هذه المرحلة.</a:t>
             </a:r>
             <a:endParaRPr lang="en-US" sz="1200" dirty="0"/>
           </a:p>
@@ -7707,7 +7498,7 @@
                 <a:ea typeface="Arial" pitchFamily="34" charset="-122"/>
                 <a:cs typeface="Arial" pitchFamily="34" charset="-120"/>
               </a:rPr>
-              <a:t>التدريب</a:t>
+              <a:t>قطعة تجريبية</a:t>
             </a:r>
             <a:endParaRPr lang="en-US" sz="1400" dirty="0"/>
           </a:p>
@@ -7749,7 +7540,7 @@
                 <a:ea typeface="Arial" pitchFamily="34" charset="-122"/>
                 <a:cs typeface="Arial" pitchFamily="34" charset="-120"/>
               </a:rPr>
-              <a:t>تدريب فني للفرق، وبروتوكولات الجرعات، وتحديثها في كل موسم.</a:t>
+              <a:t>تجربة مقارنة على قطعة واحدة، مع قطعة شاهدة تُدار بالطريقة نفسها.</a:t>
             </a:r>
             <a:endParaRPr lang="en-US" sz="1200" dirty="0"/>
           </a:p>
@@ -7874,7 +7665,7 @@
                 <a:ea typeface="Arial" pitchFamily="34" charset="-122"/>
                 <a:cs typeface="Arial" pitchFamily="34" charset="-120"/>
               </a:rPr>
-              <a:t>تجارب مشتركة</a:t>
+              <a:t>القياس</a:t>
             </a:r>
             <a:endParaRPr lang="en-US" sz="1400" dirty="0"/>
           </a:p>
@@ -7916,7 +7707,7 @@
                 <a:ea typeface="Arial" pitchFamily="34" charset="-122"/>
                 <a:cs typeface="Arial" pitchFamily="34" charset="-120"/>
               </a:rPr>
-              <a:t>قطع إرشادية مع قطعة شاهد، ونتائج تُعرض على المزارعين.</a:t>
+              <a:t>رصد الاستهلاك المائي والمردود على مدى دورة زراعية كاملة.</a:t>
             </a:r>
             <a:endParaRPr lang="en-US" sz="1200" dirty="0"/>
           </a:p>
@@ -8041,7 +7832,7 @@
                 <a:ea typeface="Arial" pitchFamily="34" charset="-122"/>
                 <a:cs typeface="Arial" pitchFamily="34" charset="-120"/>
               </a:rPr>
-              <a:t>المؤسسات</a:t>
+              <a:t>التوسيع</a:t>
             </a:r>
             <a:endParaRPr lang="en-US" sz="1400" dirty="0"/>
           </a:p>
@@ -8083,7 +7874,7 @@
                 <a:ea typeface="Arial" pitchFamily="34" charset="-122"/>
                 <a:cs typeface="Arial" pitchFamily="34" charset="-120"/>
               </a:rPr>
-              <a:t>حوار مع وزارة الزراعة وبرامج الأمن الغذائي.</a:t>
+              <a:t>تعميم تدريجي على بقية القطع استناداً إلى النتائج المسجّلة فعلياً.</a:t>
             </a:r>
             <a:endParaRPr lang="en-US" sz="1200" dirty="0"/>
           </a:p>
@@ -8125,7 +7916,7 @@
                 <a:ea typeface="Arial" pitchFamily="34" charset="-122"/>
                 <a:cs typeface="Arial" pitchFamily="34" charset="-120"/>
               </a:rPr>
-              <a:t>يتكيف الإطار مع الإقليم: يمكن أن يقود الشراكة مستورد أو موزّع مدخلات زراعية أو جمعية منتجين.</a:t>
+              <a:t>قاعدة الجرعة واحدة في كل مكان: 3 غرامات لكل لتر من التربة المستغلة. ما يتغيّر من أرض إلى أخرى هو حجم التربة الذي تستكشفه الجذور فعلياً.</a:t>
             </a:r>
             <a:endParaRPr lang="en-US" sz="1250" dirty="0"/>
           </a:p>
@@ -8278,7 +8069,7 @@
                 <a:ea typeface="Arial" pitchFamily="34" charset="-122"/>
                 <a:cs typeface="Arial" pitchFamily="34" charset="-120"/>
               </a:rPr>
-              <a:t>ما ينبغي توقّعه</a:t>
+              <a:t>العمل معاً</a:t>
             </a:r>
             <a:endParaRPr lang="en-US" sz="1150" dirty="0"/>
           </a:p>
@@ -8317,7 +8108,7 @@
                 <a:ea typeface="Arial" pitchFamily="34" charset="-122"/>
                 <a:cs typeface="Arial" pitchFamily="34" charset="-120"/>
               </a:rPr>
-              <a:t>مخاطر محددة وردود عليها</a:t>
+              <a:t>شريك محلي في الأردن</a:t>
             </a:r>
             <a:endParaRPr lang="en-US" sz="3000" dirty="0"/>
           </a:p>
@@ -8325,332 +8116,18 @@
       </p:sp>
       <p:sp>
         <p:nvSpPr>
-          <p:cNvPr id="4" name="Text 2"/>
-          <p:cNvSpPr txBox="1"/>
-          <p:nvPr/>
-        </p:nvSpPr>
-        <p:spPr>
-          <a:xfrm>
-            <a:off x="594360" y="1783080"/>
-            <a:ext cx="5227168" cy="411480"/>
-          </a:xfrm>
-          <a:prstGeom prst="rect">
-            <a:avLst/>
-          </a:prstGeom>
-          <a:noFill/>
-          <a:ln/>
-        </p:spPr>
-        <p:txBody>
-          <a:bodyPr wrap="square" lIns="0" tIns="0" rIns="0" bIns="0" rtlCol="0" anchor="ctr"/>
-          <a:lstStyle/>
-          <a:p>
-            <a:pPr rtl="1" algn="r" indent="0" marL="0">
-              <a:buNone/>
-            </a:pPr>
-            <a:r>
-              <a:rPr lang="en-US" sz="1600" b="1" dirty="0">
-                <a:solidFill>
-                  <a:srgbClr val="2C6E49"/>
-                </a:solidFill>
-                <a:latin typeface="Arial" pitchFamily="34" charset="0"/>
-                <a:ea typeface="Arial" pitchFamily="34" charset="-122"/>
-                <a:cs typeface="Arial" pitchFamily="34" charset="-120"/>
-              </a:rPr>
-              <a:t>المخاطر</a:t>
-            </a:r>
-            <a:endParaRPr lang="en-US" sz="1600" dirty="0"/>
-          </a:p>
-        </p:txBody>
-      </p:sp>
-      <p:sp>
-        <p:nvSpPr>
-          <p:cNvPr id="5" name="Text 3"/>
-          <p:cNvSpPr txBox="1"/>
-          <p:nvPr/>
-        </p:nvSpPr>
-        <p:spPr>
-          <a:xfrm>
-            <a:off x="594360" y="2286000"/>
-            <a:ext cx="5227168" cy="2468880"/>
-          </a:xfrm>
-          <a:prstGeom prst="rect">
-            <a:avLst/>
-          </a:prstGeom>
-          <a:noFill/>
-          <a:ln/>
-        </p:spPr>
-        <p:txBody>
-          <a:bodyPr wrap="square" lIns="0" tIns="0" rIns="0" bIns="0" rtlCol="0" anchor="t"/>
-          <a:lstStyle/>
-          <a:p>
-            <a:pPr algn="r" marL="342900" indent="-342900">
-              <a:lnSpc>
-                <a:spcPct val="122000"/>
-              </a:lnSpc>
-              <a:spcAft>
-                <a:spcPts val="1000"/>
-              </a:spcAft>
-              <a:buSzPct val="100000"/>
-              <a:buChar char="•"/>
-            </a:pPr>
-            <a:r>
-              <a:rPr lang="en-US" sz="1350" dirty="0">
-                <a:solidFill>
-                  <a:srgbClr val="364239"/>
-                </a:solidFill>
-                <a:latin typeface="Arial" pitchFamily="34" charset="0"/>
-                <a:ea typeface="Arial" pitchFamily="34" charset="-122"/>
-                <a:cs typeface="Arial" pitchFamily="34" charset="-120"/>
-              </a:rPr>
-              <a:t>تفاوت الأمطار بين سنة وأخرى: موسم رطب قد يحجب فائدة المنتج في المرتفعات البعلية.</a:t>
-            </a:r>
-            <a:endParaRPr lang="en-US" sz="1350" dirty="0"/>
-          </a:p>
-          <a:p>
-            <a:pPr algn="r" marL="342900" indent="-342900">
-              <a:lnSpc>
-                <a:spcPct val="122000"/>
-              </a:lnSpc>
-              <a:spcAft>
-                <a:spcPts val="1000"/>
-              </a:spcAft>
-              <a:buSzPct val="100000"/>
-              <a:buChar char="•"/>
-            </a:pPr>
-            <a:r>
-              <a:rPr lang="en-US" sz="1350" dirty="0">
-                <a:solidFill>
-                  <a:srgbClr val="364239"/>
-                </a:solidFill>
-                <a:latin typeface="Arial" pitchFamily="34" charset="0"/>
-                <a:ea typeface="Arial" pitchFamily="34" charset="-122"/>
-                <a:cs typeface="Arial" pitchFamily="34" charset="-120"/>
-              </a:rPr>
-              <a:t>تجزّؤ الحيازات وصغر مساحاتها، ما يشتّت قرار الشراء على عدد كبير من المزارعين.</a:t>
-            </a:r>
-            <a:endParaRPr lang="en-US" sz="1350" dirty="0"/>
-          </a:p>
-          <a:p>
-            <a:pPr algn="r" marL="342900" indent="-342900">
-              <a:lnSpc>
-                <a:spcPct val="122000"/>
-              </a:lnSpc>
-              <a:spcAft>
-                <a:spcPts val="1000"/>
-              </a:spcAft>
-              <a:buSzPct val="100000"/>
-              <a:buChar char="•"/>
-            </a:pPr>
-            <a:r>
-              <a:rPr lang="en-US" sz="1350" dirty="0">
-                <a:solidFill>
-                  <a:srgbClr val="364239"/>
-                </a:solidFill>
-                <a:latin typeface="Arial" pitchFamily="34" charset="0"/>
-                <a:ea typeface="Arial" pitchFamily="34" charset="-122"/>
-                <a:cs typeface="Arial" pitchFamily="34" charset="-120"/>
-              </a:rPr>
-              <a:t>منافسة مواد رخيصة أساسها الصوديوم تركت انطباعاً سيئاً لدى المزارعين.</a:t>
-            </a:r>
-            <a:endParaRPr lang="en-US" sz="1350" dirty="0"/>
-          </a:p>
-          <a:p>
-            <a:pPr algn="r" marL="342900" indent="-342900">
-              <a:lnSpc>
-                <a:spcPct val="122000"/>
-              </a:lnSpc>
-              <a:spcAft>
-                <a:spcPts val="1000"/>
-              </a:spcAft>
-              <a:buSzPct val="100000"/>
-              <a:buChar char="•"/>
-            </a:pPr>
-            <a:r>
-              <a:rPr lang="en-US" sz="1350" dirty="0">
-                <a:solidFill>
-                  <a:srgbClr val="364239"/>
-                </a:solidFill>
-                <a:latin typeface="Arial" pitchFamily="34" charset="0"/>
-                <a:ea typeface="Arial" pitchFamily="34" charset="-122"/>
-                <a:cs typeface="Arial" pitchFamily="34" charset="-120"/>
-              </a:rPr>
-              <a:t>ضغط على السيولة لدى الحيازات بعد مواسم متتالية من ارتفاع كلفة المياه والمدخلات.</a:t>
-            </a:r>
-            <a:endParaRPr lang="en-US" sz="1350" dirty="0"/>
-          </a:p>
-        </p:txBody>
-      </p:sp>
-      <p:sp>
-        <p:nvSpPr>
-          <p:cNvPr id="6" name="Text 4"/>
-          <p:cNvSpPr txBox="1"/>
-          <p:nvPr/>
-        </p:nvSpPr>
-        <p:spPr>
-          <a:xfrm>
-            <a:off x="6370168" y="1783080"/>
-            <a:ext cx="5227168" cy="411480"/>
-          </a:xfrm>
-          <a:prstGeom prst="rect">
-            <a:avLst/>
-          </a:prstGeom>
-          <a:noFill/>
-          <a:ln/>
-        </p:spPr>
-        <p:txBody>
-          <a:bodyPr wrap="square" lIns="0" tIns="0" rIns="0" bIns="0" rtlCol="0" anchor="ctr"/>
-          <a:lstStyle/>
-          <a:p>
-            <a:pPr rtl="1" algn="r" indent="0" marL="0">
-              <a:buNone/>
-            </a:pPr>
-            <a:r>
-              <a:rPr lang="en-US" sz="1600" b="1" dirty="0">
-                <a:solidFill>
-                  <a:srgbClr val="2C6E49"/>
-                </a:solidFill>
-                <a:latin typeface="Arial" pitchFamily="34" charset="0"/>
-                <a:ea typeface="Arial" pitchFamily="34" charset="-122"/>
-                <a:cs typeface="Arial" pitchFamily="34" charset="-120"/>
-              </a:rPr>
-              <a:t>الردود</a:t>
-            </a:r>
-            <a:endParaRPr lang="en-US" sz="1600" dirty="0"/>
-          </a:p>
-        </p:txBody>
-      </p:sp>
-      <p:sp>
-        <p:nvSpPr>
-          <p:cNvPr id="7" name="Text 5"/>
-          <p:cNvSpPr txBox="1"/>
-          <p:nvPr/>
-        </p:nvSpPr>
-        <p:spPr>
-          <a:xfrm>
-            <a:off x="6370168" y="2286000"/>
-            <a:ext cx="5227168" cy="2468880"/>
-          </a:xfrm>
-          <a:prstGeom prst="rect">
-            <a:avLst/>
-          </a:prstGeom>
-          <a:noFill/>
-          <a:ln/>
-        </p:spPr>
-        <p:txBody>
-          <a:bodyPr wrap="square" lIns="0" tIns="0" rIns="0" bIns="0" rtlCol="0" anchor="t"/>
-          <a:lstStyle/>
-          <a:p>
-            <a:pPr algn="r" marL="342900" indent="-342900">
-              <a:lnSpc>
-                <a:spcPct val="122000"/>
-              </a:lnSpc>
-              <a:spcAft>
-                <a:spcPts val="1000"/>
-              </a:spcAft>
-              <a:buSzPct val="100000"/>
-              <a:buChar char="•"/>
-            </a:pPr>
-            <a:r>
-              <a:rPr lang="en-US" sz="1350" dirty="0">
-                <a:solidFill>
-                  <a:srgbClr val="364239"/>
-                </a:solidFill>
-                <a:latin typeface="Arial" pitchFamily="34" charset="0"/>
-                <a:ea typeface="Arial" pitchFamily="34" charset="-122"/>
-                <a:cs typeface="Arial" pitchFamily="34" charset="-120"/>
-              </a:rPr>
-              <a:t>إجراء التجربة على دورة كاملة مع قطعة شاهدة، لتوثيق المكسب حتى في سنة مواتية.</a:t>
-            </a:r>
-            <a:endParaRPr lang="en-US" sz="1350" dirty="0"/>
-          </a:p>
-          <a:p>
-            <a:pPr algn="r" marL="342900" indent="-342900">
-              <a:lnSpc>
-                <a:spcPct val="122000"/>
-              </a:lnSpc>
-              <a:spcAft>
-                <a:spcPts val="1000"/>
-              </a:spcAft>
-              <a:buSzPct val="100000"/>
-              <a:buChar char="•"/>
-            </a:pPr>
-            <a:r>
-              <a:rPr lang="en-US" sz="1350" dirty="0">
-                <a:solidFill>
-                  <a:srgbClr val="364239"/>
-                </a:solidFill>
-                <a:latin typeface="Arial" pitchFamily="34" charset="0"/>
-                <a:ea typeface="Arial" pitchFamily="34" charset="-122"/>
-                <a:cs typeface="Arial" pitchFamily="34" charset="-120"/>
-              </a:rPr>
-              <a:t>المرور عبر الجمعيات التعاونية واتحادات المزارعين بدل التعامل الفردي.</a:t>
-            </a:r>
-            <a:endParaRPr lang="en-US" sz="1350" dirty="0"/>
-          </a:p>
-          <a:p>
-            <a:pPr algn="r" marL="342900" indent="-342900">
-              <a:lnSpc>
-                <a:spcPct val="122000"/>
-              </a:lnSpc>
-              <a:spcAft>
-                <a:spcPts val="1000"/>
-              </a:spcAft>
-              <a:buSzPct val="100000"/>
-              <a:buChar char="•"/>
-            </a:pPr>
-            <a:r>
-              <a:rPr lang="en-US" sz="1350" dirty="0">
-                <a:solidFill>
-                  <a:srgbClr val="364239"/>
-                </a:solidFill>
-                <a:latin typeface="Arial" pitchFamily="34" charset="0"/>
-                <a:ea typeface="Arial" pitchFamily="34" charset="-122"/>
-                <a:cs typeface="Arial" pitchFamily="34" charset="-120"/>
-              </a:rPr>
-              <a:t>توثيق فارق التركيبة: بوتاسيوم لا صوديوم، وملاءمة للمحاصيل الغذائية وللتربة المالحة.</a:t>
-            </a:r>
-            <a:endParaRPr lang="en-US" sz="1350" dirty="0"/>
-          </a:p>
-          <a:p>
-            <a:pPr algn="r" marL="342900" indent="-342900">
-              <a:lnSpc>
-                <a:spcPct val="122000"/>
-              </a:lnSpc>
-              <a:spcAft>
-                <a:spcPts val="1000"/>
-              </a:spcAft>
-              <a:buSzPct val="100000"/>
-              <a:buChar char="•"/>
-            </a:pPr>
-            <a:r>
-              <a:rPr lang="en-US" sz="1350" dirty="0">
-                <a:solidFill>
-                  <a:srgbClr val="364239"/>
-                </a:solidFill>
-                <a:latin typeface="Arial" pitchFamily="34" charset="0"/>
-                <a:ea typeface="Arial" pitchFamily="34" charset="-122"/>
-                <a:cs typeface="Arial" pitchFamily="34" charset="-120"/>
-              </a:rPr>
-              <a:t>توزيع الالتزام على الزمن: أثر يدوم 3 إلى 4 سنوات يوزّع الكلفة على عدة مواسم.</a:t>
-            </a:r>
-            <a:endParaRPr lang="en-US" sz="1350" dirty="0"/>
-          </a:p>
-        </p:txBody>
-      </p:sp>
-      <p:sp>
-        <p:nvSpPr>
-          <p:cNvPr id="8" name="Shape 6"/>
+          <p:cNvPr id="4" name="Shape 2"/>
           <p:cNvSpPr/>
           <p:nvPr/>
         </p:nvSpPr>
         <p:spPr>
           <a:xfrm>
-            <a:off x="594360" y="4846320"/>
-            <a:ext cx="11002975" cy="960120"/>
+            <a:off x="594360" y="1874520"/>
+            <a:ext cx="2545004" cy="2834640"/>
           </a:xfrm>
           <a:prstGeom prst="roundRect">
             <a:avLst>
-              <a:gd name="adj" fmla="val 7619"/>
+              <a:gd name="adj" fmla="val 3593"/>
             </a:avLst>
           </a:prstGeom>
           <a:solidFill>
@@ -8666,14 +8143,112 @@
       </p:sp>
       <p:sp>
         <p:nvSpPr>
-          <p:cNvPr id="9" name="Text 7"/>
-          <p:cNvSpPr txBox="1"/>
-          <p:nvPr/>
-        </p:nvSpPr>
-        <p:spPr>
-          <a:xfrm>
-            <a:off x="822960" y="4983480"/>
-            <a:ext cx="10545775" cy="713232"/>
+          <p:cNvPr id="5" name="Shape 3"/>
+          <p:cNvSpPr/>
+          <p:nvPr/>
+        </p:nvSpPr>
+        <p:spPr>
+          <a:xfrm>
+            <a:off x="822960" y="2103120"/>
+            <a:ext cx="566928" cy="566928"/>
+          </a:xfrm>
+          <a:prstGeom prst="ellipse">
+            <a:avLst/>
+          </a:prstGeom>
+          <a:solidFill>
+            <a:srgbClr val="2C6E49"/>
+          </a:solidFill>
+          <a:ln/>
+        </p:spPr>
+      </p:sp>
+      <p:sp>
+        <p:nvSpPr>
+          <p:cNvPr id="6" name="Text 4"/>
+          <p:cNvSpPr txBox="1"/>
+          <p:nvPr/>
+        </p:nvSpPr>
+        <p:spPr>
+          <a:xfrm>
+            <a:off x="822960" y="2103120"/>
+            <a:ext cx="566928" cy="566928"/>
+          </a:xfrm>
+          <a:prstGeom prst="rect">
+            <a:avLst/>
+          </a:prstGeom>
+          <a:noFill/>
+          <a:ln/>
+        </p:spPr>
+        <p:txBody>
+          <a:bodyPr wrap="square" lIns="0" tIns="0" rIns="0" bIns="0" rtlCol="0" anchor="ctr"/>
+          <a:lstStyle/>
+          <a:p>
+            <a:pPr rtl="1" algn="ctr" indent="0" marL="0">
+              <a:buNone/>
+            </a:pPr>
+            <a:r>
+              <a:rPr lang="en-US" sz="1600" b="1" dirty="0">
+                <a:solidFill>
+                  <a:srgbClr val="FFFFFF"/>
+                </a:solidFill>
+                <a:latin typeface="Arial" pitchFamily="34" charset="0"/>
+                <a:ea typeface="Arial" pitchFamily="34" charset="-122"/>
+                <a:cs typeface="Arial" pitchFamily="34" charset="-120"/>
+              </a:rPr>
+              <a:t>1</a:t>
+            </a:r>
+            <a:endParaRPr lang="en-US" sz="1600" dirty="0"/>
+          </a:p>
+        </p:txBody>
+      </p:sp>
+      <p:sp>
+        <p:nvSpPr>
+          <p:cNvPr id="7" name="Text 5"/>
+          <p:cNvSpPr txBox="1"/>
+          <p:nvPr/>
+        </p:nvSpPr>
+        <p:spPr>
+          <a:xfrm>
+            <a:off x="822960" y="2788920"/>
+            <a:ext cx="2087804" cy="457200"/>
+          </a:xfrm>
+          <a:prstGeom prst="rect">
+            <a:avLst/>
+          </a:prstGeom>
+          <a:noFill/>
+          <a:ln/>
+        </p:spPr>
+        <p:txBody>
+          <a:bodyPr wrap="square" lIns="0" tIns="0" rIns="0" bIns="0" rtlCol="0" anchor="ctr"/>
+          <a:lstStyle/>
+          <a:p>
+            <a:pPr rtl="1" algn="r" indent="0" marL="0">
+              <a:buNone/>
+            </a:pPr>
+            <a:r>
+              <a:rPr lang="en-US" sz="1400" b="1" dirty="0">
+                <a:solidFill>
+                  <a:srgbClr val="2C6E49"/>
+                </a:solidFill>
+                <a:latin typeface="Arial" pitchFamily="34" charset="0"/>
+                <a:ea typeface="Arial" pitchFamily="34" charset="-122"/>
+                <a:cs typeface="Arial" pitchFamily="34" charset="-120"/>
+              </a:rPr>
+              <a:t>التوزيع</a:t>
+            </a:r>
+            <a:endParaRPr lang="en-US" sz="1400" dirty="0"/>
+          </a:p>
+        </p:txBody>
+      </p:sp>
+      <p:sp>
+        <p:nvSpPr>
+          <p:cNvPr id="8" name="Text 6"/>
+          <p:cNvSpPr txBox="1"/>
+          <p:nvPr/>
+        </p:nvSpPr>
+        <p:spPr>
+          <a:xfrm>
+            <a:off x="822960" y="3291840"/>
+            <a:ext cx="2087804" cy="1234440"/>
           </a:xfrm>
           <a:prstGeom prst="rect">
             <a:avLst/>
@@ -8687,12 +8262,555 @@
           <a:p>
             <a:pPr rtl="1" algn="r" indent="0" marL="0">
               <a:lnSpc>
-                <a:spcPct val="118000"/>
+                <a:spcPct val="120000"/>
               </a:lnSpc>
               <a:buNone/>
             </a:pPr>
             <a:r>
-              <a:rPr lang="en-US" sz="1100" dirty="0">
+              <a:rPr lang="en-US" sz="1200" dirty="0">
+                <a:solidFill>
+                  <a:srgbClr val="364239"/>
+                </a:solidFill>
+                <a:latin typeface="Arial" pitchFamily="34" charset="0"/>
+                <a:ea typeface="Arial" pitchFamily="34" charset="-122"/>
+                <a:cs typeface="Arial" pitchFamily="34" charset="-120"/>
+              </a:rPr>
+              <a:t>حصرية على مستوى الإقليم ومخزون إطلاق للموسم التجاري الأول.</a:t>
+            </a:r>
+            <a:endParaRPr lang="en-US" sz="1200" dirty="0"/>
+          </a:p>
+        </p:txBody>
+      </p:sp>
+      <p:sp>
+        <p:nvSpPr>
+          <p:cNvPr id="9" name="Shape 7"/>
+          <p:cNvSpPr/>
+          <p:nvPr/>
+        </p:nvSpPr>
+        <p:spPr>
+          <a:xfrm>
+            <a:off x="3413684" y="1874520"/>
+            <a:ext cx="2545004" cy="2834640"/>
+          </a:xfrm>
+          <a:prstGeom prst="roundRect">
+            <a:avLst>
+              <a:gd name="adj" fmla="val 3593"/>
+            </a:avLst>
+          </a:prstGeom>
+          <a:solidFill>
+            <a:srgbClr val="F2F1E8"/>
+          </a:solidFill>
+          <a:ln w="9525">
+            <a:solidFill>
+              <a:srgbClr val="E0DFD0"/>
+            </a:solidFill>
+            <a:prstDash val="solid"/>
+          </a:ln>
+        </p:spPr>
+      </p:sp>
+      <p:sp>
+        <p:nvSpPr>
+          <p:cNvPr id="10" name="Shape 8"/>
+          <p:cNvSpPr/>
+          <p:nvPr/>
+        </p:nvSpPr>
+        <p:spPr>
+          <a:xfrm>
+            <a:off x="3642284" y="2103120"/>
+            <a:ext cx="566928" cy="566928"/>
+          </a:xfrm>
+          <a:prstGeom prst="ellipse">
+            <a:avLst/>
+          </a:prstGeom>
+          <a:solidFill>
+            <a:srgbClr val="2C6E49"/>
+          </a:solidFill>
+          <a:ln/>
+        </p:spPr>
+      </p:sp>
+      <p:sp>
+        <p:nvSpPr>
+          <p:cNvPr id="11" name="Text 9"/>
+          <p:cNvSpPr txBox="1"/>
+          <p:nvPr/>
+        </p:nvSpPr>
+        <p:spPr>
+          <a:xfrm>
+            <a:off x="3642284" y="2103120"/>
+            <a:ext cx="566928" cy="566928"/>
+          </a:xfrm>
+          <a:prstGeom prst="rect">
+            <a:avLst/>
+          </a:prstGeom>
+          <a:noFill/>
+          <a:ln/>
+        </p:spPr>
+        <p:txBody>
+          <a:bodyPr wrap="square" lIns="0" tIns="0" rIns="0" bIns="0" rtlCol="0" anchor="ctr"/>
+          <a:lstStyle/>
+          <a:p>
+            <a:pPr rtl="1" algn="ctr" indent="0" marL="0">
+              <a:buNone/>
+            </a:pPr>
+            <a:r>
+              <a:rPr lang="en-US" sz="1600" b="1" dirty="0">
+                <a:solidFill>
+                  <a:srgbClr val="FFFFFF"/>
+                </a:solidFill>
+                <a:latin typeface="Arial" pitchFamily="34" charset="0"/>
+                <a:ea typeface="Arial" pitchFamily="34" charset="-122"/>
+                <a:cs typeface="Arial" pitchFamily="34" charset="-120"/>
+              </a:rPr>
+              <a:t>2</a:t>
+            </a:r>
+            <a:endParaRPr lang="en-US" sz="1600" dirty="0"/>
+          </a:p>
+        </p:txBody>
+      </p:sp>
+      <p:sp>
+        <p:nvSpPr>
+          <p:cNvPr id="12" name="Text 10"/>
+          <p:cNvSpPr txBox="1"/>
+          <p:nvPr/>
+        </p:nvSpPr>
+        <p:spPr>
+          <a:xfrm>
+            <a:off x="3642284" y="2788920"/>
+            <a:ext cx="2087804" cy="457200"/>
+          </a:xfrm>
+          <a:prstGeom prst="rect">
+            <a:avLst/>
+          </a:prstGeom>
+          <a:noFill/>
+          <a:ln/>
+        </p:spPr>
+        <p:txBody>
+          <a:bodyPr wrap="square" lIns="0" tIns="0" rIns="0" bIns="0" rtlCol="0" anchor="ctr"/>
+          <a:lstStyle/>
+          <a:p>
+            <a:pPr rtl="1" algn="r" indent="0" marL="0">
+              <a:buNone/>
+            </a:pPr>
+            <a:r>
+              <a:rPr lang="en-US" sz="1400" b="1" dirty="0">
+                <a:solidFill>
+                  <a:srgbClr val="2C6E49"/>
+                </a:solidFill>
+                <a:latin typeface="Arial" pitchFamily="34" charset="0"/>
+                <a:ea typeface="Arial" pitchFamily="34" charset="-122"/>
+                <a:cs typeface="Arial" pitchFamily="34" charset="-120"/>
+              </a:rPr>
+              <a:t>التدريب</a:t>
+            </a:r>
+            <a:endParaRPr lang="en-US" sz="1400" dirty="0"/>
+          </a:p>
+        </p:txBody>
+      </p:sp>
+      <p:sp>
+        <p:nvSpPr>
+          <p:cNvPr id="13" name="Text 11"/>
+          <p:cNvSpPr txBox="1"/>
+          <p:nvPr/>
+        </p:nvSpPr>
+        <p:spPr>
+          <a:xfrm>
+            <a:off x="3642284" y="3291840"/>
+            <a:ext cx="2087804" cy="1234440"/>
+          </a:xfrm>
+          <a:prstGeom prst="rect">
+            <a:avLst/>
+          </a:prstGeom>
+          <a:noFill/>
+          <a:ln/>
+        </p:spPr>
+        <p:txBody>
+          <a:bodyPr wrap="square" lIns="0" tIns="0" rIns="0" bIns="0" rtlCol="0" anchor="t"/>
+          <a:lstStyle/>
+          <a:p>
+            <a:pPr rtl="1" algn="r" indent="0" marL="0">
+              <a:lnSpc>
+                <a:spcPct val="120000"/>
+              </a:lnSpc>
+              <a:buNone/>
+            </a:pPr>
+            <a:r>
+              <a:rPr lang="en-US" sz="1200" dirty="0">
+                <a:solidFill>
+                  <a:srgbClr val="364239"/>
+                </a:solidFill>
+                <a:latin typeface="Arial" pitchFamily="34" charset="0"/>
+                <a:ea typeface="Arial" pitchFamily="34" charset="-122"/>
+                <a:cs typeface="Arial" pitchFamily="34" charset="-120"/>
+              </a:rPr>
+              <a:t>تدريب فني للفرق، وبروتوكولات الجرعات، وتحديثها في كل موسم.</a:t>
+            </a:r>
+            <a:endParaRPr lang="en-US" sz="1200" dirty="0"/>
+          </a:p>
+        </p:txBody>
+      </p:sp>
+      <p:sp>
+        <p:nvSpPr>
+          <p:cNvPr id="14" name="Shape 12"/>
+          <p:cNvSpPr/>
+          <p:nvPr/>
+        </p:nvSpPr>
+        <p:spPr>
+          <a:xfrm>
+            <a:off x="6233008" y="1874520"/>
+            <a:ext cx="2545004" cy="2834640"/>
+          </a:xfrm>
+          <a:prstGeom prst="roundRect">
+            <a:avLst>
+              <a:gd name="adj" fmla="val 3593"/>
+            </a:avLst>
+          </a:prstGeom>
+          <a:solidFill>
+            <a:srgbClr val="F2F1E8"/>
+          </a:solidFill>
+          <a:ln w="9525">
+            <a:solidFill>
+              <a:srgbClr val="E0DFD0"/>
+            </a:solidFill>
+            <a:prstDash val="solid"/>
+          </a:ln>
+        </p:spPr>
+      </p:sp>
+      <p:sp>
+        <p:nvSpPr>
+          <p:cNvPr id="15" name="Shape 13"/>
+          <p:cNvSpPr/>
+          <p:nvPr/>
+        </p:nvSpPr>
+        <p:spPr>
+          <a:xfrm>
+            <a:off x="6461608" y="2103120"/>
+            <a:ext cx="566928" cy="566928"/>
+          </a:xfrm>
+          <a:prstGeom prst="ellipse">
+            <a:avLst/>
+          </a:prstGeom>
+          <a:solidFill>
+            <a:srgbClr val="2C6E49"/>
+          </a:solidFill>
+          <a:ln/>
+        </p:spPr>
+      </p:sp>
+      <p:sp>
+        <p:nvSpPr>
+          <p:cNvPr id="16" name="Text 14"/>
+          <p:cNvSpPr txBox="1"/>
+          <p:nvPr/>
+        </p:nvSpPr>
+        <p:spPr>
+          <a:xfrm>
+            <a:off x="6461608" y="2103120"/>
+            <a:ext cx="566928" cy="566928"/>
+          </a:xfrm>
+          <a:prstGeom prst="rect">
+            <a:avLst/>
+          </a:prstGeom>
+          <a:noFill/>
+          <a:ln/>
+        </p:spPr>
+        <p:txBody>
+          <a:bodyPr wrap="square" lIns="0" tIns="0" rIns="0" bIns="0" rtlCol="0" anchor="ctr"/>
+          <a:lstStyle/>
+          <a:p>
+            <a:pPr rtl="1" algn="ctr" indent="0" marL="0">
+              <a:buNone/>
+            </a:pPr>
+            <a:r>
+              <a:rPr lang="en-US" sz="1600" b="1" dirty="0">
+                <a:solidFill>
+                  <a:srgbClr val="FFFFFF"/>
+                </a:solidFill>
+                <a:latin typeface="Arial" pitchFamily="34" charset="0"/>
+                <a:ea typeface="Arial" pitchFamily="34" charset="-122"/>
+                <a:cs typeface="Arial" pitchFamily="34" charset="-120"/>
+              </a:rPr>
+              <a:t>3</a:t>
+            </a:r>
+            <a:endParaRPr lang="en-US" sz="1600" dirty="0"/>
+          </a:p>
+        </p:txBody>
+      </p:sp>
+      <p:sp>
+        <p:nvSpPr>
+          <p:cNvPr id="17" name="Text 15"/>
+          <p:cNvSpPr txBox="1"/>
+          <p:nvPr/>
+        </p:nvSpPr>
+        <p:spPr>
+          <a:xfrm>
+            <a:off x="6461608" y="2788920"/>
+            <a:ext cx="2087804" cy="457200"/>
+          </a:xfrm>
+          <a:prstGeom prst="rect">
+            <a:avLst/>
+          </a:prstGeom>
+          <a:noFill/>
+          <a:ln/>
+        </p:spPr>
+        <p:txBody>
+          <a:bodyPr wrap="square" lIns="0" tIns="0" rIns="0" bIns="0" rtlCol="0" anchor="ctr"/>
+          <a:lstStyle/>
+          <a:p>
+            <a:pPr rtl="1" algn="r" indent="0" marL="0">
+              <a:buNone/>
+            </a:pPr>
+            <a:r>
+              <a:rPr lang="en-US" sz="1400" b="1" dirty="0">
+                <a:solidFill>
+                  <a:srgbClr val="2C6E49"/>
+                </a:solidFill>
+                <a:latin typeface="Arial" pitchFamily="34" charset="0"/>
+                <a:ea typeface="Arial" pitchFamily="34" charset="-122"/>
+                <a:cs typeface="Arial" pitchFamily="34" charset="-120"/>
+              </a:rPr>
+              <a:t>تجارب مشتركة</a:t>
+            </a:r>
+            <a:endParaRPr lang="en-US" sz="1400" dirty="0"/>
+          </a:p>
+        </p:txBody>
+      </p:sp>
+      <p:sp>
+        <p:nvSpPr>
+          <p:cNvPr id="18" name="Text 16"/>
+          <p:cNvSpPr txBox="1"/>
+          <p:nvPr/>
+        </p:nvSpPr>
+        <p:spPr>
+          <a:xfrm>
+            <a:off x="6461608" y="3291840"/>
+            <a:ext cx="2087804" cy="1234440"/>
+          </a:xfrm>
+          <a:prstGeom prst="rect">
+            <a:avLst/>
+          </a:prstGeom>
+          <a:noFill/>
+          <a:ln/>
+        </p:spPr>
+        <p:txBody>
+          <a:bodyPr wrap="square" lIns="0" tIns="0" rIns="0" bIns="0" rtlCol="0" anchor="t"/>
+          <a:lstStyle/>
+          <a:p>
+            <a:pPr rtl="1" algn="r" indent="0" marL="0">
+              <a:lnSpc>
+                <a:spcPct val="120000"/>
+              </a:lnSpc>
+              <a:buNone/>
+            </a:pPr>
+            <a:r>
+              <a:rPr lang="en-US" sz="1200" dirty="0">
+                <a:solidFill>
+                  <a:srgbClr val="364239"/>
+                </a:solidFill>
+                <a:latin typeface="Arial" pitchFamily="34" charset="0"/>
+                <a:ea typeface="Arial" pitchFamily="34" charset="-122"/>
+                <a:cs typeface="Arial" pitchFamily="34" charset="-120"/>
+              </a:rPr>
+              <a:t>قطع إرشادية مع قطعة شاهد، ونتائج تُعرض على المزارعين.</a:t>
+            </a:r>
+            <a:endParaRPr lang="en-US" sz="1200" dirty="0"/>
+          </a:p>
+        </p:txBody>
+      </p:sp>
+      <p:sp>
+        <p:nvSpPr>
+          <p:cNvPr id="19" name="Shape 17"/>
+          <p:cNvSpPr/>
+          <p:nvPr/>
+        </p:nvSpPr>
+        <p:spPr>
+          <a:xfrm>
+            <a:off x="9052331" y="1874520"/>
+            <a:ext cx="2545004" cy="2834640"/>
+          </a:xfrm>
+          <a:prstGeom prst="roundRect">
+            <a:avLst>
+              <a:gd name="adj" fmla="val 3593"/>
+            </a:avLst>
+          </a:prstGeom>
+          <a:solidFill>
+            <a:srgbClr val="F2F1E8"/>
+          </a:solidFill>
+          <a:ln w="9525">
+            <a:solidFill>
+              <a:srgbClr val="E0DFD0"/>
+            </a:solidFill>
+            <a:prstDash val="solid"/>
+          </a:ln>
+        </p:spPr>
+      </p:sp>
+      <p:sp>
+        <p:nvSpPr>
+          <p:cNvPr id="20" name="Shape 18"/>
+          <p:cNvSpPr/>
+          <p:nvPr/>
+        </p:nvSpPr>
+        <p:spPr>
+          <a:xfrm>
+            <a:off x="9280931" y="2103120"/>
+            <a:ext cx="566928" cy="566928"/>
+          </a:xfrm>
+          <a:prstGeom prst="ellipse">
+            <a:avLst/>
+          </a:prstGeom>
+          <a:solidFill>
+            <a:srgbClr val="2C6E49"/>
+          </a:solidFill>
+          <a:ln/>
+        </p:spPr>
+      </p:sp>
+      <p:sp>
+        <p:nvSpPr>
+          <p:cNvPr id="21" name="Text 19"/>
+          <p:cNvSpPr txBox="1"/>
+          <p:nvPr/>
+        </p:nvSpPr>
+        <p:spPr>
+          <a:xfrm>
+            <a:off x="9280931" y="2103120"/>
+            <a:ext cx="566928" cy="566928"/>
+          </a:xfrm>
+          <a:prstGeom prst="rect">
+            <a:avLst/>
+          </a:prstGeom>
+          <a:noFill/>
+          <a:ln/>
+        </p:spPr>
+        <p:txBody>
+          <a:bodyPr wrap="square" lIns="0" tIns="0" rIns="0" bIns="0" rtlCol="0" anchor="ctr"/>
+          <a:lstStyle/>
+          <a:p>
+            <a:pPr rtl="1" algn="ctr" indent="0" marL="0">
+              <a:buNone/>
+            </a:pPr>
+            <a:r>
+              <a:rPr lang="en-US" sz="1600" b="1" dirty="0">
+                <a:solidFill>
+                  <a:srgbClr val="FFFFFF"/>
+                </a:solidFill>
+                <a:latin typeface="Arial" pitchFamily="34" charset="0"/>
+                <a:ea typeface="Arial" pitchFamily="34" charset="-122"/>
+                <a:cs typeface="Arial" pitchFamily="34" charset="-120"/>
+              </a:rPr>
+              <a:t>4</a:t>
+            </a:r>
+            <a:endParaRPr lang="en-US" sz="1600" dirty="0"/>
+          </a:p>
+        </p:txBody>
+      </p:sp>
+      <p:sp>
+        <p:nvSpPr>
+          <p:cNvPr id="22" name="Text 20"/>
+          <p:cNvSpPr txBox="1"/>
+          <p:nvPr/>
+        </p:nvSpPr>
+        <p:spPr>
+          <a:xfrm>
+            <a:off x="9280931" y="2788920"/>
+            <a:ext cx="2087804" cy="457200"/>
+          </a:xfrm>
+          <a:prstGeom prst="rect">
+            <a:avLst/>
+          </a:prstGeom>
+          <a:noFill/>
+          <a:ln/>
+        </p:spPr>
+        <p:txBody>
+          <a:bodyPr wrap="square" lIns="0" tIns="0" rIns="0" bIns="0" rtlCol="0" anchor="ctr"/>
+          <a:lstStyle/>
+          <a:p>
+            <a:pPr rtl="1" algn="r" indent="0" marL="0">
+              <a:buNone/>
+            </a:pPr>
+            <a:r>
+              <a:rPr lang="en-US" sz="1400" b="1" dirty="0">
+                <a:solidFill>
+                  <a:srgbClr val="2C6E49"/>
+                </a:solidFill>
+                <a:latin typeface="Arial" pitchFamily="34" charset="0"/>
+                <a:ea typeface="Arial" pitchFamily="34" charset="-122"/>
+                <a:cs typeface="Arial" pitchFamily="34" charset="-120"/>
+              </a:rPr>
+              <a:t>المؤسسات</a:t>
+            </a:r>
+            <a:endParaRPr lang="en-US" sz="1400" dirty="0"/>
+          </a:p>
+        </p:txBody>
+      </p:sp>
+      <p:sp>
+        <p:nvSpPr>
+          <p:cNvPr id="23" name="Text 21"/>
+          <p:cNvSpPr txBox="1"/>
+          <p:nvPr/>
+        </p:nvSpPr>
+        <p:spPr>
+          <a:xfrm>
+            <a:off x="9280931" y="3291840"/>
+            <a:ext cx="2087804" cy="1234440"/>
+          </a:xfrm>
+          <a:prstGeom prst="rect">
+            <a:avLst/>
+          </a:prstGeom>
+          <a:noFill/>
+          <a:ln/>
+        </p:spPr>
+        <p:txBody>
+          <a:bodyPr wrap="square" lIns="0" tIns="0" rIns="0" bIns="0" rtlCol="0" anchor="t"/>
+          <a:lstStyle/>
+          <a:p>
+            <a:pPr rtl="1" algn="r" indent="0" marL="0">
+              <a:lnSpc>
+                <a:spcPct val="120000"/>
+              </a:lnSpc>
+              <a:buNone/>
+            </a:pPr>
+            <a:r>
+              <a:rPr lang="en-US" sz="1200" dirty="0">
+                <a:solidFill>
+                  <a:srgbClr val="364239"/>
+                </a:solidFill>
+                <a:latin typeface="Arial" pitchFamily="34" charset="0"/>
+                <a:ea typeface="Arial" pitchFamily="34" charset="-122"/>
+                <a:cs typeface="Arial" pitchFamily="34" charset="-120"/>
+              </a:rPr>
+              <a:t>حوار مع وزارة الزراعة وبرامج الأمن الغذائي.</a:t>
+            </a:r>
+            <a:endParaRPr lang="en-US" sz="1200" dirty="0"/>
+          </a:p>
+        </p:txBody>
+      </p:sp>
+      <p:sp>
+        <p:nvSpPr>
+          <p:cNvPr id="24" name="Text 22"/>
+          <p:cNvSpPr txBox="1"/>
+          <p:nvPr/>
+        </p:nvSpPr>
+        <p:spPr>
+          <a:xfrm>
+            <a:off x="594360" y="4983480"/>
+            <a:ext cx="11002975" cy="822960"/>
+          </a:xfrm>
+          <a:prstGeom prst="rect">
+            <a:avLst/>
+          </a:prstGeom>
+          <a:noFill/>
+          <a:ln/>
+        </p:spPr>
+        <p:txBody>
+          <a:bodyPr wrap="square" lIns="0" tIns="0" rIns="0" bIns="0" rtlCol="0" anchor="t"/>
+          <a:lstStyle/>
+          <a:p>
+            <a:pPr rtl="1" algn="r" indent="0" marL="0">
+              <a:lnSpc>
+                <a:spcPct val="125000"/>
+              </a:lnSpc>
+              <a:buNone/>
+            </a:pPr>
+            <a:r>
+              <a:rPr lang="en-US" sz="1250" dirty="0">
                 <a:solidFill>
                   <a:srgbClr val="6F7D71"/>
                 </a:solidFill>
@@ -8700,15 +8818,15 @@
                 <a:ea typeface="Arial" pitchFamily="34" charset="-122"/>
                 <a:cs typeface="Arial" pitchFamily="34" charset="-120"/>
               </a:rPr>
-              <a:t>تحليل الأكريلاميد (مختبر Polymex، ISO 9001، بتركيز أقل من 3,0 ميكروغرام/غرام) وفحص REACH / SVHC (SGS) وشهادة SOHISCERT السارية حتى 4 سبتمبر 2027: متاحة جميعها عند الطلب.</a:t>
-            </a:r>
-            <a:endParaRPr lang="en-US" sz="1100" dirty="0"/>
-          </a:p>
-        </p:txBody>
-      </p:sp>
-      <p:sp>
-        <p:nvSpPr>
-          <p:cNvPr id="10" name="Text 8"/>
+              <a:t>يتكيف الإطار مع الإقليم: يمكن أن يقود الشراكة مستورد أو موزّع مدخلات زراعية أو جمعية منتجين.</a:t>
+            </a:r>
+            <a:endParaRPr lang="en-US" sz="1250" dirty="0"/>
+          </a:p>
+        </p:txBody>
+      </p:sp>
+      <p:sp>
+        <p:nvSpPr>
+          <p:cNvPr id="25" name="Text 23"/>
           <p:cNvSpPr txBox="1"/>
           <p:nvPr/>
         </p:nvSpPr>
@@ -8749,7 +8867,7 @@
       </p:sp>
       <p:sp>
         <p:nvSpPr>
-          <p:cNvPr id="11" name="Text 9"/>
+          <p:cNvPr id="26" name="Text 24"/>
           <p:cNvSpPr txBox="1"/>
           <p:nvPr/>
         </p:nvSpPr>
@@ -8853,7 +8971,7 @@
                 <a:ea typeface="Arial" pitchFamily="34" charset="-122"/>
                 <a:cs typeface="Arial" pitchFamily="34" charset="-120"/>
               </a:rPr>
-              <a:t>المصادر</a:t>
+              <a:t>ما ينبغي توقّعه</a:t>
             </a:r>
             <a:endParaRPr lang="en-US" sz="1150" dirty="0"/>
           </a:p>
@@ -8892,7 +9010,7 @@
                 <a:ea typeface="Arial" pitchFamily="34" charset="-122"/>
                 <a:cs typeface="Arial" pitchFamily="34" charset="-120"/>
               </a:rPr>
-              <a:t>المصادر وافتراضات العمل</a:t>
+              <a:t>مخاطر محددة وردود عليها</a:t>
             </a:r>
             <a:endParaRPr lang="en-US" sz="3000" dirty="0"/>
           </a:p>
@@ -8931,7 +9049,7 @@
                 <a:ea typeface="Arial" pitchFamily="34" charset="-122"/>
                 <a:cs typeface="Arial" pitchFamily="34" charset="-120"/>
               </a:rPr>
-              <a:t>المصادر الرئيسية</a:t>
+              <a:t>المخاطر</a:t>
             </a:r>
             <a:endParaRPr lang="en-US" sz="1600" dirty="0"/>
           </a:p>
@@ -8977,7 +9095,7 @@
                 <a:ea typeface="Arial" pitchFamily="34" charset="-122"/>
                 <a:cs typeface="Arial" pitchFamily="34" charset="-120"/>
               </a:rPr>
-              <a:t>دائرة الإحصاءات العامة: الناتج المحلي الإجمالي والمسوح الزراعية.</a:t>
+              <a:t>تفاوت الأمطار بين سنة وأخرى: موسم رطب قد يحجب فائدة المنتج في المرتفعات البعلية.</a:t>
             </a:r>
             <a:endParaRPr lang="en-US" sz="1350" dirty="0"/>
           </a:p>
@@ -9001,7 +9119,7 @@
                 <a:ea typeface="Arial" pitchFamily="34" charset="-122"/>
                 <a:cs typeface="Arial" pitchFamily="34" charset="-120"/>
               </a:rPr>
-              <a:t>وزارة الزراعة: الاستراتيجية الوطنية للتنمية الزراعية وإحصاءات الزيتون.</a:t>
+              <a:t>تجزّؤ الحيازات وصغر مساحاتها، ما يشتّت قرار الشراء على عدد كبير من المزارعين.</a:t>
             </a:r>
             <a:endParaRPr lang="en-US" sz="1350" dirty="0"/>
           </a:p>
@@ -9025,7 +9143,7 @@
                 <a:ea typeface="Arial" pitchFamily="34" charset="-122"/>
                 <a:cs typeface="Arial" pitchFamily="34" charset="-120"/>
               </a:rPr>
-              <a:t>وزارة المياه والري وسلطة وادي الأردن: الاستراتيجية الوطنية للمياه وحصص الري.</a:t>
+              <a:t>منافسة مواد رخيصة أساسها الصوديوم تركت انطباعاً سيئاً لدى المزارعين.</a:t>
             </a:r>
             <a:endParaRPr lang="en-US" sz="1350" dirty="0"/>
           </a:p>
@@ -9049,10 +9167,71 @@
                 <a:ea typeface="Arial" pitchFamily="34" charset="-122"/>
                 <a:cs typeface="Arial" pitchFamily="34" charset="-120"/>
               </a:rPr>
-              <a:t>منظمة الأغذية والزراعة (FAOSTAT وAQUASTAT) والبنك الدولي (WDI).</a:t>
+              <a:t>ضغط على السيولة لدى الحيازات بعد مواسم متتالية من ارتفاع كلفة المياه والمدخلات.</a:t>
             </a:r>
             <a:endParaRPr lang="en-US" sz="1350" dirty="0"/>
           </a:p>
+        </p:txBody>
+      </p:sp>
+      <p:sp>
+        <p:nvSpPr>
+          <p:cNvPr id="6" name="Text 4"/>
+          <p:cNvSpPr txBox="1"/>
+          <p:nvPr/>
+        </p:nvSpPr>
+        <p:spPr>
+          <a:xfrm>
+            <a:off x="6370168" y="1783080"/>
+            <a:ext cx="5227168" cy="411480"/>
+          </a:xfrm>
+          <a:prstGeom prst="rect">
+            <a:avLst/>
+          </a:prstGeom>
+          <a:noFill/>
+          <a:ln/>
+        </p:spPr>
+        <p:txBody>
+          <a:bodyPr wrap="square" lIns="0" tIns="0" rIns="0" bIns="0" rtlCol="0" anchor="ctr"/>
+          <a:lstStyle/>
+          <a:p>
+            <a:pPr rtl="1" algn="r" indent="0" marL="0">
+              <a:buNone/>
+            </a:pPr>
+            <a:r>
+              <a:rPr lang="en-US" sz="1600" b="1" dirty="0">
+                <a:solidFill>
+                  <a:srgbClr val="2C6E49"/>
+                </a:solidFill>
+                <a:latin typeface="Arial" pitchFamily="34" charset="0"/>
+                <a:ea typeface="Arial" pitchFamily="34" charset="-122"/>
+                <a:cs typeface="Arial" pitchFamily="34" charset="-120"/>
+              </a:rPr>
+              <a:t>الردود</a:t>
+            </a:r>
+            <a:endParaRPr lang="en-US" sz="1600" dirty="0"/>
+          </a:p>
+        </p:txBody>
+      </p:sp>
+      <p:sp>
+        <p:nvSpPr>
+          <p:cNvPr id="7" name="Text 5"/>
+          <p:cNvSpPr txBox="1"/>
+          <p:nvPr/>
+        </p:nvSpPr>
+        <p:spPr>
+          <a:xfrm>
+            <a:off x="6370168" y="2286000"/>
+            <a:ext cx="5227168" cy="2468880"/>
+          </a:xfrm>
+          <a:prstGeom prst="rect">
+            <a:avLst/>
+          </a:prstGeom>
+          <a:noFill/>
+          <a:ln/>
+        </p:spPr>
+        <p:txBody>
+          <a:bodyPr wrap="square" lIns="0" tIns="0" rIns="0" bIns="0" rtlCol="0" anchor="t"/>
+          <a:lstStyle/>
           <a:p>
             <a:pPr algn="r" marL="342900" indent="-342900">
               <a:lnSpc>
@@ -9073,71 +9252,10 @@
                 <a:ea typeface="Arial" pitchFamily="34" charset="-122"/>
                 <a:cs typeface="Arial" pitchFamily="34" charset="-120"/>
               </a:rPr>
-              <a:t>الصور الفوتوغرافية: User:Issagm (CC BY-SA 3.0), Omarbrodsd (CC BY-SA 4.0) — عبر ويكيميديا كومنز.</a:t>
+              <a:t>إجراء التجربة على دورة كاملة مع قطعة شاهدة، لتوثيق المكسب حتى في سنة مواتية.</a:t>
             </a:r>
             <a:endParaRPr lang="en-US" sz="1350" dirty="0"/>
           </a:p>
-        </p:txBody>
-      </p:sp>
-      <p:sp>
-        <p:nvSpPr>
-          <p:cNvPr id="6" name="Text 4"/>
-          <p:cNvSpPr txBox="1"/>
-          <p:nvPr/>
-        </p:nvSpPr>
-        <p:spPr>
-          <a:xfrm>
-            <a:off x="6370168" y="1783080"/>
-            <a:ext cx="5227168" cy="411480"/>
-          </a:xfrm>
-          <a:prstGeom prst="rect">
-            <a:avLst/>
-          </a:prstGeom>
-          <a:noFill/>
-          <a:ln/>
-        </p:spPr>
-        <p:txBody>
-          <a:bodyPr wrap="square" lIns="0" tIns="0" rIns="0" bIns="0" rtlCol="0" anchor="ctr"/>
-          <a:lstStyle/>
-          <a:p>
-            <a:pPr rtl="1" algn="r" indent="0" marL="0">
-              <a:buNone/>
-            </a:pPr>
-            <a:r>
-              <a:rPr lang="en-US" sz="1600" b="1" dirty="0">
-                <a:solidFill>
-                  <a:srgbClr val="2C6E49"/>
-                </a:solidFill>
-                <a:latin typeface="Arial" pitchFamily="34" charset="0"/>
-                <a:ea typeface="Arial" pitchFamily="34" charset="-122"/>
-                <a:cs typeface="Arial" pitchFamily="34" charset="-120"/>
-              </a:rPr>
-              <a:t>افتراضات العمل</a:t>
-            </a:r>
-            <a:endParaRPr lang="en-US" sz="1600" dirty="0"/>
-          </a:p>
-        </p:txBody>
-      </p:sp>
-      <p:sp>
-        <p:nvSpPr>
-          <p:cNvPr id="7" name="Text 5"/>
-          <p:cNvSpPr txBox="1"/>
-          <p:nvPr/>
-        </p:nvSpPr>
-        <p:spPr>
-          <a:xfrm>
-            <a:off x="6370168" y="2286000"/>
-            <a:ext cx="5227168" cy="2468880"/>
-          </a:xfrm>
-          <a:prstGeom prst="rect">
-            <a:avLst/>
-          </a:prstGeom>
-          <a:noFill/>
-          <a:ln/>
-        </p:spPr>
-        <p:txBody>
-          <a:bodyPr wrap="square" lIns="0" tIns="0" rIns="0" bIns="0" rtlCol="0" anchor="t"/>
-          <a:lstStyle/>
           <a:p>
             <a:pPr algn="r" marL="342900" indent="-342900">
               <a:lnSpc>
@@ -9158,7 +9276,7 @@
                 <a:ea typeface="Arial" pitchFamily="34" charset="-122"/>
                 <a:cs typeface="Arial" pitchFamily="34" charset="-120"/>
               </a:rPr>
-              <a:t>الأرقام رتب حجم مقرّبة، مأخوذة من أحدث البيانات العامة المتاحة.</a:t>
+              <a:t>المرور عبر الجمعيات التعاونية واتحادات المزارعين بدل التعامل الفردي.</a:t>
             </a:r>
             <a:endParaRPr lang="en-US" sz="1350" dirty="0"/>
           </a:p>
@@ -9182,7 +9300,7 @@
                 <a:ea typeface="Arial" pitchFamily="34" charset="-122"/>
                 <a:cs typeface="Arial" pitchFamily="34" charset="-120"/>
               </a:rPr>
-              <a:t>توفير الماء وزيادة الإنتاج أرقام استرشادية تتغير بحسب التربة والمناخ والمحصول.</a:t>
+              <a:t>توثيق فارق التركيبة: بوتاسيوم لا صوديوم، وملاءمة للمحاصيل الغذائية وللتربة المالحة.</a:t>
             </a:r>
             <a:endParaRPr lang="en-US" sz="1350" dirty="0"/>
           </a:p>
@@ -9206,7 +9324,7 @@
                 <a:ea typeface="Arial" pitchFamily="34" charset="-122"/>
                 <a:cs typeface="Arial" pitchFamily="34" charset="-120"/>
               </a:rPr>
-              <a:t>وثيقة عمل تجارية: تُحدَّث الأرقام قبل أي تقديم رسمي.</a:t>
+              <a:t>توزيع الالتزام على الزمن: أثر يدوم 3 إلى 4 سنوات يوزّع الكلفة على عدة مواسم.</a:t>
             </a:r>
             <a:endParaRPr lang="en-US" sz="1350" dirty="0"/>
           </a:p>
@@ -9275,7 +9393,7 @@
                 <a:ea typeface="Arial" pitchFamily="34" charset="-122"/>
                 <a:cs typeface="Arial" pitchFamily="34" charset="-120"/>
               </a:rPr>
-              <a:t>تقارير التجارب والشهادات (SOHISCERT، وتحاليل Polymex وSGS) والنشرات الفنية متاحة عند الطلب.</a:t>
+              <a:t>تحليل الأكريلاميد (مختبر Polymex، ISO 9001، بتركيز أقل من 3,0 ميكروغرام/غرام) وفحص REACH / SVHC (SGS) وشهادة SOHISCERT السارية حتى 4 سبتمبر 2027: متاحة جميعها عند الطلب.</a:t>
             </a:r>
             <a:endParaRPr lang="en-US" sz="1100" dirty="0"/>
           </a:p>
@@ -9374,6 +9492,605 @@
 <file path=ppt/slides/slide18.xml><?xml version="1.0" encoding="utf-8"?>
 <p:sld xmlns:a="http://schemas.openxmlformats.org/drawingml/2006/main" xmlns:r="http://schemas.openxmlformats.org/officeDocument/2006/relationships" xmlns:p="http://schemas.openxmlformats.org/presentationml/2006/main">
   <p:cSld name="Slide 18">
+    <p:bg>
+      <p:bgPr>
+        <a:solidFill>
+          <a:srgbClr val="FCFAF5"/>
+        </a:solidFill>
+      </p:bgPr>
+    </p:bg>
+    <p:spTree>
+      <p:nvGrpSpPr>
+        <p:cNvPr id="1" name=""/>
+        <p:cNvGrpSpPr/>
+        <p:nvPr/>
+      </p:nvGrpSpPr>
+      <p:grpSpPr>
+        <a:xfrm>
+          <a:off x="0" y="0"/>
+          <a:ext cx="0" cy="0"/>
+          <a:chOff x="0" y="0"/>
+          <a:chExt cx="0" cy="0"/>
+        </a:xfrm>
+      </p:grpSpPr>
+      <p:sp>
+        <p:nvSpPr>
+          <p:cNvPr id="2" name="Text 0"/>
+          <p:cNvSpPr txBox="1"/>
+          <p:nvPr/>
+        </p:nvSpPr>
+        <p:spPr>
+          <a:xfrm>
+            <a:off x="594360" y="411480"/>
+            <a:ext cx="10515600" cy="274320"/>
+          </a:xfrm>
+          <a:prstGeom prst="rect">
+            <a:avLst/>
+          </a:prstGeom>
+          <a:noFill/>
+          <a:ln/>
+        </p:spPr>
+        <p:txBody>
+          <a:bodyPr wrap="square" lIns="0" tIns="0" rIns="0" bIns="0" rtlCol="0" anchor="ctr"/>
+          <a:lstStyle/>
+          <a:p>
+            <a:pPr rtl="1" algn="r" indent="0" marL="0">
+              <a:buNone/>
+            </a:pPr>
+            <a:r>
+              <a:rPr lang="en-US" sz="1150" b="1" spc="200" kern="0" dirty="0">
+                <a:solidFill>
+                  <a:srgbClr val="D9A441"/>
+                </a:solidFill>
+                <a:latin typeface="Arial" pitchFamily="34" charset="0"/>
+                <a:ea typeface="Arial" pitchFamily="34" charset="-122"/>
+                <a:cs typeface="Arial" pitchFamily="34" charset="-120"/>
+              </a:rPr>
+              <a:t>المصادر</a:t>
+            </a:r>
+            <a:endParaRPr lang="en-US" sz="1150" dirty="0"/>
+          </a:p>
+        </p:txBody>
+      </p:sp>
+      <p:sp>
+        <p:nvSpPr>
+          <p:cNvPr id="3" name="Text 1"/>
+          <p:cNvSpPr txBox="1"/>
+          <p:nvPr/>
+        </p:nvSpPr>
+        <p:spPr>
+          <a:xfrm>
+            <a:off x="594360" y="731520"/>
+            <a:ext cx="10881360" cy="731520"/>
+          </a:xfrm>
+          <a:prstGeom prst="rect">
+            <a:avLst/>
+          </a:prstGeom>
+          <a:noFill/>
+          <a:ln/>
+        </p:spPr>
+        <p:txBody>
+          <a:bodyPr wrap="square" lIns="0" tIns="0" rIns="0" bIns="0" rtlCol="0" anchor="ctr"/>
+          <a:lstStyle/>
+          <a:p>
+            <a:pPr rtl="1" algn="r" indent="0" marL="0">
+              <a:buNone/>
+            </a:pPr>
+            <a:r>
+              <a:rPr lang="en-US" sz="3000" b="1" dirty="0">
+                <a:solidFill>
+                  <a:srgbClr val="16412B"/>
+                </a:solidFill>
+                <a:latin typeface="Arial" pitchFamily="34" charset="0"/>
+                <a:ea typeface="Arial" pitchFamily="34" charset="-122"/>
+                <a:cs typeface="Arial" pitchFamily="34" charset="-120"/>
+              </a:rPr>
+              <a:t>المصادر وافتراضات العمل</a:t>
+            </a:r>
+            <a:endParaRPr lang="en-US" sz="3000" dirty="0"/>
+          </a:p>
+        </p:txBody>
+      </p:sp>
+      <p:sp>
+        <p:nvSpPr>
+          <p:cNvPr id="4" name="Text 2"/>
+          <p:cNvSpPr txBox="1"/>
+          <p:nvPr/>
+        </p:nvSpPr>
+        <p:spPr>
+          <a:xfrm>
+            <a:off x="594360" y="1783080"/>
+            <a:ext cx="5227168" cy="411480"/>
+          </a:xfrm>
+          <a:prstGeom prst="rect">
+            <a:avLst/>
+          </a:prstGeom>
+          <a:noFill/>
+          <a:ln/>
+        </p:spPr>
+        <p:txBody>
+          <a:bodyPr wrap="square" lIns="0" tIns="0" rIns="0" bIns="0" rtlCol="0" anchor="ctr"/>
+          <a:lstStyle/>
+          <a:p>
+            <a:pPr rtl="1" algn="r" indent="0" marL="0">
+              <a:buNone/>
+            </a:pPr>
+            <a:r>
+              <a:rPr lang="en-US" sz="1600" b="1" dirty="0">
+                <a:solidFill>
+                  <a:srgbClr val="2C6E49"/>
+                </a:solidFill>
+                <a:latin typeface="Arial" pitchFamily="34" charset="0"/>
+                <a:ea typeface="Arial" pitchFamily="34" charset="-122"/>
+                <a:cs typeface="Arial" pitchFamily="34" charset="-120"/>
+              </a:rPr>
+              <a:t>المصادر الرئيسية</a:t>
+            </a:r>
+            <a:endParaRPr lang="en-US" sz="1600" dirty="0"/>
+          </a:p>
+        </p:txBody>
+      </p:sp>
+      <p:sp>
+        <p:nvSpPr>
+          <p:cNvPr id="5" name="Text 3"/>
+          <p:cNvSpPr txBox="1"/>
+          <p:nvPr/>
+        </p:nvSpPr>
+        <p:spPr>
+          <a:xfrm>
+            <a:off x="594360" y="2286000"/>
+            <a:ext cx="5227168" cy="2468880"/>
+          </a:xfrm>
+          <a:prstGeom prst="rect">
+            <a:avLst/>
+          </a:prstGeom>
+          <a:noFill/>
+          <a:ln/>
+        </p:spPr>
+        <p:txBody>
+          <a:bodyPr wrap="square" lIns="0" tIns="0" rIns="0" bIns="0" rtlCol="0" anchor="t"/>
+          <a:lstStyle/>
+          <a:p>
+            <a:pPr algn="r" marL="342900" indent="-342900">
+              <a:lnSpc>
+                <a:spcPct val="122000"/>
+              </a:lnSpc>
+              <a:spcAft>
+                <a:spcPts val="1000"/>
+              </a:spcAft>
+              <a:buSzPct val="100000"/>
+              <a:buChar char="•"/>
+            </a:pPr>
+            <a:r>
+              <a:rPr lang="en-US" sz="1350" dirty="0">
+                <a:solidFill>
+                  <a:srgbClr val="364239"/>
+                </a:solidFill>
+                <a:latin typeface="Arial" pitchFamily="34" charset="0"/>
+                <a:ea typeface="Arial" pitchFamily="34" charset="-122"/>
+                <a:cs typeface="Arial" pitchFamily="34" charset="-120"/>
+              </a:rPr>
+              <a:t>دائرة الإحصاءات العامة: الناتج المحلي الإجمالي والمسوح الزراعية.</a:t>
+            </a:r>
+            <a:endParaRPr lang="en-US" sz="1350" dirty="0"/>
+          </a:p>
+          <a:p>
+            <a:pPr algn="r" marL="342900" indent="-342900">
+              <a:lnSpc>
+                <a:spcPct val="122000"/>
+              </a:lnSpc>
+              <a:spcAft>
+                <a:spcPts val="1000"/>
+              </a:spcAft>
+              <a:buSzPct val="100000"/>
+              <a:buChar char="•"/>
+            </a:pPr>
+            <a:r>
+              <a:rPr lang="en-US" sz="1350" dirty="0">
+                <a:solidFill>
+                  <a:srgbClr val="364239"/>
+                </a:solidFill>
+                <a:latin typeface="Arial" pitchFamily="34" charset="0"/>
+                <a:ea typeface="Arial" pitchFamily="34" charset="-122"/>
+                <a:cs typeface="Arial" pitchFamily="34" charset="-120"/>
+              </a:rPr>
+              <a:t>وزارة الزراعة: الاستراتيجية الوطنية للتنمية الزراعية وإحصاءات الزيتون.</a:t>
+            </a:r>
+            <a:endParaRPr lang="en-US" sz="1350" dirty="0"/>
+          </a:p>
+          <a:p>
+            <a:pPr algn="r" marL="342900" indent="-342900">
+              <a:lnSpc>
+                <a:spcPct val="122000"/>
+              </a:lnSpc>
+              <a:spcAft>
+                <a:spcPts val="1000"/>
+              </a:spcAft>
+              <a:buSzPct val="100000"/>
+              <a:buChar char="•"/>
+            </a:pPr>
+            <a:r>
+              <a:rPr lang="en-US" sz="1350" dirty="0">
+                <a:solidFill>
+                  <a:srgbClr val="364239"/>
+                </a:solidFill>
+                <a:latin typeface="Arial" pitchFamily="34" charset="0"/>
+                <a:ea typeface="Arial" pitchFamily="34" charset="-122"/>
+                <a:cs typeface="Arial" pitchFamily="34" charset="-120"/>
+              </a:rPr>
+              <a:t>وزارة المياه والري وسلطة وادي الأردن: الاستراتيجية الوطنية للمياه وحصص الري.</a:t>
+            </a:r>
+            <a:endParaRPr lang="en-US" sz="1350" dirty="0"/>
+          </a:p>
+          <a:p>
+            <a:pPr algn="r" marL="342900" indent="-342900">
+              <a:lnSpc>
+                <a:spcPct val="122000"/>
+              </a:lnSpc>
+              <a:spcAft>
+                <a:spcPts val="1000"/>
+              </a:spcAft>
+              <a:buSzPct val="100000"/>
+              <a:buChar char="•"/>
+            </a:pPr>
+            <a:r>
+              <a:rPr lang="en-US" sz="1350" dirty="0">
+                <a:solidFill>
+                  <a:srgbClr val="364239"/>
+                </a:solidFill>
+                <a:latin typeface="Arial" pitchFamily="34" charset="0"/>
+                <a:ea typeface="Arial" pitchFamily="34" charset="-122"/>
+                <a:cs typeface="Arial" pitchFamily="34" charset="-120"/>
+              </a:rPr>
+              <a:t>منظمة الأغذية والزراعة (FAOSTAT وAQUASTAT) والبنك الدولي (WDI).</a:t>
+            </a:r>
+            <a:endParaRPr lang="en-US" sz="1350" dirty="0"/>
+          </a:p>
+          <a:p>
+            <a:pPr algn="r" marL="342900" indent="-342900">
+              <a:lnSpc>
+                <a:spcPct val="122000"/>
+              </a:lnSpc>
+              <a:spcAft>
+                <a:spcPts val="1000"/>
+              </a:spcAft>
+              <a:buSzPct val="100000"/>
+              <a:buChar char="•"/>
+            </a:pPr>
+            <a:r>
+              <a:rPr lang="en-US" sz="1350" dirty="0">
+                <a:solidFill>
+                  <a:srgbClr val="364239"/>
+                </a:solidFill>
+                <a:latin typeface="Arial" pitchFamily="34" charset="0"/>
+                <a:ea typeface="Arial" pitchFamily="34" charset="-122"/>
+                <a:cs typeface="Arial" pitchFamily="34" charset="-120"/>
+              </a:rPr>
+              <a:t>اتفاقية الأمم المتحدة لمكافحة التصحر، الجفاف بالأرقام 2022: ارتفاع عدد فترات الجفاف ومدتها 29٪ منذ 2000 مقارنة بـ1980–1999.</a:t>
+            </a:r>
+            <a:endParaRPr lang="en-US" sz="1350" dirty="0"/>
+          </a:p>
+          <a:p>
+            <a:pPr algn="r" marL="342900" indent="-342900">
+              <a:lnSpc>
+                <a:spcPct val="122000"/>
+              </a:lnSpc>
+              <a:spcAft>
+                <a:spcPts val="1000"/>
+              </a:spcAft>
+              <a:buSzPct val="100000"/>
+              <a:buChar char="•"/>
+            </a:pPr>
+            <a:r>
+              <a:rPr lang="en-US" sz="1350" dirty="0">
+                <a:solidFill>
+                  <a:srgbClr val="364239"/>
+                </a:solidFill>
+                <a:latin typeface="Arial" pitchFamily="34" charset="0"/>
+                <a:ea typeface="Arial" pitchFamily="34" charset="-122"/>
+                <a:cs typeface="Arial" pitchFamily="34" charset="-120"/>
+              </a:rPr>
+              <a:t>الأمم المتحدة للمياه / أكواستات الفاو، مؤشر الهدف 6.4.2: تعريف الإجهاد المائي وحدوده.</a:t>
+            </a:r>
+            <a:endParaRPr lang="en-US" sz="1350" dirty="0"/>
+          </a:p>
+        </p:txBody>
+      </p:sp>
+      <p:sp>
+        <p:nvSpPr>
+          <p:cNvPr id="6" name="Text 4"/>
+          <p:cNvSpPr txBox="1"/>
+          <p:nvPr/>
+        </p:nvSpPr>
+        <p:spPr>
+          <a:xfrm>
+            <a:off x="6370168" y="1783080"/>
+            <a:ext cx="5227168" cy="411480"/>
+          </a:xfrm>
+          <a:prstGeom prst="rect">
+            <a:avLst/>
+          </a:prstGeom>
+          <a:noFill/>
+          <a:ln/>
+        </p:spPr>
+        <p:txBody>
+          <a:bodyPr wrap="square" lIns="0" tIns="0" rIns="0" bIns="0" rtlCol="0" anchor="ctr"/>
+          <a:lstStyle/>
+          <a:p>
+            <a:pPr rtl="1" algn="r" indent="0" marL="0">
+              <a:buNone/>
+            </a:pPr>
+            <a:r>
+              <a:rPr lang="en-US" sz="1600" b="1" dirty="0">
+                <a:solidFill>
+                  <a:srgbClr val="2C6E49"/>
+                </a:solidFill>
+                <a:latin typeface="Arial" pitchFamily="34" charset="0"/>
+                <a:ea typeface="Arial" pitchFamily="34" charset="-122"/>
+                <a:cs typeface="Arial" pitchFamily="34" charset="-120"/>
+              </a:rPr>
+              <a:t>افتراضات العمل</a:t>
+            </a:r>
+            <a:endParaRPr lang="en-US" sz="1600" dirty="0"/>
+          </a:p>
+        </p:txBody>
+      </p:sp>
+      <p:sp>
+        <p:nvSpPr>
+          <p:cNvPr id="7" name="Text 5"/>
+          <p:cNvSpPr txBox="1"/>
+          <p:nvPr/>
+        </p:nvSpPr>
+        <p:spPr>
+          <a:xfrm>
+            <a:off x="6370168" y="2286000"/>
+            <a:ext cx="5227168" cy="2468880"/>
+          </a:xfrm>
+          <a:prstGeom prst="rect">
+            <a:avLst/>
+          </a:prstGeom>
+          <a:noFill/>
+          <a:ln/>
+        </p:spPr>
+        <p:txBody>
+          <a:bodyPr wrap="square" lIns="0" tIns="0" rIns="0" bIns="0" rtlCol="0" anchor="t"/>
+          <a:lstStyle/>
+          <a:p>
+            <a:pPr algn="r" marL="342900" indent="-342900">
+              <a:lnSpc>
+                <a:spcPct val="122000"/>
+              </a:lnSpc>
+              <a:spcAft>
+                <a:spcPts val="1000"/>
+              </a:spcAft>
+              <a:buSzPct val="100000"/>
+              <a:buChar char="•"/>
+            </a:pPr>
+            <a:r>
+              <a:rPr lang="en-US" sz="1350" dirty="0">
+                <a:solidFill>
+                  <a:srgbClr val="364239"/>
+                </a:solidFill>
+                <a:latin typeface="Arial" pitchFamily="34" charset="0"/>
+                <a:ea typeface="Arial" pitchFamily="34" charset="-122"/>
+                <a:cs typeface="Arial" pitchFamily="34" charset="-120"/>
+              </a:rPr>
+              <a:t>الأرقام رتب حجم مقرّبة، مأخوذة من أحدث البيانات العامة المتاحة.</a:t>
+            </a:r>
+            <a:endParaRPr lang="en-US" sz="1350" dirty="0"/>
+          </a:p>
+          <a:p>
+            <a:pPr algn="r" marL="342900" indent="-342900">
+              <a:lnSpc>
+                <a:spcPct val="122000"/>
+              </a:lnSpc>
+              <a:spcAft>
+                <a:spcPts val="1000"/>
+              </a:spcAft>
+              <a:buSzPct val="100000"/>
+              <a:buChar char="•"/>
+            </a:pPr>
+            <a:r>
+              <a:rPr lang="en-US" sz="1350" dirty="0">
+                <a:solidFill>
+                  <a:srgbClr val="364239"/>
+                </a:solidFill>
+                <a:latin typeface="Arial" pitchFamily="34" charset="0"/>
+                <a:ea typeface="Arial" pitchFamily="34" charset="-122"/>
+                <a:cs typeface="Arial" pitchFamily="34" charset="-120"/>
+              </a:rPr>
+              <a:t>توفير الماء وزيادة الإنتاج أرقام استرشادية تتغير بحسب التربة والمناخ والمحصول.</a:t>
+            </a:r>
+            <a:endParaRPr lang="en-US" sz="1350" dirty="0"/>
+          </a:p>
+          <a:p>
+            <a:pPr algn="r" marL="342900" indent="-342900">
+              <a:lnSpc>
+                <a:spcPct val="122000"/>
+              </a:lnSpc>
+              <a:spcAft>
+                <a:spcPts val="1000"/>
+              </a:spcAft>
+              <a:buSzPct val="100000"/>
+              <a:buChar char="•"/>
+            </a:pPr>
+            <a:r>
+              <a:rPr lang="en-US" sz="1350" dirty="0">
+                <a:solidFill>
+                  <a:srgbClr val="364239"/>
+                </a:solidFill>
+                <a:latin typeface="Arial" pitchFamily="34" charset="0"/>
+                <a:ea typeface="Arial" pitchFamily="34" charset="-122"/>
+                <a:cs typeface="Arial" pitchFamily="34" charset="-120"/>
+              </a:rPr>
+              <a:t>وثيقة عمل تجارية: تُحدَّث الأرقام قبل أي تقديم رسمي.</a:t>
+            </a:r>
+            <a:endParaRPr lang="en-US" sz="1350" dirty="0"/>
+          </a:p>
+        </p:txBody>
+      </p:sp>
+      <p:sp>
+        <p:nvSpPr>
+          <p:cNvPr id="8" name="Shape 6"/>
+          <p:cNvSpPr/>
+          <p:nvPr/>
+        </p:nvSpPr>
+        <p:spPr>
+          <a:xfrm>
+            <a:off x="594360" y="4846320"/>
+            <a:ext cx="11002975" cy="960120"/>
+          </a:xfrm>
+          <a:prstGeom prst="roundRect">
+            <a:avLst>
+              <a:gd name="adj" fmla="val 7619"/>
+            </a:avLst>
+          </a:prstGeom>
+          <a:solidFill>
+            <a:srgbClr val="F2F1E8"/>
+          </a:solidFill>
+          <a:ln w="9525">
+            <a:solidFill>
+              <a:srgbClr val="E0DFD0"/>
+            </a:solidFill>
+            <a:prstDash val="solid"/>
+          </a:ln>
+        </p:spPr>
+      </p:sp>
+      <p:sp>
+        <p:nvSpPr>
+          <p:cNvPr id="9" name="Text 7"/>
+          <p:cNvSpPr txBox="1"/>
+          <p:nvPr/>
+        </p:nvSpPr>
+        <p:spPr>
+          <a:xfrm>
+            <a:off x="822960" y="4983480"/>
+            <a:ext cx="10545775" cy="713232"/>
+          </a:xfrm>
+          <a:prstGeom prst="rect">
+            <a:avLst/>
+          </a:prstGeom>
+          <a:noFill/>
+          <a:ln/>
+        </p:spPr>
+        <p:txBody>
+          <a:bodyPr wrap="square" lIns="0" tIns="0" rIns="0" bIns="0" rtlCol="0" anchor="t"/>
+          <a:lstStyle/>
+          <a:p>
+            <a:pPr rtl="1" algn="r" indent="0" marL="0">
+              <a:lnSpc>
+                <a:spcPct val="118000"/>
+              </a:lnSpc>
+              <a:buNone/>
+            </a:pPr>
+            <a:r>
+              <a:rPr lang="en-US" sz="1100" dirty="0">
+                <a:solidFill>
+                  <a:srgbClr val="6F7D71"/>
+                </a:solidFill>
+                <a:latin typeface="Arial" pitchFamily="34" charset="0"/>
+                <a:ea typeface="Arial" pitchFamily="34" charset="-122"/>
+                <a:cs typeface="Arial" pitchFamily="34" charset="-120"/>
+              </a:rPr>
+              <a:t>تقارير التجارب والشهادات (SOHISCERT، وتحاليل Polymex وSGS) والنشرات الفنية متاحة عند الطلب.</a:t>
+            </a:r>
+            <a:endParaRPr lang="en-US" sz="1100" dirty="0"/>
+          </a:p>
+        </p:txBody>
+      </p:sp>
+      <p:sp>
+        <p:nvSpPr>
+          <p:cNvPr id="10" name="Text 8"/>
+          <p:cNvSpPr txBox="1"/>
+          <p:nvPr/>
+        </p:nvSpPr>
+        <p:spPr>
+          <a:xfrm>
+            <a:off x="502920" y="6382512"/>
+            <a:ext cx="8229600" cy="274320"/>
+          </a:xfrm>
+          <a:prstGeom prst="rect">
+            <a:avLst/>
+          </a:prstGeom>
+          <a:noFill/>
+          <a:ln/>
+        </p:spPr>
+        <p:txBody>
+          <a:bodyPr wrap="square" lIns="0" tIns="0" rIns="0" bIns="0" rtlCol="0" anchor="ctr"/>
+          <a:lstStyle/>
+          <a:p>
+            <a:pPr rtl="1" algn="r" indent="0" marL="0">
+              <a:buNone/>
+            </a:pPr>
+            <a:r>
+              <a:rPr lang="en-US" sz="950" dirty="0">
+                <a:solidFill>
+                  <a:srgbClr val="6F7D71">
+                    <a:alpha val="80000"/>
+                  </a:srgbClr>
+                </a:solidFill>
+                <a:latin typeface="Arial" pitchFamily="34" charset="0"/>
+                <a:ea typeface="Arial" pitchFamily="34" charset="-122"/>
+                <a:cs typeface="Arial" pitchFamily="34" charset="-120"/>
+              </a:rPr>
+              <a:t>Green Solutions · ملف السوق الزراعية الأردنية</a:t>
+            </a:r>
+            <a:endParaRPr lang="en-US" sz="950" dirty="0"/>
+          </a:p>
+        </p:txBody>
+      </p:sp>
+      <p:sp>
+        <p:nvSpPr>
+          <p:cNvPr id="11" name="Text 9"/>
+          <p:cNvSpPr txBox="1"/>
+          <p:nvPr/>
+        </p:nvSpPr>
+        <p:spPr>
+          <a:xfrm>
+            <a:off x="11140135" y="6382512"/>
+            <a:ext cx="548640" cy="274320"/>
+          </a:xfrm>
+          <a:prstGeom prst="rect">
+            <a:avLst/>
+          </a:prstGeom>
+          <a:noFill/>
+          <a:ln/>
+        </p:spPr>
+        <p:txBody>
+          <a:bodyPr wrap="square" lIns="0" tIns="0" rIns="0" bIns="0" rtlCol="0" anchor="ctr"/>
+          <a:lstStyle/>
+          <a:p>
+            <a:pPr rtl="1" algn="r" indent="0" marL="0">
+              <a:buNone/>
+            </a:pPr>
+            <a:r>
+              <a:rPr lang="en-US" sz="950" dirty="0">
+                <a:solidFill>
+                  <a:srgbClr val="6F7D71">
+                    <a:alpha val="80000"/>
+                  </a:srgbClr>
+                </a:solidFill>
+                <a:latin typeface="Arial" pitchFamily="34" charset="0"/>
+                <a:ea typeface="Arial" pitchFamily="34" charset="-122"/>
+                <a:cs typeface="Arial" pitchFamily="34" charset="-120"/>
+              </a:rPr>
+              <a:t>17</a:t>
+            </a:r>
+            <a:endParaRPr lang="en-US" sz="950" dirty="0"/>
+          </a:p>
+        </p:txBody>
+      </p:sp>
+    </p:spTree>
+  </p:cSld>
+  <p:clrMapOvr>
+    <a:masterClrMapping/>
+  </p:clrMapOvr>
+</p:sld>
+</file>
+
+<file path=ppt/slides/slide19.xml><?xml version="1.0" encoding="utf-8"?>
+<p:sld xmlns:a="http://schemas.openxmlformats.org/drawingml/2006/main" xmlns:r="http://schemas.openxmlformats.org/officeDocument/2006/relationships" xmlns:p="http://schemas.openxmlformats.org/presentationml/2006/main">
+  <p:cSld name="Slide 19">
     <p:spTree>
       <p:nvGrpSpPr>
         <p:cNvPr id="1" name=""/>
@@ -9567,7 +10284,7 @@
       </p:sp>
       <p:pic>
         <p:nvPicPr>
-          <p:cNvPr id="6" name="Image 1" descr="C:\Users\Utilisateur\dev\green-solutions-web\scripts\dossiers\sceau-aim-clair.png">    </p:cNvPr>
+          <p:cNvPr id="6" name="Image 1" descr="/workspace/scratch/50eb4f7d8e13/green-solutions-web/scripts/dossiers/sceau-aim-clair.png">    </p:cNvPr>
           <p:cNvPicPr>
             <a:picLocks noChangeAspect="1"/>
           </p:cNvPicPr>
@@ -9667,7 +10384,7 @@
                 <a:ea typeface="Arial" pitchFamily="34" charset="-122"/>
                 <a:cs typeface="Arial" pitchFamily="34" charset="-120"/>
               </a:rPr>
-              <a:t>17</a:t>
+              <a:t>18</a:t>
             </a:r>
             <a:endParaRPr lang="en-US" sz="950" dirty="0"/>
           </a:p>
@@ -10801,7 +11518,7 @@
                 <a:ea typeface="Arial" pitchFamily="34" charset="-122"/>
                 <a:cs typeface="Arial" pitchFamily="34" charset="-120"/>
               </a:rPr>
-              <a:t>أين تذهب المياه</a:t>
+              <a:t>الجفاف والإجهاد المائي</a:t>
             </a:r>
             <a:endParaRPr lang="en-US" sz="1150" dirty="0"/>
           </a:p>
@@ -10840,7 +11557,7 @@
                 <a:ea typeface="Arial" pitchFamily="34" charset="-122"/>
                 <a:cs typeface="Arial" pitchFamily="34" charset="-120"/>
               </a:rPr>
-              <a:t>الري يستحوذ على أكثر من نصف المسحوب</a:t>
+              <a:t>الضغط يتزايد، لكن المخاطر تبقى محلية</a:t>
             </a:r>
             <a:endParaRPr lang="en-US" sz="3000" dirty="0"/>
           </a:p>
@@ -10922,7 +11639,7 @@
                 <a:ea typeface="Arial" pitchFamily="34" charset="-122"/>
                 <a:cs typeface="Arial" pitchFamily="34" charset="-120"/>
               </a:rPr>
-              <a:t>ما الذي يعنيه ذلك</a:t>
+              <a:t>مؤشران مختلفان</a:t>
             </a:r>
             <a:endParaRPr lang="en-US" sz="1300" dirty="0"/>
           </a:p>
@@ -10964,7 +11681,7 @@
                 <a:ea typeface="Arial" pitchFamily="34" charset="-122"/>
                 <a:cs typeface="Arial" pitchFamily="34" charset="-120"/>
               </a:rPr>
-              <a:t>خفض استهلاك الري بنسبة 10 % يوفّر حجماً أكبر مما يوفّره إلغاء الاستخدام الصناعي بالكامل.</a:t>
+              <a:t>عالمياً، ارتفع عدد فترات الجفاف ومدتها بنسبة 29٪ منذ عام 2000 مقارنة بالعقدين السابقين.</a:t>
             </a:r>
             <a:endParaRPr lang="en-US" sz="1200" dirty="0"/>
           </a:p>
@@ -10993,7 +11710,7 @@
                 <a:ea typeface="Arial" pitchFamily="34" charset="-122"/>
                 <a:cs typeface="Arial" pitchFamily="34" charset="-120"/>
               </a:rPr>
-              <a:t>حصة مياه الشرب هنا مرتفعة بمقاييس المنطقة بفعل النمو السكاني، ما يجعل أي توسّع زراعي مرهوناً بترشيد ما هو قائم.</a:t>
+              <a:t>أما الإجهاد المائي فيقيس نسبة السحب إلى الموارد المتجددة المتاحة بعد الاحتياجات البيئية. لذلك لا تمثل هذه الإشارة العالمية توقعاً خاصاً بالدولة، بل يجب قراءتها مع الأمطار والمياه الجوفية والمواسم والاستخدامات المحلية.</a:t>
             </a:r>
             <a:endParaRPr lang="en-US" sz="1200" dirty="0"/>
           </a:p>
@@ -11146,7 +11863,7 @@
                 <a:ea typeface="Arial" pitchFamily="34" charset="-122"/>
                 <a:cs typeface="Arial" pitchFamily="34" charset="-120"/>
               </a:rPr>
-              <a:t>الاقتصاد والأمن الغذائي</a:t>
+              <a:t>أين تذهب المياه</a:t>
             </a:r>
             <a:endParaRPr lang="en-US" sz="1150" dirty="0"/>
           </a:p>
@@ -11185,26 +11902,42 @@
                 <a:ea typeface="Arial" pitchFamily="34" charset="-122"/>
                 <a:cs typeface="Arial" pitchFamily="34" charset="-120"/>
               </a:rPr>
-              <a:t>بلد يستورد حبوبه ويصدّر خضرواته</a:t>
+              <a:t>الري يستحوذ على أكثر من نصف المسحوب</a:t>
             </a:r>
             <a:endParaRPr lang="en-US" sz="3000" dirty="0"/>
           </a:p>
         </p:txBody>
       </p:sp>
-      <p:sp>
-        <p:nvSpPr>
-          <p:cNvPr id="4" name="Shape 2"/>
+      <p:graphicFrame>
+        <p:nvGraphicFramePr>
+          <p:cNvPr id="4" name="Chart 0" descr=""/>
+          <p:cNvGraphicFramePr/>
+          <p:nvPr/>
+        </p:nvGraphicFramePr>
+        <p:xfrm>
+          <a:off x="594360" y="1783080"/>
+          <a:ext cx="7360920" cy="3977640"/>
+        </p:xfrm>
+        <a:graphic xmlns:a="http://schemas.openxmlformats.org/drawingml/2006/main">
+          <a:graphicData uri="http://schemas.openxmlformats.org/drawingml/2006/chart">
+            <c:chart xmlns:c="http://schemas.openxmlformats.org/drawingml/2006/chart" r:id="rId1"/>
+          </a:graphicData>
+        </a:graphic>
+      </p:graphicFrame>
+      <p:sp>
+        <p:nvSpPr>
+          <p:cNvPr id="5" name="Shape 2"/>
           <p:cNvSpPr/>
           <p:nvPr/>
         </p:nvSpPr>
         <p:spPr>
           <a:xfrm>
-            <a:off x="594360" y="1874520"/>
-            <a:ext cx="3484778" cy="2514600"/>
+            <a:off x="8275320" y="1783080"/>
+            <a:ext cx="3291840" cy="3977640"/>
           </a:xfrm>
           <a:prstGeom prst="roundRect">
             <a:avLst>
-              <a:gd name="adj" fmla="val 3636"/>
+              <a:gd name="adj" fmla="val 2778"/>
             </a:avLst>
           </a:prstGeom>
           <a:solidFill>
@@ -11220,14 +11953,14 @@
       </p:sp>
       <p:sp>
         <p:nvSpPr>
-          <p:cNvPr id="5" name="Text 3"/>
-          <p:cNvSpPr txBox="1"/>
-          <p:nvPr/>
-        </p:nvSpPr>
-        <p:spPr>
-          <a:xfrm>
-            <a:off x="777240" y="2148840"/>
-            <a:ext cx="3119018" cy="960120"/>
+          <p:cNvPr id="6" name="Text 3"/>
+          <p:cNvSpPr txBox="1"/>
+          <p:nvPr/>
+        </p:nvSpPr>
+        <p:spPr>
+          <a:xfrm>
+            <a:off x="8503920" y="2011680"/>
+            <a:ext cx="2834640" cy="457200"/>
           </a:xfrm>
           <a:prstGeom prst="rect">
             <a:avLst/>
@@ -11239,11 +11972,11 @@
           <a:bodyPr wrap="square" lIns="0" tIns="0" rIns="0" bIns="0" rtlCol="0" anchor="ctr"/>
           <a:lstStyle/>
           <a:p>
-            <a:pPr rtl="1" algn="ctr" indent="0" marL="0">
-              <a:buNone/>
-            </a:pPr>
-            <a:r>
-              <a:rPr lang="en-US" sz="3800" b="1" dirty="0">
+            <a:pPr rtl="1" algn="r" indent="0" marL="0">
+              <a:buNone/>
+            </a:pPr>
+            <a:r>
+              <a:rPr lang="en-US" sz="1300" b="1" dirty="0">
                 <a:solidFill>
                   <a:srgbClr val="2C6E49"/>
                 </a:solidFill>
@@ -11251,280 +11984,22 @@
                 <a:ea typeface="Arial" pitchFamily="34" charset="-122"/>
                 <a:cs typeface="Arial" pitchFamily="34" charset="-120"/>
               </a:rPr>
-              <a:t>&gt; 90 %</a:t>
-            </a:r>
-            <a:endParaRPr lang="en-US" sz="3800" dirty="0"/>
-          </a:p>
-        </p:txBody>
-      </p:sp>
-      <p:sp>
-        <p:nvSpPr>
-          <p:cNvPr id="6" name="Text 4"/>
-          <p:cNvSpPr txBox="1"/>
-          <p:nvPr/>
-        </p:nvSpPr>
-        <p:spPr>
-          <a:xfrm>
-            <a:off x="795528" y="3154680"/>
-            <a:ext cx="3082442" cy="1051560"/>
-          </a:xfrm>
-          <a:prstGeom prst="rect">
-            <a:avLst/>
-          </a:prstGeom>
-          <a:noFill/>
-          <a:ln/>
-        </p:spPr>
-        <p:txBody>
-          <a:bodyPr wrap="square" lIns="0" tIns="0" rIns="0" bIns="0" rtlCol="0" anchor="t"/>
-          <a:lstStyle/>
-          <a:p>
-            <a:pPr rtl="1" algn="ctr" indent="0" marL="0">
-              <a:lnSpc>
-                <a:spcPct val="118000"/>
-              </a:lnSpc>
-              <a:buNone/>
-            </a:pPr>
-            <a:r>
-              <a:rPr lang="en-US" sz="1250" dirty="0">
-                <a:solidFill>
-                  <a:srgbClr val="364239"/>
-                </a:solidFill>
-                <a:latin typeface="Arial" pitchFamily="34" charset="0"/>
-                <a:ea typeface="Arial" pitchFamily="34" charset="-122"/>
-                <a:cs typeface="Arial" pitchFamily="34" charset="-120"/>
-              </a:rPr>
-              <a:t>من القمح والحبوب المستهلكة مستوردة</a:t>
-            </a:r>
-            <a:endParaRPr lang="en-US" sz="1250" dirty="0"/>
-          </a:p>
-        </p:txBody>
-      </p:sp>
-      <p:sp>
-        <p:nvSpPr>
-          <p:cNvPr id="7" name="Shape 5"/>
-          <p:cNvSpPr/>
-          <p:nvPr/>
-        </p:nvSpPr>
-        <p:spPr>
-          <a:xfrm>
-            <a:off x="4353458" y="1874520"/>
-            <a:ext cx="3484778" cy="2514600"/>
-          </a:xfrm>
-          <a:prstGeom prst="roundRect">
-            <a:avLst>
-              <a:gd name="adj" fmla="val 3636"/>
-            </a:avLst>
-          </a:prstGeom>
-          <a:solidFill>
-            <a:srgbClr val="F2F1E8"/>
-          </a:solidFill>
-          <a:ln w="9525">
-            <a:solidFill>
-              <a:srgbClr val="E0DFD0"/>
-            </a:solidFill>
-            <a:prstDash val="solid"/>
-          </a:ln>
-        </p:spPr>
-      </p:sp>
-      <p:sp>
-        <p:nvSpPr>
-          <p:cNvPr id="8" name="Text 6"/>
-          <p:cNvSpPr txBox="1"/>
-          <p:nvPr/>
-        </p:nvSpPr>
-        <p:spPr>
-          <a:xfrm>
-            <a:off x="4536338" y="2148840"/>
-            <a:ext cx="3119018" cy="960120"/>
-          </a:xfrm>
-          <a:prstGeom prst="rect">
-            <a:avLst/>
-          </a:prstGeom>
-          <a:noFill/>
-          <a:ln/>
-        </p:spPr>
-        <p:txBody>
-          <a:bodyPr wrap="square" lIns="0" tIns="0" rIns="0" bIns="0" rtlCol="0" anchor="ctr"/>
-          <a:lstStyle/>
-          <a:p>
-            <a:pPr rtl="1" algn="ctr" indent="0" marL="0">
-              <a:buNone/>
-            </a:pPr>
-            <a:r>
-              <a:rPr lang="en-US" sz="3000" b="1" dirty="0">
-                <a:solidFill>
-                  <a:srgbClr val="2C6E49"/>
-                </a:solidFill>
-                <a:latin typeface="Arial" pitchFamily="34" charset="0"/>
-                <a:ea typeface="Arial" pitchFamily="34" charset="-122"/>
-                <a:cs typeface="Arial" pitchFamily="34" charset="-120"/>
-              </a:rPr>
-              <a:t>≈ 17 مليون</a:t>
-            </a:r>
-            <a:endParaRPr lang="en-US" sz="3000" dirty="0"/>
-          </a:p>
-        </p:txBody>
-      </p:sp>
-      <p:sp>
-        <p:nvSpPr>
-          <p:cNvPr id="9" name="Text 7"/>
-          <p:cNvSpPr txBox="1"/>
-          <p:nvPr/>
-        </p:nvSpPr>
-        <p:spPr>
-          <a:xfrm>
-            <a:off x="4554626" y="3154680"/>
-            <a:ext cx="3082442" cy="1051560"/>
-          </a:xfrm>
-          <a:prstGeom prst="rect">
-            <a:avLst/>
-          </a:prstGeom>
-          <a:noFill/>
-          <a:ln/>
-        </p:spPr>
-        <p:txBody>
-          <a:bodyPr wrap="square" lIns="0" tIns="0" rIns="0" bIns="0" rtlCol="0" anchor="t"/>
-          <a:lstStyle/>
-          <a:p>
-            <a:pPr rtl="1" algn="ctr" indent="0" marL="0">
-              <a:lnSpc>
-                <a:spcPct val="118000"/>
-              </a:lnSpc>
-              <a:buNone/>
-            </a:pPr>
-            <a:r>
-              <a:rPr lang="en-US" sz="1250" dirty="0">
-                <a:solidFill>
-                  <a:srgbClr val="364239"/>
-                </a:solidFill>
-                <a:latin typeface="Arial" pitchFamily="34" charset="0"/>
-                <a:ea typeface="Arial" pitchFamily="34" charset="-122"/>
-                <a:cs typeface="Arial" pitchFamily="34" charset="-120"/>
-              </a:rPr>
-              <a:t>شجرة زيتون، أهم شجرة مثمرة في المملكة</a:t>
-            </a:r>
-            <a:endParaRPr lang="en-US" sz="1250" dirty="0"/>
-          </a:p>
-        </p:txBody>
-      </p:sp>
-      <p:sp>
-        <p:nvSpPr>
-          <p:cNvPr id="10" name="Shape 8"/>
-          <p:cNvSpPr/>
-          <p:nvPr/>
-        </p:nvSpPr>
-        <p:spPr>
-          <a:xfrm>
-            <a:off x="8112557" y="1874520"/>
-            <a:ext cx="3484778" cy="2514600"/>
-          </a:xfrm>
-          <a:prstGeom prst="roundRect">
-            <a:avLst>
-              <a:gd name="adj" fmla="val 3636"/>
-            </a:avLst>
-          </a:prstGeom>
-          <a:solidFill>
-            <a:srgbClr val="F2F1E8"/>
-          </a:solidFill>
-          <a:ln w="9525">
-            <a:solidFill>
-              <a:srgbClr val="E0DFD0"/>
-            </a:solidFill>
-            <a:prstDash val="solid"/>
-          </a:ln>
-        </p:spPr>
-      </p:sp>
-      <p:sp>
-        <p:nvSpPr>
-          <p:cNvPr id="11" name="Text 9"/>
-          <p:cNvSpPr txBox="1"/>
-          <p:nvPr/>
-        </p:nvSpPr>
-        <p:spPr>
-          <a:xfrm>
-            <a:off x="8295437" y="2148840"/>
-            <a:ext cx="3119018" cy="960120"/>
-          </a:xfrm>
-          <a:prstGeom prst="rect">
-            <a:avLst/>
-          </a:prstGeom>
-          <a:noFill/>
-          <a:ln/>
-        </p:spPr>
-        <p:txBody>
-          <a:bodyPr wrap="square" lIns="0" tIns="0" rIns="0" bIns="0" rtlCol="0" anchor="ctr"/>
-          <a:lstStyle/>
-          <a:p>
-            <a:pPr rtl="1" algn="ctr" indent="0" marL="0">
-              <a:buNone/>
-            </a:pPr>
-            <a:r>
-              <a:rPr lang="en-US" sz="3800" b="1" dirty="0">
-                <a:solidFill>
-                  <a:srgbClr val="2C6E49"/>
-                </a:solidFill>
-                <a:latin typeface="Arial" pitchFamily="34" charset="0"/>
-                <a:ea typeface="Arial" pitchFamily="34" charset="-122"/>
-                <a:cs typeface="Arial" pitchFamily="34" charset="-120"/>
-              </a:rPr>
-              <a:t>≈ 2 %</a:t>
-            </a:r>
-            <a:endParaRPr lang="en-US" sz="3800" dirty="0"/>
-          </a:p>
-        </p:txBody>
-      </p:sp>
-      <p:sp>
-        <p:nvSpPr>
-          <p:cNvPr id="12" name="Text 10"/>
-          <p:cNvSpPr txBox="1"/>
-          <p:nvPr/>
-        </p:nvSpPr>
-        <p:spPr>
-          <a:xfrm>
-            <a:off x="8313725" y="3154680"/>
-            <a:ext cx="3082442" cy="1051560"/>
-          </a:xfrm>
-          <a:prstGeom prst="rect">
-            <a:avLst/>
-          </a:prstGeom>
-          <a:noFill/>
-          <a:ln/>
-        </p:spPr>
-        <p:txBody>
-          <a:bodyPr wrap="square" lIns="0" tIns="0" rIns="0" bIns="0" rtlCol="0" anchor="t"/>
-          <a:lstStyle/>
-          <a:p>
-            <a:pPr rtl="1" algn="ctr" indent="0" marL="0">
-              <a:lnSpc>
-                <a:spcPct val="118000"/>
-              </a:lnSpc>
-              <a:buNone/>
-            </a:pPr>
-            <a:r>
-              <a:rPr lang="en-US" sz="1250" dirty="0">
-                <a:solidFill>
-                  <a:srgbClr val="364239"/>
-                </a:solidFill>
-                <a:latin typeface="Arial" pitchFamily="34" charset="0"/>
-                <a:ea typeface="Arial" pitchFamily="34" charset="-122"/>
-                <a:cs typeface="Arial" pitchFamily="34" charset="-120"/>
-              </a:rPr>
-              <a:t>من مساحة المملكة أراضٍ صالحة للزراعة</a:t>
-            </a:r>
-            <a:endParaRPr lang="en-US" sz="1250" dirty="0"/>
-          </a:p>
-        </p:txBody>
-      </p:sp>
-      <p:sp>
-        <p:nvSpPr>
-          <p:cNvPr id="13" name="Text 11"/>
-          <p:cNvSpPr txBox="1"/>
-          <p:nvPr/>
-        </p:nvSpPr>
-        <p:spPr>
-          <a:xfrm>
-            <a:off x="594360" y="4709160"/>
-            <a:ext cx="11002975" cy="1097280"/>
+              <a:t>ما الذي يعنيه ذلك</a:t>
+            </a:r>
+            <a:endParaRPr lang="en-US" sz="1300" dirty="0"/>
+          </a:p>
+        </p:txBody>
+      </p:sp>
+      <p:sp>
+        <p:nvSpPr>
+          <p:cNvPr id="7" name="Text 4"/>
+          <p:cNvSpPr txBox="1"/>
+          <p:nvPr/>
+        </p:nvSpPr>
+        <p:spPr>
+          <a:xfrm>
+            <a:off x="8503920" y="2560320"/>
+            <a:ext cx="2834640" cy="3017520"/>
           </a:xfrm>
           <a:prstGeom prst="rect">
             <a:avLst/>
@@ -11538,12 +12013,12 @@
           <a:p>
             <a:pPr rtl="1" algn="r" indent="0" marL="0">
               <a:lnSpc>
-                <a:spcPct val="130000"/>
+                <a:spcPct val="125000"/>
               </a:lnSpc>
               <a:buNone/>
             </a:pPr>
             <a:r>
-              <a:rPr lang="en-US" sz="1350" dirty="0">
+              <a:rPr lang="en-US" sz="1200" dirty="0">
                 <a:solidFill>
                   <a:srgbClr val="364239"/>
                 </a:solidFill>
@@ -11551,15 +12026,44 @@
                 <a:ea typeface="Arial" pitchFamily="34" charset="-122"/>
                 <a:cs typeface="Arial" pitchFamily="34" charset="-120"/>
               </a:rPr>
-              <a:t>تتركز صادرات الأردن الزراعية في الخضروات والفواكه المتجهة أساساً إلى أسواق الخليج، بينما يعتمد على الخارج في القمح والأعلاف. وتضع الاستراتيجية الوطنية للمياه إعادة استخدام المياه المعالجة وترشيد الري في قلب أي توسع زراعي.</a:t>
-            </a:r>
-            <a:endParaRPr lang="en-US" sz="1350" dirty="0"/>
-          </a:p>
-        </p:txBody>
-      </p:sp>
-      <p:sp>
-        <p:nvSpPr>
-          <p:cNvPr id="14" name="Text 12"/>
+              <a:t>خفض استهلاك الري بنسبة 10 % يوفّر حجماً أكبر مما يوفّره إلغاء الاستخدام الصناعي بالكامل.</a:t>
+            </a:r>
+            <a:endParaRPr lang="en-US" sz="1200" dirty="0"/>
+          </a:p>
+          <a:p>
+            <a:pPr rtl="1" algn="r" indent="0" marL="0">
+              <a:lnSpc>
+                <a:spcPct val="125000"/>
+              </a:lnSpc>
+              <a:buNone/>
+            </a:pPr>
+            <a:endParaRPr lang="en-US" sz="1200" dirty="0"/>
+          </a:p>
+          <a:p>
+            <a:pPr rtl="1" algn="r" indent="0" marL="0">
+              <a:lnSpc>
+                <a:spcPct val="125000"/>
+              </a:lnSpc>
+              <a:buNone/>
+            </a:pPr>
+            <a:r>
+              <a:rPr lang="en-US" sz="1200" dirty="0">
+                <a:solidFill>
+                  <a:srgbClr val="364239"/>
+                </a:solidFill>
+                <a:latin typeface="Arial" pitchFamily="34" charset="0"/>
+                <a:ea typeface="Arial" pitchFamily="34" charset="-122"/>
+                <a:cs typeface="Arial" pitchFamily="34" charset="-120"/>
+              </a:rPr>
+              <a:t>حصة مياه الشرب هنا مرتفعة بمقاييس المنطقة بفعل النمو السكاني، ما يجعل أي توسّع زراعي مرهوناً بترشيد ما هو قائم.</a:t>
+            </a:r>
+            <a:endParaRPr lang="en-US" sz="1200" dirty="0"/>
+          </a:p>
+        </p:txBody>
+      </p:sp>
+      <p:sp>
+        <p:nvSpPr>
+          <p:cNvPr id="8" name="Text 5"/>
           <p:cNvSpPr txBox="1"/>
           <p:nvPr/>
         </p:nvSpPr>
@@ -11600,7 +12104,7 @@
       </p:sp>
       <p:sp>
         <p:nvSpPr>
-          <p:cNvPr id="15" name="Text 13"/>
+          <p:cNvPr id="9" name="Text 6"/>
           <p:cNvSpPr txBox="1"/>
           <p:nvPr/>
         </p:nvSpPr>
@@ -11704,7 +12208,7 @@
                 <a:ea typeface="Arial" pitchFamily="34" charset="-122"/>
                 <a:cs typeface="Arial" pitchFamily="34" charset="-120"/>
               </a:rPr>
-              <a:t>المحاصيل</a:t>
+              <a:t>الاقتصاد والأمن الغذائي</a:t>
             </a:r>
             <a:endParaRPr lang="en-US" sz="1150" dirty="0"/>
           </a:p>
@@ -11743,42 +12247,26 @@
                 <a:ea typeface="Arial" pitchFamily="34" charset="-122"/>
                 <a:cs typeface="Arial" pitchFamily="34" charset="-120"/>
               </a:rPr>
-              <a:t>خمسة محاصيل تشكّل عصب الإنتاج والتصدير</a:t>
+              <a:t>بلد يستورد حبوبه ويصدّر خضرواته</a:t>
             </a:r>
             <a:endParaRPr lang="en-US" sz="3000" dirty="0"/>
           </a:p>
         </p:txBody>
       </p:sp>
-      <p:graphicFrame>
-        <p:nvGraphicFramePr>
-          <p:cNvPr id="4" name="Chart 0" descr=""/>
-          <p:cNvGraphicFramePr/>
-          <p:nvPr/>
-        </p:nvGraphicFramePr>
-        <p:xfrm>
-          <a:off x="594360" y="1783080"/>
-          <a:ext cx="7360920" cy="3977640"/>
-        </p:xfrm>
-        <a:graphic xmlns:a="http://schemas.openxmlformats.org/drawingml/2006/main">
-          <a:graphicData uri="http://schemas.openxmlformats.org/drawingml/2006/chart">
-            <c:chart xmlns:c="http://schemas.openxmlformats.org/drawingml/2006/chart" r:id="rId1"/>
-          </a:graphicData>
-        </a:graphic>
-      </p:graphicFrame>
-      <p:sp>
-        <p:nvSpPr>
-          <p:cNvPr id="5" name="Shape 2"/>
+      <p:sp>
+        <p:nvSpPr>
+          <p:cNvPr id="4" name="Shape 2"/>
           <p:cNvSpPr/>
           <p:nvPr/>
         </p:nvSpPr>
         <p:spPr>
           <a:xfrm>
-            <a:off x="8275320" y="1783080"/>
-            <a:ext cx="3291840" cy="3977640"/>
+            <a:off x="594360" y="1874520"/>
+            <a:ext cx="3484778" cy="2514600"/>
           </a:xfrm>
           <a:prstGeom prst="roundRect">
             <a:avLst>
-              <a:gd name="adj" fmla="val 2778"/>
+              <a:gd name="adj" fmla="val 3636"/>
             </a:avLst>
           </a:prstGeom>
           <a:solidFill>
@@ -11794,14 +12282,14 @@
       </p:sp>
       <p:sp>
         <p:nvSpPr>
-          <p:cNvPr id="6" name="Text 3"/>
-          <p:cNvSpPr txBox="1"/>
-          <p:nvPr/>
-        </p:nvSpPr>
-        <p:spPr>
-          <a:xfrm>
-            <a:off x="8503920" y="2011680"/>
-            <a:ext cx="2834640" cy="457200"/>
+          <p:cNvPr id="5" name="Text 3"/>
+          <p:cNvSpPr txBox="1"/>
+          <p:nvPr/>
+        </p:nvSpPr>
+        <p:spPr>
+          <a:xfrm>
+            <a:off x="777240" y="2148840"/>
+            <a:ext cx="3119018" cy="960120"/>
           </a:xfrm>
           <a:prstGeom prst="rect">
             <a:avLst/>
@@ -11813,11 +12301,11 @@
           <a:bodyPr wrap="square" lIns="0" tIns="0" rIns="0" bIns="0" rtlCol="0" anchor="ctr"/>
           <a:lstStyle/>
           <a:p>
-            <a:pPr rtl="1" algn="r" indent="0" marL="0">
-              <a:buNone/>
-            </a:pPr>
-            <a:r>
-              <a:rPr lang="en-US" sz="1300" b="1" dirty="0">
+            <a:pPr rtl="1" algn="ctr" indent="0" marL="0">
+              <a:buNone/>
+            </a:pPr>
+            <a:r>
+              <a:rPr lang="en-US" sz="3800" b="1" dirty="0">
                 <a:solidFill>
                   <a:srgbClr val="2C6E49"/>
                 </a:solidFill>
@@ -11825,22 +12313,280 @@
                 <a:ea typeface="Arial" pitchFamily="34" charset="-122"/>
                 <a:cs typeface="Arial" pitchFamily="34" charset="-120"/>
               </a:rPr>
-              <a:t>قراءة</a:t>
-            </a:r>
-            <a:endParaRPr lang="en-US" sz="1300" dirty="0"/>
-          </a:p>
-        </p:txBody>
-      </p:sp>
-      <p:sp>
-        <p:nvSpPr>
-          <p:cNvPr id="7" name="Text 4"/>
-          <p:cNvSpPr txBox="1"/>
-          <p:nvPr/>
-        </p:nvSpPr>
-        <p:spPr>
-          <a:xfrm>
-            <a:off x="8503920" y="2560320"/>
-            <a:ext cx="2834640" cy="3017520"/>
+              <a:t>&gt; 90 %</a:t>
+            </a:r>
+            <a:endParaRPr lang="en-US" sz="3800" dirty="0"/>
+          </a:p>
+        </p:txBody>
+      </p:sp>
+      <p:sp>
+        <p:nvSpPr>
+          <p:cNvPr id="6" name="Text 4"/>
+          <p:cNvSpPr txBox="1"/>
+          <p:nvPr/>
+        </p:nvSpPr>
+        <p:spPr>
+          <a:xfrm>
+            <a:off x="795528" y="3154680"/>
+            <a:ext cx="3082442" cy="1051560"/>
+          </a:xfrm>
+          <a:prstGeom prst="rect">
+            <a:avLst/>
+          </a:prstGeom>
+          <a:noFill/>
+          <a:ln/>
+        </p:spPr>
+        <p:txBody>
+          <a:bodyPr wrap="square" lIns="0" tIns="0" rIns="0" bIns="0" rtlCol="0" anchor="t"/>
+          <a:lstStyle/>
+          <a:p>
+            <a:pPr rtl="1" algn="ctr" indent="0" marL="0">
+              <a:lnSpc>
+                <a:spcPct val="118000"/>
+              </a:lnSpc>
+              <a:buNone/>
+            </a:pPr>
+            <a:r>
+              <a:rPr lang="en-US" sz="1250" dirty="0">
+                <a:solidFill>
+                  <a:srgbClr val="364239"/>
+                </a:solidFill>
+                <a:latin typeface="Arial" pitchFamily="34" charset="0"/>
+                <a:ea typeface="Arial" pitchFamily="34" charset="-122"/>
+                <a:cs typeface="Arial" pitchFamily="34" charset="-120"/>
+              </a:rPr>
+              <a:t>من القمح والحبوب المستهلكة مستوردة</a:t>
+            </a:r>
+            <a:endParaRPr lang="en-US" sz="1250" dirty="0"/>
+          </a:p>
+        </p:txBody>
+      </p:sp>
+      <p:sp>
+        <p:nvSpPr>
+          <p:cNvPr id="7" name="Shape 5"/>
+          <p:cNvSpPr/>
+          <p:nvPr/>
+        </p:nvSpPr>
+        <p:spPr>
+          <a:xfrm>
+            <a:off x="4353458" y="1874520"/>
+            <a:ext cx="3484778" cy="2514600"/>
+          </a:xfrm>
+          <a:prstGeom prst="roundRect">
+            <a:avLst>
+              <a:gd name="adj" fmla="val 3636"/>
+            </a:avLst>
+          </a:prstGeom>
+          <a:solidFill>
+            <a:srgbClr val="F2F1E8"/>
+          </a:solidFill>
+          <a:ln w="9525">
+            <a:solidFill>
+              <a:srgbClr val="E0DFD0"/>
+            </a:solidFill>
+            <a:prstDash val="solid"/>
+          </a:ln>
+        </p:spPr>
+      </p:sp>
+      <p:sp>
+        <p:nvSpPr>
+          <p:cNvPr id="8" name="Text 6"/>
+          <p:cNvSpPr txBox="1"/>
+          <p:nvPr/>
+        </p:nvSpPr>
+        <p:spPr>
+          <a:xfrm>
+            <a:off x="4536338" y="2148840"/>
+            <a:ext cx="3119018" cy="960120"/>
+          </a:xfrm>
+          <a:prstGeom prst="rect">
+            <a:avLst/>
+          </a:prstGeom>
+          <a:noFill/>
+          <a:ln/>
+        </p:spPr>
+        <p:txBody>
+          <a:bodyPr wrap="square" lIns="0" tIns="0" rIns="0" bIns="0" rtlCol="0" anchor="ctr"/>
+          <a:lstStyle/>
+          <a:p>
+            <a:pPr rtl="1" algn="ctr" indent="0" marL="0">
+              <a:buNone/>
+            </a:pPr>
+            <a:r>
+              <a:rPr lang="en-US" sz="3000" b="1" dirty="0">
+                <a:solidFill>
+                  <a:srgbClr val="2C6E49"/>
+                </a:solidFill>
+                <a:latin typeface="Arial" pitchFamily="34" charset="0"/>
+                <a:ea typeface="Arial" pitchFamily="34" charset="-122"/>
+                <a:cs typeface="Arial" pitchFamily="34" charset="-120"/>
+              </a:rPr>
+              <a:t>≈ 17 مليون</a:t>
+            </a:r>
+            <a:endParaRPr lang="en-US" sz="3000" dirty="0"/>
+          </a:p>
+        </p:txBody>
+      </p:sp>
+      <p:sp>
+        <p:nvSpPr>
+          <p:cNvPr id="9" name="Text 7"/>
+          <p:cNvSpPr txBox="1"/>
+          <p:nvPr/>
+        </p:nvSpPr>
+        <p:spPr>
+          <a:xfrm>
+            <a:off x="4554626" y="3154680"/>
+            <a:ext cx="3082442" cy="1051560"/>
+          </a:xfrm>
+          <a:prstGeom prst="rect">
+            <a:avLst/>
+          </a:prstGeom>
+          <a:noFill/>
+          <a:ln/>
+        </p:spPr>
+        <p:txBody>
+          <a:bodyPr wrap="square" lIns="0" tIns="0" rIns="0" bIns="0" rtlCol="0" anchor="t"/>
+          <a:lstStyle/>
+          <a:p>
+            <a:pPr rtl="1" algn="ctr" indent="0" marL="0">
+              <a:lnSpc>
+                <a:spcPct val="118000"/>
+              </a:lnSpc>
+              <a:buNone/>
+            </a:pPr>
+            <a:r>
+              <a:rPr lang="en-US" sz="1250" dirty="0">
+                <a:solidFill>
+                  <a:srgbClr val="364239"/>
+                </a:solidFill>
+                <a:latin typeface="Arial" pitchFamily="34" charset="0"/>
+                <a:ea typeface="Arial" pitchFamily="34" charset="-122"/>
+                <a:cs typeface="Arial" pitchFamily="34" charset="-120"/>
+              </a:rPr>
+              <a:t>شجرة زيتون، أهم شجرة مثمرة في المملكة</a:t>
+            </a:r>
+            <a:endParaRPr lang="en-US" sz="1250" dirty="0"/>
+          </a:p>
+        </p:txBody>
+      </p:sp>
+      <p:sp>
+        <p:nvSpPr>
+          <p:cNvPr id="10" name="Shape 8"/>
+          <p:cNvSpPr/>
+          <p:nvPr/>
+        </p:nvSpPr>
+        <p:spPr>
+          <a:xfrm>
+            <a:off x="8112557" y="1874520"/>
+            <a:ext cx="3484778" cy="2514600"/>
+          </a:xfrm>
+          <a:prstGeom prst="roundRect">
+            <a:avLst>
+              <a:gd name="adj" fmla="val 3636"/>
+            </a:avLst>
+          </a:prstGeom>
+          <a:solidFill>
+            <a:srgbClr val="F2F1E8"/>
+          </a:solidFill>
+          <a:ln w="9525">
+            <a:solidFill>
+              <a:srgbClr val="E0DFD0"/>
+            </a:solidFill>
+            <a:prstDash val="solid"/>
+          </a:ln>
+        </p:spPr>
+      </p:sp>
+      <p:sp>
+        <p:nvSpPr>
+          <p:cNvPr id="11" name="Text 9"/>
+          <p:cNvSpPr txBox="1"/>
+          <p:nvPr/>
+        </p:nvSpPr>
+        <p:spPr>
+          <a:xfrm>
+            <a:off x="8295437" y="2148840"/>
+            <a:ext cx="3119018" cy="960120"/>
+          </a:xfrm>
+          <a:prstGeom prst="rect">
+            <a:avLst/>
+          </a:prstGeom>
+          <a:noFill/>
+          <a:ln/>
+        </p:spPr>
+        <p:txBody>
+          <a:bodyPr wrap="square" lIns="0" tIns="0" rIns="0" bIns="0" rtlCol="0" anchor="ctr"/>
+          <a:lstStyle/>
+          <a:p>
+            <a:pPr rtl="1" algn="ctr" indent="0" marL="0">
+              <a:buNone/>
+            </a:pPr>
+            <a:r>
+              <a:rPr lang="en-US" sz="3800" b="1" dirty="0">
+                <a:solidFill>
+                  <a:srgbClr val="2C6E49"/>
+                </a:solidFill>
+                <a:latin typeface="Arial" pitchFamily="34" charset="0"/>
+                <a:ea typeface="Arial" pitchFamily="34" charset="-122"/>
+                <a:cs typeface="Arial" pitchFamily="34" charset="-120"/>
+              </a:rPr>
+              <a:t>≈ 2 %</a:t>
+            </a:r>
+            <a:endParaRPr lang="en-US" sz="3800" dirty="0"/>
+          </a:p>
+        </p:txBody>
+      </p:sp>
+      <p:sp>
+        <p:nvSpPr>
+          <p:cNvPr id="12" name="Text 10"/>
+          <p:cNvSpPr txBox="1"/>
+          <p:nvPr/>
+        </p:nvSpPr>
+        <p:spPr>
+          <a:xfrm>
+            <a:off x="8313725" y="3154680"/>
+            <a:ext cx="3082442" cy="1051560"/>
+          </a:xfrm>
+          <a:prstGeom prst="rect">
+            <a:avLst/>
+          </a:prstGeom>
+          <a:noFill/>
+          <a:ln/>
+        </p:spPr>
+        <p:txBody>
+          <a:bodyPr wrap="square" lIns="0" tIns="0" rIns="0" bIns="0" rtlCol="0" anchor="t"/>
+          <a:lstStyle/>
+          <a:p>
+            <a:pPr rtl="1" algn="ctr" indent="0" marL="0">
+              <a:lnSpc>
+                <a:spcPct val="118000"/>
+              </a:lnSpc>
+              <a:buNone/>
+            </a:pPr>
+            <a:r>
+              <a:rPr lang="en-US" sz="1250" dirty="0">
+                <a:solidFill>
+                  <a:srgbClr val="364239"/>
+                </a:solidFill>
+                <a:latin typeface="Arial" pitchFamily="34" charset="0"/>
+                <a:ea typeface="Arial" pitchFamily="34" charset="-122"/>
+                <a:cs typeface="Arial" pitchFamily="34" charset="-120"/>
+              </a:rPr>
+              <a:t>من مساحة المملكة أراضٍ صالحة للزراعة</a:t>
+            </a:r>
+            <a:endParaRPr lang="en-US" sz="1250" dirty="0"/>
+          </a:p>
+        </p:txBody>
+      </p:sp>
+      <p:sp>
+        <p:nvSpPr>
+          <p:cNvPr id="13" name="Text 11"/>
+          <p:cNvSpPr txBox="1"/>
+          <p:nvPr/>
+        </p:nvSpPr>
+        <p:spPr>
+          <a:xfrm>
+            <a:off x="594360" y="4709160"/>
+            <a:ext cx="11002975" cy="1097280"/>
           </a:xfrm>
           <a:prstGeom prst="rect">
             <a:avLst/>
@@ -11854,12 +12600,12 @@
           <a:p>
             <a:pPr rtl="1" algn="r" indent="0" marL="0">
               <a:lnSpc>
-                <a:spcPct val="125000"/>
+                <a:spcPct val="130000"/>
               </a:lnSpc>
               <a:buNone/>
             </a:pPr>
             <a:r>
-              <a:rPr lang="en-US" sz="1200" dirty="0">
+              <a:rPr lang="en-US" sz="1350" dirty="0">
                 <a:solidFill>
                   <a:srgbClr val="364239"/>
                 </a:solidFill>
@@ -11867,44 +12613,15 @@
                 <a:ea typeface="Arial" pitchFamily="34" charset="-122"/>
                 <a:cs typeface="Arial" pitchFamily="34" charset="-120"/>
               </a:rPr>
-              <a:t>الطماطم والخيار محصولان مرويان موجّهان أساساً إلى أسواق الخليج: فيهما يتحوّل توفير الماء مباشرة إلى هامش.</a:t>
-            </a:r>
-            <a:endParaRPr lang="en-US" sz="1200" dirty="0"/>
-          </a:p>
-          <a:p>
-            <a:pPr rtl="1" algn="r" indent="0" marL="0">
-              <a:lnSpc>
-                <a:spcPct val="125000"/>
-              </a:lnSpc>
-              <a:buNone/>
-            </a:pPr>
-            <a:endParaRPr lang="en-US" sz="1200" dirty="0"/>
-          </a:p>
-          <a:p>
-            <a:pPr rtl="1" algn="r" indent="0" marL="0">
-              <a:lnSpc>
-                <a:spcPct val="125000"/>
-              </a:lnSpc>
-              <a:buNone/>
-            </a:pPr>
-            <a:r>
-              <a:rPr lang="en-US" sz="1200" dirty="0">
-                <a:solidFill>
-                  <a:srgbClr val="364239"/>
-                </a:solidFill>
-                <a:latin typeface="Arial" pitchFamily="34" charset="0"/>
-                <a:ea typeface="Arial" pitchFamily="34" charset="-122"/>
-                <a:cs typeface="Arial" pitchFamily="34" charset="-120"/>
-              </a:rPr>
-              <a:t>* إنتاج الزيتون يتذبذب بين موسم وآخر بحكم المعاومة. أما تمور المجهول فحجمها أصغر (نحو 35 ألف طن) لكن قيمتها التصديرية للطن هي الأعلى.</a:t>
-            </a:r>
-            <a:endParaRPr lang="en-US" sz="1200" dirty="0"/>
-          </a:p>
-        </p:txBody>
-      </p:sp>
-      <p:sp>
-        <p:nvSpPr>
-          <p:cNvPr id="8" name="Text 5"/>
+              <a:t>تتركز صادرات الأردن الزراعية في الخضروات والفواكه المتجهة أساساً إلى أسواق الخليج، بينما يعتمد على الخارج في القمح والأعلاف. وتضع الاستراتيجية الوطنية للمياه إعادة استخدام المياه المعالجة وترشيد الري في قلب أي توسع زراعي.</a:t>
+            </a:r>
+            <a:endParaRPr lang="en-US" sz="1350" dirty="0"/>
+          </a:p>
+        </p:txBody>
+      </p:sp>
+      <p:sp>
+        <p:nvSpPr>
+          <p:cNvPr id="14" name="Text 12"/>
           <p:cNvSpPr txBox="1"/>
           <p:nvPr/>
         </p:nvSpPr>
@@ -11945,7 +12662,7 @@
       </p:sp>
       <p:sp>
         <p:nvSpPr>
-          <p:cNvPr id="9" name="Text 6"/>
+          <p:cNvPr id="15" name="Text 13"/>
           <p:cNvSpPr txBox="1"/>
           <p:nvPr/>
         </p:nvSpPr>
@@ -12049,7 +12766,7 @@
                 <a:ea typeface="Arial" pitchFamily="34" charset="-122"/>
                 <a:cs typeface="Arial" pitchFamily="34" charset="-120"/>
               </a:rPr>
-              <a:t>القطاع الأول</a:t>
+              <a:t>المحاصيل</a:t>
             </a:r>
             <a:endParaRPr lang="en-US" sz="1150" dirty="0"/>
           </a:p>
@@ -12088,46 +12805,104 @@
                 <a:ea typeface="Arial" pitchFamily="34" charset="-122"/>
                 <a:cs typeface="Arial" pitchFamily="34" charset="-120"/>
               </a:rPr>
-              <a:t>الزيتون: شجرة المرتفعات البعلية</a:t>
+              <a:t>خمسة محاصيل تشكّل عصب الإنتاج والتصدير</a:t>
             </a:r>
             <a:endParaRPr lang="en-US" sz="3000" dirty="0"/>
           </a:p>
         </p:txBody>
       </p:sp>
-      <p:pic>
-        <p:nvPicPr>
-          <p:cNvPr id="4" name="Image 0" descr="preencoded.png">    </p:cNvPr>
-          <p:cNvPicPr>
-            <a:picLocks noChangeAspect="1"/>
-          </p:cNvPicPr>
-          <p:nvPr/>
-        </p:nvPicPr>
-        <p:blipFill>
-          <a:blip r:embed="rId1"/>
-          <a:stretch>
-            <a:fillRect/>
-          </a:stretch>
-        </p:blipFill>
-        <p:spPr>
-          <a:xfrm>
-            <a:off x="6522415" y="1783080"/>
-            <a:ext cx="5074920" cy="3794760"/>
-          </a:xfrm>
-          <a:prstGeom prst="rect">
-            <a:avLst/>
-          </a:prstGeom>
-        </p:spPr>
-      </p:pic>
-      <p:sp>
-        <p:nvSpPr>
-          <p:cNvPr id="5" name="Text 2"/>
-          <p:cNvSpPr txBox="1"/>
-          <p:nvPr/>
-        </p:nvSpPr>
-        <p:spPr>
-          <a:xfrm>
-            <a:off x="594360" y="1783080"/>
-            <a:ext cx="5379415" cy="4251960"/>
+      <p:graphicFrame>
+        <p:nvGraphicFramePr>
+          <p:cNvPr id="4" name="Chart 0" descr=""/>
+          <p:cNvGraphicFramePr/>
+          <p:nvPr/>
+        </p:nvGraphicFramePr>
+        <p:xfrm>
+          <a:off x="594360" y="1783080"/>
+          <a:ext cx="7360920" cy="3977640"/>
+        </p:xfrm>
+        <a:graphic xmlns:a="http://schemas.openxmlformats.org/drawingml/2006/main">
+          <a:graphicData uri="http://schemas.openxmlformats.org/drawingml/2006/chart">
+            <c:chart xmlns:c="http://schemas.openxmlformats.org/drawingml/2006/chart" r:id="rId1"/>
+          </a:graphicData>
+        </a:graphic>
+      </p:graphicFrame>
+      <p:sp>
+        <p:nvSpPr>
+          <p:cNvPr id="5" name="Shape 2"/>
+          <p:cNvSpPr/>
+          <p:nvPr/>
+        </p:nvSpPr>
+        <p:spPr>
+          <a:xfrm>
+            <a:off x="8275320" y="1783080"/>
+            <a:ext cx="3291840" cy="3977640"/>
+          </a:xfrm>
+          <a:prstGeom prst="roundRect">
+            <a:avLst>
+              <a:gd name="adj" fmla="val 2778"/>
+            </a:avLst>
+          </a:prstGeom>
+          <a:solidFill>
+            <a:srgbClr val="F2F1E8"/>
+          </a:solidFill>
+          <a:ln w="9525">
+            <a:solidFill>
+              <a:srgbClr val="E0DFD0"/>
+            </a:solidFill>
+            <a:prstDash val="solid"/>
+          </a:ln>
+        </p:spPr>
+      </p:sp>
+      <p:sp>
+        <p:nvSpPr>
+          <p:cNvPr id="6" name="Text 3"/>
+          <p:cNvSpPr txBox="1"/>
+          <p:nvPr/>
+        </p:nvSpPr>
+        <p:spPr>
+          <a:xfrm>
+            <a:off x="8503920" y="2011680"/>
+            <a:ext cx="2834640" cy="457200"/>
+          </a:xfrm>
+          <a:prstGeom prst="rect">
+            <a:avLst/>
+          </a:prstGeom>
+          <a:noFill/>
+          <a:ln/>
+        </p:spPr>
+        <p:txBody>
+          <a:bodyPr wrap="square" lIns="0" tIns="0" rIns="0" bIns="0" rtlCol="0" anchor="ctr"/>
+          <a:lstStyle/>
+          <a:p>
+            <a:pPr rtl="1" algn="r" indent="0" marL="0">
+              <a:buNone/>
+            </a:pPr>
+            <a:r>
+              <a:rPr lang="en-US" sz="1300" b="1" dirty="0">
+                <a:solidFill>
+                  <a:srgbClr val="2C6E49"/>
+                </a:solidFill>
+                <a:latin typeface="Arial" pitchFamily="34" charset="0"/>
+                <a:ea typeface="Arial" pitchFamily="34" charset="-122"/>
+                <a:cs typeface="Arial" pitchFamily="34" charset="-120"/>
+              </a:rPr>
+              <a:t>قراءة</a:t>
+            </a:r>
+            <a:endParaRPr lang="en-US" sz="1300" dirty="0"/>
+          </a:p>
+        </p:txBody>
+      </p:sp>
+      <p:sp>
+        <p:nvSpPr>
+          <p:cNvPr id="7" name="Text 4"/>
+          <p:cNvSpPr txBox="1"/>
+          <p:nvPr/>
+        </p:nvSpPr>
+        <p:spPr>
+          <a:xfrm>
+            <a:off x="8503920" y="2560320"/>
+            <a:ext cx="2834640" cy="3017520"/>
           </a:xfrm>
           <a:prstGeom prst="rect">
             <a:avLst/>
@@ -12139,18 +12914,14 @@
           <a:bodyPr wrap="square" lIns="0" tIns="0" rIns="0" bIns="0" rtlCol="0" anchor="t"/>
           <a:lstStyle/>
           <a:p>
-            <a:pPr algn="r" marL="342900" indent="-342900">
+            <a:pPr rtl="1" algn="r" indent="0" marL="0">
               <a:lnSpc>
-                <a:spcPct val="122000"/>
+                <a:spcPct val="125000"/>
               </a:lnSpc>
-              <a:spcAft>
-                <a:spcPts val="1100"/>
-              </a:spcAft>
-              <a:buSzPct val="100000"/>
-              <a:buChar char="•"/>
-            </a:pPr>
-            <a:r>
-              <a:rPr lang="en-US" sz="1400" dirty="0">
+              <a:buNone/>
+            </a:pPr>
+            <a:r>
+              <a:rPr lang="en-US" sz="1200" dirty="0">
                 <a:solidFill>
                   <a:srgbClr val="364239"/>
                 </a:solidFill>
@@ -12158,23 +12929,28 @@
                 <a:ea typeface="Arial" pitchFamily="34" charset="-122"/>
                 <a:cs typeface="Arial" pitchFamily="34" charset="-120"/>
               </a:rPr>
-              <a:t>يغطي الزيتون الجزء الأكبر من المساحة المزروعة بالأشجار، في إربد وعجلون وجرش والبلقاء والمفرق.</a:t>
-            </a:r>
-            <a:endParaRPr lang="en-US" sz="1400" dirty="0"/>
-          </a:p>
-          <a:p>
-            <a:pPr algn="r" marL="342900" indent="-342900">
+              <a:t>الطماطم والخيار محصولان مرويان موجّهان أساساً إلى أسواق الخليج: فيهما يتحوّل توفير الماء مباشرة إلى هامش.</a:t>
+            </a:r>
+            <a:endParaRPr lang="en-US" sz="1200" dirty="0"/>
+          </a:p>
+          <a:p>
+            <a:pPr rtl="1" algn="r" indent="0" marL="0">
               <a:lnSpc>
-                <a:spcPct val="122000"/>
+                <a:spcPct val="125000"/>
               </a:lnSpc>
-              <a:spcAft>
-                <a:spcPts val="1100"/>
-              </a:spcAft>
-              <a:buSzPct val="100000"/>
-              <a:buChar char="•"/>
-            </a:pPr>
-            <a:r>
-              <a:rPr lang="en-US" sz="1400" dirty="0">
+              <a:buNone/>
+            </a:pPr>
+            <a:endParaRPr lang="en-US" sz="1200" dirty="0"/>
+          </a:p>
+          <a:p>
+            <a:pPr rtl="1" algn="r" indent="0" marL="0">
+              <a:lnSpc>
+                <a:spcPct val="125000"/>
+              </a:lnSpc>
+              <a:buNone/>
+            </a:pPr>
+            <a:r>
+              <a:rPr lang="en-US" sz="1200" dirty="0">
                 <a:solidFill>
                   <a:srgbClr val="364239"/>
                 </a:solidFill>
@@ -12182,87 +12958,15 @@
                 <a:ea typeface="Arial" pitchFamily="34" charset="-122"/>
                 <a:cs typeface="Arial" pitchFamily="34" charset="-120"/>
               </a:rPr>
-              <a:t>معظم البساتين بعلية: تتوقف غلة السنة على أمطار الشتاء، وتتراجع كثيراً في سنوات الجفاف.</a:t>
-            </a:r>
-            <a:endParaRPr lang="en-US" sz="1400" dirty="0"/>
-          </a:p>
-          <a:p>
-            <a:pPr algn="r" marL="342900" indent="-342900">
-              <a:lnSpc>
-                <a:spcPct val="122000"/>
-              </a:lnSpc>
-              <a:spcAft>
-                <a:spcPts val="1100"/>
-              </a:spcAft>
-              <a:buSzPct val="100000"/>
-              <a:buChar char="•"/>
-            </a:pPr>
-            <a:r>
-              <a:rPr lang="en-US" sz="1400" dirty="0">
-                <a:solidFill>
-                  <a:srgbClr val="364239"/>
-                </a:solidFill>
-                <a:latin typeface="Arial" pitchFamily="34" charset="0"/>
-                <a:ea typeface="Arial" pitchFamily="34" charset="-122"/>
-                <a:cs typeface="Arial" pitchFamily="34" charset="-120"/>
-              </a:rPr>
-              <a:t>تذبذب الحمل بين سنة وأخرى يُضعف دخل المزارع ويصعّب تثبيت عقود بيع الزيت.</a:t>
-            </a:r>
-            <a:endParaRPr lang="en-US" sz="1400" dirty="0"/>
-          </a:p>
-          <a:p>
-            <a:pPr algn="r" marL="342900" indent="-342900">
-              <a:lnSpc>
-                <a:spcPct val="122000"/>
-              </a:lnSpc>
-              <a:spcAft>
-                <a:spcPts val="1100"/>
-              </a:spcAft>
-              <a:buSzPct val="100000"/>
-              <a:buChar char="•"/>
-            </a:pPr>
-            <a:r>
-              <a:rPr lang="en-US" sz="1400" dirty="0">
-                <a:solidFill>
-                  <a:srgbClr val="364239"/>
-                </a:solidFill>
-                <a:latin typeface="Arial" pitchFamily="34" charset="0"/>
-                <a:ea typeface="Arial" pitchFamily="34" charset="-122"/>
-                <a:cs typeface="Arial" pitchFamily="34" charset="-120"/>
-              </a:rPr>
-              <a:t>الغراس الجديدة هي الأكثر عرضة للموت في صيفها الأول دون ري تكميلي.</a:t>
-            </a:r>
-            <a:endParaRPr lang="en-US" sz="1400" dirty="0"/>
-          </a:p>
-          <a:p>
-            <a:pPr algn="r" marL="342900" indent="-342900">
-              <a:lnSpc>
-                <a:spcPct val="122000"/>
-              </a:lnSpc>
-              <a:spcAft>
-                <a:spcPts val="1100"/>
-              </a:spcAft>
-              <a:buSzPct val="100000"/>
-              <a:buChar char="•"/>
-            </a:pPr>
-            <a:r>
-              <a:rPr lang="en-US" sz="1400" dirty="0">
-                <a:solidFill>
-                  <a:srgbClr val="364239"/>
-                </a:solidFill>
-                <a:latin typeface="Arial" pitchFamily="34" charset="0"/>
-                <a:ea typeface="Arial" pitchFamily="34" charset="-122"/>
-                <a:cs typeface="Arial" pitchFamily="34" charset="-120"/>
-              </a:rPr>
-              <a:t>وضع EVERGREEN® في حفرة الغرس يحتفظ بمياه المطر حول الجذور لأسابيع إضافية.</a:t>
-            </a:r>
-            <a:endParaRPr lang="en-US" sz="1400" dirty="0"/>
-          </a:p>
-        </p:txBody>
-      </p:sp>
-      <p:sp>
-        <p:nvSpPr>
-          <p:cNvPr id="6" name="Text 3"/>
+              <a:t>* إنتاج الزيتون يتذبذب بين موسم وآخر بحكم المعاومة. أما تمور المجهول فحجمها أصغر (نحو 35 ألف طن) لكن قيمتها التصديرية للطن هي الأعلى.</a:t>
+            </a:r>
+            <a:endParaRPr lang="en-US" sz="1200" dirty="0"/>
+          </a:p>
+        </p:txBody>
+      </p:sp>
+      <p:sp>
+        <p:nvSpPr>
+          <p:cNvPr id="8" name="Text 5"/>
           <p:cNvSpPr txBox="1"/>
           <p:nvPr/>
         </p:nvSpPr>
@@ -12303,7 +13007,7 @@
       </p:sp>
       <p:sp>
         <p:nvSpPr>
-          <p:cNvPr id="7" name="Text 4"/>
+          <p:cNvPr id="9" name="Text 6"/>
           <p:cNvSpPr txBox="1"/>
           <p:nvPr/>
         </p:nvSpPr>
@@ -12407,7 +13111,7 @@
                 <a:ea typeface="Arial" pitchFamily="34" charset="-122"/>
                 <a:cs typeface="Arial" pitchFamily="34" charset="-120"/>
               </a:rPr>
-              <a:t>القطاع الثاني</a:t>
+              <a:t>القطاع الأول</a:t>
             </a:r>
             <a:endParaRPr lang="en-US" sz="1150" dirty="0"/>
           </a:p>
@@ -12446,7 +13150,7 @@
                 <a:ea typeface="Arial" pitchFamily="34" charset="-122"/>
                 <a:cs typeface="Arial" pitchFamily="34" charset="-120"/>
               </a:rPr>
-              <a:t>خضروات وادي الأردن: إنتاج الشتاء للتصدير</a:t>
+              <a:t>الزيتون: شجرة المرتفعات البعلية</a:t>
             </a:r>
             <a:endParaRPr lang="en-US" sz="3000" dirty="0"/>
           </a:p>
@@ -12468,23 +13172,23 @@
         </p:blipFill>
         <p:spPr>
           <a:xfrm>
+            <a:off x="6522415" y="1783080"/>
+            <a:ext cx="5074920" cy="3794760"/>
+          </a:xfrm>
+          <a:prstGeom prst="rect">
+            <a:avLst/>
+          </a:prstGeom>
+        </p:spPr>
+      </p:pic>
+      <p:sp>
+        <p:nvSpPr>
+          <p:cNvPr id="5" name="Text 2"/>
+          <p:cNvSpPr txBox="1"/>
+          <p:nvPr/>
+        </p:nvSpPr>
+        <p:spPr>
+          <a:xfrm>
             <a:off x="594360" y="1783080"/>
-            <a:ext cx="5074920" cy="3794760"/>
-          </a:xfrm>
-          <a:prstGeom prst="rect">
-            <a:avLst/>
-          </a:prstGeom>
-        </p:spPr>
-      </p:pic>
-      <p:sp>
-        <p:nvSpPr>
-          <p:cNvPr id="5" name="Text 2"/>
-          <p:cNvSpPr txBox="1"/>
-          <p:nvPr/>
-        </p:nvSpPr>
-        <p:spPr>
-          <a:xfrm>
-            <a:off x="6217920" y="1783080"/>
             <a:ext cx="5379415" cy="4251960"/>
           </a:xfrm>
           <a:prstGeom prst="rect">
@@ -12516,7 +13220,7 @@
                 <a:ea typeface="Arial" pitchFamily="34" charset="-122"/>
                 <a:cs typeface="Arial" pitchFamily="34" charset="-120"/>
               </a:rPr>
-              <a:t>يسمح دفء وادي الأردن بإنتاج الطماطم والخيار والفلفل في الشتاء، حين تكون أسعار التصدير في أعلاها.</a:t>
+              <a:t>يغطي الزيتون الجزء الأكبر من المساحة المزروعة بالأشجار، في إربد وعجلون وجرش والبلقاء والمفرق.</a:t>
             </a:r>
             <a:endParaRPr lang="en-US" sz="1400" dirty="0"/>
           </a:p>
@@ -12540,7 +13244,7 @@
                 <a:ea typeface="Arial" pitchFamily="34" charset="-122"/>
                 <a:cs typeface="Arial" pitchFamily="34" charset="-120"/>
               </a:rPr>
-              <a:t>يُروى الوادي من قناة الملك عبد الله بمزيج من مياه اليرموك والمياه المعالجة، وبحصص محدودة.</a:t>
+              <a:t>معظم البساتين بعلية: تتوقف غلة السنة على أمطار الشتاء، وتتراجع كثيراً في سنوات الجفاف.</a:t>
             </a:r>
             <a:endParaRPr lang="en-US" sz="1400" dirty="0"/>
           </a:p>
@@ -12564,7 +13268,7 @@
                 <a:ea typeface="Arial" pitchFamily="34" charset="-122"/>
                 <a:cs typeface="Arial" pitchFamily="34" charset="-120"/>
               </a:rPr>
-              <a:t>ملوحة المياه والتربة في جنوب الوادي تخفض الإنتاج وتفرض غسل التربة بكميات ماء إضافية.</a:t>
+              <a:t>تذبذب الحمل بين سنة وأخرى يُضعف دخل المزارع ويصعّب تثبيت عقود بيع الزيت.</a:t>
             </a:r>
             <a:endParaRPr lang="en-US" sz="1400" dirty="0"/>
           </a:p>
@@ -12588,7 +13292,7 @@
                 <a:ea typeface="Arial" pitchFamily="34" charset="-122"/>
                 <a:cs typeface="Arial" pitchFamily="34" charset="-120"/>
               </a:rPr>
-              <a:t>الري بالتنقيط منتشر، لذلك يأتي أي توفير جديد من الاحتفاظ بالماء في التربة نفسها.</a:t>
+              <a:t>الغراس الجديدة هي الأكثر عرضة للموت في صيفها الأول دون ري تكميلي.</a:t>
             </a:r>
             <a:endParaRPr lang="en-US" sz="1400" dirty="0"/>
           </a:p>
@@ -12612,7 +13316,7 @@
                 <a:ea typeface="Arial" pitchFamily="34" charset="-122"/>
                 <a:cs typeface="Arial" pitchFamily="34" charset="-120"/>
               </a:rPr>
-              <a:t>‏NAPEMA® يعالج الآفات دون متبقيات، وهو شرط لقبول الشحنات في أسواق التصدير.</a:t>
+              <a:t>وضع EVERGREEN® في حفرة الغرس يحتفظ بمياه المطر حول الجذور لأسابيع إضافية.</a:t>
             </a:r>
             <a:endParaRPr lang="en-US" sz="1400" dirty="0"/>
           </a:p>
@@ -12765,7 +13469,7 @@
                 <a:ea typeface="Arial" pitchFamily="34" charset="-122"/>
                 <a:cs typeface="Arial" pitchFamily="34" charset="-120"/>
               </a:rPr>
-              <a:t>إمكانات الإنتاج</a:t>
+              <a:t>القطاع الثاني</a:t>
             </a:r>
             <a:endParaRPr lang="en-US" sz="1150" dirty="0"/>
           </a:p>
@@ -12804,168 +13508,181 @@
                 <a:ea typeface="Arial" pitchFamily="34" charset="-122"/>
                 <a:cs typeface="Arial" pitchFamily="34" charset="-120"/>
               </a:rPr>
-              <a:t>الزيادة المتوقعة في الإنتاج حسب المحصول</a:t>
+              <a:t>خضروات وادي الأردن: إنتاج الشتاء للتصدير</a:t>
             </a:r>
             <a:endParaRPr lang="en-US" sz="3000" dirty="0"/>
           </a:p>
         </p:txBody>
       </p:sp>
-      <p:graphicFrame>
-        <p:nvGraphicFramePr>
-          <p:cNvPr id="4" name="Chart 0" descr=""/>
-          <p:cNvGraphicFramePr/>
-          <p:nvPr/>
-        </p:nvGraphicFramePr>
-        <p:xfrm>
-          <a:off x="594360" y="1783080"/>
-          <a:ext cx="7360920" cy="3977640"/>
-        </p:xfrm>
-        <a:graphic xmlns:a="http://schemas.openxmlformats.org/drawingml/2006/main">
-          <a:graphicData uri="http://schemas.openxmlformats.org/drawingml/2006/chart">
-            <c:chart xmlns:c="http://schemas.openxmlformats.org/drawingml/2006/chart" r:id="rId1"/>
-          </a:graphicData>
-        </a:graphic>
-      </p:graphicFrame>
-      <p:sp>
-        <p:nvSpPr>
-          <p:cNvPr id="5" name="Shape 2"/>
-          <p:cNvSpPr/>
-          <p:nvPr/>
-        </p:nvSpPr>
-        <p:spPr>
-          <a:xfrm>
-            <a:off x="8275320" y="1783080"/>
-            <a:ext cx="3291840" cy="3977640"/>
-          </a:xfrm>
-          <a:prstGeom prst="roundRect">
-            <a:avLst>
-              <a:gd name="adj" fmla="val 2778"/>
-            </a:avLst>
-          </a:prstGeom>
-          <a:solidFill>
-            <a:srgbClr val="F2F1E8"/>
-          </a:solidFill>
-          <a:ln w="9525">
-            <a:solidFill>
-              <a:srgbClr val="E0DFD0"/>
-            </a:solidFill>
-            <a:prstDash val="solid"/>
-          </a:ln>
-        </p:spPr>
+      <p:pic>
+        <p:nvPicPr>
+          <p:cNvPr id="4" name="Image 0" descr="preencoded.png">    </p:cNvPr>
+          <p:cNvPicPr>
+            <a:picLocks noChangeAspect="1"/>
+          </p:cNvPicPr>
+          <p:nvPr/>
+        </p:nvPicPr>
+        <p:blipFill>
+          <a:blip r:embed="rId1"/>
+          <a:stretch>
+            <a:fillRect/>
+          </a:stretch>
+        </p:blipFill>
+        <p:spPr>
+          <a:xfrm>
+            <a:off x="594360" y="1783080"/>
+            <a:ext cx="5074920" cy="3794760"/>
+          </a:xfrm>
+          <a:prstGeom prst="rect">
+            <a:avLst/>
+          </a:prstGeom>
+        </p:spPr>
+      </p:pic>
+      <p:sp>
+        <p:nvSpPr>
+          <p:cNvPr id="5" name="Text 2"/>
+          <p:cNvSpPr txBox="1"/>
+          <p:nvPr/>
+        </p:nvSpPr>
+        <p:spPr>
+          <a:xfrm>
+            <a:off x="6217920" y="1783080"/>
+            <a:ext cx="5379415" cy="4251960"/>
+          </a:xfrm>
+          <a:prstGeom prst="rect">
+            <a:avLst/>
+          </a:prstGeom>
+          <a:noFill/>
+          <a:ln/>
+        </p:spPr>
+        <p:txBody>
+          <a:bodyPr wrap="square" lIns="0" tIns="0" rIns="0" bIns="0" rtlCol="0" anchor="t"/>
+          <a:lstStyle/>
+          <a:p>
+            <a:pPr algn="r" marL="342900" indent="-342900">
+              <a:lnSpc>
+                <a:spcPct val="122000"/>
+              </a:lnSpc>
+              <a:spcAft>
+                <a:spcPts val="1100"/>
+              </a:spcAft>
+              <a:buSzPct val="100000"/>
+              <a:buChar char="•"/>
+            </a:pPr>
+            <a:r>
+              <a:rPr lang="en-US" sz="1400" dirty="0">
+                <a:solidFill>
+                  <a:srgbClr val="364239"/>
+                </a:solidFill>
+                <a:latin typeface="Arial" pitchFamily="34" charset="0"/>
+                <a:ea typeface="Arial" pitchFamily="34" charset="-122"/>
+                <a:cs typeface="Arial" pitchFamily="34" charset="-120"/>
+              </a:rPr>
+              <a:t>يسمح دفء وادي الأردن بإنتاج الطماطم والخيار والفلفل في الشتاء، حين تكون أسعار التصدير في أعلاها.</a:t>
+            </a:r>
+            <a:endParaRPr lang="en-US" sz="1400" dirty="0"/>
+          </a:p>
+          <a:p>
+            <a:pPr algn="r" marL="342900" indent="-342900">
+              <a:lnSpc>
+                <a:spcPct val="122000"/>
+              </a:lnSpc>
+              <a:spcAft>
+                <a:spcPts val="1100"/>
+              </a:spcAft>
+              <a:buSzPct val="100000"/>
+              <a:buChar char="•"/>
+            </a:pPr>
+            <a:r>
+              <a:rPr lang="en-US" sz="1400" dirty="0">
+                <a:solidFill>
+                  <a:srgbClr val="364239"/>
+                </a:solidFill>
+                <a:latin typeface="Arial" pitchFamily="34" charset="0"/>
+                <a:ea typeface="Arial" pitchFamily="34" charset="-122"/>
+                <a:cs typeface="Arial" pitchFamily="34" charset="-120"/>
+              </a:rPr>
+              <a:t>يُروى الوادي من قناة الملك عبد الله بمزيج من مياه اليرموك والمياه المعالجة، وبحصص محدودة.</a:t>
+            </a:r>
+            <a:endParaRPr lang="en-US" sz="1400" dirty="0"/>
+          </a:p>
+          <a:p>
+            <a:pPr algn="r" marL="342900" indent="-342900">
+              <a:lnSpc>
+                <a:spcPct val="122000"/>
+              </a:lnSpc>
+              <a:spcAft>
+                <a:spcPts val="1100"/>
+              </a:spcAft>
+              <a:buSzPct val="100000"/>
+              <a:buChar char="•"/>
+            </a:pPr>
+            <a:r>
+              <a:rPr lang="en-US" sz="1400" dirty="0">
+                <a:solidFill>
+                  <a:srgbClr val="364239"/>
+                </a:solidFill>
+                <a:latin typeface="Arial" pitchFamily="34" charset="0"/>
+                <a:ea typeface="Arial" pitchFamily="34" charset="-122"/>
+                <a:cs typeface="Arial" pitchFamily="34" charset="-120"/>
+              </a:rPr>
+              <a:t>ملوحة المياه والتربة في جنوب الوادي تخفض الإنتاج وتفرض غسل التربة بكميات ماء إضافية.</a:t>
+            </a:r>
+            <a:endParaRPr lang="en-US" sz="1400" dirty="0"/>
+          </a:p>
+          <a:p>
+            <a:pPr algn="r" marL="342900" indent="-342900">
+              <a:lnSpc>
+                <a:spcPct val="122000"/>
+              </a:lnSpc>
+              <a:spcAft>
+                <a:spcPts val="1100"/>
+              </a:spcAft>
+              <a:buSzPct val="100000"/>
+              <a:buChar char="•"/>
+            </a:pPr>
+            <a:r>
+              <a:rPr lang="en-US" sz="1400" dirty="0">
+                <a:solidFill>
+                  <a:srgbClr val="364239"/>
+                </a:solidFill>
+                <a:latin typeface="Arial" pitchFamily="34" charset="0"/>
+                <a:ea typeface="Arial" pitchFamily="34" charset="-122"/>
+                <a:cs typeface="Arial" pitchFamily="34" charset="-120"/>
+              </a:rPr>
+              <a:t>الري بالتنقيط منتشر، لذلك يأتي أي توفير جديد من الاحتفاظ بالماء في التربة نفسها.</a:t>
+            </a:r>
+            <a:endParaRPr lang="en-US" sz="1400" dirty="0"/>
+          </a:p>
+          <a:p>
+            <a:pPr algn="r" marL="342900" indent="-342900">
+              <a:lnSpc>
+                <a:spcPct val="122000"/>
+              </a:lnSpc>
+              <a:spcAft>
+                <a:spcPts val="1100"/>
+              </a:spcAft>
+              <a:buSzPct val="100000"/>
+              <a:buChar char="•"/>
+            </a:pPr>
+            <a:r>
+              <a:rPr lang="en-US" sz="1400" dirty="0">
+                <a:solidFill>
+                  <a:srgbClr val="364239"/>
+                </a:solidFill>
+                <a:latin typeface="Arial" pitchFamily="34" charset="0"/>
+                <a:ea typeface="Arial" pitchFamily="34" charset="-122"/>
+                <a:cs typeface="Arial" pitchFamily="34" charset="-120"/>
+              </a:rPr>
+              <a:t>‏NAPEMA® يعالج الآفات دون متبقيات، وهو شرط لقبول الشحنات في أسواق التصدير.</a:t>
+            </a:r>
+            <a:endParaRPr lang="en-US" sz="1400" dirty="0"/>
+          </a:p>
+        </p:txBody>
       </p:sp>
       <p:sp>
         <p:nvSpPr>
           <p:cNvPr id="6" name="Text 3"/>
-          <p:cNvSpPr txBox="1"/>
-          <p:nvPr/>
-        </p:nvSpPr>
-        <p:spPr>
-          <a:xfrm>
-            <a:off x="8503920" y="2011680"/>
-            <a:ext cx="2834640" cy="457200"/>
-          </a:xfrm>
-          <a:prstGeom prst="rect">
-            <a:avLst/>
-          </a:prstGeom>
-          <a:noFill/>
-          <a:ln/>
-        </p:spPr>
-        <p:txBody>
-          <a:bodyPr wrap="square" lIns="0" tIns="0" rIns="0" bIns="0" rtlCol="0" anchor="ctr"/>
-          <a:lstStyle/>
-          <a:p>
-            <a:pPr rtl="1" algn="r" indent="0" marL="0">
-              <a:buNone/>
-            </a:pPr>
-            <a:r>
-              <a:rPr lang="en-US" sz="1300" b="1" dirty="0">
-                <a:solidFill>
-                  <a:srgbClr val="2C6E49"/>
-                </a:solidFill>
-                <a:latin typeface="Arial" pitchFamily="34" charset="0"/>
-                <a:ea typeface="Arial" pitchFamily="34" charset="-122"/>
-                <a:cs typeface="Arial" pitchFamily="34" charset="-120"/>
-              </a:rPr>
-              <a:t>تُقرأ بتحفّظ</a:t>
-            </a:r>
-            <a:endParaRPr lang="en-US" sz="1300" dirty="0"/>
-          </a:p>
-        </p:txBody>
-      </p:sp>
-      <p:sp>
-        <p:nvSpPr>
-          <p:cNvPr id="7" name="Text 4"/>
-          <p:cNvSpPr txBox="1"/>
-          <p:nvPr/>
-        </p:nvSpPr>
-        <p:spPr>
-          <a:xfrm>
-            <a:off x="8503920" y="2560320"/>
-            <a:ext cx="2834640" cy="3017520"/>
-          </a:xfrm>
-          <a:prstGeom prst="rect">
-            <a:avLst/>
-          </a:prstGeom>
-          <a:noFill/>
-          <a:ln/>
-        </p:spPr>
-        <p:txBody>
-          <a:bodyPr wrap="square" lIns="0" tIns="0" rIns="0" bIns="0" rtlCol="0" anchor="t"/>
-          <a:lstStyle/>
-          <a:p>
-            <a:pPr rtl="1" algn="r" indent="0" marL="0">
-              <a:lnSpc>
-                <a:spcPct val="125000"/>
-              </a:lnSpc>
-              <a:buNone/>
-            </a:pPr>
-            <a:r>
-              <a:rPr lang="en-US" sz="1200" dirty="0">
-                <a:solidFill>
-                  <a:srgbClr val="364239"/>
-                </a:solidFill>
-                <a:latin typeface="Arial" pitchFamily="34" charset="0"/>
-                <a:ea typeface="Arial" pitchFamily="34" charset="-122"/>
-                <a:cs typeface="Arial" pitchFamily="34" charset="-120"/>
-              </a:rPr>
-              <a:t>نطاقات يعتمدها حاسب الجرعات على موقعنا، لمحصول يُدار إدارة عادية مع وضع EVERGREEN® عند الزراعة.</a:t>
-            </a:r>
-            <a:endParaRPr lang="en-US" sz="1200" dirty="0"/>
-          </a:p>
-          <a:p>
-            <a:pPr rtl="1" algn="r" indent="0" marL="0">
-              <a:lnSpc>
-                <a:spcPct val="125000"/>
-              </a:lnSpc>
-              <a:buNone/>
-            </a:pPr>
-            <a:endParaRPr lang="en-US" sz="1200" dirty="0"/>
-          </a:p>
-          <a:p>
-            <a:pPr rtl="1" algn="r" indent="0" marL="0">
-              <a:lnSpc>
-                <a:spcPct val="125000"/>
-              </a:lnSpc>
-              <a:buNone/>
-            </a:pPr>
-            <a:r>
-              <a:rPr lang="en-US" sz="1200" dirty="0">
-                <a:solidFill>
-                  <a:srgbClr val="364239"/>
-                </a:solidFill>
-                <a:latin typeface="Arial" pitchFamily="34" charset="0"/>
-                <a:ea typeface="Arial" pitchFamily="34" charset="-122"/>
-                <a:cs typeface="Arial" pitchFamily="34" charset="-120"/>
-              </a:rPr>
-              <a:t>النتيجة الفعلية تتوقف على التربة والمناخ وأسلوب الإدارة. أما الحبوب فلا نعلن فيها أي زيادة دون تجربة ميدانية.</a:t>
-            </a:r>
-            <a:endParaRPr lang="en-US" sz="1200" dirty="0"/>
-          </a:p>
-        </p:txBody>
-      </p:sp>
-      <p:sp>
-        <p:nvSpPr>
-          <p:cNvPr id="8" name="Text 5"/>
           <p:cNvSpPr txBox="1"/>
           <p:nvPr/>
         </p:nvSpPr>
@@ -13006,7 +13723,7 @@
       </p:sp>
       <p:sp>
         <p:nvSpPr>
-          <p:cNvPr id="9" name="Text 6"/>
+          <p:cNvPr id="7" name="Text 4"/>
           <p:cNvSpPr txBox="1"/>
           <p:nvPr/>
         </p:nvSpPr>

--- a/public/documents/countries/jordanie.pptx
+++ b/public/documents/countries/jordanie.pptx
@@ -125,7 +125,7 @@
 </p:presentation>
 </file>
 
-<file path=ppt/charts/chart64.xml><?xml version="1.0" encoding="utf-8"?>
+<file path=ppt/charts/chart66.xml><?xml version="1.0" encoding="utf-8"?>
 <c:chartSpace xmlns:c="http://schemas.openxmlformats.org/drawingml/2006/chart" xmlns:a="http://schemas.openxmlformats.org/drawingml/2006/main" xmlns:r="http://schemas.openxmlformats.org/officeDocument/2006/relationships">
   <c:date1904 val="0"/>
   <c:roundedCorners val="1"/>
@@ -384,7 +384,7 @@
 </c:chartSpace>
 </file>
 
-<file path=ppt/charts/chart65.xml><?xml version="1.0" encoding="utf-8"?>
+<file path=ppt/charts/chart67.xml><?xml version="1.0" encoding="utf-8"?>
 <c:chartSpace xmlns:c="http://schemas.openxmlformats.org/drawingml/2006/chart" xmlns:a="http://schemas.openxmlformats.org/drawingml/2006/main" xmlns:r="http://schemas.openxmlformats.org/officeDocument/2006/relationships">
   <c:date1904 val="0"/>
   <c:roundedCorners val="1"/>
@@ -629,7 +629,7 @@
 </c:chartSpace>
 </file>
 
-<file path=ppt/charts/chart66.xml><?xml version="1.0" encoding="utf-8"?>
+<file path=ppt/charts/chart68.xml><?xml version="1.0" encoding="utf-8"?>
 <c:chartSpace xmlns:c="http://schemas.openxmlformats.org/drawingml/2006/chart" xmlns:a="http://schemas.openxmlformats.org/drawingml/2006/main" xmlns:r="http://schemas.openxmlformats.org/officeDocument/2006/relationships">
   <c:date1904 val="0"/>
   <c:roundedCorners val="1"/>
@@ -937,7 +937,7 @@
 </c:chartSpace>
 </file>
 
-<file path=ppt/charts/chart67.xml><?xml version="1.0" encoding="utf-8"?>
+<file path=ppt/charts/chart69.xml><?xml version="1.0" encoding="utf-8"?>
 <c:chartSpace xmlns:c="http://schemas.openxmlformats.org/drawingml/2006/chart" xmlns:a="http://schemas.openxmlformats.org/drawingml/2006/main" xmlns:r="http://schemas.openxmlformats.org/officeDocument/2006/relationships">
   <c:date1904 val="0"/>
   <c:roundedCorners val="1"/>
@@ -1302,7 +1302,7 @@
 </c:chartSpace>
 </file>
 
-<file path=ppt/charts/chart68.xml><?xml version="1.0" encoding="utf-8"?>
+<file path=ppt/charts/chart70.xml><?xml version="1.0" encoding="utf-8"?>
 <c:chartSpace xmlns:c="http://schemas.openxmlformats.org/drawingml/2006/chart" xmlns:a="http://schemas.openxmlformats.org/drawingml/2006/main" xmlns:r="http://schemas.openxmlformats.org/officeDocument/2006/relationships">
   <c:date1904 val="0"/>
   <c:roundedCorners val="1"/>
@@ -4092,7 +4092,7 @@
       </p:sp>
       <p:pic>
         <p:nvPicPr>
-          <p:cNvPr id="5" name="Image 1" descr="/workspace/scratch/50eb4f7d8e13/green-solutions-web/public/images/logo-icon.png">    </p:cNvPr>
+          <p:cNvPr id="5" name="Image 1" descr="/home/claude/green-solutions-web/public/images/logo-icon.png">    </p:cNvPr>
           <p:cNvPicPr>
             <a:picLocks noChangeAspect="1"/>
           </p:cNvPicPr>
@@ -4116,7 +4116,7 @@
       </p:pic>
       <p:pic>
         <p:nvPicPr>
-          <p:cNvPr id="6" name="Image 2" descr="/workspace/scratch/50eb4f7d8e13/green-solutions-web/scripts/dossiers/drapeaux/jordanie.png">    </p:cNvPr>
+          <p:cNvPr id="6" name="Image 2" descr="/home/claude/green-solutions-web/scripts/dossiers/drapeaux/jordanie.png">    </p:cNvPr>
           <p:cNvPicPr>
             <a:picLocks noChangeAspect="1"/>
           </p:cNvPicPr>
@@ -10276,7 +10276,7 @@
                 <a:ea typeface="Arial" pitchFamily="34" charset="-122"/>
                 <a:cs typeface="Arial" pitchFamily="34" charset="-120"/>
               </a:rPr>
-              <a:t>contact@evergreen-ecosorb.com · Green Solutions Groupe AIM SA, 46, route de la Condémine, 1475 Forel, Switzerland</a:t>
+              <a:t>contact@green-solutions-group.com · Green Solutions Groupe AIM SA, 46, route de la Condémine, 1475 Forel, Switzerland</a:t>
             </a:r>
             <a:endParaRPr lang="en-US" sz="1400" dirty="0"/>
           </a:p>
@@ -10284,7 +10284,7 @@
       </p:sp>
       <p:pic>
         <p:nvPicPr>
-          <p:cNvPr id="6" name="Image 1" descr="/workspace/scratch/50eb4f7d8e13/green-solutions-web/scripts/dossiers/sceau-aim-clair.png">    </p:cNvPr>
+          <p:cNvPr id="6" name="Image 1" descr="/home/claude/green-solutions-web/scripts/dossiers/sceau-aim-clair.png">    </p:cNvPr>
           <p:cNvPicPr>
             <a:picLocks noChangeAspect="1"/>
           </p:cNvPicPr>
